--- a/slides/ME344_Final_Arnold_Hambuch.pptx
+++ b/slides/ME344_Final_Arnold_Hambuch.pptx
@@ -3101,7 +3101,7 @@
         <p:spPr>
           <a:xfrm>
             <a:off x="0" y="0"/>
-            <a:ext cx="12191695" cy="118872"/>
+            <a:ext cx="146304" cy="6858000"/>
           </a:xfrm>
           <a:prstGeom prst="rect">
             <a:avLst/>
@@ -3144,8 +3144,8 @@
         </p:nvSpPr>
         <p:spPr>
           <a:xfrm>
-            <a:off x="548640" y="320040"/>
-            <a:ext cx="914400" cy="548640"/>
+            <a:off x="10881360" y="45720"/>
+            <a:ext cx="1188720" cy="1371600"/>
           </a:xfrm>
           <a:prstGeom prst="rect">
             <a:avLst/>
@@ -3153,20 +3153,16 @@
           <a:noFill/>
         </p:spPr>
         <p:txBody>
-          <a:bodyPr wrap="square" anchor="t">
+          <a:bodyPr wrap="none">
             <a:spAutoFit/>
           </a:bodyPr>
           <a:lstStyle/>
           <a:p>
-            <a:pPr algn="l">
-              <a:spcAft>
-                <a:spcPts val="600"/>
-              </a:spcAft>
-            </a:pPr>
-            <a:r>
-              <a:rPr sz="4000" b="1">
-                <a:solidFill>
-                  <a:srgbClr val="E8590C"/>
+            <a:pPr algn="r"/>
+            <a:r>
+              <a:rPr sz="7200" b="1">
+                <a:solidFill>
+                  <a:srgbClr val="E6E9EC"/>
                 </a:solidFill>
                 <a:latin typeface="Helvetica Neue"/>
               </a:rPr>
@@ -3183,8 +3179,8 @@
         </p:nvSpPr>
         <p:spPr>
           <a:xfrm>
-            <a:off x="1234440" y="384048"/>
-            <a:ext cx="10424160" cy="731520"/>
+            <a:off x="566928" y="365760"/>
+            <a:ext cx="9601200" cy="274320"/>
           </a:xfrm>
           <a:prstGeom prst="rect">
             <a:avLst/>
@@ -3199,17 +3195,17 @@
           <a:p>
             <a:pPr algn="l">
               <a:spcAft>
-                <a:spcPts val="600"/>
-              </a:spcAft>
-            </a:pPr>
-            <a:r>
-              <a:rPr sz="3000" b="1">
-                <a:solidFill>
-                  <a:srgbClr val="1A1A1A"/>
-                </a:solidFill>
-                <a:latin typeface="Helvetica Neue"/>
-              </a:rPr>
-              <a:t>Where does an LLM fine-tuning job spend its time?</a:t>
+                <a:spcPts val="500"/>
+              </a:spcAft>
+            </a:pPr>
+            <a:r>
+              <a:rPr sz="1200" b="1" i="0">
+                <a:solidFill>
+                  <a:srgbClr val="E8590C"/>
+                </a:solidFill>
+                <a:latin typeface="Helvetica Neue"/>
+              </a:rPr>
+              <a:t>THE PROBLEM</a:t>
             </a:r>
           </a:p>
         </p:txBody>
@@ -3222,8 +3218,8 @@
         </p:nvSpPr>
         <p:spPr>
           <a:xfrm>
-            <a:off x="1234440" y="1024128"/>
-            <a:ext cx="10424160" cy="457200"/>
+            <a:off x="566928" y="658368"/>
+            <a:ext cx="10058400" cy="822960"/>
           </a:xfrm>
           <a:prstGeom prst="rect">
             <a:avLst/>
@@ -3238,31 +3234,79 @@
           <a:p>
             <a:pPr algn="l">
               <a:spcAft>
-                <a:spcPts val="600"/>
-              </a:spcAft>
-            </a:pPr>
-            <a:r>
-              <a:rPr sz="1500" b="0">
-                <a:solidFill>
-                  <a:srgbClr val="6B7280"/>
-                </a:solidFill>
-                <a:latin typeface="Helvetica Neue"/>
-              </a:rPr>
-              <a:t>ME344 Final Project · Option 2, custom workload · Leonard Arnold &amp; Luis Hambuch</a:t>
-            </a:r>
-          </a:p>
-        </p:txBody>
-      </p:sp>
-      <p:sp>
-        <p:nvSpPr>
-          <p:cNvPr id="6" name="TextBox 5"/>
+                <a:spcPts val="500"/>
+              </a:spcAft>
+            </a:pPr>
+            <a:r>
+              <a:rPr sz="3200" b="1" i="0">
+                <a:solidFill>
+                  <a:srgbClr val="15171A"/>
+                </a:solidFill>
+                <a:latin typeface="Helvetica Neue"/>
+              </a:rPr>
+              <a:t>Can a clinic afford to run its own coding model?</a:t>
+            </a:r>
+          </a:p>
+        </p:txBody>
+      </p:sp>
+      <p:sp>
+        <p:nvSpPr>
+          <p:cNvPr id="6" name="Rounded Rectangle 5"/>
+          <p:cNvSpPr/>
+          <p:nvPr/>
+        </p:nvSpPr>
+        <p:spPr>
+          <a:xfrm>
+            <a:off x="566928" y="1691640"/>
+            <a:ext cx="5486400" cy="2148840"/>
+          </a:xfrm>
+          <a:prstGeom prst="roundRect">
+            <a:avLst>
+              <a:gd name="adj" fmla="val 4000"/>
+            </a:avLst>
+          </a:prstGeom>
+          <a:solidFill>
+            <a:srgbClr val="FEF3EA"/>
+          </a:solidFill>
+          <a:ln w="9525">
+            <a:solidFill>
+              <a:srgbClr val="E6E9EC"/>
+            </a:solidFill>
+          </a:ln>
+          <a:effectLst/>
+        </p:spPr>
+        <p:style>
+          <a:lnRef idx="1">
+            <a:schemeClr val="accent1"/>
+          </a:lnRef>
+          <a:fillRef idx="3">
+            <a:schemeClr val="accent1"/>
+          </a:fillRef>
+          <a:effectRef idx="2">
+            <a:schemeClr val="accent1"/>
+          </a:effectRef>
+          <a:fontRef idx="minor">
+            <a:schemeClr val="lt1"/>
+          </a:fontRef>
+        </p:style>
+        <p:txBody>
+          <a:bodyPr rtlCol="0" anchor="ctr"/>
+          <a:lstStyle/>
+          <a:p>
+            <a:pPr algn="ctr"/>
+          </a:p>
+        </p:txBody>
+      </p:sp>
+      <p:sp>
+        <p:nvSpPr>
+          <p:cNvPr id="7" name="TextBox 6"/>
           <p:cNvSpPr txBox="1"/>
           <p:nvPr/>
         </p:nvSpPr>
         <p:spPr>
           <a:xfrm>
-            <a:off x="548640" y="1691640"/>
-            <a:ext cx="5760720" cy="4023360"/>
+            <a:off x="841248" y="1901952"/>
+            <a:ext cx="5029200" cy="320040"/>
           </a:xfrm>
           <a:prstGeom prst="rect">
             <a:avLst/>
@@ -3277,159 +3321,31 @@
           <a:p>
             <a:pPr algn="l">
               <a:spcAft>
-                <a:spcPts val="600"/>
-              </a:spcAft>
-            </a:pPr>
-            <a:r>
-              <a:rPr sz="1500" b="0">
-                <a:solidFill>
-                  <a:srgbClr val="1A1A1A"/>
-                </a:solidFill>
-                <a:latin typeface="Helvetica Neue"/>
-              </a:rPr>
-              <a:t>The workload</a:t>
-            </a:r>
-          </a:p>
-          <a:p>
-            <a:pPr algn="l">
-              <a:spcAft>
-                <a:spcPts val="600"/>
-              </a:spcAft>
-            </a:pPr>
-            <a:r>
-              <a:rPr sz="1500" b="0">
-                <a:solidFill>
-                  <a:srgbClr val="1A1A1A"/>
-                </a:solidFill>
-                <a:latin typeface="Helvetica Neue"/>
-              </a:rPr>
-              <a:t>LoRA fine-tune of Qwen3 on CodiEsp — 1 000 Spanish clinical case</a:t>
-            </a:r>
-          </a:p>
-          <a:p>
-            <a:pPr algn="l">
-              <a:spcAft>
-                <a:spcPts val="600"/>
-              </a:spcAft>
-            </a:pPr>
-            <a:r>
-              <a:rPr sz="1500" b="0">
-                <a:solidFill>
-                  <a:srgbClr val="1A1A1A"/>
-                </a:solidFill>
-                <a:latin typeface="Helvetica Neue"/>
-              </a:rPr>
-              <a:t>reports annotated with ICD-10 diagnosis codes (CC-BY 4.0).</a:t>
-            </a:r>
-          </a:p>
-          <a:p>
-            <a:pPr algn="l">
-              <a:spcAft>
-                <a:spcPts val="600"/>
-              </a:spcAft>
-            </a:pPr>
-            <a:r>
-              <a:rPr sz="1500" b="0">
-                <a:solidFill>
-                  <a:srgbClr val="1A1A1A"/>
-                </a:solidFill>
-                <a:latin typeface="Helvetica Neue"/>
-              </a:rPr>
-              <a:t>500 train / 250 dev, ⌀ 15 codes per document, 1 811 labels.</a:t>
-            </a:r>
-          </a:p>
-          <a:p>
-            <a:pPr algn="l">
-              <a:spcAft>
-                <a:spcPts val="600"/>
-              </a:spcAft>
-            </a:pPr>
-            <a:r>
-              <a:rPr sz="1500" b="0">
-                <a:solidFill>
-                  <a:srgbClr val="1A1A1A"/>
-                </a:solidFill>
-                <a:latin typeface="Helvetica Neue"/>
-              </a:rPr>
-              <a:t/>
-            </a:r>
-          </a:p>
-          <a:p>
-            <a:pPr algn="l">
-              <a:spcAft>
-                <a:spcPts val="600"/>
-              </a:spcAft>
-            </a:pPr>
-            <a:r>
-              <a:rPr sz="1500" b="0">
-                <a:solidFill>
-                  <a:srgbClr val="1A1A1A"/>
-                </a:solidFill>
-                <a:latin typeface="Helvetica Neue"/>
-              </a:rPr>
-              <a:t>Why it is a resource problem</a:t>
-            </a:r>
-          </a:p>
-          <a:p>
-            <a:pPr algn="l">
-              <a:spcAft>
-                <a:spcPts val="600"/>
-              </a:spcAft>
-            </a:pPr>
-            <a:r>
-              <a:rPr sz="1500" b="0">
-                <a:solidFill>
-                  <a:srgbClr val="1A1A1A"/>
-                </a:solidFill>
-                <a:latin typeface="Helvetica Neue"/>
-              </a:rPr>
-              <a:t>4B parameters = 8 GB of weights before a single activation.</a:t>
-            </a:r>
-          </a:p>
-          <a:p>
-            <a:pPr algn="l">
-              <a:spcAft>
-                <a:spcPts val="600"/>
-              </a:spcAft>
-            </a:pPr>
-            <a:r>
-              <a:rPr sz="1500" b="0">
-                <a:solidFill>
-                  <a:srgbClr val="1A1A1A"/>
-                </a:solidFill>
-                <a:latin typeface="Helvetica Neue"/>
-              </a:rPr>
-              <a:t>Documents run to 2 489 tokens. Model accuracy earns no marks —</a:t>
-            </a:r>
-          </a:p>
-          <a:p>
-            <a:pPr algn="l">
-              <a:spcAft>
-                <a:spcPts val="600"/>
-              </a:spcAft>
-            </a:pPr>
-            <a:r>
-              <a:rPr sz="1500" b="0">
-                <a:solidFill>
-                  <a:srgbClr val="1A1A1A"/>
-                </a:solidFill>
-                <a:latin typeface="Helvetica Neue"/>
-              </a:rPr>
-              <a:t>the object of study is the infrastructure.</a:t>
-            </a:r>
-          </a:p>
-        </p:txBody>
-      </p:sp>
-      <p:sp>
-        <p:nvSpPr>
-          <p:cNvPr id="7" name="TextBox 6"/>
+                <a:spcPts val="500"/>
+              </a:spcAft>
+            </a:pPr>
+            <a:r>
+              <a:rPr sz="1400" b="1" i="0">
+                <a:solidFill>
+                  <a:srgbClr val="15171A"/>
+                </a:solidFill>
+                <a:latin typeface="Helvetica Neue"/>
+              </a:rPr>
+              <a:t>Dr. Findus — our startup, Berlin</a:t>
+            </a:r>
+          </a:p>
+        </p:txBody>
+      </p:sp>
+      <p:sp>
+        <p:nvSpPr>
+          <p:cNvPr id="8" name="TextBox 7"/>
           <p:cNvSpPr txBox="1"/>
           <p:nvPr/>
         </p:nvSpPr>
         <p:spPr>
           <a:xfrm>
-            <a:off x="6583680" y="1691640"/>
-            <a:ext cx="5120640" cy="1371600"/>
+            <a:off x="841248" y="2286000"/>
+            <a:ext cx="5029200" cy="1463040"/>
           </a:xfrm>
           <a:prstGeom prst="rect">
             <a:avLst/>
@@ -3444,31 +3360,95 @@
           <a:p>
             <a:pPr algn="l">
               <a:spcAft>
-                <a:spcPts val="600"/>
-              </a:spcAft>
-            </a:pPr>
-            <a:r>
-              <a:rPr sz="1500" b="1">
-                <a:solidFill>
-                  <a:srgbClr val="E8590C"/>
-                </a:solidFill>
-                <a:latin typeface="Helvetica Neue"/>
-              </a:rPr>
-              <a:t>The question</a:t>
-            </a:r>
-          </a:p>
-        </p:txBody>
-      </p:sp>
-      <p:sp>
-        <p:nvSpPr>
-          <p:cNvPr id="8" name="TextBox 7"/>
+                <a:spcPts val="300"/>
+              </a:spcAft>
+            </a:pPr>
+            <a:r>
+              <a:rPr sz="1300" b="0" i="0">
+                <a:solidFill>
+                  <a:srgbClr val="15171A"/>
+                </a:solidFill>
+                <a:latin typeface="Helvetica Neue"/>
+              </a:rPr>
+              <a:t>German GPs must code every consultation.</a:t>
+            </a:r>
+          </a:p>
+          <a:p>
+            <a:pPr algn="l">
+              <a:spcAft>
+                <a:spcPts val="300"/>
+              </a:spcAft>
+            </a:pPr>
+            <a:r>
+              <a:rPr sz="1300" b="0" i="0">
+                <a:solidFill>
+                  <a:srgbClr val="15171A"/>
+                </a:solidFill>
+                <a:latin typeface="Helvetica Neue"/>
+              </a:rPr>
+              <a:t>We read the note and propose the codes;</a:t>
+            </a:r>
+          </a:p>
+          <a:p>
+            <a:pPr algn="l">
+              <a:spcAft>
+                <a:spcPts val="300"/>
+              </a:spcAft>
+            </a:pPr>
+            <a:r>
+              <a:rPr sz="1300" b="0" i="0">
+                <a:solidFill>
+                  <a:srgbClr val="15171A"/>
+                </a:solidFill>
+                <a:latin typeface="Helvetica Neue"/>
+              </a:rPr>
+              <a:t>the physician confirms each one — a legal</a:t>
+            </a:r>
+          </a:p>
+          <a:p>
+            <a:pPr algn="l">
+              <a:spcAft>
+                <a:spcPts val="300"/>
+              </a:spcAft>
+            </a:pPr>
+            <a:r>
+              <a:rPr sz="1300" b="0" i="0">
+                <a:solidFill>
+                  <a:srgbClr val="15171A"/>
+                </a:solidFill>
+                <a:latin typeface="Helvetica Neue"/>
+              </a:rPr>
+              <a:t>requirement here. Reliability is the product:</a:t>
+            </a:r>
+          </a:p>
+          <a:p>
+            <a:pPr algn="l">
+              <a:spcAft>
+                <a:spcPts val="300"/>
+              </a:spcAft>
+            </a:pPr>
+            <a:r>
+              <a:rPr sz="1300" b="0" i="0">
+                <a:solidFill>
+                  <a:srgbClr val="15171A"/>
+                </a:solidFill>
+                <a:latin typeface="Helvetica Neue"/>
+              </a:rPr>
+              <a:t>over-coding is fraud exposure, not error.</a:t>
+            </a:r>
+          </a:p>
+        </p:txBody>
+      </p:sp>
+      <p:sp>
+        <p:nvSpPr>
+          <p:cNvPr id="9" name="TextBox 8"/>
           <p:cNvSpPr txBox="1"/>
           <p:nvPr/>
         </p:nvSpPr>
         <p:spPr>
           <a:xfrm>
-            <a:off x="6583680" y="2057400"/>
-            <a:ext cx="5120640" cy="1828800"/>
+            <a:off x="6400800" y="1783080"/>
+            <a:ext cx="5212080" cy="731520"/>
           </a:xfrm>
           <a:prstGeom prst="rect">
             <a:avLst/>
@@ -3483,63 +3463,47 @@
           <a:p>
             <a:pPr algn="l">
               <a:spcAft>
-                <a:spcPts val="600"/>
-              </a:spcAft>
-            </a:pPr>
-            <a:r>
-              <a:rPr sz="2100" b="1">
-                <a:solidFill>
-                  <a:srgbClr val="1A1A1A"/>
-                </a:solidFill>
-                <a:latin typeface="Helvetica Neue"/>
-              </a:rPr>
-              <a:t>Where does the time actually go —</a:t>
-            </a:r>
-          </a:p>
-          <a:p>
-            <a:pPr algn="l">
-              <a:spcAft>
-                <a:spcPts val="600"/>
-              </a:spcAft>
-            </a:pPr>
-            <a:r>
-              <a:rPr sz="2100" b="1">
-                <a:solidFill>
-                  <a:srgbClr val="1A1A1A"/>
-                </a:solidFill>
-                <a:latin typeface="Helvetica Neue"/>
-              </a:rPr>
-              <a:t>and what does it take to run</a:t>
-            </a:r>
-          </a:p>
-          <a:p>
-            <a:pPr algn="l">
-              <a:spcAft>
-                <a:spcPts val="600"/>
-              </a:spcAft>
-            </a:pPr>
-            <a:r>
-              <a:rPr sz="2100" b="1">
-                <a:solidFill>
-                  <a:srgbClr val="1A1A1A"/>
-                </a:solidFill>
-                <a:latin typeface="Helvetica Neue"/>
-              </a:rPr>
-              <a:t>the job at all?</a:t>
-            </a:r>
-          </a:p>
-        </p:txBody>
-      </p:sp>
-      <p:sp>
-        <p:nvSpPr>
-          <p:cNvPr id="9" name="TextBox 8"/>
+                <a:spcPts val="200"/>
+              </a:spcAft>
+            </a:pPr>
+            <a:r>
+              <a:rPr sz="1600" b="1" i="0">
+                <a:solidFill>
+                  <a:srgbClr val="15171A"/>
+                </a:solidFill>
+                <a:latin typeface="Helvetica Neue"/>
+              </a:rPr>
+              <a:t>Today that runs on hosted APIs.</a:t>
+            </a:r>
+          </a:p>
+          <a:p>
+            <a:pPr algn="l">
+              <a:spcAft>
+                <a:spcPts val="200"/>
+              </a:spcAft>
+            </a:pPr>
+            <a:r>
+              <a:rPr sz="1600" b="1" i="0">
+                <a:solidFill>
+                  <a:srgbClr val="15171A"/>
+                </a:solidFill>
+                <a:latin typeface="Helvetica Neue"/>
+              </a:rPr>
+              <a:t>Could it run on our own hardware?</a:t>
+            </a:r>
+          </a:p>
+        </p:txBody>
+      </p:sp>
+      <p:sp>
+        <p:nvSpPr>
+          <p:cNvPr id="10" name="TextBox 9"/>
           <p:cNvSpPr txBox="1"/>
           <p:nvPr/>
         </p:nvSpPr>
         <p:spPr>
           <a:xfrm>
-            <a:off x="6583680" y="3886200"/>
-            <a:ext cx="5120640" cy="2011680"/>
+            <a:off x="6400800" y="2606040"/>
+            <a:ext cx="5212080" cy="1280160"/>
           </a:xfrm>
           <a:prstGeom prst="rect">
             <a:avLst/>
@@ -3554,45 +3518,45 @@
           <a:p>
             <a:pPr algn="l">
               <a:spcAft>
-                <a:spcPts val="600"/>
-              </a:spcAft>
-            </a:pPr>
-            <a:r>
-              <a:rPr sz="1300" b="0">
-                <a:solidFill>
-                  <a:srgbClr val="6B7280"/>
-                </a:solidFill>
-                <a:latin typeface="Helvetica Neue"/>
-              </a:rPr>
-              <a:t>The second half is not decoration. At Qwen3-0.6B all three</a:t>
-            </a:r>
-          </a:p>
-          <a:p>
-            <a:pPr algn="l">
-              <a:spcAft>
-                <a:spcPts val="600"/>
-              </a:spcAft>
-            </a:pPr>
-            <a:r>
-              <a:rPr sz="1300" b="0">
-                <a:solidFill>
-                  <a:srgbClr val="6B7280"/>
-                </a:solidFill>
-                <a:latin typeface="Helvetica Neue"/>
-              </a:rPr>
-              <a:t>backends run. At 4B the CPU runs in no configuration we tried.</a:t>
-            </a:r>
-          </a:p>
-          <a:p>
-            <a:pPr algn="l">
-              <a:spcAft>
-                <a:spcPts val="600"/>
-              </a:spcAft>
-            </a:pPr>
-            <a:r>
-              <a:rPr sz="1300" b="0">
-                <a:solidFill>
-                  <a:srgbClr val="6B7280"/>
+                <a:spcPts val="300"/>
+              </a:spcAft>
+            </a:pPr>
+            <a:r>
+              <a:rPr sz="1300" b="0" i="0">
+                <a:solidFill>
+                  <a:srgbClr val="717A85"/>
+                </a:solidFill>
+                <a:latin typeface="Helvetica Neue"/>
+              </a:rPr>
+              <a:t>An infrastructure question, not a model one —</a:t>
+            </a:r>
+          </a:p>
+          <a:p>
+            <a:pPr algn="l">
+              <a:spcAft>
+                <a:spcPts val="300"/>
+              </a:spcAft>
+            </a:pPr>
+            <a:r>
+              <a:rPr sz="1300" b="0" i="0">
+                <a:solidFill>
+                  <a:srgbClr val="717A85"/>
+                </a:solidFill>
+                <a:latin typeface="Helvetica Neue"/>
+              </a:rPr>
+              <a:t>so we built the workload and measured it.</a:t>
+            </a:r>
+          </a:p>
+          <a:p>
+            <a:pPr algn="l">
+              <a:spcAft>
+                <a:spcPts val="300"/>
+              </a:spcAft>
+            </a:pPr>
+            <a:r>
+              <a:rPr sz="1300" b="0" i="0">
+                <a:solidFill>
+                  <a:srgbClr val="717A85"/>
                 </a:solidFill>
                 <a:latin typeface="Helvetica Neue"/>
               </a:rPr>
@@ -3602,33 +3566,393 @@
           <a:p>
             <a:pPr algn="l">
               <a:spcAft>
-                <a:spcPts val="600"/>
-              </a:spcAft>
-            </a:pPr>
-            <a:r>
-              <a:rPr sz="1300" b="0">
-                <a:solidFill>
-                  <a:srgbClr val="6B7280"/>
-                </a:solidFill>
-                <a:latin typeface="Helvetica Neue"/>
-              </a:rPr>
-              <a:t>Motivated by Dr. Findus, a medical billing system that maps</a:t>
-            </a:r>
-          </a:p>
-          <a:p>
-            <a:pPr algn="l">
-              <a:spcAft>
-                <a:spcPts val="600"/>
-              </a:spcAft>
-            </a:pPr>
-            <a:r>
-              <a:rPr sz="1300" b="0">
-                <a:solidFill>
-                  <a:srgbClr val="6B7280"/>
-                </a:solidFill>
-                <a:latin typeface="Helvetica Neue"/>
-              </a:rPr>
-              <a:t>clinical documentation to ICD-10. No patient data was used.</a:t>
+                <a:spcPts val="300"/>
+              </a:spcAft>
+            </a:pPr>
+            <a:r>
+              <a:rPr sz="1300" b="0" i="0">
+                <a:solidFill>
+                  <a:srgbClr val="717A85"/>
+                </a:solidFill>
+                <a:latin typeface="Helvetica Neue"/>
+              </a:rPr>
+              <a:t>Qwen3 + LoRA on CodiEsp: 1 000 clinical case</a:t>
+            </a:r>
+          </a:p>
+          <a:p>
+            <a:pPr algn="l">
+              <a:spcAft>
+                <a:spcPts val="300"/>
+              </a:spcAft>
+            </a:pPr>
+            <a:r>
+              <a:rPr sz="1300" b="0" i="0">
+                <a:solidFill>
+                  <a:srgbClr val="717A85"/>
+                </a:solidFill>
+                <a:latin typeface="Helvetica Neue"/>
+              </a:rPr>
+              <a:t>reports, ICD-10 labelled, CC-BY 4.0.</a:t>
+            </a:r>
+          </a:p>
+        </p:txBody>
+      </p:sp>
+      <p:sp>
+        <p:nvSpPr>
+          <p:cNvPr id="11" name="TextBox 10"/>
+          <p:cNvSpPr txBox="1"/>
+          <p:nvPr/>
+        </p:nvSpPr>
+        <p:spPr>
+          <a:xfrm>
+            <a:off x="566928" y="4160520"/>
+            <a:ext cx="2743200" cy="777240"/>
+          </a:xfrm>
+          <a:prstGeom prst="rect">
+            <a:avLst/>
+          </a:prstGeom>
+          <a:noFill/>
+        </p:spPr>
+        <p:txBody>
+          <a:bodyPr wrap="square" anchor="t">
+            <a:spAutoFit/>
+          </a:bodyPr>
+          <a:lstStyle/>
+          <a:p>
+            <a:pPr algn="l">
+              <a:spcAft>
+                <a:spcPts val="0"/>
+              </a:spcAft>
+            </a:pPr>
+            <a:r>
+              <a:rPr sz="4400" b="1" i="0">
+                <a:solidFill>
+                  <a:srgbClr val="E8590C"/>
+                </a:solidFill>
+                <a:latin typeface="Helvetica Neue"/>
+              </a:rPr>
+              <a:t>8 GB</a:t>
+            </a:r>
+          </a:p>
+        </p:txBody>
+      </p:sp>
+      <p:sp>
+        <p:nvSpPr>
+          <p:cNvPr id="12" name="TextBox 11"/>
+          <p:cNvSpPr txBox="1"/>
+          <p:nvPr/>
+        </p:nvSpPr>
+        <p:spPr>
+          <a:xfrm>
+            <a:off x="566928" y="4818888"/>
+            <a:ext cx="2743200" cy="822960"/>
+          </a:xfrm>
+          <a:prstGeom prst="rect">
+            <a:avLst/>
+          </a:prstGeom>
+          <a:noFill/>
+        </p:spPr>
+        <p:txBody>
+          <a:bodyPr wrap="square" anchor="t">
+            <a:spAutoFit/>
+          </a:bodyPr>
+          <a:lstStyle/>
+          <a:p>
+            <a:pPr algn="l">
+              <a:spcAft>
+                <a:spcPts val="200"/>
+              </a:spcAft>
+            </a:pPr>
+            <a:r>
+              <a:rPr sz="1200" b="0" i="0">
+                <a:solidFill>
+                  <a:srgbClr val="717A85"/>
+                </a:solidFill>
+                <a:latin typeface="Helvetica Neue"/>
+              </a:rPr>
+              <a:t>of weights at 4B, before a single</a:t>
+            </a:r>
+          </a:p>
+          <a:p>
+            <a:pPr algn="l">
+              <a:spcAft>
+                <a:spcPts val="200"/>
+              </a:spcAft>
+            </a:pPr>
+            <a:r>
+              <a:rPr sz="1200" b="0" i="0">
+                <a:solidFill>
+                  <a:srgbClr val="717A85"/>
+                </a:solidFill>
+                <a:latin typeface="Helvetica Neue"/>
+              </a:rPr>
+              <a:t>activation exists</a:t>
+            </a:r>
+          </a:p>
+        </p:txBody>
+      </p:sp>
+      <p:sp>
+        <p:nvSpPr>
+          <p:cNvPr id="13" name="TextBox 12"/>
+          <p:cNvSpPr txBox="1"/>
+          <p:nvPr/>
+        </p:nvSpPr>
+        <p:spPr>
+          <a:xfrm>
+            <a:off x="3657600" y="4160520"/>
+            <a:ext cx="2743200" cy="777240"/>
+          </a:xfrm>
+          <a:prstGeom prst="rect">
+            <a:avLst/>
+          </a:prstGeom>
+          <a:noFill/>
+        </p:spPr>
+        <p:txBody>
+          <a:bodyPr wrap="square" anchor="t">
+            <a:spAutoFit/>
+          </a:bodyPr>
+          <a:lstStyle/>
+          <a:p>
+            <a:pPr algn="l">
+              <a:spcAft>
+                <a:spcPts val="0"/>
+              </a:spcAft>
+            </a:pPr>
+            <a:r>
+              <a:rPr sz="4400" b="1" i="0">
+                <a:solidFill>
+                  <a:srgbClr val="E8590C"/>
+                </a:solidFill>
+                <a:latin typeface="Helvetica Neue"/>
+              </a:rPr>
+              <a:t>2 489</a:t>
+            </a:r>
+          </a:p>
+        </p:txBody>
+      </p:sp>
+      <p:sp>
+        <p:nvSpPr>
+          <p:cNvPr id="14" name="TextBox 13"/>
+          <p:cNvSpPr txBox="1"/>
+          <p:nvPr/>
+        </p:nvSpPr>
+        <p:spPr>
+          <a:xfrm>
+            <a:off x="3657600" y="4818888"/>
+            <a:ext cx="2743200" cy="822960"/>
+          </a:xfrm>
+          <a:prstGeom prst="rect">
+            <a:avLst/>
+          </a:prstGeom>
+          <a:noFill/>
+        </p:spPr>
+        <p:txBody>
+          <a:bodyPr wrap="square" anchor="t">
+            <a:spAutoFit/>
+          </a:bodyPr>
+          <a:lstStyle/>
+          <a:p>
+            <a:pPr algn="l">
+              <a:spcAft>
+                <a:spcPts val="200"/>
+              </a:spcAft>
+            </a:pPr>
+            <a:r>
+              <a:rPr sz="1200" b="0" i="0">
+                <a:solidFill>
+                  <a:srgbClr val="717A85"/>
+                </a:solidFill>
+                <a:latin typeface="Helvetica Neue"/>
+              </a:rPr>
+              <a:t>tokens in the longest case —</a:t>
+            </a:r>
+          </a:p>
+          <a:p>
+            <a:pPr algn="l">
+              <a:spcAft>
+                <a:spcPts val="200"/>
+              </a:spcAft>
+            </a:pPr>
+            <a:r>
+              <a:rPr sz="1200" b="0" i="0">
+                <a:solidFill>
+                  <a:srgbClr val="717A85"/>
+                </a:solidFill>
+                <a:latin typeface="Helvetica Neue"/>
+              </a:rPr>
+              <a:t>sequence length is not free</a:t>
+            </a:r>
+          </a:p>
+        </p:txBody>
+      </p:sp>
+      <p:sp>
+        <p:nvSpPr>
+          <p:cNvPr id="15" name="TextBox 14"/>
+          <p:cNvSpPr txBox="1"/>
+          <p:nvPr/>
+        </p:nvSpPr>
+        <p:spPr>
+          <a:xfrm>
+            <a:off x="6766560" y="4160520"/>
+            <a:ext cx="4846320" cy="777240"/>
+          </a:xfrm>
+          <a:prstGeom prst="rect">
+            <a:avLst/>
+          </a:prstGeom>
+          <a:noFill/>
+        </p:spPr>
+        <p:txBody>
+          <a:bodyPr wrap="square" anchor="t">
+            <a:spAutoFit/>
+          </a:bodyPr>
+          <a:lstStyle/>
+          <a:p>
+            <a:pPr algn="l">
+              <a:spcAft>
+                <a:spcPts val="0"/>
+              </a:spcAft>
+            </a:pPr>
+            <a:r>
+              <a:rPr sz="4400" b="1" i="0">
+                <a:solidFill>
+                  <a:srgbClr val="E8590C"/>
+                </a:solidFill>
+                <a:latin typeface="Helvetica Neue"/>
+              </a:rPr>
+              <a:t>3 backends</a:t>
+            </a:r>
+          </a:p>
+        </p:txBody>
+      </p:sp>
+      <p:sp>
+        <p:nvSpPr>
+          <p:cNvPr id="16" name="TextBox 15"/>
+          <p:cNvSpPr txBox="1"/>
+          <p:nvPr/>
+        </p:nvSpPr>
+        <p:spPr>
+          <a:xfrm>
+            <a:off x="6766560" y="4818888"/>
+            <a:ext cx="4846320" cy="822960"/>
+          </a:xfrm>
+          <a:prstGeom prst="rect">
+            <a:avLst/>
+          </a:prstGeom>
+          <a:noFill/>
+        </p:spPr>
+        <p:txBody>
+          <a:bodyPr wrap="square" anchor="t">
+            <a:spAutoFit/>
+          </a:bodyPr>
+          <a:lstStyle/>
+          <a:p>
+            <a:pPr algn="l">
+              <a:spcAft>
+                <a:spcPts val="200"/>
+              </a:spcAft>
+            </a:pPr>
+            <a:r>
+              <a:rPr sz="1200" b="0" i="0">
+                <a:solidFill>
+                  <a:srgbClr val="717A85"/>
+                </a:solidFill>
+                <a:latin typeface="Helvetica Neue"/>
+              </a:rPr>
+              <a:t>CPU · GPU · TPU, one JAX program,</a:t>
+            </a:r>
+          </a:p>
+          <a:p>
+            <a:pPr algn="l">
+              <a:spcAft>
+                <a:spcPts val="200"/>
+              </a:spcAft>
+            </a:pPr>
+            <a:r>
+              <a:rPr sz="1200" b="0" i="0">
+                <a:solidFill>
+                  <a:srgbClr val="717A85"/>
+                </a:solidFill>
+                <a:latin typeface="Helvetica Neue"/>
+              </a:rPr>
+              <a:t>no per-backend reimplementation</a:t>
+            </a:r>
+          </a:p>
+        </p:txBody>
+      </p:sp>
+      <p:sp>
+        <p:nvSpPr>
+          <p:cNvPr id="17" name="TextBox 16"/>
+          <p:cNvSpPr txBox="1"/>
+          <p:nvPr/>
+        </p:nvSpPr>
+        <p:spPr>
+          <a:xfrm>
+            <a:off x="566928" y="5806440"/>
+            <a:ext cx="10972800" cy="640080"/>
+          </a:xfrm>
+          <a:prstGeom prst="rect">
+            <a:avLst/>
+          </a:prstGeom>
+          <a:noFill/>
+        </p:spPr>
+        <p:txBody>
+          <a:bodyPr wrap="square" anchor="t">
+            <a:spAutoFit/>
+          </a:bodyPr>
+          <a:lstStyle/>
+          <a:p>
+            <a:pPr algn="l">
+              <a:spcAft>
+                <a:spcPts val="500"/>
+              </a:spcAft>
+            </a:pPr>
+            <a:r>
+              <a:rPr sz="1900" b="1" i="0">
+                <a:solidFill>
+                  <a:srgbClr val="E8590C"/>
+                </a:solidFill>
+                <a:latin typeface="Helvetica Neue"/>
+              </a:rPr>
+              <a:t>Where does the time actually go — and what does it take to run this at all?</a:t>
+            </a:r>
+          </a:p>
+        </p:txBody>
+      </p:sp>
+      <p:sp>
+        <p:nvSpPr>
+          <p:cNvPr id="18" name="TextBox 17"/>
+          <p:cNvSpPr txBox="1"/>
+          <p:nvPr/>
+        </p:nvSpPr>
+        <p:spPr>
+          <a:xfrm>
+            <a:off x="566928" y="6263640"/>
+            <a:ext cx="10972800" cy="365760"/>
+          </a:xfrm>
+          <a:prstGeom prst="rect">
+            <a:avLst/>
+          </a:prstGeom>
+          <a:noFill/>
+        </p:spPr>
+        <p:txBody>
+          <a:bodyPr wrap="square" anchor="t">
+            <a:spAutoFit/>
+          </a:bodyPr>
+          <a:lstStyle/>
+          <a:p>
+            <a:pPr algn="l">
+              <a:spcAft>
+                <a:spcPts val="500"/>
+              </a:spcAft>
+            </a:pPr>
+            <a:r>
+              <a:rPr sz="1100" b="0" i="1">
+                <a:solidFill>
+                  <a:srgbClr val="717A85"/>
+                </a:solidFill>
+                <a:latin typeface="Helvetica Neue"/>
+              </a:rPr>
+              <a:t>No patient data was used. Model accuracy earns no marks here — the object of study is the infrastructure.</a:t>
             </a:r>
           </a:p>
         </p:txBody>
@@ -3660,7 +3984,7 @@
         <p:spPr>
           <a:xfrm>
             <a:off x="0" y="0"/>
-            <a:ext cx="12191695" cy="118872"/>
+            <a:ext cx="146304" cy="6858000"/>
           </a:xfrm>
           <a:prstGeom prst="rect">
             <a:avLst/>
@@ -3703,8 +4027,8 @@
         </p:nvSpPr>
         <p:spPr>
           <a:xfrm>
-            <a:off x="548640" y="320040"/>
-            <a:ext cx="914400" cy="548640"/>
+            <a:off x="10881360" y="45720"/>
+            <a:ext cx="1188720" cy="1371600"/>
           </a:xfrm>
           <a:prstGeom prst="rect">
             <a:avLst/>
@@ -3712,20 +4036,16 @@
           <a:noFill/>
         </p:spPr>
         <p:txBody>
-          <a:bodyPr wrap="square" anchor="t">
+          <a:bodyPr wrap="none">
             <a:spAutoFit/>
           </a:bodyPr>
           <a:lstStyle/>
           <a:p>
-            <a:pPr algn="l">
-              <a:spcAft>
-                <a:spcPts val="600"/>
-              </a:spcAft>
-            </a:pPr>
-            <a:r>
-              <a:rPr sz="4000" b="1">
-                <a:solidFill>
-                  <a:srgbClr val="E8590C"/>
+            <a:pPr algn="r"/>
+            <a:r>
+              <a:rPr sz="7200" b="1">
+                <a:solidFill>
+                  <a:srgbClr val="E6E9EC"/>
                 </a:solidFill>
                 <a:latin typeface="Helvetica Neue"/>
               </a:rPr>
@@ -3742,8 +4062,8 @@
         </p:nvSpPr>
         <p:spPr>
           <a:xfrm>
-            <a:off x="1234440" y="384048"/>
-            <a:ext cx="10424160" cy="731520"/>
+            <a:off x="566928" y="365760"/>
+            <a:ext cx="9601200" cy="274320"/>
           </a:xfrm>
           <a:prstGeom prst="rect">
             <a:avLst/>
@@ -3758,17 +4078,17 @@
           <a:p>
             <a:pPr algn="l">
               <a:spcAft>
-                <a:spcPts val="600"/>
-              </a:spcAft>
-            </a:pPr>
-            <a:r>
-              <a:rPr sz="3000" b="1">
-                <a:solidFill>
-                  <a:srgbClr val="1A1A1A"/>
-                </a:solidFill>
-                <a:latin typeface="Helvetica Neue"/>
-              </a:rPr>
-              <a:t>One code path, three backends</a:t>
+                <a:spcPts val="500"/>
+              </a:spcAft>
+            </a:pPr>
+            <a:r>
+              <a:rPr sz="1200" b="1" i="0">
+                <a:solidFill>
+                  <a:srgbClr val="E8590C"/>
+                </a:solidFill>
+                <a:latin typeface="Helvetica Neue"/>
+              </a:rPr>
+              <a:t>APPROACH</a:t>
             </a:r>
           </a:p>
         </p:txBody>
@@ -3781,8 +4101,8 @@
         </p:nvSpPr>
         <p:spPr>
           <a:xfrm>
-            <a:off x="1234440" y="1024128"/>
-            <a:ext cx="10424160" cy="457200"/>
+            <a:off x="566928" y="658368"/>
+            <a:ext cx="10058400" cy="822960"/>
           </a:xfrm>
           <a:prstGeom prst="rect">
             <a:avLst/>
@@ -3797,31 +4117,79 @@
           <a:p>
             <a:pPr algn="l">
               <a:spcAft>
-                <a:spcPts val="600"/>
-              </a:spcAft>
-            </a:pPr>
-            <a:r>
-              <a:rPr sz="1500" b="0">
-                <a:solidFill>
-                  <a:srgbClr val="6B7280"/>
-                </a:solidFill>
-                <a:latin typeface="Helvetica Neue"/>
-              </a:rPr>
-              <a:t>Proposal, orchestration, and the compilation layer</a:t>
-            </a:r>
-          </a:p>
-        </p:txBody>
-      </p:sp>
-      <p:sp>
-        <p:nvSpPr>
-          <p:cNvPr id="6" name="TextBox 5"/>
+                <a:spcPts val="500"/>
+              </a:spcAft>
+            </a:pPr>
+            <a:r>
+              <a:rPr sz="3200" b="1" i="0">
+                <a:solidFill>
+                  <a:srgbClr val="15171A"/>
+                </a:solidFill>
+                <a:latin typeface="Helvetica Neue"/>
+              </a:rPr>
+              <a:t>One program. Three backends. All measured.</a:t>
+            </a:r>
+          </a:p>
+        </p:txBody>
+      </p:sp>
+      <p:sp>
+        <p:nvSpPr>
+          <p:cNvPr id="6" name="Rounded Rectangle 5"/>
+          <p:cNvSpPr/>
+          <p:nvPr/>
+        </p:nvSpPr>
+        <p:spPr>
+          <a:xfrm>
+            <a:off x="566928" y="1783080"/>
+            <a:ext cx="3520440" cy="2286000"/>
+          </a:xfrm>
+          <a:prstGeom prst="roundRect">
+            <a:avLst>
+              <a:gd name="adj" fmla="val 4000"/>
+            </a:avLst>
+          </a:prstGeom>
+          <a:solidFill>
+            <a:srgbClr val="FEF3EA"/>
+          </a:solidFill>
+          <a:ln w="9525">
+            <a:solidFill>
+              <a:srgbClr val="E6E9EC"/>
+            </a:solidFill>
+          </a:ln>
+          <a:effectLst/>
+        </p:spPr>
+        <p:style>
+          <a:lnRef idx="1">
+            <a:schemeClr val="accent1"/>
+          </a:lnRef>
+          <a:fillRef idx="3">
+            <a:schemeClr val="accent1"/>
+          </a:fillRef>
+          <a:effectRef idx="2">
+            <a:schemeClr val="accent1"/>
+          </a:effectRef>
+          <a:fontRef idx="minor">
+            <a:schemeClr val="lt1"/>
+          </a:fontRef>
+        </p:style>
+        <p:txBody>
+          <a:bodyPr rtlCol="0" anchor="ctr"/>
+          <a:lstStyle/>
+          <a:p>
+            <a:pPr algn="ctr"/>
+          </a:p>
+        </p:txBody>
+      </p:sp>
+      <p:sp>
+        <p:nvSpPr>
+          <p:cNvPr id="7" name="TextBox 6"/>
           <p:cNvSpPr txBox="1"/>
           <p:nvPr/>
         </p:nvSpPr>
         <p:spPr>
           <a:xfrm>
-            <a:off x="548640" y="1691640"/>
-            <a:ext cx="3657600" cy="3291840"/>
+            <a:off x="822960" y="1965960"/>
+            <a:ext cx="3017520" cy="365760"/>
           </a:xfrm>
           <a:prstGeom prst="rect">
             <a:avLst/>
@@ -3836,95 +4204,31 @@
           <a:p>
             <a:pPr algn="l">
               <a:spcAft>
-                <a:spcPts val="600"/>
-              </a:spcAft>
-            </a:pPr>
-            <a:r>
-              <a:rPr sz="1500" b="0">
-                <a:solidFill>
-                  <a:srgbClr val="1A1A1A"/>
-                </a:solidFill>
-                <a:latin typeface="Helvetica Neue"/>
-              </a:rPr>
-              <a:t>Compilation layer</a:t>
-            </a:r>
-          </a:p>
-          <a:p>
-            <a:pPr algn="l">
-              <a:spcAft>
-                <a:spcPts val="600"/>
-              </a:spcAft>
-            </a:pPr>
-            <a:r>
-              <a:rPr sz="1500" b="0">
-                <a:solidFill>
-                  <a:srgbClr val="1A1A1A"/>
-                </a:solidFill>
-                <a:latin typeface="Helvetica Neue"/>
-              </a:rPr>
-              <a:t>One JAX / Flax program.</a:t>
-            </a:r>
-          </a:p>
-          <a:p>
-            <a:pPr algn="l">
-              <a:spcAft>
-                <a:spcPts val="600"/>
-              </a:spcAft>
-            </a:pPr>
-            <a:r>
-              <a:rPr sz="1500" b="0">
-                <a:solidFill>
-                  <a:srgbClr val="1A1A1A"/>
-                </a:solidFill>
-                <a:latin typeface="Helvetica Neue"/>
-              </a:rPr>
-              <a:t>XLA lowers it to CPU, CUDA and TPU.</a:t>
-            </a:r>
-          </a:p>
-          <a:p>
-            <a:pPr algn="l">
-              <a:spcAft>
-                <a:spcPts val="600"/>
-              </a:spcAft>
-            </a:pPr>
-            <a:r>
-              <a:rPr sz="1500" b="0">
-                <a:solidFill>
-                  <a:srgbClr val="1A1A1A"/>
-                </a:solidFill>
-                <a:latin typeface="Helvetica Neue"/>
-              </a:rPr>
-              <a:t>LoRA via qwix, training via Tunix.</a:t>
-            </a:r>
-          </a:p>
-          <a:p>
-            <a:pPr algn="l">
-              <a:spcAft>
-                <a:spcPts val="600"/>
-              </a:spcAft>
-            </a:pPr>
-            <a:r>
-              <a:rPr sz="1500" b="0">
-                <a:solidFill>
-                  <a:srgbClr val="1A1A1A"/>
-                </a:solidFill>
-                <a:latin typeface="Helvetica Neue"/>
-              </a:rPr>
-              <a:t>No per-backend reimplementation.</a:t>
-            </a:r>
-          </a:p>
-        </p:txBody>
-      </p:sp>
-      <p:sp>
-        <p:nvSpPr>
-          <p:cNvPr id="7" name="TextBox 6"/>
+                <a:spcPts val="500"/>
+              </a:spcAft>
+            </a:pPr>
+            <a:r>
+              <a:rPr sz="1600" b="1" i="0">
+                <a:solidFill>
+                  <a:srgbClr val="E8590C"/>
+                </a:solidFill>
+                <a:latin typeface="Helvetica Neue"/>
+              </a:rPr>
+              <a:t>Compilation</a:t>
+            </a:r>
+          </a:p>
+        </p:txBody>
+      </p:sp>
+      <p:sp>
+        <p:nvSpPr>
+          <p:cNvPr id="8" name="TextBox 7"/>
           <p:cNvSpPr txBox="1"/>
           <p:nvPr/>
         </p:nvSpPr>
         <p:spPr>
           <a:xfrm>
-            <a:off x="4389120" y="1691640"/>
-            <a:ext cx="3657600" cy="3291840"/>
+            <a:off x="822960" y="2359152"/>
+            <a:ext cx="3063240" cy="1645920"/>
           </a:xfrm>
           <a:prstGeom prst="rect">
             <a:avLst/>
@@ -3939,95 +4243,159 @@
           <a:p>
             <a:pPr algn="l">
               <a:spcAft>
-                <a:spcPts val="600"/>
-              </a:spcAft>
-            </a:pPr>
-            <a:r>
-              <a:rPr sz="1500" b="0">
-                <a:solidFill>
-                  <a:srgbClr val="1A1A1A"/>
-                </a:solidFill>
-                <a:latin typeface="Helvetica Neue"/>
-              </a:rPr>
-              <a:t>Orchestration</a:t>
-            </a:r>
-          </a:p>
-          <a:p>
-            <a:pPr algn="l">
-              <a:spcAft>
-                <a:spcPts val="600"/>
-              </a:spcAft>
-            </a:pPr>
-            <a:r>
-              <a:rPr sz="1500" b="0">
-                <a:solidFill>
-                  <a:srgbClr val="1A1A1A"/>
-                </a:solidFill>
-                <a:latin typeface="Helvetica Neue"/>
-              </a:rPr>
-              <a:t>3 pinned Docker images.</a:t>
-            </a:r>
-          </a:p>
-          <a:p>
-            <a:pPr algn="l">
-              <a:spcAft>
-                <a:spcPts val="600"/>
-              </a:spcAft>
-            </a:pPr>
-            <a:r>
-              <a:rPr sz="1500" b="0">
-                <a:solidFill>
-                  <a:srgbClr val="1A1A1A"/>
-                </a:solidFill>
-                <a:latin typeface="Helvetica Neue"/>
-              </a:rPr>
-              <a:t>Kubernetes Jobs on two clusters.</a:t>
-            </a:r>
-          </a:p>
-          <a:p>
-            <a:pPr algn="l">
-              <a:spcAft>
-                <a:spcPts val="600"/>
-              </a:spcAft>
-            </a:pPr>
-            <a:r>
-              <a:rPr sz="1500" b="0">
-                <a:solidFill>
-                  <a:srgbClr val="1A1A1A"/>
-                </a:solidFill>
-                <a:latin typeface="Helvetica Neue"/>
-              </a:rPr>
-              <a:t>Kueue admission on the TPU pool.</a:t>
-            </a:r>
-          </a:p>
-          <a:p>
-            <a:pPr algn="l">
-              <a:spcAft>
-                <a:spcPts val="600"/>
-              </a:spcAft>
-            </a:pPr>
-            <a:r>
-              <a:rPr sz="1500" b="0">
-                <a:solidFill>
-                  <a:srgbClr val="1A1A1A"/>
-                </a:solidFill>
-                <a:latin typeface="Helvetica Neue"/>
-              </a:rPr>
-              <a:t>Explicit CPU / memory / chip limits.</a:t>
-            </a:r>
-          </a:p>
-        </p:txBody>
-      </p:sp>
-      <p:sp>
-        <p:nvSpPr>
-          <p:cNvPr id="8" name="TextBox 7"/>
+                <a:spcPts val="200"/>
+              </a:spcAft>
+            </a:pPr>
+            <a:r>
+              <a:rPr sz="1200" b="0" i="0">
+                <a:solidFill>
+                  <a:srgbClr val="15171A"/>
+                </a:solidFill>
+                <a:latin typeface="Helvetica Neue"/>
+              </a:rPr>
+              <a:t>One JAX / Flax program.</a:t>
+            </a:r>
+          </a:p>
+          <a:p>
+            <a:pPr algn="l">
+              <a:spcAft>
+                <a:spcPts val="200"/>
+              </a:spcAft>
+            </a:pPr>
+            <a:r>
+              <a:rPr sz="1200" b="0" i="0">
+                <a:solidFill>
+                  <a:srgbClr val="15171A"/>
+                </a:solidFill>
+                <a:latin typeface="Helvetica Neue"/>
+              </a:rPr>
+              <a:t>XLA lowers it to CPU, CUDA</a:t>
+            </a:r>
+          </a:p>
+          <a:p>
+            <a:pPr algn="l">
+              <a:spcAft>
+                <a:spcPts val="200"/>
+              </a:spcAft>
+            </a:pPr>
+            <a:r>
+              <a:rPr sz="1200" b="0" i="0">
+                <a:solidFill>
+                  <a:srgbClr val="15171A"/>
+                </a:solidFill>
+                <a:latin typeface="Helvetica Neue"/>
+              </a:rPr>
+              <a:t>and TPU.</a:t>
+            </a:r>
+          </a:p>
+          <a:p>
+            <a:pPr algn="l">
+              <a:spcAft>
+                <a:spcPts val="200"/>
+              </a:spcAft>
+            </a:pPr>
+            <a:r>
+              <a:rPr sz="1200" b="0" i="0">
+                <a:solidFill>
+                  <a:srgbClr val="15171A"/>
+                </a:solidFill>
+                <a:latin typeface="Helvetica Neue"/>
+              </a:rPr>
+              <a:t>LoRA via qwix, training via</a:t>
+            </a:r>
+          </a:p>
+          <a:p>
+            <a:pPr algn="l">
+              <a:spcAft>
+                <a:spcPts val="200"/>
+              </a:spcAft>
+            </a:pPr>
+            <a:r>
+              <a:rPr sz="1200" b="0" i="0">
+                <a:solidFill>
+                  <a:srgbClr val="15171A"/>
+                </a:solidFill>
+                <a:latin typeface="Helvetica Neue"/>
+              </a:rPr>
+              <a:t>Tunix — no per-backend</a:t>
+            </a:r>
+          </a:p>
+          <a:p>
+            <a:pPr algn="l">
+              <a:spcAft>
+                <a:spcPts val="200"/>
+              </a:spcAft>
+            </a:pPr>
+            <a:r>
+              <a:rPr sz="1200" b="0" i="0">
+                <a:solidFill>
+                  <a:srgbClr val="15171A"/>
+                </a:solidFill>
+                <a:latin typeface="Helvetica Neue"/>
+              </a:rPr>
+              <a:t>reimplementation.</a:t>
+            </a:r>
+          </a:p>
+        </p:txBody>
+      </p:sp>
+      <p:sp>
+        <p:nvSpPr>
+          <p:cNvPr id="9" name="Rounded Rectangle 8"/>
+          <p:cNvSpPr/>
+          <p:nvPr/>
+        </p:nvSpPr>
+        <p:spPr>
+          <a:xfrm>
+            <a:off x="4361688" y="1783080"/>
+            <a:ext cx="3520440" cy="2286000"/>
+          </a:xfrm>
+          <a:prstGeom prst="roundRect">
+            <a:avLst>
+              <a:gd name="adj" fmla="val 4000"/>
+            </a:avLst>
+          </a:prstGeom>
+          <a:solidFill>
+            <a:srgbClr val="FEF3EA"/>
+          </a:solidFill>
+          <a:ln w="9525">
+            <a:solidFill>
+              <a:srgbClr val="E6E9EC"/>
+            </a:solidFill>
+          </a:ln>
+          <a:effectLst/>
+        </p:spPr>
+        <p:style>
+          <a:lnRef idx="1">
+            <a:schemeClr val="accent1"/>
+          </a:lnRef>
+          <a:fillRef idx="3">
+            <a:schemeClr val="accent1"/>
+          </a:fillRef>
+          <a:effectRef idx="2">
+            <a:schemeClr val="accent1"/>
+          </a:effectRef>
+          <a:fontRef idx="minor">
+            <a:schemeClr val="lt1"/>
+          </a:fontRef>
+        </p:style>
+        <p:txBody>
+          <a:bodyPr rtlCol="0" anchor="ctr"/>
+          <a:lstStyle/>
+          <a:p>
+            <a:pPr algn="ctr"/>
+          </a:p>
+        </p:txBody>
+      </p:sp>
+      <p:sp>
+        <p:nvSpPr>
+          <p:cNvPr id="10" name="TextBox 9"/>
           <p:cNvSpPr txBox="1"/>
           <p:nvPr/>
         </p:nvSpPr>
         <p:spPr>
           <a:xfrm>
-            <a:off x="8229600" y="1691640"/>
-            <a:ext cx="3474720" cy="3291840"/>
+            <a:off x="4617720" y="1965960"/>
+            <a:ext cx="3017520" cy="365760"/>
           </a:xfrm>
           <a:prstGeom prst="rect">
             <a:avLst/>
@@ -4042,29 +4410,258 @@
           <a:p>
             <a:pPr algn="l">
               <a:spcAft>
-                <a:spcPts val="600"/>
-              </a:spcAft>
-            </a:pPr>
-            <a:r>
-              <a:rPr sz="1500" b="0">
-                <a:solidFill>
-                  <a:srgbClr val="1A1A1A"/>
+                <a:spcPts val="500"/>
+              </a:spcAft>
+            </a:pPr>
+            <a:r>
+              <a:rPr sz="1600" b="1" i="0">
+                <a:solidFill>
+                  <a:srgbClr val="E8590C"/>
+                </a:solidFill>
+                <a:latin typeface="Helvetica Neue"/>
+              </a:rPr>
+              <a:t>Orchestration</a:t>
+            </a:r>
+          </a:p>
+        </p:txBody>
+      </p:sp>
+      <p:sp>
+        <p:nvSpPr>
+          <p:cNvPr id="11" name="TextBox 10"/>
+          <p:cNvSpPr txBox="1"/>
+          <p:nvPr/>
+        </p:nvSpPr>
+        <p:spPr>
+          <a:xfrm>
+            <a:off x="4617720" y="2359152"/>
+            <a:ext cx="3063240" cy="1645920"/>
+          </a:xfrm>
+          <a:prstGeom prst="rect">
+            <a:avLst/>
+          </a:prstGeom>
+          <a:noFill/>
+        </p:spPr>
+        <p:txBody>
+          <a:bodyPr wrap="square" anchor="t">
+            <a:spAutoFit/>
+          </a:bodyPr>
+          <a:lstStyle/>
+          <a:p>
+            <a:pPr algn="l">
+              <a:spcAft>
+                <a:spcPts val="200"/>
+              </a:spcAft>
+            </a:pPr>
+            <a:r>
+              <a:rPr sz="1200" b="0" i="0">
+                <a:solidFill>
+                  <a:srgbClr val="15171A"/>
+                </a:solidFill>
+                <a:latin typeface="Helvetica Neue"/>
+              </a:rPr>
+              <a:t>3 pinned Docker images.</a:t>
+            </a:r>
+          </a:p>
+          <a:p>
+            <a:pPr algn="l">
+              <a:spcAft>
+                <a:spcPts val="200"/>
+              </a:spcAft>
+            </a:pPr>
+            <a:r>
+              <a:rPr sz="1200" b="0" i="0">
+                <a:solidFill>
+                  <a:srgbClr val="15171A"/>
+                </a:solidFill>
+                <a:latin typeface="Helvetica Neue"/>
+              </a:rPr>
+              <a:t>Kubernetes Jobs across two</a:t>
+            </a:r>
+          </a:p>
+          <a:p>
+            <a:pPr algn="l">
+              <a:spcAft>
+                <a:spcPts val="200"/>
+              </a:spcAft>
+            </a:pPr>
+            <a:r>
+              <a:rPr sz="1200" b="0" i="0">
+                <a:solidFill>
+                  <a:srgbClr val="15171A"/>
+                </a:solidFill>
+                <a:latin typeface="Helvetica Neue"/>
+              </a:rPr>
+              <a:t>clusters.</a:t>
+            </a:r>
+          </a:p>
+          <a:p>
+            <a:pPr algn="l">
+              <a:spcAft>
+                <a:spcPts val="200"/>
+              </a:spcAft>
+            </a:pPr>
+            <a:r>
+              <a:rPr sz="1200" b="0" i="0">
+                <a:solidFill>
+                  <a:srgbClr val="15171A"/>
+                </a:solidFill>
+                <a:latin typeface="Helvetica Neue"/>
+              </a:rPr>
+              <a:t>Kueue admission on the TPU</a:t>
+            </a:r>
+          </a:p>
+          <a:p>
+            <a:pPr algn="l">
+              <a:spcAft>
+                <a:spcPts val="200"/>
+              </a:spcAft>
+            </a:pPr>
+            <a:r>
+              <a:rPr sz="1200" b="0" i="0">
+                <a:solidFill>
+                  <a:srgbClr val="15171A"/>
+                </a:solidFill>
+                <a:latin typeface="Helvetica Neue"/>
+              </a:rPr>
+              <a:t>pool. Every manifest states</a:t>
+            </a:r>
+          </a:p>
+          <a:p>
+            <a:pPr algn="l">
+              <a:spcAft>
+                <a:spcPts val="200"/>
+              </a:spcAft>
+            </a:pPr>
+            <a:r>
+              <a:rPr sz="1200" b="0" i="0">
+                <a:solidFill>
+                  <a:srgbClr val="15171A"/>
+                </a:solidFill>
+                <a:latin typeface="Helvetica Neue"/>
+              </a:rPr>
+              <a:t>its CPU, memory and chips.</a:t>
+            </a:r>
+          </a:p>
+        </p:txBody>
+      </p:sp>
+      <p:sp>
+        <p:nvSpPr>
+          <p:cNvPr id="12" name="Rounded Rectangle 11"/>
+          <p:cNvSpPr/>
+          <p:nvPr/>
+        </p:nvSpPr>
+        <p:spPr>
+          <a:xfrm>
+            <a:off x="8156448" y="1783080"/>
+            <a:ext cx="3520440" cy="2286000"/>
+          </a:xfrm>
+          <a:prstGeom prst="roundRect">
+            <a:avLst>
+              <a:gd name="adj" fmla="val 4000"/>
+            </a:avLst>
+          </a:prstGeom>
+          <a:solidFill>
+            <a:srgbClr val="FEF3EA"/>
+          </a:solidFill>
+          <a:ln w="9525">
+            <a:solidFill>
+              <a:srgbClr val="E6E9EC"/>
+            </a:solidFill>
+          </a:ln>
+          <a:effectLst/>
+        </p:spPr>
+        <p:style>
+          <a:lnRef idx="1">
+            <a:schemeClr val="accent1"/>
+          </a:lnRef>
+          <a:fillRef idx="3">
+            <a:schemeClr val="accent1"/>
+          </a:fillRef>
+          <a:effectRef idx="2">
+            <a:schemeClr val="accent1"/>
+          </a:effectRef>
+          <a:fontRef idx="minor">
+            <a:schemeClr val="lt1"/>
+          </a:fontRef>
+        </p:style>
+        <p:txBody>
+          <a:bodyPr rtlCol="0" anchor="ctr"/>
+          <a:lstStyle/>
+          <a:p>
+            <a:pPr algn="ctr"/>
+          </a:p>
+        </p:txBody>
+      </p:sp>
+      <p:sp>
+        <p:nvSpPr>
+          <p:cNvPr id="13" name="TextBox 12"/>
+          <p:cNvSpPr txBox="1"/>
+          <p:nvPr/>
+        </p:nvSpPr>
+        <p:spPr>
+          <a:xfrm>
+            <a:off x="8412480" y="1965960"/>
+            <a:ext cx="3017520" cy="365760"/>
+          </a:xfrm>
+          <a:prstGeom prst="rect">
+            <a:avLst/>
+          </a:prstGeom>
+          <a:noFill/>
+        </p:spPr>
+        <p:txBody>
+          <a:bodyPr wrap="square" anchor="t">
+            <a:spAutoFit/>
+          </a:bodyPr>
+          <a:lstStyle/>
+          <a:p>
+            <a:pPr algn="l">
+              <a:spcAft>
+                <a:spcPts val="500"/>
+              </a:spcAft>
+            </a:pPr>
+            <a:r>
+              <a:rPr sz="1600" b="1" i="0">
+                <a:solidFill>
+                  <a:srgbClr val="E8590C"/>
                 </a:solidFill>
                 <a:latin typeface="Helvetica Neue"/>
               </a:rPr>
               <a:t>Storage</a:t>
             </a:r>
           </a:p>
-          <a:p>
-            <a:pPr algn="l">
-              <a:spcAft>
-                <a:spcPts val="600"/>
-              </a:spcAft>
-            </a:pPr>
-            <a:r>
-              <a:rPr sz="1500" b="0">
-                <a:solidFill>
-                  <a:srgbClr val="1A1A1A"/>
+        </p:txBody>
+      </p:sp>
+      <p:sp>
+        <p:nvSpPr>
+          <p:cNvPr id="14" name="TextBox 13"/>
+          <p:cNvSpPr txBox="1"/>
+          <p:nvPr/>
+        </p:nvSpPr>
+        <p:spPr>
+          <a:xfrm>
+            <a:off x="8412480" y="2359152"/>
+            <a:ext cx="3063240" cy="1645920"/>
+          </a:xfrm>
+          <a:prstGeom prst="rect">
+            <a:avLst/>
+          </a:prstGeom>
+          <a:noFill/>
+        </p:spPr>
+        <p:txBody>
+          <a:bodyPr wrap="square" anchor="t">
+            <a:spAutoFit/>
+          </a:bodyPr>
+          <a:lstStyle/>
+          <a:p>
+            <a:pPr algn="l">
+              <a:spcAft>
+                <a:spcPts val="200"/>
+              </a:spcAft>
+            </a:pPr>
+            <a:r>
+              <a:rPr sz="1200" b="0" i="0">
+                <a:solidFill>
+                  <a:srgbClr val="15171A"/>
                 </a:solidFill>
                 <a:latin typeface="Helvetica Neue"/>
               </a:rPr>
@@ -4074,64 +4671,112 @@
           <a:p>
             <a:pPr algn="l">
               <a:spcAft>
-                <a:spcPts val="600"/>
-              </a:spcAft>
-            </a:pPr>
-            <a:r>
-              <a:rPr sz="1500" b="0">
-                <a:solidFill>
-                  <a:srgbClr val="1A1A1A"/>
-                </a:solidFill>
-                <a:latin typeface="Helvetica Neue"/>
-              </a:rPr>
-              <a:t>8 GB checkpoint from a bucket.</a:t>
-            </a:r>
-          </a:p>
-          <a:p>
-            <a:pPr algn="l">
-              <a:spcAft>
-                <a:spcPts val="600"/>
-              </a:spcAft>
-            </a:pPr>
-            <a:r>
-              <a:rPr sz="1500" b="0">
-                <a:solidFill>
-                  <a:srgbClr val="1A1A1A"/>
-                </a:solidFill>
-                <a:latin typeface="Helvetica Neue"/>
-              </a:rPr>
-              <a:t>fileCacheCapacity as a knob —</a:t>
-            </a:r>
-          </a:p>
-          <a:p>
-            <a:pPr algn="l">
-              <a:spcAft>
-                <a:spcPts val="600"/>
-              </a:spcAft>
-            </a:pPr>
-            <a:r>
-              <a:rPr sz="1500" b="0">
-                <a:solidFill>
-                  <a:srgbClr val="1A1A1A"/>
-                </a:solidFill>
-                <a:latin typeface="Helvetica Neue"/>
-              </a:rPr>
-              <a:t>that knob is the experiment.</a:t>
+                <a:spcPts val="200"/>
+              </a:spcAft>
+            </a:pPr>
+            <a:r>
+              <a:rPr sz="1200" b="0" i="0">
+                <a:solidFill>
+                  <a:srgbClr val="15171A"/>
+                </a:solidFill>
+                <a:latin typeface="Helvetica Neue"/>
+              </a:rPr>
+              <a:t>An 8 GB checkpoint read</a:t>
+            </a:r>
+          </a:p>
+          <a:p>
+            <a:pPr algn="l">
+              <a:spcAft>
+                <a:spcPts val="200"/>
+              </a:spcAft>
+            </a:pPr>
+            <a:r>
+              <a:rPr sz="1200" b="0" i="0">
+                <a:solidFill>
+                  <a:srgbClr val="15171A"/>
+                </a:solidFill>
+                <a:latin typeface="Helvetica Neue"/>
+              </a:rPr>
+              <a:t>from a bucket.</a:t>
+            </a:r>
+          </a:p>
+          <a:p>
+            <a:pPr algn="l">
+              <a:spcAft>
+                <a:spcPts val="200"/>
+              </a:spcAft>
+            </a:pPr>
+            <a:r>
+              <a:rPr sz="1200" b="0" i="0">
+                <a:solidFill>
+                  <a:srgbClr val="15171A"/>
+                </a:solidFill>
+                <a:latin typeface="Helvetica Neue"/>
+              </a:rPr>
+              <a:t>The file cache was left as a</a:t>
+            </a:r>
+          </a:p>
+          <a:p>
+            <a:pPr algn="l">
+              <a:spcAft>
+                <a:spcPts val="200"/>
+              </a:spcAft>
+            </a:pPr>
+            <a:r>
+              <a:rPr sz="1200" b="0" i="0">
+                <a:solidFill>
+                  <a:srgbClr val="15171A"/>
+                </a:solidFill>
+                <a:latin typeface="Helvetica Neue"/>
+              </a:rPr>
+              <a:t>knob rather than fixed —</a:t>
+            </a:r>
+          </a:p>
+          <a:p>
+            <a:pPr algn="l">
+              <a:spcAft>
+                <a:spcPts val="200"/>
+              </a:spcAft>
+            </a:pPr>
+            <a:r>
+              <a:rPr sz="1200" b="0" i="0">
+                <a:solidFill>
+                  <a:srgbClr val="15171A"/>
+                </a:solidFill>
+                <a:latin typeface="Helvetica Neue"/>
+              </a:rPr>
+              <a:t>that knob became the</a:t>
+            </a:r>
+          </a:p>
+          <a:p>
+            <a:pPr algn="l">
+              <a:spcAft>
+                <a:spcPts val="200"/>
+              </a:spcAft>
+            </a:pPr>
+            <a:r>
+              <a:rPr sz="1200" b="0" i="0">
+                <a:solidFill>
+                  <a:srgbClr val="15171A"/>
+                </a:solidFill>
+                <a:latin typeface="Helvetica Neue"/>
+              </a:rPr>
+              <a:t>experiment.</a:t>
             </a:r>
           </a:p>
         </p:txBody>
       </p:sp>
       <p:graphicFrame>
         <p:nvGraphicFramePr>
-          <p:cNvPr id="9" name="Table 8"/>
+          <p:cNvPr id="15" name="Table 14"/>
           <p:cNvGraphicFramePr>
             <a:graphicFrameLocks noGrp="1"/>
           </p:cNvGraphicFramePr>
           <p:nvPr/>
         </p:nvGraphicFramePr>
         <p:xfrm>
-          <a:off x="548640" y="4617720"/>
-          <a:ext cx="11064240" cy="1536192"/>
+          <a:off x="566928" y="4343400"/>
+          <a:ext cx="11064238" cy="1463040"/>
         </p:xfrm>
         <a:graphic>
           <a:graphicData uri="http://schemas.openxmlformats.org/drawingml/2006/table">
@@ -4141,11 +4786,11 @@
               </a:tblPr>
               <a:tblGrid>
                 <a:gridCol w="1371600"/>
-                <a:gridCol w="3840480"/>
-                <a:gridCol w="2377440"/>
-                <a:gridCol w="3474720"/>
+                <a:gridCol w="3749039"/>
+                <a:gridCol w="2194560"/>
+                <a:gridCol w="3749039"/>
               </a:tblGrid>
-              <a:tr h="384048">
+              <a:tr h="365760">
                 <a:tc>
                   <a:txBody>
                     <a:bodyPr/>
@@ -4153,7 +4798,7 @@
                     <a:p>
                       <a:pPr algn="l"/>
                       <a:r>
-                        <a:rPr sz="1300" b="1">
+                        <a:rPr sz="1250" b="1">
                           <a:solidFill>
                             <a:srgbClr val="FFFFFF"/>
                           </a:solidFill>
@@ -4163,9 +4808,9 @@
                       </a:r>
                     </a:p>
                   </a:txBody>
-                  <a:tcPr anchor="ctr" marL="91440" marT="18288" marB="18288">
+                  <a:tcPr anchor="ctr" marL="82296" marR="82296" marT="9144" marB="9144">
                     <a:solidFill>
-                      <a:srgbClr val="E8590C"/>
+                      <a:srgbClr val="15171A"/>
                     </a:solidFill>
                   </a:tcPr>
                 </a:tc>
@@ -4174,9 +4819,9 @@
                     <a:bodyPr/>
                     <a:lstStyle/>
                     <a:p>
-                      <a:pPr algn="r"/>
+                      <a:pPr algn="l"/>
                       <a:r>
-                        <a:rPr sz="1300" b="1">
+                        <a:rPr sz="1250" b="1">
                           <a:solidFill>
                             <a:srgbClr val="FFFFFF"/>
                           </a:solidFill>
@@ -4186,9 +4831,9 @@
                       </a:r>
                     </a:p>
                   </a:txBody>
-                  <a:tcPr anchor="ctr" marL="91440" marT="18288" marB="18288">
+                  <a:tcPr anchor="ctr" marL="82296" marR="82296" marT="9144" marB="9144">
                     <a:solidFill>
-                      <a:srgbClr val="E8590C"/>
+                      <a:srgbClr val="15171A"/>
                     </a:solidFill>
                   </a:tcPr>
                 </a:tc>
@@ -4197,9 +4842,9 @@
                     <a:bodyPr/>
                     <a:lstStyle/>
                     <a:p>
-                      <a:pPr algn="r"/>
+                      <a:pPr algn="l"/>
                       <a:r>
-                        <a:rPr sz="1300" b="1">
+                        <a:rPr sz="1250" b="1">
                           <a:solidFill>
                             <a:srgbClr val="FFFFFF"/>
                           </a:solidFill>
@@ -4209,9 +4854,9 @@
                       </a:r>
                     </a:p>
                   </a:txBody>
-                  <a:tcPr anchor="ctr" marL="91440" marT="18288" marB="18288">
+                  <a:tcPr anchor="ctr" marL="82296" marR="82296" marT="9144" marB="9144">
                     <a:solidFill>
-                      <a:srgbClr val="E8590C"/>
+                      <a:srgbClr val="15171A"/>
                     </a:solidFill>
                   </a:tcPr>
                 </a:tc>
@@ -4220,26 +4865,26 @@
                     <a:bodyPr/>
                     <a:lstStyle/>
                     <a:p>
-                      <a:pPr algn="r"/>
+                      <a:pPr algn="l"/>
                       <a:r>
-                        <a:rPr sz="1300" b="1">
+                        <a:rPr sz="1250" b="1">
                           <a:solidFill>
                             <a:srgbClr val="FFFFFF"/>
                           </a:solidFill>
                           <a:latin typeface="Helvetica Neue"/>
                         </a:rPr>
-                        <a:t>Delivery</a:t>
+                        <a:t>How the code got there</a:t>
                       </a:r>
                     </a:p>
                   </a:txBody>
-                  <a:tcPr anchor="ctr" marL="91440" marT="18288" marB="18288">
+                  <a:tcPr anchor="ctr" marL="82296" marR="82296" marT="9144" marB="9144">
                     <a:solidFill>
-                      <a:srgbClr val="E8590C"/>
+                      <a:srgbClr val="15171A"/>
                     </a:solidFill>
                   </a:tcPr>
                 </a:tc>
               </a:tr>
-              <a:tr h="384048">
+              <a:tr h="365760">
                 <a:tc>
                   <a:txBody>
                     <a:bodyPr/>
@@ -4247,9 +4892,9 @@
                     <a:p>
                       <a:pPr algn="l"/>
                       <a:r>
-                        <a:rPr sz="1300">
+                        <a:rPr sz="1250">
                           <a:solidFill>
-                            <a:srgbClr val="1A1A1A"/>
+                            <a:srgbClr val="15171A"/>
                           </a:solidFill>
                           <a:latin typeface="Helvetica Neue"/>
                         </a:rPr>
@@ -4257,7 +4902,7 @@
                       </a:r>
                     </a:p>
                   </a:txBody>
-                  <a:tcPr anchor="ctr" marL="91440" marT="18288" marB="18288">
+                  <a:tcPr anchor="ctr" marL="82296" marR="82296" marT="9144" marB="9144">
                     <a:solidFill>
                       <a:srgbClr val="FFFFFF"/>
                     </a:solidFill>
@@ -4268,11 +4913,11 @@
                     <a:bodyPr/>
                     <a:lstStyle/>
                     <a:p>
-                      <a:pPr algn="r"/>
+                      <a:pPr algn="l"/>
                       <a:r>
-                        <a:rPr sz="1300">
+                        <a:rPr sz="1250">
                           <a:solidFill>
-                            <a:srgbClr val="1A1A1A"/>
+                            <a:srgbClr val="15171A"/>
                           </a:solidFill>
                           <a:latin typeface="Helvetica Neue"/>
                         </a:rPr>
@@ -4280,7 +4925,7 @@
                       </a:r>
                     </a:p>
                   </a:txBody>
-                  <a:tcPr anchor="ctr" marL="91440" marT="18288" marB="18288">
+                  <a:tcPr anchor="ctr" marL="82296" marR="82296" marT="9144" marB="9144">
                     <a:solidFill>
                       <a:srgbClr val="FFFFFF"/>
                     </a:solidFill>
@@ -4291,11 +4936,11 @@
                     <a:bodyPr/>
                     <a:lstStyle/>
                     <a:p>
-                      <a:pPr algn="r"/>
+                      <a:pPr algn="l"/>
                       <a:r>
-                        <a:rPr sz="1300">
+                        <a:rPr sz="1250">
                           <a:solidFill>
-                            <a:srgbClr val="1A1A1A"/>
+                            <a:srgbClr val="15171A"/>
                           </a:solidFill>
                           <a:latin typeface="Helvetica Neue"/>
                         </a:rPr>
@@ -4303,7 +4948,7 @@
                       </a:r>
                     </a:p>
                   </a:txBody>
-                  <a:tcPr anchor="ctr" marL="91440" marT="18288" marB="18288">
+                  <a:tcPr anchor="ctr" marL="82296" marR="82296" marT="9144" marB="9144">
                     <a:solidFill>
                       <a:srgbClr val="FFFFFF"/>
                     </a:solidFill>
@@ -4314,11 +4959,11 @@
                     <a:bodyPr/>
                     <a:lstStyle/>
                     <a:p>
-                      <a:pPr algn="r"/>
+                      <a:pPr algn="l"/>
                       <a:r>
-                        <a:rPr sz="1300">
+                        <a:rPr sz="1250">
                           <a:solidFill>
-                            <a:srgbClr val="1A1A1A"/>
+                            <a:srgbClr val="15171A"/>
                           </a:solidFill>
                           <a:latin typeface="Helvetica Neue"/>
                         </a:rPr>
@@ -4326,14 +4971,14 @@
                       </a:r>
                     </a:p>
                   </a:txBody>
-                  <a:tcPr anchor="ctr" marL="91440" marT="18288" marB="18288">
+                  <a:tcPr anchor="ctr" marL="82296" marR="82296" marT="9144" marB="9144">
                     <a:solidFill>
                       <a:srgbClr val="FFFFFF"/>
                     </a:solidFill>
                   </a:tcPr>
                 </a:tc>
               </a:tr>
-              <a:tr h="384048">
+              <a:tr h="365760">
                 <a:tc>
                   <a:txBody>
                     <a:bodyPr/>
@@ -4341,9 +4986,9 @@
                     <a:p>
                       <a:pPr algn="l"/>
                       <a:r>
-                        <a:rPr sz="1300">
+                        <a:rPr sz="1250">
                           <a:solidFill>
-                            <a:srgbClr val="1A1A1A"/>
+                            <a:srgbClr val="15171A"/>
                           </a:solidFill>
                           <a:latin typeface="Helvetica Neue"/>
                         </a:rPr>
@@ -4351,101 +4996,7 @@
                       </a:r>
                     </a:p>
                   </a:txBody>
-                  <a:tcPr anchor="ctr" marL="91440" marT="18288" marB="18288">
-                    <a:solidFill>
-                      <a:srgbClr val="FDF0E6"/>
-                    </a:solidFill>
-                  </a:tcPr>
-                </a:tc>
-                <a:tc>
-                  <a:txBody>
-                    <a:bodyPr/>
-                    <a:lstStyle/>
-                    <a:p>
-                      <a:pPr algn="r"/>
-                      <a:r>
-                        <a:rPr sz="1300">
-                          <a:solidFill>
-                            <a:srgbClr val="1A1A1A"/>
-                          </a:solidFill>
-                          <a:latin typeface="Helvetica Neue"/>
-                        </a:rPr>
-                        <a:t>NVIDIA GH200 480 GB</a:t>
-                      </a:r>
-                    </a:p>
-                  </a:txBody>
-                  <a:tcPr anchor="ctr" marL="91440" marT="18288" marB="18288">
-                    <a:solidFill>
-                      <a:srgbClr val="FDF0E6"/>
-                    </a:solidFill>
-                  </a:tcPr>
-                </a:tc>
-                <a:tc>
-                  <a:txBody>
-                    <a:bodyPr/>
-                    <a:lstStyle/>
-                    <a:p>
-                      <a:pPr algn="r"/>
-                      <a:r>
-                        <a:rPr sz="1300">
-                          <a:solidFill>
-                            <a:srgbClr val="1A1A1A"/>
-                          </a:solidFill>
-                          <a:latin typeface="Helvetica Neue"/>
-                        </a:rPr>
-                        <a:t>ARM64 Grace</a:t>
-                      </a:r>
-                    </a:p>
-                  </a:txBody>
-                  <a:tcPr anchor="ctr" marL="91440" marT="18288" marB="18288">
-                    <a:solidFill>
-                      <a:srgbClr val="FDF0E6"/>
-                    </a:solidFill>
-                  </a:tcPr>
-                </a:tc>
-                <a:tc>
-                  <a:txBody>
-                    <a:bodyPr/>
-                    <a:lstStyle/>
-                    <a:p>
-                      <a:pPr algn="r"/>
-                      <a:r>
-                        <a:rPr sz="1300">
-                          <a:solidFill>
-                            <a:srgbClr val="1A1A1A"/>
-                          </a:solidFill>
-                          <a:latin typeface="Helvetica Neue"/>
-                        </a:rPr>
-                        <a:t>public image + ConfigMap</a:t>
-                      </a:r>
-                    </a:p>
-                  </a:txBody>
-                  <a:tcPr anchor="ctr" marL="91440" marT="18288" marB="18288">
-                    <a:solidFill>
-                      <a:srgbClr val="FDF0E6"/>
-                    </a:solidFill>
-                  </a:tcPr>
-                </a:tc>
-              </a:tr>
-              <a:tr h="384048">
-                <a:tc>
-                  <a:txBody>
-                    <a:bodyPr/>
-                    <a:lstStyle/>
-                    <a:p>
-                      <a:pPr algn="l"/>
-                      <a:r>
-                        <a:rPr sz="1300">
-                          <a:solidFill>
-                            <a:srgbClr val="1A1A1A"/>
-                          </a:solidFill>
-                          <a:latin typeface="Helvetica Neue"/>
-                        </a:rPr>
-                        <a:t>TPU</a:t>
-                      </a:r>
-                    </a:p>
-                  </a:txBody>
-                  <a:tcPr anchor="ctr" marL="91440" marT="18288" marB="18288">
+                  <a:tcPr anchor="ctr" marL="82296" marR="82296" marT="9144" marB="9144">
                     <a:solidFill>
                       <a:srgbClr val="FFFFFF"/>
                     </a:solidFill>
@@ -4456,19 +5007,19 @@
                     <a:bodyPr/>
                     <a:lstStyle/>
                     <a:p>
-                      <a:pPr algn="r"/>
+                      <a:pPr algn="l"/>
                       <a:r>
-                        <a:rPr sz="1300">
+                        <a:rPr sz="1250">
                           <a:solidFill>
-                            <a:srgbClr val="1A1A1A"/>
+                            <a:srgbClr val="15171A"/>
                           </a:solidFill>
                           <a:latin typeface="Helvetica Neue"/>
                         </a:rPr>
-                        <a:t>v5e 2×4 — 8 chips</a:t>
+                        <a:t>NVIDIA GH200 480 GB</a:t>
                       </a:r>
                     </a:p>
                   </a:txBody>
-                  <a:tcPr anchor="ctr" marL="91440" marT="18288" marB="18288">
+                  <a:tcPr anchor="ctr" marL="82296" marR="82296" marT="9144" marB="9144">
                     <a:solidFill>
                       <a:srgbClr val="FFFFFF"/>
                     </a:solidFill>
@@ -4479,19 +5030,19 @@
                     <a:bodyPr/>
                     <a:lstStyle/>
                     <a:p>
-                      <a:pPr algn="r"/>
+                      <a:pPr algn="l"/>
                       <a:r>
-                        <a:rPr sz="1300">
+                        <a:rPr sz="1250">
                           <a:solidFill>
-                            <a:srgbClr val="1A1A1A"/>
+                            <a:srgbClr val="15171A"/>
                           </a:solidFill>
                           <a:latin typeface="Helvetica Neue"/>
                         </a:rPr>
-                        <a:t>x86_64</a:t>
+                        <a:t>ARM64 Grace</a:t>
                       </a:r>
                     </a:p>
                   </a:txBody>
-                  <a:tcPr anchor="ctr" marL="91440" marT="18288" marB="18288">
+                  <a:tcPr anchor="ctr" marL="82296" marR="82296" marT="9144" marB="9144">
                     <a:solidFill>
                       <a:srgbClr val="FFFFFF"/>
                     </a:solidFill>
@@ -4502,11 +5053,105 @@
                     <a:bodyPr/>
                     <a:lstStyle/>
                     <a:p>
-                      <a:pPr algn="r"/>
+                      <a:pPr algn="l"/>
                       <a:r>
-                        <a:rPr sz="1300">
+                        <a:rPr sz="1250">
                           <a:solidFill>
-                            <a:srgbClr val="1A1A1A"/>
+                            <a:srgbClr val="15171A"/>
+                          </a:solidFill>
+                          <a:latin typeface="Helvetica Neue"/>
+                        </a:rPr>
+                        <a:t>public image + ConfigMap</a:t>
+                      </a:r>
+                    </a:p>
+                  </a:txBody>
+                  <a:tcPr anchor="ctr" marL="82296" marR="82296" marT="9144" marB="9144">
+                    <a:solidFill>
+                      <a:srgbClr val="FFFFFF"/>
+                    </a:solidFill>
+                  </a:tcPr>
+                </a:tc>
+              </a:tr>
+              <a:tr h="365760">
+                <a:tc>
+                  <a:txBody>
+                    <a:bodyPr/>
+                    <a:lstStyle/>
+                    <a:p>
+                      <a:pPr algn="l"/>
+                      <a:r>
+                        <a:rPr sz="1250">
+                          <a:solidFill>
+                            <a:srgbClr val="15171A"/>
+                          </a:solidFill>
+                          <a:latin typeface="Helvetica Neue"/>
+                        </a:rPr>
+                        <a:t>TPU</a:t>
+                      </a:r>
+                    </a:p>
+                  </a:txBody>
+                  <a:tcPr anchor="ctr" marL="82296" marR="82296" marT="9144" marB="9144">
+                    <a:solidFill>
+                      <a:srgbClr val="FFFFFF"/>
+                    </a:solidFill>
+                  </a:tcPr>
+                </a:tc>
+                <a:tc>
+                  <a:txBody>
+                    <a:bodyPr/>
+                    <a:lstStyle/>
+                    <a:p>
+                      <a:pPr algn="l"/>
+                      <a:r>
+                        <a:rPr sz="1250">
+                          <a:solidFill>
+                            <a:srgbClr val="15171A"/>
+                          </a:solidFill>
+                          <a:latin typeface="Helvetica Neue"/>
+                        </a:rPr>
+                        <a:t>v5e 2×4 — 8 chips</a:t>
+                      </a:r>
+                    </a:p>
+                  </a:txBody>
+                  <a:tcPr anchor="ctr" marL="82296" marR="82296" marT="9144" marB="9144">
+                    <a:solidFill>
+                      <a:srgbClr val="FFFFFF"/>
+                    </a:solidFill>
+                  </a:tcPr>
+                </a:tc>
+                <a:tc>
+                  <a:txBody>
+                    <a:bodyPr/>
+                    <a:lstStyle/>
+                    <a:p>
+                      <a:pPr algn="l"/>
+                      <a:r>
+                        <a:rPr sz="1250">
+                          <a:solidFill>
+                            <a:srgbClr val="15171A"/>
+                          </a:solidFill>
+                          <a:latin typeface="Helvetica Neue"/>
+                        </a:rPr>
+                        <a:t>x86_64</a:t>
+                      </a:r>
+                    </a:p>
+                  </a:txBody>
+                  <a:tcPr anchor="ctr" marL="82296" marR="82296" marT="9144" marB="9144">
+                    <a:solidFill>
+                      <a:srgbClr val="FFFFFF"/>
+                    </a:solidFill>
+                  </a:tcPr>
+                </a:tc>
+                <a:tc>
+                  <a:txBody>
+                    <a:bodyPr/>
+                    <a:lstStyle/>
+                    <a:p>
+                      <a:pPr algn="l"/>
+                      <a:r>
+                        <a:rPr sz="1250">
+                          <a:solidFill>
+                            <a:srgbClr val="15171A"/>
                           </a:solidFill>
                           <a:latin typeface="Helvetica Neue"/>
                         </a:rPr>
@@ -4514,7 +5159,7 @@
                       </a:r>
                     </a:p>
                   </a:txBody>
-                  <a:tcPr anchor="ctr" marL="91440" marT="18288" marB="18288">
+                  <a:tcPr anchor="ctr" marL="82296" marR="82296" marT="9144" marB="9144">
                     <a:solidFill>
                       <a:srgbClr val="FFFFFF"/>
                     </a:solidFill>
@@ -4525,6 +5170,45 @@
           </a:graphicData>
         </a:graphic>
       </p:graphicFrame>
+      <p:sp>
+        <p:nvSpPr>
+          <p:cNvPr id="16" name="TextBox 15"/>
+          <p:cNvSpPr txBox="1"/>
+          <p:nvPr/>
+        </p:nvSpPr>
+        <p:spPr>
+          <a:xfrm>
+            <a:off x="566928" y="5989320"/>
+            <a:ext cx="10972800" cy="548640"/>
+          </a:xfrm>
+          <a:prstGeom prst="rect">
+            <a:avLst/>
+          </a:prstGeom>
+          <a:noFill/>
+        </p:spPr>
+        <p:txBody>
+          <a:bodyPr wrap="square" anchor="t">
+            <a:spAutoFit/>
+          </a:bodyPr>
+          <a:lstStyle/>
+          <a:p>
+            <a:pPr algn="l">
+              <a:spcAft>
+                <a:spcPts val="500"/>
+              </a:spcAft>
+            </a:pPr>
+            <a:r>
+              <a:rPr sz="1300" b="0" i="1">
+                <a:solidFill>
+                  <a:srgbClr val="717A85"/>
+                </a:solidFill>
+                <a:latin typeface="Helvetica Neue"/>
+              </a:rPr>
+              <a:t>Note the middle row: the GH200's host is ARM64, not x86. That single fact cost us five separate blockers.</a:t>
+            </a:r>
+          </a:p>
+        </p:txBody>
+      </p:sp>
     </p:spTree>
   </p:cSld>
   <p:clrMapOvr>
@@ -4552,7 +5236,7 @@
         <p:spPr>
           <a:xfrm>
             <a:off x="0" y="0"/>
-            <a:ext cx="12191695" cy="118872"/>
+            <a:ext cx="146304" cy="6858000"/>
           </a:xfrm>
           <a:prstGeom prst="rect">
             <a:avLst/>
@@ -4595,8 +5279,8 @@
         </p:nvSpPr>
         <p:spPr>
           <a:xfrm>
-            <a:off x="548640" y="320040"/>
-            <a:ext cx="914400" cy="548640"/>
+            <a:off x="10881360" y="45720"/>
+            <a:ext cx="1188720" cy="1371600"/>
           </a:xfrm>
           <a:prstGeom prst="rect">
             <a:avLst/>
@@ -4604,20 +5288,16 @@
           <a:noFill/>
         </p:spPr>
         <p:txBody>
-          <a:bodyPr wrap="square" anchor="t">
+          <a:bodyPr wrap="none">
             <a:spAutoFit/>
           </a:bodyPr>
           <a:lstStyle/>
           <a:p>
-            <a:pPr algn="l">
-              <a:spcAft>
-                <a:spcPts val="600"/>
-              </a:spcAft>
-            </a:pPr>
-            <a:r>
-              <a:rPr sz="4000" b="1">
-                <a:solidFill>
-                  <a:srgbClr val="E8590C"/>
+            <a:pPr algn="r"/>
+            <a:r>
+              <a:rPr sz="7200" b="1">
+                <a:solidFill>
+                  <a:srgbClr val="E6E9EC"/>
                 </a:solidFill>
                 <a:latin typeface="Helvetica Neue"/>
               </a:rPr>
@@ -4634,8 +5314,8 @@
         </p:nvSpPr>
         <p:spPr>
           <a:xfrm>
-            <a:off x="1234440" y="384048"/>
-            <a:ext cx="10424160" cy="731520"/>
+            <a:off x="566928" y="365760"/>
+            <a:ext cx="9601200" cy="274320"/>
           </a:xfrm>
           <a:prstGeom prst="rect">
             <a:avLst/>
@@ -4650,17 +5330,17 @@
           <a:p>
             <a:pPr algn="l">
               <a:spcAft>
-                <a:spcPts val="600"/>
-              </a:spcAft>
-            </a:pPr>
-            <a:r>
-              <a:rPr sz="3000" b="1">
-                <a:solidFill>
-                  <a:srgbClr val="1A1A1A"/>
-                </a:solidFill>
-                <a:latin typeface="Helvetica Neue"/>
-              </a:rPr>
-              <a:t>How we measured</a:t>
+                <a:spcPts val="500"/>
+              </a:spcAft>
+            </a:pPr>
+            <a:r>
+              <a:rPr sz="1200" b="1" i="0">
+                <a:solidFill>
+                  <a:srgbClr val="E8590C"/>
+                </a:solidFill>
+                <a:latin typeface="Helvetica Neue"/>
+              </a:rPr>
+              <a:t>MEASUREMENTS</a:t>
             </a:r>
           </a:p>
         </p:txBody>
@@ -4673,8 +5353,8 @@
         </p:nvSpPr>
         <p:spPr>
           <a:xfrm>
-            <a:off x="1234440" y="1024128"/>
-            <a:ext cx="10424160" cy="457200"/>
+            <a:off x="566928" y="658368"/>
+            <a:ext cx="10058400" cy="822960"/>
           </a:xfrm>
           <a:prstGeom prst="rect">
             <a:avLst/>
@@ -4689,17 +5369,17 @@
           <a:p>
             <a:pPr algn="l">
               <a:spcAft>
-                <a:spcPts val="600"/>
-              </a:spcAft>
-            </a:pPr>
-            <a:r>
-              <a:rPr sz="1500" b="0">
-                <a:solidFill>
-                  <a:srgbClr val="6B7280"/>
-                </a:solidFill>
-                <a:latin typeface="Helvetica Neue"/>
-              </a:rPr>
-              <a:t>Every number below is emitted by the run itself, against a fixed schema</a:t>
+                <a:spcPts val="500"/>
+              </a:spcAft>
+            </a:pPr>
+            <a:r>
+              <a:rPr sz="3200" b="1" i="0">
+                <a:solidFill>
+                  <a:srgbClr val="15171A"/>
+                </a:solidFill>
+                <a:latin typeface="Helvetica Neue"/>
+              </a:rPr>
+              <a:t>We did not time the job. We took it apart.</a:t>
             </a:r>
           </a:p>
         </p:txBody>
@@ -4712,8 +5392,8 @@
         </p:nvSpPr>
         <p:spPr>
           <a:xfrm>
-            <a:off x="548640" y="1645920"/>
-            <a:ext cx="5120640" cy="3108960"/>
+            <a:off x="566928" y="1783080"/>
+            <a:ext cx="4846320" cy="2377440"/>
           </a:xfrm>
           <a:prstGeom prst="rect">
             <a:avLst/>
@@ -4728,61 +5408,77 @@
           <a:p>
             <a:pPr algn="l">
               <a:spcAft>
-                <a:spcPts val="600"/>
-              </a:spcAft>
-            </a:pPr>
-            <a:r>
-              <a:rPr sz="1400" b="0">
-                <a:solidFill>
-                  <a:srgbClr val="1A1A1A"/>
-                </a:solidFill>
-                <a:latin typeface="Helvetica Neue"/>
-              </a:rPr>
-              <a:t>Wall-clock decomposition, six phases</a:t>
-            </a:r>
-          </a:p>
-          <a:p>
-            <a:pPr algn="l">
-              <a:spcAft>
-                <a:spcPts val="600"/>
-              </a:spcAft>
-            </a:pPr>
-            <a:r>
-              <a:rPr sz="1400" b="0">
-                <a:solidFill>
-                  <a:srgbClr val="1A1A1A"/>
-                </a:solidFill>
-                <a:latin typeface="Helvetica Neue"/>
-              </a:rPr>
-              <a:t>scheduling · image pull · checkpoint load ·</a:t>
-            </a:r>
-          </a:p>
-          <a:p>
-            <a:pPr algn="l">
-              <a:spcAft>
-                <a:spcPts val="600"/>
-              </a:spcAft>
-            </a:pPr>
-            <a:r>
-              <a:rPr sz="1400" b="0">
-                <a:solidFill>
-                  <a:srgbClr val="1A1A1A"/>
-                </a:solidFill>
-                <a:latin typeface="Helvetica Neue"/>
-              </a:rPr>
-              <a:t>XLA compile · steady-state steps · checkpoint write</a:t>
-            </a:r>
-          </a:p>
-          <a:p>
-            <a:pPr algn="l">
-              <a:spcAft>
-                <a:spcPts val="600"/>
-              </a:spcAft>
-            </a:pPr>
-            <a:r>
-              <a:rPr sz="1400" b="0">
-                <a:solidFill>
-                  <a:srgbClr val="1A1A1A"/>
+                <a:spcPts val="300"/>
+              </a:spcAft>
+            </a:pPr>
+            <a:r>
+              <a:rPr sz="1300" b="0" i="0">
+                <a:solidFill>
+                  <a:srgbClr val="15171A"/>
+                </a:solidFill>
+                <a:latin typeface="Helvetica Neue"/>
+              </a:rPr>
+              <a:t>Every run takes its own wall clock apart</a:t>
+            </a:r>
+          </a:p>
+          <a:p>
+            <a:pPr algn="l">
+              <a:spcAft>
+                <a:spcPts val="300"/>
+              </a:spcAft>
+            </a:pPr>
+            <a:r>
+              <a:rPr sz="1300" b="0" i="0">
+                <a:solidFill>
+                  <a:srgbClr val="15171A"/>
+                </a:solidFill>
+                <a:latin typeface="Helvetica Neue"/>
+              </a:rPr>
+              <a:t>into six phases — scheduling, image pull,</a:t>
+            </a:r>
+          </a:p>
+          <a:p>
+            <a:pPr algn="l">
+              <a:spcAft>
+                <a:spcPts val="300"/>
+              </a:spcAft>
+            </a:pPr>
+            <a:r>
+              <a:rPr sz="1300" b="0" i="0">
+                <a:solidFill>
+                  <a:srgbClr val="15171A"/>
+                </a:solidFill>
+                <a:latin typeface="Helvetica Neue"/>
+              </a:rPr>
+              <a:t>checkpoint load, XLA compile, the steady-</a:t>
+            </a:r>
+          </a:p>
+          <a:p>
+            <a:pPr algn="l">
+              <a:spcAft>
+                <a:spcPts val="300"/>
+              </a:spcAft>
+            </a:pPr>
+            <a:r>
+              <a:rPr sz="1300" b="0" i="0">
+                <a:solidFill>
+                  <a:srgbClr val="15171A"/>
+                </a:solidFill>
+                <a:latin typeface="Helvetica Neue"/>
+              </a:rPr>
+              <a:t>state steps, checkpoint write.</a:t>
+            </a:r>
+          </a:p>
+          <a:p>
+            <a:pPr algn="l">
+              <a:spcAft>
+                <a:spcPts val="300"/>
+              </a:spcAft>
+            </a:pPr>
+            <a:r>
+              <a:rPr sz="1300" b="0" i="0">
+                <a:solidFill>
+                  <a:srgbClr val="15171A"/>
                 </a:solidFill>
                 <a:latin typeface="Helvetica Neue"/>
               </a:rPr>
@@ -4792,77 +5488,77 @@
           <a:p>
             <a:pPr algn="l">
               <a:spcAft>
-                <a:spcPts val="600"/>
-              </a:spcAft>
-            </a:pPr>
-            <a:r>
-              <a:rPr sz="1400" b="0">
-                <a:solidFill>
-                  <a:srgbClr val="1A1A1A"/>
-                </a:solidFill>
-                <a:latin typeface="Helvetica Neue"/>
-              </a:rPr>
-              <a:t>Sweeps</a:t>
-            </a:r>
-          </a:p>
-          <a:p>
-            <a:pPr algn="l">
-              <a:spcAft>
-                <a:spcPts val="600"/>
-              </a:spcAft>
-            </a:pPr>
-            <a:r>
-              <a:rPr sz="1400" b="0">
-                <a:solidFill>
-                  <a:srgbClr val="1A1A1A"/>
-                </a:solidFill>
-                <a:latin typeface="Helvetica Neue"/>
-              </a:rPr>
-              <a:t>batch 1→32 and sequence 512→2048, walked into OOM.</a:t>
-            </a:r>
-          </a:p>
-          <a:p>
-            <a:pPr algn="l">
-              <a:spcAft>
-                <a:spcPts val="600"/>
-              </a:spcAft>
-            </a:pPr>
-            <a:r>
-              <a:rPr sz="1400" b="0">
-                <a:solidFill>
-                  <a:srgbClr val="1A1A1A"/>
-                </a:solidFill>
-                <a:latin typeface="Helvetica Neue"/>
-              </a:rPr>
-              <a:t>A failed cell is recorded, not dropped — the boundary</a:t>
-            </a:r>
-          </a:p>
-          <a:p>
-            <a:pPr algn="l">
-              <a:spcAft>
-                <a:spcPts val="600"/>
-              </a:spcAft>
-            </a:pPr>
-            <a:r>
-              <a:rPr sz="1400" b="0">
-                <a:solidFill>
-                  <a:srgbClr val="1A1A1A"/>
-                </a:solidFill>
-                <a:latin typeface="Helvetica Neue"/>
-              </a:rPr>
-              <a:t>is the chart.</a:t>
-            </a:r>
-          </a:p>
-          <a:p>
-            <a:pPr algn="l">
-              <a:spcAft>
-                <a:spcPts val="600"/>
-              </a:spcAft>
-            </a:pPr>
-            <a:r>
-              <a:rPr sz="1400" b="0">
-                <a:solidFill>
-                  <a:srgbClr val="1A1A1A"/>
+                <a:spcPts val="300"/>
+              </a:spcAft>
+            </a:pPr>
+            <a:r>
+              <a:rPr sz="1300" b="0" i="0">
+                <a:solidFill>
+                  <a:srgbClr val="15171A"/>
+                </a:solidFill>
+                <a:latin typeface="Helvetica Neue"/>
+              </a:rPr>
+              <a:t>Batch and sequence sweeps walked until</a:t>
+            </a:r>
+          </a:p>
+          <a:p>
+            <a:pPr algn="l">
+              <a:spcAft>
+                <a:spcPts val="300"/>
+              </a:spcAft>
+            </a:pPr>
+            <a:r>
+              <a:rPr sz="1300" b="0" i="0">
+                <a:solidFill>
+                  <a:srgbClr val="15171A"/>
+                </a:solidFill>
+                <a:latin typeface="Helvetica Neue"/>
+              </a:rPr>
+              <a:t>the job dies. A failed cell is recorded,</a:t>
+            </a:r>
+          </a:p>
+          <a:p>
+            <a:pPr algn="l">
+              <a:spcAft>
+                <a:spcPts val="300"/>
+              </a:spcAft>
+            </a:pPr>
+            <a:r>
+              <a:rPr sz="1300" b="0" i="0">
+                <a:solidFill>
+                  <a:srgbClr val="15171A"/>
+                </a:solidFill>
+                <a:latin typeface="Helvetica Neue"/>
+              </a:rPr>
+              <a:t>never dropped — the boundary is the</a:t>
+            </a:r>
+          </a:p>
+          <a:p>
+            <a:pPr algn="l">
+              <a:spcAft>
+                <a:spcPts val="300"/>
+              </a:spcAft>
+            </a:pPr>
+            <a:r>
+              <a:rPr sz="1300" b="0" i="0">
+                <a:solidFill>
+                  <a:srgbClr val="15171A"/>
+                </a:solidFill>
+                <a:latin typeface="Helvetica Neue"/>
+              </a:rPr>
+              <a:t>measurement.</a:t>
+            </a:r>
+          </a:p>
+          <a:p>
+            <a:pPr algn="l">
+              <a:spcAft>
+                <a:spcPts val="300"/>
+              </a:spcAft>
+            </a:pPr>
+            <a:r>
+              <a:rPr sz="1300" b="0" i="0">
+                <a:solidFill>
+                  <a:srgbClr val="15171A"/>
                 </a:solidFill>
                 <a:latin typeface="Helvetica Neue"/>
               </a:rPr>
@@ -4872,56 +5568,40 @@
           <a:p>
             <a:pPr algn="l">
               <a:spcAft>
-                <a:spcPts val="600"/>
-              </a:spcAft>
-            </a:pPr>
-            <a:r>
-              <a:rPr sz="1400" b="0">
-                <a:solidFill>
-                  <a:srgbClr val="1A1A1A"/>
-                </a:solidFill>
-                <a:latin typeface="Helvetica Neue"/>
-              </a:rPr>
-              <a:t>Contract</a:t>
-            </a:r>
-          </a:p>
-          <a:p>
-            <a:pPr algn="l">
-              <a:spcAft>
-                <a:spcPts val="600"/>
-              </a:spcAft>
-            </a:pPr>
-            <a:r>
-              <a:rPr sz="1400" b="0">
-                <a:solidFill>
-                  <a:srgbClr val="1A1A1A"/>
-                </a:solidFill>
-                <a:latin typeface="Helvetica Neue"/>
-              </a:rPr>
-              <a:t>docs/metrics-contract.md. One JSON per run.</a:t>
-            </a:r>
-          </a:p>
-          <a:p>
-            <a:pPr algn="l">
-              <a:spcAft>
-                <a:spcPts val="600"/>
-              </a:spcAft>
-            </a:pPr>
-            <a:r>
-              <a:rPr sz="1400" b="0">
-                <a:solidFill>
-                  <a:srgbClr val="1A1A1A"/>
-                </a:solidFill>
-                <a:latin typeface="Helvetica Neue"/>
-              </a:rPr>
-              <a:t>Charts read results/ and nothing else.</a:t>
+                <a:spcPts val="300"/>
+              </a:spcAft>
+            </a:pPr>
+            <a:r>
+              <a:rPr sz="1300" b="0" i="0">
+                <a:solidFill>
+                  <a:srgbClr val="15171A"/>
+                </a:solidFill>
+                <a:latin typeface="Helvetica Neue"/>
+              </a:rPr>
+              <a:t>One schema, one JSON per run. Every figure</a:t>
+            </a:r>
+          </a:p>
+          <a:p>
+            <a:pPr algn="l">
+              <a:spcAft>
+                <a:spcPts val="300"/>
+              </a:spcAft>
+            </a:pPr>
+            <a:r>
+              <a:rPr sz="1300" b="0" i="0">
+                <a:solidFill>
+                  <a:srgbClr val="15171A"/>
+                </a:solidFill>
+                <a:latin typeface="Helvetica Neue"/>
+              </a:rPr>
+              <a:t>here reads those files and nothing else.</a:t>
             </a:r>
           </a:p>
         </p:txBody>
       </p:sp>
       <p:pic>
         <p:nvPicPr>
-          <p:cNvPr id="7" name="Picture 6" descr="panel-walltime.png"/>
+          <p:cNvPr id="7" name="Picture 6" descr="slide3-walltime.png"/>
           <p:cNvPicPr>
             <a:picLocks noChangeAspect="1"/>
           </p:cNvPicPr>
@@ -4935,8 +5615,8 @@
         </p:blipFill>
         <p:spPr>
           <a:xfrm>
-            <a:off x="5943600" y="1600200"/>
-            <a:ext cx="5760720" cy="2552813"/>
+            <a:off x="5852160" y="1828800"/>
+            <a:ext cx="5760720" cy="1228350"/>
           </a:xfrm>
           <a:prstGeom prst="rect">
             <a:avLst/>
@@ -4945,14 +5625,62 @@
       </p:pic>
       <p:sp>
         <p:nvSpPr>
-          <p:cNvPr id="8" name="TextBox 7"/>
+          <p:cNvPr id="8" name="Rounded Rectangle 7"/>
+          <p:cNvSpPr/>
+          <p:nvPr/>
+        </p:nvSpPr>
+        <p:spPr>
+          <a:xfrm>
+            <a:off x="5852160" y="3520440"/>
+            <a:ext cx="5760720" cy="2148840"/>
+          </a:xfrm>
+          <a:prstGeom prst="roundRect">
+            <a:avLst>
+              <a:gd name="adj" fmla="val 4000"/>
+            </a:avLst>
+          </a:prstGeom>
+          <a:solidFill>
+            <a:srgbClr val="FEF2F2"/>
+          </a:solidFill>
+          <a:ln w="9525">
+            <a:solidFill>
+              <a:srgbClr val="E6E9EC"/>
+            </a:solidFill>
+          </a:ln>
+          <a:effectLst/>
+        </p:spPr>
+        <p:style>
+          <a:lnRef idx="1">
+            <a:schemeClr val="accent1"/>
+          </a:lnRef>
+          <a:fillRef idx="3">
+            <a:schemeClr val="accent1"/>
+          </a:fillRef>
+          <a:effectRef idx="2">
+            <a:schemeClr val="accent1"/>
+          </a:effectRef>
+          <a:fontRef idx="minor">
+            <a:schemeClr val="lt1"/>
+          </a:fontRef>
+        </p:style>
+        <p:txBody>
+          <a:bodyPr rtlCol="0" anchor="ctr"/>
+          <a:lstStyle/>
+          <a:p>
+            <a:pPr algn="ctr"/>
+          </a:p>
+        </p:txBody>
+      </p:sp>
+      <p:sp>
+        <p:nvSpPr>
+          <p:cNvPr id="9" name="TextBox 8"/>
           <p:cNvSpPr txBox="1"/>
           <p:nvPr/>
         </p:nvSpPr>
         <p:spPr>
           <a:xfrm>
-            <a:off x="548640" y="5074920"/>
-            <a:ext cx="5120640" cy="1371600"/>
+            <a:off x="6144768" y="3730752"/>
+            <a:ext cx="5212080" cy="320040"/>
           </a:xfrm>
           <a:prstGeom prst="rect">
             <a:avLst/>
@@ -4967,31 +5695,31 @@
           <a:p>
             <a:pPr algn="l">
               <a:spcAft>
-                <a:spcPts val="600"/>
-              </a:spcAft>
-            </a:pPr>
-            <a:r>
-              <a:rPr sz="1400" b="1">
-                <a:solidFill>
-                  <a:srgbClr val="E8590C"/>
-                </a:solidFill>
-                <a:latin typeface="Helvetica Neue"/>
-              </a:rPr>
-              <a:t>The schema caught a bad measurement</a:t>
-            </a:r>
-          </a:p>
-        </p:txBody>
-      </p:sp>
-      <p:sp>
-        <p:nvSpPr>
-          <p:cNvPr id="9" name="TextBox 8"/>
+                <a:spcPts val="500"/>
+              </a:spcAft>
+            </a:pPr>
+            <a:r>
+              <a:rPr sz="1500" b="1" i="0">
+                <a:solidFill>
+                  <a:srgbClr val="DC2626"/>
+                </a:solidFill>
+                <a:latin typeface="Helvetica Neue"/>
+              </a:rPr>
+              <a:t>The schema caught a lie</a:t>
+            </a:r>
+          </a:p>
+        </p:txBody>
+      </p:sp>
+      <p:sp>
+        <p:nvSpPr>
+          <p:cNvPr id="10" name="TextBox 9"/>
           <p:cNvSpPr txBox="1"/>
           <p:nvPr/>
         </p:nvSpPr>
         <p:spPr>
           <a:xfrm>
-            <a:off x="548640" y="5394960"/>
-            <a:ext cx="5120640" cy="1188720"/>
+            <a:off x="6144768" y="4114800"/>
+            <a:ext cx="5212080" cy="1463040"/>
           </a:xfrm>
           <a:prstGeom prst="rect">
             <a:avLst/>
@@ -5006,49 +5734,65 @@
           <a:p>
             <a:pPr algn="l">
               <a:spcAft>
-                <a:spcPts val="600"/>
-              </a:spcAft>
-            </a:pPr>
-            <a:r>
-              <a:rPr sz="1200" b="0">
-                <a:solidFill>
-                  <a:srgbClr val="6B7280"/>
-                </a:solidFill>
-                <a:latin typeface="Helvetica Neue"/>
-              </a:rPr>
-              <a:t>One run reported 93 µs per step and 11 M tokens/s — impossible.</a:t>
-            </a:r>
-          </a:p>
-          <a:p>
-            <a:pPr algn="l">
-              <a:spcAft>
-                <a:spcPts val="600"/>
-              </a:spcAft>
-            </a:pPr>
-            <a:r>
-              <a:rPr sz="1200" b="0">
-                <a:solidFill>
-                  <a:srgbClr val="6B7280"/>
-                </a:solidFill>
-                <a:latin typeface="Helvetica Neue"/>
-              </a:rPr>
-              <a:t>It carried status "ok", but telemetry.py had flagged in notes that it</a:t>
-            </a:r>
-          </a:p>
-          <a:p>
-            <a:pPr algn="l">
-              <a:spcAft>
-                <a:spcPts val="600"/>
-              </a:spcAft>
-            </a:pPr>
-            <a:r>
-              <a:rPr sz="1200" b="0">
-                <a:solidFill>
-                  <a:srgbClr val="6B7280"/>
-                </a:solidFill>
-                <a:latin typeface="Helvetica Neue"/>
-              </a:rPr>
-              <a:t>may have timed dispatch, not completion. Discarded and repeated.</a:t>
+                <a:spcPts val="200"/>
+              </a:spcAft>
+            </a:pPr>
+            <a:r>
+              <a:rPr sz="1200" b="0" i="0">
+                <a:solidFill>
+                  <a:srgbClr val="15171A"/>
+                </a:solidFill>
+                <a:latin typeface="Helvetica Neue"/>
+              </a:rPr>
+              <a:t>One run reported 93 µs per step and 11 M tokens/s.</a:t>
+            </a:r>
+          </a:p>
+          <a:p>
+            <a:pPr algn="l">
+              <a:spcAft>
+                <a:spcPts val="200"/>
+              </a:spcAft>
+            </a:pPr>
+            <a:r>
+              <a:rPr sz="1200" b="0" i="0">
+                <a:solidFill>
+                  <a:srgbClr val="15171A"/>
+                </a:solidFill>
+                <a:latin typeface="Helvetica Neue"/>
+              </a:rPr>
+              <a:t>Impossible — yet it carried status "ok".</a:t>
+            </a:r>
+          </a:p>
+          <a:p>
+            <a:pPr algn="l">
+              <a:spcAft>
+                <a:spcPts val="200"/>
+              </a:spcAft>
+            </a:pPr>
+            <a:r>
+              <a:rPr sz="1200" b="0" i="0">
+                <a:solidFill>
+                  <a:srgbClr val="15171A"/>
+                </a:solidFill>
+                <a:latin typeface="Helvetica Neue"/>
+              </a:rPr>
+              <a:t>Its own notes flagged that it may have timed</a:t>
+            </a:r>
+          </a:p>
+          <a:p>
+            <a:pPr algn="l">
+              <a:spcAft>
+                <a:spcPts val="200"/>
+              </a:spcAft>
+            </a:pPr>
+            <a:r>
+              <a:rPr sz="1200" b="0" i="0">
+                <a:solidFill>
+                  <a:srgbClr val="15171A"/>
+                </a:solidFill>
+                <a:latin typeface="Helvetica Neue"/>
+              </a:rPr>
+              <a:t>dispatch, not completion. Discarded, repeated.</a:t>
             </a:r>
           </a:p>
         </p:txBody>
@@ -5080,7 +5824,7 @@
         <p:spPr>
           <a:xfrm>
             <a:off x="0" y="0"/>
-            <a:ext cx="12191695" cy="118872"/>
+            <a:ext cx="146304" cy="6858000"/>
           </a:xfrm>
           <a:prstGeom prst="rect">
             <a:avLst/>
@@ -5123,8 +5867,8 @@
         </p:nvSpPr>
         <p:spPr>
           <a:xfrm>
-            <a:off x="548640" y="320040"/>
-            <a:ext cx="914400" cy="548640"/>
+            <a:off x="10881360" y="45720"/>
+            <a:ext cx="1188720" cy="1371600"/>
           </a:xfrm>
           <a:prstGeom prst="rect">
             <a:avLst/>
@@ -5132,20 +5876,16 @@
           <a:noFill/>
         </p:spPr>
         <p:txBody>
-          <a:bodyPr wrap="square" anchor="t">
+          <a:bodyPr wrap="none">
             <a:spAutoFit/>
           </a:bodyPr>
           <a:lstStyle/>
           <a:p>
-            <a:pPr algn="l">
-              <a:spcAft>
-                <a:spcPts val="600"/>
-              </a:spcAft>
-            </a:pPr>
-            <a:r>
-              <a:rPr sz="4000" b="1">
-                <a:solidFill>
-                  <a:srgbClr val="E8590C"/>
+            <a:pPr algn="r"/>
+            <a:r>
+              <a:rPr sz="7200" b="1">
+                <a:solidFill>
+                  <a:srgbClr val="E6E9EC"/>
                 </a:solidFill>
                 <a:latin typeface="Helvetica Neue"/>
               </a:rPr>
@@ -5162,8 +5902,8 @@
         </p:nvSpPr>
         <p:spPr>
           <a:xfrm>
-            <a:off x="1234440" y="384048"/>
-            <a:ext cx="10424160" cy="731520"/>
+            <a:off x="566928" y="365760"/>
+            <a:ext cx="9601200" cy="274320"/>
           </a:xfrm>
           <a:prstGeom prst="rect">
             <a:avLst/>
@@ -5178,17 +5918,17 @@
           <a:p>
             <a:pPr algn="l">
               <a:spcAft>
-                <a:spcPts val="600"/>
-              </a:spcAft>
-            </a:pPr>
-            <a:r>
-              <a:rPr sz="3000" b="1">
-                <a:solidFill>
-                  <a:srgbClr val="1A1A1A"/>
-                </a:solidFill>
-                <a:latin typeface="Helvetica Neue"/>
-              </a:rPr>
-              <a:t>Results</a:t>
+                <a:spcPts val="500"/>
+              </a:spcAft>
+            </a:pPr>
+            <a:r>
+              <a:rPr sz="1200" b="1" i="0">
+                <a:solidFill>
+                  <a:srgbClr val="E8590C"/>
+                </a:solidFill>
+                <a:latin typeface="Helvetica Neue"/>
+              </a:rPr>
+              <a:t>RESULTS</a:t>
             </a:r>
           </a:p>
         </p:txBody>
@@ -5201,8 +5941,8 @@
         </p:nvSpPr>
         <p:spPr>
           <a:xfrm>
-            <a:off x="1234440" y="1024128"/>
-            <a:ext cx="10424160" cy="457200"/>
+            <a:off x="566928" y="658368"/>
+            <a:ext cx="10058400" cy="822960"/>
           </a:xfrm>
           <a:prstGeom prst="rect">
             <a:avLst/>
@@ -5217,17 +5957,17 @@
           <a:p>
             <a:pPr algn="l">
               <a:spcAft>
-                <a:spcPts val="600"/>
-              </a:spcAft>
-            </a:pPr>
-            <a:r>
-              <a:rPr sz="1500" b="0">
-                <a:solidFill>
-                  <a:srgbClr val="6B7280"/>
-                </a:solidFill>
-                <a:latin typeface="Helvetica Neue"/>
-              </a:rPr>
-              <a:t>Qwen3-0.6B · batch 1 · sequence 1024 · bfloat16 — identical script, identical flags</a:t>
+                <a:spcPts val="500"/>
+              </a:spcAft>
+            </a:pPr>
+            <a:r>
+              <a:rPr sz="3200" b="1" i="0">
+                <a:solidFill>
+                  <a:srgbClr val="15171A"/>
+                </a:solidFill>
+                <a:latin typeface="Helvetica Neue"/>
+              </a:rPr>
+              <a:t>One Hopper chip kept up with eight TPU chips.</a:t>
             </a:r>
           </a:p>
         </p:txBody>
@@ -5241,8 +5981,8 @@
           <p:nvPr/>
         </p:nvGraphicFramePr>
         <p:xfrm>
-          <a:off x="548640" y="1600200"/>
-          <a:ext cx="7315200" cy="2779776"/>
+          <a:off x="566928" y="1664208"/>
+          <a:ext cx="6629400" cy="2112264"/>
         </p:xfrm>
         <a:graphic>
           <a:graphicData uri="http://schemas.openxmlformats.org/drawingml/2006/table">
@@ -5251,1586 +5991,12 @@
                 <a:tableStyleId>{5C22544A-7EE6-4342-B048-85BDC9FD1C3A}</a:tableStyleId>
               </a:tblPr>
               <a:tblGrid>
-                <a:gridCol w="2103120"/>
-                <a:gridCol w="1737360"/>
-                <a:gridCol w="1737360"/>
-                <a:gridCol w="1737360"/>
+                <a:gridCol w="2377440"/>
+                <a:gridCol w="1325880"/>
+                <a:gridCol w="1463040"/>
+                <a:gridCol w="1463040"/>
               </a:tblGrid>
-              <a:tr h="347472">
-                <a:tc>
-                  <a:txBody>
-                    <a:bodyPr/>
-                    <a:lstStyle/>
-                    <a:p>
-                      <a:pPr algn="l"/>
-                      <a:r>
-                        <a:rPr sz="1300" b="1">
-                          <a:solidFill>
-                            <a:srgbClr val="FFFFFF"/>
-                          </a:solidFill>
-                          <a:latin typeface="Helvetica Neue"/>
-                        </a:rPr>
-                        <a:t/>
-                      </a:r>
-                    </a:p>
-                  </a:txBody>
-                  <a:tcPr anchor="ctr" marL="91440" marT="18288" marB="18288">
-                    <a:solidFill>
-                      <a:srgbClr val="E8590C"/>
-                    </a:solidFill>
-                  </a:tcPr>
-                </a:tc>
-                <a:tc>
-                  <a:txBody>
-                    <a:bodyPr/>
-                    <a:lstStyle/>
-                    <a:p>
-                      <a:pPr algn="r"/>
-                      <a:r>
-                        <a:rPr sz="1300" b="1">
-                          <a:solidFill>
-                            <a:srgbClr val="FFFFFF"/>
-                          </a:solidFill>
-                          <a:latin typeface="Helvetica Neue"/>
-                        </a:rPr>
-                        <a:t>CPU 32-core</a:t>
-                      </a:r>
-                    </a:p>
-                  </a:txBody>
-                  <a:tcPr anchor="ctr" marL="91440" marT="18288" marB="18288">
-                    <a:solidFill>
-                      <a:srgbClr val="E8590C"/>
-                    </a:solidFill>
-                  </a:tcPr>
-                </a:tc>
-                <a:tc>
-                  <a:txBody>
-                    <a:bodyPr/>
-                    <a:lstStyle/>
-                    <a:p>
-                      <a:pPr algn="r"/>
-                      <a:r>
-                        <a:rPr sz="1300" b="1">
-                          <a:solidFill>
-                            <a:srgbClr val="FFFFFF"/>
-                          </a:solidFill>
-                          <a:latin typeface="Helvetica Neue"/>
-                        </a:rPr>
-                        <a:t>GPU GH200</a:t>
-                      </a:r>
-                    </a:p>
-                  </a:txBody>
-                  <a:tcPr anchor="ctr" marL="91440" marT="18288" marB="18288">
-                    <a:solidFill>
-                      <a:srgbClr val="E8590C"/>
-                    </a:solidFill>
-                  </a:tcPr>
-                </a:tc>
-                <a:tc>
-                  <a:txBody>
-                    <a:bodyPr/>
-                    <a:lstStyle/>
-                    <a:p>
-                      <a:pPr algn="r"/>
-                      <a:r>
-                        <a:rPr sz="1300" b="1">
-                          <a:solidFill>
-                            <a:srgbClr val="FFFFFF"/>
-                          </a:solidFill>
-                          <a:latin typeface="Helvetica Neue"/>
-                        </a:rPr>
-                        <a:t>TPU v5e 2×4</a:t>
-                      </a:r>
-                    </a:p>
-                  </a:txBody>
-                  <a:tcPr anchor="ctr" marL="91440" marT="18288" marB="18288">
-                    <a:solidFill>
-                      <a:srgbClr val="E8590C"/>
-                    </a:solidFill>
-                  </a:tcPr>
-                </a:tc>
-              </a:tr>
-              <a:tr h="347472">
-                <a:tc>
-                  <a:txBody>
-                    <a:bodyPr/>
-                    <a:lstStyle/>
-                    <a:p>
-                      <a:pPr algn="l"/>
-                      <a:r>
-                        <a:rPr sz="1300">
-                          <a:solidFill>
-                            <a:srgbClr val="1A1A1A"/>
-                          </a:solidFill>
-                          <a:latin typeface="Helvetica Neue"/>
-                        </a:rPr>
-                        <a:t/>
-                      </a:r>
-                    </a:p>
-                  </a:txBody>
-                  <a:tcPr anchor="ctr" marL="91440" marT="18288" marB="18288">
-                    <a:solidFill>
-                      <a:srgbClr val="FFFFFF"/>
-                    </a:solidFill>
-                  </a:tcPr>
-                </a:tc>
-                <a:tc>
-                  <a:txBody>
-                    <a:bodyPr/>
-                    <a:lstStyle/>
-                    <a:p>
-                      <a:pPr algn="r"/>
-                      <a:r>
-                        <a:rPr sz="1300">
-                          <a:solidFill>
-                            <a:srgbClr val="1A1A1A"/>
-                          </a:solidFill>
-                          <a:latin typeface="Helvetica Neue"/>
-                        </a:rPr>
-                        <a:t/>
-                      </a:r>
-                    </a:p>
-                  </a:txBody>
-                  <a:tcPr anchor="ctr" marL="91440" marT="18288" marB="18288">
-                    <a:solidFill>
-                      <a:srgbClr val="FFFFFF"/>
-                    </a:solidFill>
-                  </a:tcPr>
-                </a:tc>
-                <a:tc>
-                  <a:txBody>
-                    <a:bodyPr/>
-                    <a:lstStyle/>
-                    <a:p>
-                      <a:pPr algn="r"/>
-                      <a:r>
-                        <a:rPr sz="1300">
-                          <a:solidFill>
-                            <a:srgbClr val="1A1A1A"/>
-                          </a:solidFill>
-                          <a:latin typeface="Helvetica Neue"/>
-                        </a:rPr>
-                        <a:t>1 chip</a:t>
-                      </a:r>
-                    </a:p>
-                  </a:txBody>
-                  <a:tcPr anchor="ctr" marL="91440" marT="18288" marB="18288">
-                    <a:solidFill>
-                      <a:srgbClr val="FFFFFF"/>
-                    </a:solidFill>
-                  </a:tcPr>
-                </a:tc>
-                <a:tc>
-                  <a:txBody>
-                    <a:bodyPr/>
-                    <a:lstStyle/>
-                    <a:p>
-                      <a:pPr algn="r"/>
-                      <a:r>
-                        <a:rPr sz="1300">
-                          <a:solidFill>
-                            <a:srgbClr val="1A1A1A"/>
-                          </a:solidFill>
-                          <a:latin typeface="Helvetica Neue"/>
-                        </a:rPr>
-                        <a:t>8 chips</a:t>
-                      </a:r>
-                    </a:p>
-                  </a:txBody>
-                  <a:tcPr anchor="ctr" marL="91440" marT="18288" marB="18288">
-                    <a:solidFill>
-                      <a:srgbClr val="FFFFFF"/>
-                    </a:solidFill>
-                  </a:tcPr>
-                </a:tc>
-              </a:tr>
-              <a:tr h="347472">
-                <a:tc>
-                  <a:txBody>
-                    <a:bodyPr/>
-                    <a:lstStyle/>
-                    <a:p>
-                      <a:pPr algn="l"/>
-                      <a:r>
-                        <a:rPr sz="1300">
-                          <a:solidFill>
-                            <a:srgbClr val="1A1A1A"/>
-                          </a:solidFill>
-                          <a:latin typeface="Helvetica Neue"/>
-                        </a:rPr>
-                        <a:t>Median step</a:t>
-                      </a:r>
-                    </a:p>
-                  </a:txBody>
-                  <a:tcPr anchor="ctr" marL="91440" marT="18288" marB="18288">
-                    <a:solidFill>
-                      <a:srgbClr val="FDF0E6"/>
-                    </a:solidFill>
-                  </a:tcPr>
-                </a:tc>
-                <a:tc>
-                  <a:txBody>
-                    <a:bodyPr/>
-                    <a:lstStyle/>
-                    <a:p>
-                      <a:pPr algn="r"/>
-                      <a:r>
-                        <a:rPr sz="1300">
-                          <a:solidFill>
-                            <a:srgbClr val="1A1A1A"/>
-                          </a:solidFill>
-                          <a:latin typeface="Helvetica Neue"/>
-                        </a:rPr>
-                        <a:t>18.99 s</a:t>
-                      </a:r>
-                    </a:p>
-                  </a:txBody>
-                  <a:tcPr anchor="ctr" marL="91440" marT="18288" marB="18288">
-                    <a:solidFill>
-                      <a:srgbClr val="FDF0E6"/>
-                    </a:solidFill>
-                  </a:tcPr>
-                </a:tc>
-                <a:tc>
-                  <a:txBody>
-                    <a:bodyPr/>
-                    <a:lstStyle/>
-                    <a:p>
-                      <a:pPr algn="r"/>
-                      <a:r>
-                        <a:rPr sz="1300">
-                          <a:solidFill>
-                            <a:srgbClr val="1A1A1A"/>
-                          </a:solidFill>
-                          <a:latin typeface="Helvetica Neue"/>
-                        </a:rPr>
-                        <a:t>0.0798 s</a:t>
-                      </a:r>
-                    </a:p>
-                  </a:txBody>
-                  <a:tcPr anchor="ctr" marL="91440" marT="18288" marB="18288">
-                    <a:solidFill>
-                      <a:srgbClr val="FDF0E6"/>
-                    </a:solidFill>
-                  </a:tcPr>
-                </a:tc>
-                <a:tc>
-                  <a:txBody>
-                    <a:bodyPr/>
-                    <a:lstStyle/>
-                    <a:p>
-                      <a:pPr algn="r"/>
-                      <a:r>
-                        <a:rPr sz="1300">
-                          <a:solidFill>
-                            <a:srgbClr val="1A1A1A"/>
-                          </a:solidFill>
-                          <a:latin typeface="Helvetica Neue"/>
-                        </a:rPr>
-                        <a:t>0.0800 s</a:t>
-                      </a:r>
-                    </a:p>
-                  </a:txBody>
-                  <a:tcPr anchor="ctr" marL="91440" marT="18288" marB="18288">
-                    <a:solidFill>
-                      <a:srgbClr val="FDF0E6"/>
-                    </a:solidFill>
-                  </a:tcPr>
-                </a:tc>
-              </a:tr>
-              <a:tr h="347472">
-                <a:tc>
-                  <a:txBody>
-                    <a:bodyPr/>
-                    <a:lstStyle/>
-                    <a:p>
-                      <a:pPr algn="l"/>
-                      <a:r>
-                        <a:rPr sz="1300">
-                          <a:solidFill>
-                            <a:srgbClr val="1A1A1A"/>
-                          </a:solidFill>
-                          <a:latin typeface="Helvetica Neue"/>
-                        </a:rPr>
-                        <a:t>Throughput</a:t>
-                      </a:r>
-                    </a:p>
-                  </a:txBody>
-                  <a:tcPr anchor="ctr" marL="91440" marT="18288" marB="18288">
-                    <a:solidFill>
-                      <a:srgbClr val="FFFFFF"/>
-                    </a:solidFill>
-                  </a:tcPr>
-                </a:tc>
-                <a:tc>
-                  <a:txBody>
-                    <a:bodyPr/>
-                    <a:lstStyle/>
-                    <a:p>
-                      <a:pPr algn="r"/>
-                      <a:r>
-                        <a:rPr sz="1300">
-                          <a:solidFill>
-                            <a:srgbClr val="1A1A1A"/>
-                          </a:solidFill>
-                          <a:latin typeface="Helvetica Neue"/>
-                        </a:rPr>
-                        <a:t>54 tok/s</a:t>
-                      </a:r>
-                    </a:p>
-                  </a:txBody>
-                  <a:tcPr anchor="ctr" marL="91440" marT="18288" marB="18288">
-                    <a:solidFill>
-                      <a:srgbClr val="FFFFFF"/>
-                    </a:solidFill>
-                  </a:tcPr>
-                </a:tc>
-                <a:tc>
-                  <a:txBody>
-                    <a:bodyPr/>
-                    <a:lstStyle/>
-                    <a:p>
-                      <a:pPr algn="r"/>
-                      <a:r>
-                        <a:rPr sz="1300">
-                          <a:solidFill>
-                            <a:srgbClr val="1A1A1A"/>
-                          </a:solidFill>
-                          <a:latin typeface="Helvetica Neue"/>
-                        </a:rPr>
-                        <a:t>12,834 tok/s</a:t>
-                      </a:r>
-                    </a:p>
-                  </a:txBody>
-                  <a:tcPr anchor="ctr" marL="91440" marT="18288" marB="18288">
-                    <a:solidFill>
-                      <a:srgbClr val="FFFFFF"/>
-                    </a:solidFill>
-                  </a:tcPr>
-                </a:tc>
-                <a:tc>
-                  <a:txBody>
-                    <a:bodyPr/>
-                    <a:lstStyle/>
-                    <a:p>
-                      <a:pPr algn="r"/>
-                      <a:r>
-                        <a:rPr sz="1300">
-                          <a:solidFill>
-                            <a:srgbClr val="1A1A1A"/>
-                          </a:solidFill>
-                          <a:latin typeface="Helvetica Neue"/>
-                        </a:rPr>
-                        <a:t>12,804 tok/s</a:t>
-                      </a:r>
-                    </a:p>
-                  </a:txBody>
-                  <a:tcPr anchor="ctr" marL="91440" marT="18288" marB="18288">
-                    <a:solidFill>
-                      <a:srgbClr val="FFFFFF"/>
-                    </a:solidFill>
-                  </a:tcPr>
-                </a:tc>
-              </a:tr>
-              <a:tr h="347472">
-                <a:tc>
-                  <a:txBody>
-                    <a:bodyPr/>
-                    <a:lstStyle/>
-                    <a:p>
-                      <a:pPr algn="l"/>
-                      <a:r>
-                        <a:rPr sz="1300">
-                          <a:solidFill>
-                            <a:srgbClr val="1A1A1A"/>
-                          </a:solidFill>
-                          <a:latin typeface="Helvetica Neue"/>
-                        </a:rPr>
-                        <a:t>Speedup vs CPU</a:t>
-                      </a:r>
-                    </a:p>
-                  </a:txBody>
-                  <a:tcPr anchor="ctr" marL="91440" marT="18288" marB="18288">
-                    <a:solidFill>
-                      <a:srgbClr val="FDF0E6"/>
-                    </a:solidFill>
-                  </a:tcPr>
-                </a:tc>
-                <a:tc>
-                  <a:txBody>
-                    <a:bodyPr/>
-                    <a:lstStyle/>
-                    <a:p>
-                      <a:pPr algn="r"/>
-                      <a:r>
-                        <a:rPr sz="1300">
-                          <a:solidFill>
-                            <a:srgbClr val="1A1A1A"/>
-                          </a:solidFill>
-                          <a:latin typeface="Helvetica Neue"/>
-                        </a:rPr>
-                        <a:t>1.0×</a:t>
-                      </a:r>
-                    </a:p>
-                  </a:txBody>
-                  <a:tcPr anchor="ctr" marL="91440" marT="18288" marB="18288">
-                    <a:solidFill>
-                      <a:srgbClr val="FDF0E6"/>
-                    </a:solidFill>
-                  </a:tcPr>
-                </a:tc>
-                <a:tc>
-                  <a:txBody>
-                    <a:bodyPr/>
-                    <a:lstStyle/>
-                    <a:p>
-                      <a:pPr algn="r"/>
-                      <a:r>
-                        <a:rPr sz="1300">
-                          <a:solidFill>
-                            <a:srgbClr val="1A1A1A"/>
-                          </a:solidFill>
-                          <a:latin typeface="Helvetica Neue"/>
-                        </a:rPr>
-                        <a:t>238.0×</a:t>
-                      </a:r>
-                    </a:p>
-                  </a:txBody>
-                  <a:tcPr anchor="ctr" marL="91440" marT="18288" marB="18288">
-                    <a:solidFill>
-                      <a:srgbClr val="FDF0E6"/>
-                    </a:solidFill>
-                  </a:tcPr>
-                </a:tc>
-                <a:tc>
-                  <a:txBody>
-                    <a:bodyPr/>
-                    <a:lstStyle/>
-                    <a:p>
-                      <a:pPr algn="r"/>
-                      <a:r>
-                        <a:rPr sz="1300">
-                          <a:solidFill>
-                            <a:srgbClr val="1A1A1A"/>
-                          </a:solidFill>
-                          <a:latin typeface="Helvetica Neue"/>
-                        </a:rPr>
-                        <a:t>237.5×</a:t>
-                      </a:r>
-                    </a:p>
-                  </a:txBody>
-                  <a:tcPr anchor="ctr" marL="91440" marT="18288" marB="18288">
-                    <a:solidFill>
-                      <a:srgbClr val="FDF0E6"/>
-                    </a:solidFill>
-                  </a:tcPr>
-                </a:tc>
-              </a:tr>
-              <a:tr h="347472">
-                <a:tc>
-                  <a:txBody>
-                    <a:bodyPr/>
-                    <a:lstStyle/>
-                    <a:p>
-                      <a:pPr algn="l"/>
-                      <a:r>
-                        <a:rPr sz="1300">
-                          <a:solidFill>
-                            <a:srgbClr val="1A1A1A"/>
-                          </a:solidFill>
-                          <a:latin typeface="Helvetica Neue"/>
-                        </a:rPr>
-                        <a:t>Peak memory</a:t>
-                      </a:r>
-                    </a:p>
-                  </a:txBody>
-                  <a:tcPr anchor="ctr" marL="91440" marT="18288" marB="18288">
-                    <a:solidFill>
-                      <a:srgbClr val="FFFFFF"/>
-                    </a:solidFill>
-                  </a:tcPr>
-                </a:tc>
-                <a:tc>
-                  <a:txBody>
-                    <a:bodyPr/>
-                    <a:lstStyle/>
-                    <a:p>
-                      <a:pPr algn="r"/>
-                      <a:r>
-                        <a:rPr sz="1300">
-                          <a:solidFill>
-                            <a:srgbClr val="1A1A1A"/>
-                          </a:solidFill>
-                          <a:latin typeface="Helvetica Neue"/>
-                        </a:rPr>
-                        <a:t>66.1 %</a:t>
-                      </a:r>
-                    </a:p>
-                  </a:txBody>
-                  <a:tcPr anchor="ctr" marL="91440" marT="18288" marB="18288">
-                    <a:solidFill>
-                      <a:srgbClr val="FFFFFF"/>
-                    </a:solidFill>
-                  </a:tcPr>
-                </a:tc>
-                <a:tc>
-                  <a:txBody>
-                    <a:bodyPr/>
-                    <a:lstStyle/>
-                    <a:p>
-                      <a:pPr algn="r"/>
-                      <a:r>
-                        <a:rPr sz="1300">
-                          <a:solidFill>
-                            <a:srgbClr val="1A1A1A"/>
-                          </a:solidFill>
-                          <a:latin typeface="Helvetica Neue"/>
-                        </a:rPr>
-                        <a:t>5.0 %</a:t>
-                      </a:r>
-                    </a:p>
-                  </a:txBody>
-                  <a:tcPr anchor="ctr" marL="91440" marT="18288" marB="18288">
-                    <a:solidFill>
-                      <a:srgbClr val="FFFFFF"/>
-                    </a:solidFill>
-                  </a:tcPr>
-                </a:tc>
-                <a:tc>
-                  <a:txBody>
-                    <a:bodyPr/>
-                    <a:lstStyle/>
-                    <a:p>
-                      <a:pPr algn="r"/>
-                      <a:r>
-                        <a:rPr sz="1300">
-                          <a:solidFill>
-                            <a:srgbClr val="1A1A1A"/>
-                          </a:solidFill>
-                          <a:latin typeface="Helvetica Neue"/>
-                        </a:rPr>
-                        <a:t>7.3 %</a:t>
-                      </a:r>
-                    </a:p>
-                  </a:txBody>
-                  <a:tcPr anchor="ctr" marL="91440" marT="18288" marB="18288">
-                    <a:solidFill>
-                      <a:srgbClr val="FFFFFF"/>
-                    </a:solidFill>
-                  </a:tcPr>
-                </a:tc>
-              </a:tr>
-              <a:tr h="347472">
-                <a:tc>
-                  <a:txBody>
-                    <a:bodyPr/>
-                    <a:lstStyle/>
-                    <a:p>
-                      <a:pPr algn="l"/>
-                      <a:r>
-                        <a:rPr sz="1300">
-                          <a:solidFill>
-                            <a:srgbClr val="1A1A1A"/>
-                          </a:solidFill>
-                          <a:latin typeface="Helvetica Neue"/>
-                        </a:rPr>
-                        <a:t>Chip utilisation</a:t>
-                      </a:r>
-                    </a:p>
-                  </a:txBody>
-                  <a:tcPr anchor="ctr" marL="91440" marT="18288" marB="18288">
-                    <a:solidFill>
-                      <a:srgbClr val="FDF0E6"/>
-                    </a:solidFill>
-                  </a:tcPr>
-                </a:tc>
-                <a:tc>
-                  <a:txBody>
-                    <a:bodyPr/>
-                    <a:lstStyle/>
-                    <a:p>
-                      <a:pPr algn="r"/>
-                      <a:r>
-                        <a:rPr sz="1300">
-                          <a:solidFill>
-                            <a:srgbClr val="1A1A1A"/>
-                          </a:solidFill>
-                          <a:latin typeface="Helvetica Neue"/>
-                        </a:rPr>
-                        <a:t>44.3 % host</a:t>
-                      </a:r>
-                    </a:p>
-                  </a:txBody>
-                  <a:tcPr anchor="ctr" marL="91440" marT="18288" marB="18288">
-                    <a:solidFill>
-                      <a:srgbClr val="FDF0E6"/>
-                    </a:solidFill>
-                  </a:tcPr>
-                </a:tc>
-                <a:tc>
-                  <a:txBody>
-                    <a:bodyPr/>
-                    <a:lstStyle/>
-                    <a:p>
-                      <a:pPr algn="r"/>
-                      <a:r>
-                        <a:rPr sz="1300">
-                          <a:solidFill>
-                            <a:srgbClr val="1A1A1A"/>
-                          </a:solidFill>
-                          <a:latin typeface="Helvetica Neue"/>
-                        </a:rPr>
-                        <a:t>1.59 %</a:t>
-                      </a:r>
-                    </a:p>
-                  </a:txBody>
-                  <a:tcPr anchor="ctr" marL="91440" marT="18288" marB="18288">
-                    <a:solidFill>
-                      <a:srgbClr val="FDF0E6"/>
-                    </a:solidFill>
-                  </a:tcPr>
-                </a:tc>
-                <a:tc>
-                  <a:txBody>
-                    <a:bodyPr/>
-                    <a:lstStyle/>
-                    <a:p>
-                      <a:pPr algn="r"/>
-                      <a:r>
-                        <a:rPr sz="1300">
-                          <a:solidFill>
-                            <a:srgbClr val="1A1A1A"/>
-                          </a:solidFill>
-                          <a:latin typeface="Helvetica Neue"/>
-                        </a:rPr>
-                        <a:t>no counter</a:t>
-                      </a:r>
-                    </a:p>
-                  </a:txBody>
-                  <a:tcPr anchor="ctr" marL="91440" marT="18288" marB="18288">
-                    <a:solidFill>
-                      <a:srgbClr val="FDF0E6"/>
-                    </a:solidFill>
-                  </a:tcPr>
-                </a:tc>
-              </a:tr>
-              <a:tr h="347472">
-                <a:tc>
-                  <a:txBody>
-                    <a:bodyPr/>
-                    <a:lstStyle/>
-                    <a:p>
-                      <a:pPr algn="l"/>
-                      <a:r>
-                        <a:rPr sz="1300">
-                          <a:solidFill>
-                            <a:srgbClr val="1A1A1A"/>
-                          </a:solidFill>
-                          <a:latin typeface="Helvetica Neue"/>
-                        </a:rPr>
-                        <a:t>USD / 1 000 steps</a:t>
-                      </a:r>
-                    </a:p>
-                  </a:txBody>
-                  <a:tcPr anchor="ctr" marL="91440" marT="18288" marB="18288">
-                    <a:solidFill>
-                      <a:srgbClr val="FFFFFF"/>
-                    </a:solidFill>
-                  </a:tcPr>
-                </a:tc>
-                <a:tc>
-                  <a:txBody>
-                    <a:bodyPr/>
-                    <a:lstStyle/>
-                    <a:p>
-                      <a:pPr algn="r"/>
-                      <a:r>
-                        <a:rPr sz="1300">
-                          <a:solidFill>
-                            <a:srgbClr val="1A1A1A"/>
-                          </a:solidFill>
-                          <a:latin typeface="Helvetica Neue"/>
-                        </a:rPr>
-                        <a:t>$6.05</a:t>
-                      </a:r>
-                    </a:p>
-                  </a:txBody>
-                  <a:tcPr anchor="ctr" marL="91440" marT="18288" marB="18288">
-                    <a:solidFill>
-                      <a:srgbClr val="FFFFFF"/>
-                    </a:solidFill>
-                  </a:tcPr>
-                </a:tc>
-                <a:tc>
-                  <a:txBody>
-                    <a:bodyPr/>
-                    <a:lstStyle/>
-                    <a:p>
-                      <a:pPr algn="r"/>
-                      <a:r>
-                        <a:rPr sz="1300">
-                          <a:solidFill>
-                            <a:srgbClr val="1A1A1A"/>
-                          </a:solidFill>
-                          <a:latin typeface="Helvetica Neue"/>
-                        </a:rPr>
-                        <a:t>$0.131</a:t>
-                      </a:r>
-                    </a:p>
-                  </a:txBody>
-                  <a:tcPr anchor="ctr" marL="91440" marT="18288" marB="18288">
-                    <a:solidFill>
-                      <a:srgbClr val="FFFFFF"/>
-                    </a:solidFill>
-                  </a:tcPr>
-                </a:tc>
-                <a:tc>
-                  <a:txBody>
-                    <a:bodyPr/>
-                    <a:lstStyle/>
-                    <a:p>
-                      <a:pPr algn="r"/>
-                      <a:r>
-                        <a:rPr sz="1300">
-                          <a:solidFill>
-                            <a:srgbClr val="1A1A1A"/>
-                          </a:solidFill>
-                          <a:latin typeface="Helvetica Neue"/>
-                        </a:rPr>
-                        <a:t>$1.03</a:t>
-                      </a:r>
-                    </a:p>
-                  </a:txBody>
-                  <a:tcPr anchor="ctr" marL="91440" marT="18288" marB="18288">
-                    <a:solidFill>
-                      <a:srgbClr val="FFFFFF"/>
-                    </a:solidFill>
-                  </a:tcPr>
-                </a:tc>
-              </a:tr>
-            </a:tbl>
-          </a:graphicData>
-        </a:graphic>
-      </p:graphicFrame>
-      <p:sp>
-        <p:nvSpPr>
-          <p:cNvPr id="7" name="TextBox 6"/>
-          <p:cNvSpPr txBox="1"/>
-          <p:nvPr/>
-        </p:nvSpPr>
-        <p:spPr>
-          <a:xfrm>
-            <a:off x="548640" y="4343400"/>
-            <a:ext cx="6949440" cy="457200"/>
-          </a:xfrm>
-          <a:prstGeom prst="rect">
-            <a:avLst/>
-          </a:prstGeom>
-          <a:noFill/>
-        </p:spPr>
-        <p:txBody>
-          <a:bodyPr wrap="square" anchor="t">
-            <a:spAutoFit/>
-          </a:bodyPr>
-          <a:lstStyle/>
-          <a:p>
-            <a:pPr algn="l">
-              <a:spcAft>
-                <a:spcPts val="600"/>
-              </a:spcAft>
-            </a:pPr>
-            <a:r>
-              <a:rPr sz="1900" b="1">
-                <a:solidFill>
-                  <a:srgbClr val="E8590C"/>
-                </a:solidFill>
-                <a:latin typeface="Helvetica Neue"/>
-              </a:rPr>
-              <a:t>One GH200 matches an eight-chip TPU slice to within 0.23 %</a:t>
-            </a:r>
-          </a:p>
-        </p:txBody>
-      </p:sp>
-      <p:sp>
-        <p:nvSpPr>
-          <p:cNvPr id="8" name="TextBox 7"/>
-          <p:cNvSpPr txBox="1"/>
-          <p:nvPr/>
-        </p:nvSpPr>
-        <p:spPr>
-          <a:xfrm>
-            <a:off x="548640" y="4754880"/>
-            <a:ext cx="6949440" cy="1737360"/>
-          </a:xfrm>
-          <a:prstGeom prst="rect">
-            <a:avLst/>
-          </a:prstGeom>
-          <a:noFill/>
-        </p:spPr>
-        <p:txBody>
-          <a:bodyPr wrap="square" anchor="t">
-            <a:spAutoFit/>
-          </a:bodyPr>
-          <a:lstStyle/>
-          <a:p>
-            <a:pPr algn="l">
-              <a:spcAft>
-                <a:spcPts val="600"/>
-              </a:spcAft>
-            </a:pPr>
-            <a:r>
-              <a:rPr sz="1300" b="0">
-                <a:solidFill>
-                  <a:srgbClr val="1A1A1A"/>
-                </a:solidFill>
-                <a:latin typeface="Helvetica Neue"/>
-              </a:rPr>
-              <a:t>At batch 1 the job occupies neither accelerator — 5.0 % of the GH200 and 7.3 %</a:t>
-            </a:r>
-          </a:p>
-          <a:p>
-            <a:pPr algn="l">
-              <a:spcAft>
-                <a:spcPts val="600"/>
-              </a:spcAft>
-            </a:pPr>
-            <a:r>
-              <a:rPr sz="1300" b="0">
-                <a:solidFill>
-                  <a:srgbClr val="1A1A1A"/>
-                </a:solidFill>
-                <a:latin typeface="Helvetica Neue"/>
-              </a:rPr>
-              <a:t>of the TPU. It is latency-bound, so the extra seven chips buy nothing.</a:t>
-            </a:r>
-          </a:p>
-          <a:p>
-            <a:pPr algn="l">
-              <a:spcAft>
-                <a:spcPts val="600"/>
-              </a:spcAft>
-            </a:pPr>
-            <a:r>
-              <a:rPr sz="1300" b="0">
-                <a:solidFill>
-                  <a:srgbClr val="1A1A1A"/>
-                </a:solidFill>
-                <a:latin typeface="Helvetica Neue"/>
-              </a:rPr>
-              <a:t/>
-            </a:r>
-          </a:p>
-          <a:p>
-            <a:pPr algn="l">
-              <a:spcAft>
-                <a:spcPts val="600"/>
-              </a:spcAft>
-            </a:pPr>
-            <a:r>
-              <a:rPr sz="1300" b="0">
-                <a:solidFill>
-                  <a:srgbClr val="1A1A1A"/>
-                </a:solidFill>
-                <a:latin typeface="Helvetica Neue"/>
-              </a:rPr>
-              <a:t>Mitigation: one manifest line — fileCacheCapacity — cut checkpoint load</a:t>
-            </a:r>
-          </a:p>
-          <a:p>
-            <a:pPr algn="l">
-              <a:spcAft>
-                <a:spcPts val="600"/>
-              </a:spcAft>
-            </a:pPr>
-            <a:r>
-              <a:rPr sz="1300" b="0">
-                <a:solidFill>
-                  <a:srgbClr val="1A1A1A"/>
-                </a:solidFill>
-                <a:latin typeface="Helvetica Neue"/>
-              </a:rPr>
-              <a:t>235 s → 16 s (14.6×) and total wall clock by 31.4 %.</a:t>
-            </a:r>
-          </a:p>
-          <a:p>
-            <a:pPr algn="l">
-              <a:spcAft>
-                <a:spcPts val="600"/>
-              </a:spcAft>
-            </a:pPr>
-            <a:r>
-              <a:rPr sz="1300" b="0">
-                <a:solidFill>
-                  <a:srgbClr val="1A1A1A"/>
-                </a:solidFill>
-                <a:latin typeface="Helvetica Neue"/>
-              </a:rPr>
-              <a:t>Control: step time identical to the fourth decimal. Only I/O moved.</a:t>
-            </a:r>
-          </a:p>
-        </p:txBody>
-      </p:sp>
-      <p:pic>
-        <p:nvPicPr>
-          <p:cNvPr id="9" name="Picture 8" descr="panel-mitigation.png"/>
-          <p:cNvPicPr>
-            <a:picLocks noChangeAspect="1"/>
-          </p:cNvPicPr>
-          <p:nvPr/>
-        </p:nvPicPr>
-        <p:blipFill>
-          <a:blip r:embed="rId2"/>
-          <a:stretch>
-            <a:fillRect/>
-          </a:stretch>
-        </p:blipFill>
-        <p:spPr>
-          <a:xfrm>
-            <a:off x="7772400" y="1737360"/>
-            <a:ext cx="3931920" cy="2735835"/>
-          </a:xfrm>
-          <a:prstGeom prst="rect">
-            <a:avLst/>
-          </a:prstGeom>
-        </p:spPr>
-      </p:pic>
-    </p:spTree>
-  </p:cSld>
-  <p:clrMapOvr>
-    <a:masterClrMapping/>
-  </p:clrMapOvr>
-</p:sld>
-</file>
-
-<file path=ppt/slides/slide5.xml><?xml version="1.0" encoding="utf-8"?>
-<p:sld xmlns:a="http://schemas.openxmlformats.org/drawingml/2006/main" xmlns:p="http://schemas.openxmlformats.org/presentationml/2006/main" xmlns:r="http://schemas.openxmlformats.org/officeDocument/2006/relationships">
-  <p:cSld>
-    <p:spTree>
-      <p:nvGrpSpPr>
-        <p:cNvPr id="1" name=""/>
-        <p:cNvGrpSpPr/>
-        <p:nvPr/>
-      </p:nvGrpSpPr>
-      <p:grpSpPr/>
-      <p:sp>
-        <p:nvSpPr>
-          <p:cNvPr id="2" name="Rectangle 1"/>
-          <p:cNvSpPr/>
-          <p:nvPr/>
-        </p:nvSpPr>
-        <p:spPr>
-          <a:xfrm>
-            <a:off x="0" y="0"/>
-            <a:ext cx="12191695" cy="118872"/>
-          </a:xfrm>
-          <a:prstGeom prst="rect">
-            <a:avLst/>
-          </a:prstGeom>
-          <a:solidFill>
-            <a:srgbClr val="E8590C"/>
-          </a:solidFill>
-          <a:ln>
-            <a:noFill/>
-          </a:ln>
-          <a:effectLst/>
-        </p:spPr>
-        <p:style>
-          <a:lnRef idx="1">
-            <a:schemeClr val="accent1"/>
-          </a:lnRef>
-          <a:fillRef idx="3">
-            <a:schemeClr val="accent1"/>
-          </a:fillRef>
-          <a:effectRef idx="2">
-            <a:schemeClr val="accent1"/>
-          </a:effectRef>
-          <a:fontRef idx="minor">
-            <a:schemeClr val="lt1"/>
-          </a:fontRef>
-        </p:style>
-        <p:txBody>
-          <a:bodyPr rtlCol="0" anchor="ctr"/>
-          <a:lstStyle/>
-          <a:p>
-            <a:pPr algn="ctr"/>
-          </a:p>
-        </p:txBody>
-      </p:sp>
-      <p:sp>
-        <p:nvSpPr>
-          <p:cNvPr id="3" name="TextBox 2"/>
-          <p:cNvSpPr txBox="1"/>
-          <p:nvPr/>
-        </p:nvSpPr>
-        <p:spPr>
-          <a:xfrm>
-            <a:off x="548640" y="320040"/>
-            <a:ext cx="914400" cy="548640"/>
-          </a:xfrm>
-          <a:prstGeom prst="rect">
-            <a:avLst/>
-          </a:prstGeom>
-          <a:noFill/>
-        </p:spPr>
-        <p:txBody>
-          <a:bodyPr wrap="square" anchor="t">
-            <a:spAutoFit/>
-          </a:bodyPr>
-          <a:lstStyle/>
-          <a:p>
-            <a:pPr algn="l">
-              <a:spcAft>
-                <a:spcPts val="600"/>
-              </a:spcAft>
-            </a:pPr>
-            <a:r>
-              <a:rPr sz="4000" b="1">
-                <a:solidFill>
-                  <a:srgbClr val="E8590C"/>
-                </a:solidFill>
-                <a:latin typeface="Helvetica Neue"/>
-              </a:rPr>
-              <a:t>5</a:t>
-            </a:r>
-          </a:p>
-        </p:txBody>
-      </p:sp>
-      <p:sp>
-        <p:nvSpPr>
-          <p:cNvPr id="4" name="TextBox 3"/>
-          <p:cNvSpPr txBox="1"/>
-          <p:nvPr/>
-        </p:nvSpPr>
-        <p:spPr>
-          <a:xfrm>
-            <a:off x="1234440" y="384048"/>
-            <a:ext cx="10424160" cy="731520"/>
-          </a:xfrm>
-          <a:prstGeom prst="rect">
-            <a:avLst/>
-          </a:prstGeom>
-          <a:noFill/>
-        </p:spPr>
-        <p:txBody>
-          <a:bodyPr wrap="square" anchor="t">
-            <a:spAutoFit/>
-          </a:bodyPr>
-          <a:lstStyle/>
-          <a:p>
-            <a:pPr algn="l">
-              <a:spcAft>
-                <a:spcPts val="600"/>
-              </a:spcAft>
-            </a:pPr>
-            <a:r>
-              <a:rPr sz="3000" b="1">
-                <a:solidFill>
-                  <a:srgbClr val="1A1A1A"/>
-                </a:solidFill>
-                <a:latin typeface="Helvetica Neue"/>
-              </a:rPr>
-              <a:t>What we learned</a:t>
-            </a:r>
-          </a:p>
-        </p:txBody>
-      </p:sp>
-      <p:sp>
-        <p:nvSpPr>
-          <p:cNvPr id="5" name="TextBox 4"/>
-          <p:cNvSpPr txBox="1"/>
-          <p:nvPr/>
-        </p:nvSpPr>
-        <p:spPr>
-          <a:xfrm>
-            <a:off x="1234440" y="1024128"/>
-            <a:ext cx="10424160" cy="457200"/>
-          </a:xfrm>
-          <a:prstGeom prst="rect">
-            <a:avLst/>
-          </a:prstGeom>
-          <a:noFill/>
-        </p:spPr>
-        <p:txBody>
-          <a:bodyPr wrap="square" anchor="t">
-            <a:spAutoFit/>
-          </a:bodyPr>
-          <a:lstStyle/>
-          <a:p>
-            <a:pPr algn="l">
-              <a:spcAft>
-                <a:spcPts val="600"/>
-              </a:spcAft>
-            </a:pPr>
-            <a:r>
-              <a:rPr sz="1500" b="0">
-                <a:solidFill>
-                  <a:srgbClr val="6B7280"/>
-                </a:solidFill>
-                <a:latin typeface="Helvetica Neue"/>
-              </a:rPr>
-              <a:t>Bottleneck, mitigation, and the recommendation</a:t>
-            </a:r>
-          </a:p>
-        </p:txBody>
-      </p:sp>
-      <p:sp>
-        <p:nvSpPr>
-          <p:cNvPr id="6" name="TextBox 5"/>
-          <p:cNvSpPr txBox="1"/>
-          <p:nvPr/>
-        </p:nvSpPr>
-        <p:spPr>
-          <a:xfrm>
-            <a:off x="548640" y="1645920"/>
-            <a:ext cx="5486400" cy="411480"/>
-          </a:xfrm>
-          <a:prstGeom prst="rect">
-            <a:avLst/>
-          </a:prstGeom>
-          <a:noFill/>
-        </p:spPr>
-        <p:txBody>
-          <a:bodyPr wrap="square" anchor="t">
-            <a:spAutoFit/>
-          </a:bodyPr>
-          <a:lstStyle/>
-          <a:p>
-            <a:pPr algn="l">
-              <a:spcAft>
-                <a:spcPts val="600"/>
-              </a:spcAft>
-            </a:pPr>
-            <a:r>
-              <a:rPr sz="1700" b="1">
-                <a:solidFill>
-                  <a:srgbClr val="E8590C"/>
-                </a:solidFill>
-                <a:latin typeface="Helvetica Neue"/>
-              </a:rPr>
-              <a:t>The bottleneck is not compute</a:t>
-            </a:r>
-          </a:p>
-        </p:txBody>
-      </p:sp>
-      <p:sp>
-        <p:nvSpPr>
-          <p:cNvPr id="7" name="TextBox 6"/>
-          <p:cNvSpPr txBox="1"/>
-          <p:nvPr/>
-        </p:nvSpPr>
-        <p:spPr>
-          <a:xfrm>
-            <a:off x="548640" y="2011680"/>
-            <a:ext cx="5486400" cy="1371600"/>
-          </a:xfrm>
-          <a:prstGeom prst="rect">
-            <a:avLst/>
-          </a:prstGeom>
-          <a:noFill/>
-        </p:spPr>
-        <p:txBody>
-          <a:bodyPr wrap="square" anchor="t">
-            <a:spAutoFit/>
-          </a:bodyPr>
-          <a:lstStyle/>
-          <a:p>
-            <a:pPr algn="l">
-              <a:spcAft>
-                <a:spcPts val="600"/>
-              </a:spcAft>
-            </a:pPr>
-            <a:r>
-              <a:rPr sz="1400" b="0">
-                <a:solidFill>
-                  <a:srgbClr val="1A1A1A"/>
-                </a:solidFill>
-                <a:latin typeface="Helvetica Neue"/>
-              </a:rPr>
-              <a:t>Of 733 s of wall clock, only 209 s — 28.5 % — is arithmetic.</a:t>
-            </a:r>
-          </a:p>
-          <a:p>
-            <a:pPr algn="l">
-              <a:spcAft>
-                <a:spcPts val="600"/>
-              </a:spcAft>
-            </a:pPr>
-            <a:r>
-              <a:rPr sz="1400" b="0">
-                <a:solidFill>
-                  <a:srgbClr val="1A1A1A"/>
-                </a:solidFill>
-                <a:latin typeface="Helvetica Neue"/>
-              </a:rPr>
-              <a:t>The largest single phase is reading the checkpoint: 32.1 %.</a:t>
-            </a:r>
-          </a:p>
-          <a:p>
-            <a:pPr algn="l">
-              <a:spcAft>
-                <a:spcPts val="600"/>
-              </a:spcAft>
-            </a:pPr>
-            <a:r>
-              <a:rPr sz="1400" b="0">
-                <a:solidFill>
-                  <a:srgbClr val="1A1A1A"/>
-                </a:solidFill>
-                <a:latin typeface="Helvetica Neue"/>
-              </a:rPr>
-              <a:t>Scheduling and XLA compilation take most of the rest.</a:t>
-            </a:r>
-          </a:p>
-        </p:txBody>
-      </p:sp>
-      <p:sp>
-        <p:nvSpPr>
-          <p:cNvPr id="8" name="TextBox 7"/>
-          <p:cNvSpPr txBox="1"/>
-          <p:nvPr/>
-        </p:nvSpPr>
-        <p:spPr>
-          <a:xfrm>
-            <a:off x="548640" y="3291840"/>
-            <a:ext cx="5486400" cy="411480"/>
-          </a:xfrm>
-          <a:prstGeom prst="rect">
-            <a:avLst/>
-          </a:prstGeom>
-          <a:noFill/>
-        </p:spPr>
-        <p:txBody>
-          <a:bodyPr wrap="square" anchor="t">
-            <a:spAutoFit/>
-          </a:bodyPr>
-          <a:lstStyle/>
-          <a:p>
-            <a:pPr algn="l">
-              <a:spcAft>
-                <a:spcPts val="600"/>
-              </a:spcAft>
-            </a:pPr>
-            <a:r>
-              <a:rPr sz="1700" b="1">
-                <a:solidFill>
-                  <a:srgbClr val="E8590C"/>
-                </a:solidFill>
-                <a:latin typeface="Helvetica Neue"/>
-              </a:rPr>
-              <a:t>Scaling the model did not scale the cost</a:t>
-            </a:r>
-          </a:p>
-        </p:txBody>
-      </p:sp>
-      <p:sp>
-        <p:nvSpPr>
-          <p:cNvPr id="9" name="TextBox 8"/>
-          <p:cNvSpPr txBox="1"/>
-          <p:nvPr/>
-        </p:nvSpPr>
-        <p:spPr>
-          <a:xfrm>
-            <a:off x="548640" y="3657600"/>
-            <a:ext cx="5486400" cy="1463040"/>
-          </a:xfrm>
-          <a:prstGeom prst="rect">
-            <a:avLst/>
-          </a:prstGeom>
-          <a:noFill/>
-        </p:spPr>
-        <p:txBody>
-          <a:bodyPr wrap="square" anchor="t">
-            <a:spAutoFit/>
-          </a:bodyPr>
-          <a:lstStyle/>
-          <a:p>
-            <a:pPr algn="l">
-              <a:spcAft>
-                <a:spcPts val="600"/>
-              </a:spcAft>
-            </a:pPr>
-            <a:r>
-              <a:rPr sz="1400" b="0">
-                <a:solidFill>
-                  <a:srgbClr val="1A1A1A"/>
-                </a:solidFill>
-                <a:latin typeface="Helvetica Neue"/>
-              </a:rPr>
-              <a:t>Growing Qwen3 from 0.6B to 4B — about 6.7× — did not make the CPU</a:t>
-            </a:r>
-          </a:p>
-          <a:p>
-            <a:pPr algn="l">
-              <a:spcAft>
-                <a:spcPts val="600"/>
-              </a:spcAft>
-            </a:pPr>
-            <a:r>
-              <a:rPr sz="1400" b="0">
-                <a:solidFill>
-                  <a:srgbClr val="1A1A1A"/>
-                </a:solidFill>
-                <a:latin typeface="Helvetica Neue"/>
-              </a:rPr>
-              <a:t>6.7× slower. It made the CPU impossible: XLA did not finish compiling</a:t>
-            </a:r>
-          </a:p>
-          <a:p>
-            <a:pPr algn="l">
-              <a:spcAft>
-                <a:spcPts val="600"/>
-              </a:spcAft>
-            </a:pPr>
-            <a:r>
-              <a:rPr sz="1400" b="0">
-                <a:solidFill>
-                  <a:srgbClr val="1A1A1A"/>
-                </a:solidFill>
-                <a:latin typeface="Helvetica Neue"/>
-              </a:rPr>
-              <a:t>in over an hour with remat, and the kernel killed the process at</a:t>
-            </a:r>
-          </a:p>
-          <a:p>
-            <a:pPr algn="l">
-              <a:spcAft>
-                <a:spcPts val="600"/>
-              </a:spcAft>
-            </a:pPr>
-            <a:r>
-              <a:rPr sz="1400" b="0">
-                <a:solidFill>
-                  <a:srgbClr val="1A1A1A"/>
-                </a:solidFill>
-                <a:latin typeface="Helvetica Neue"/>
-              </a:rPr>
-              <a:t>31.5 GB without it. A speedup chart alone hides that discontinuity.</a:t>
-            </a:r>
-          </a:p>
-        </p:txBody>
-      </p:sp>
-      <p:sp>
-        <p:nvSpPr>
-          <p:cNvPr id="10" name="TextBox 9"/>
-          <p:cNvSpPr txBox="1"/>
-          <p:nvPr/>
-        </p:nvSpPr>
-        <p:spPr>
-          <a:xfrm>
-            <a:off x="6309360" y="1645920"/>
-            <a:ext cx="5394960" cy="411480"/>
-          </a:xfrm>
-          <a:prstGeom prst="rect">
-            <a:avLst/>
-          </a:prstGeom>
-          <a:noFill/>
-        </p:spPr>
-        <p:txBody>
-          <a:bodyPr wrap="square" anchor="t">
-            <a:spAutoFit/>
-          </a:bodyPr>
-          <a:lstStyle/>
-          <a:p>
-            <a:pPr algn="l">
-              <a:spcAft>
-                <a:spcPts val="600"/>
-              </a:spcAft>
-            </a:pPr>
-            <a:r>
-              <a:rPr sz="1700" b="1">
-                <a:solidFill>
-                  <a:srgbClr val="E8590C"/>
-                </a:solidFill>
-                <a:latin typeface="Helvetica Neue"/>
-              </a:rPr>
-              <a:t>The wall was in the supply chain</a:t>
-            </a:r>
-          </a:p>
-        </p:txBody>
-      </p:sp>
-      <p:sp>
-        <p:nvSpPr>
-          <p:cNvPr id="11" name="TextBox 10"/>
-          <p:cNvSpPr txBox="1"/>
-          <p:nvPr/>
-        </p:nvSpPr>
-        <p:spPr>
-          <a:xfrm>
-            <a:off x="6309360" y="2011680"/>
-            <a:ext cx="5394960" cy="1737360"/>
-          </a:xfrm>
-          <a:prstGeom prst="rect">
-            <a:avLst/>
-          </a:prstGeom>
-          <a:noFill/>
-        </p:spPr>
-        <p:txBody>
-          <a:bodyPr wrap="square" anchor="t">
-            <a:spAutoFit/>
-          </a:bodyPr>
-          <a:lstStyle/>
-          <a:p>
-            <a:pPr algn="l">
-              <a:spcAft>
-                <a:spcPts val="600"/>
-              </a:spcAft>
-            </a:pPr>
-            <a:r>
-              <a:rPr sz="1400" b="0">
-                <a:solidFill>
-                  <a:srgbClr val="1A1A1A"/>
-                </a:solidFill>
-                <a:latin typeface="Helvetica Neue"/>
-              </a:rPr>
-              <a:t>The GH200 sat idle for a day — not for want of hardware or code.</a:t>
-            </a:r>
-          </a:p>
-          <a:p>
-            <a:pPr algn="l">
-              <a:spcAft>
-                <a:spcPts val="600"/>
-              </a:spcAft>
-            </a:pPr>
-            <a:r>
-              <a:rPr sz="1400" b="0">
-                <a:solidFill>
-                  <a:srgbClr val="1A1A1A"/>
-                </a:solidFill>
-                <a:latin typeface="Helvetica Neue"/>
-              </a:rPr>
-              <a:t>ARM64 host · QEMU cross-build segfault · libtpu has no aarch64 wheel ·</a:t>
-            </a:r>
-          </a:p>
-          <a:p>
-            <a:pPr algn="l">
-              <a:spcAft>
-                <a:spcPts val="600"/>
-              </a:spcAft>
-            </a:pPr>
-            <a:r>
-              <a:rPr sz="1400" b="0">
-                <a:solidFill>
-                  <a:srgbClr val="1A1A1A"/>
-                </a:solidFill>
-                <a:latin typeface="Helvetica Neue"/>
-              </a:rPr>
-              <a:t>no cluster credentials · registry 403.</a:t>
-            </a:r>
-          </a:p>
-          <a:p>
-            <a:pPr algn="l">
-              <a:spcAft>
-                <a:spcPts val="600"/>
-              </a:spcAft>
-            </a:pPr>
-            <a:r>
-              <a:rPr sz="1400" b="0">
-                <a:solidFill>
-                  <a:srgbClr val="1A1A1A"/>
-                </a:solidFill>
-                <a:latin typeface="Helvetica Neue"/>
-              </a:rPr>
-              <a:t/>
-            </a:r>
-          </a:p>
-          <a:p>
-            <a:pPr algn="l">
-              <a:spcAft>
-                <a:spcPts val="600"/>
-              </a:spcAft>
-            </a:pPr>
-            <a:r>
-              <a:rPr sz="1400" b="0">
-                <a:solidFill>
-                  <a:srgbClr val="1A1A1A"/>
-                </a:solidFill>
-                <a:latin typeface="Helvetica Neue"/>
-              </a:rPr>
-              <a:t>Exactly one of Tunix's 36 declared dependencies is TPU-bound.</a:t>
-            </a:r>
-          </a:p>
-          <a:p>
-            <a:pPr algn="l">
-              <a:spcAft>
-                <a:spcPts val="600"/>
-              </a:spcAft>
-            </a:pPr>
-            <a:r>
-              <a:rPr sz="1400" b="0">
-                <a:solidFill>
-                  <a:srgbClr val="1A1A1A"/>
-                </a:solidFill>
-                <a:latin typeface="Helvetica Neue"/>
-              </a:rPr>
-              <a:t>Swapping it is the whole port.</a:t>
-            </a:r>
-          </a:p>
-        </p:txBody>
-      </p:sp>
-      <p:sp>
-        <p:nvSpPr>
-          <p:cNvPr id="12" name="TextBox 11"/>
-          <p:cNvSpPr txBox="1"/>
-          <p:nvPr/>
-        </p:nvSpPr>
-        <p:spPr>
-          <a:xfrm>
-            <a:off x="6309360" y="3931920"/>
-            <a:ext cx="5394960" cy="411480"/>
-          </a:xfrm>
-          <a:prstGeom prst="rect">
-            <a:avLst/>
-          </a:prstGeom>
-          <a:noFill/>
-        </p:spPr>
-        <p:txBody>
-          <a:bodyPr wrap="square" anchor="t">
-            <a:spAutoFit/>
-          </a:bodyPr>
-          <a:lstStyle/>
-          <a:p>
-            <a:pPr algn="l">
-              <a:spcAft>
-                <a:spcPts val="600"/>
-              </a:spcAft>
-            </a:pPr>
-            <a:r>
-              <a:rPr sz="1700" b="1">
-                <a:solidFill>
-                  <a:srgbClr val="E8590C"/>
-                </a:solidFill>
-                <a:latin typeface="Helvetica Neue"/>
-              </a:rPr>
-              <a:t>Cost, and the recommendation</a:t>
-            </a:r>
-          </a:p>
-        </p:txBody>
-      </p:sp>
-      <p:graphicFrame>
-        <p:nvGraphicFramePr>
-          <p:cNvPr id="13" name="Table 12"/>
-          <p:cNvGraphicFramePr>
-            <a:graphicFrameLocks noGrp="1"/>
-          </p:cNvGraphicFramePr>
-          <p:nvPr/>
-        </p:nvGraphicFramePr>
-        <p:xfrm>
-          <a:off x="6309360" y="4315968"/>
-          <a:ext cx="5394960" cy="658368"/>
-        </p:xfrm>
-        <a:graphic>
-          <a:graphicData uri="http://schemas.openxmlformats.org/drawingml/2006/table">
-            <a:tbl>
-              <a:tblPr firstRow="1" bandRow="1">
-                <a:tableStyleId>{5C22544A-7EE6-4342-B048-85BDC9FD1C3A}</a:tableStyleId>
-              </a:tblPr>
-              <a:tblGrid>
-                <a:gridCol w="2651760"/>
-                <a:gridCol w="914400"/>
-                <a:gridCol w="914400"/>
-                <a:gridCol w="914400"/>
-              </a:tblGrid>
-              <a:tr h="329184">
+              <a:tr h="301752">
                 <a:tc>
                   <a:txBody>
                     <a:bodyPr/>
@@ -6844,13 +6010,13 @@
                           </a:solidFill>
                           <a:latin typeface="Helvetica Neue"/>
                         </a:rPr>
-                        <a:t>USD per 1 000 steps</a:t>
+                        <a:t>Qwen3-0.6B · bs 1 · seq 1024</a:t>
                       </a:r>
                     </a:p>
                   </a:txBody>
-                  <a:tcPr anchor="ctr" marL="91440" marT="18288" marB="18288">
+                  <a:tcPr anchor="ctr" marL="82296" marR="82296" marT="9144" marB="9144">
                     <a:solidFill>
-                      <a:srgbClr val="E8590C"/>
+                      <a:srgbClr val="15171A"/>
                     </a:solidFill>
                   </a:tcPr>
                 </a:tc>
@@ -6871,9 +6037,9 @@
                       </a:r>
                     </a:p>
                   </a:txBody>
-                  <a:tcPr anchor="ctr" marL="91440" marT="18288" marB="18288">
+                  <a:tcPr anchor="ctr" marL="82296" marR="82296" marT="9144" marB="9144">
                     <a:solidFill>
-                      <a:srgbClr val="E8590C"/>
+                      <a:srgbClr val="15171A"/>
                     </a:solidFill>
                   </a:tcPr>
                 </a:tc>
@@ -6890,13 +6056,13 @@
                           </a:solidFill>
                           <a:latin typeface="Helvetica Neue"/>
                         </a:rPr>
-                        <a:t>TPU 8×</a:t>
+                        <a:t>GPU GH200</a:t>
                       </a:r>
                     </a:p>
                   </a:txBody>
-                  <a:tcPr anchor="ctr" marL="91440" marT="18288" marB="18288">
+                  <a:tcPr anchor="ctr" marL="82296" marR="82296" marT="9144" marB="9144">
                     <a:solidFill>
-                      <a:srgbClr val="E8590C"/>
+                      <a:srgbClr val="15171A"/>
                     </a:solidFill>
                   </a:tcPr>
                 </a:tc>
@@ -6913,18 +6079,18 @@
                           </a:solidFill>
                           <a:latin typeface="Helvetica Neue"/>
                         </a:rPr>
-                        <a:t>GH200</a:t>
+                        <a:t>TPU v5e 2×4</a:t>
                       </a:r>
                     </a:p>
                   </a:txBody>
-                  <a:tcPr anchor="ctr" marL="91440" marT="18288" marB="18288">
+                  <a:tcPr anchor="ctr" marL="82296" marR="82296" marT="9144" marB="9144">
                     <a:solidFill>
-                      <a:srgbClr val="E8590C"/>
+                      <a:srgbClr val="15171A"/>
                     </a:solidFill>
                   </a:tcPr>
                 </a:tc>
               </a:tr>
-              <a:tr h="329184">
+              <a:tr h="301752">
                 <a:tc>
                   <a:txBody>
                     <a:bodyPr/>
@@ -6934,15 +6100,15 @@
                       <a:r>
                         <a:rPr sz="1200">
                           <a:solidFill>
-                            <a:srgbClr val="1A1A1A"/>
+                            <a:srgbClr val="15171A"/>
                           </a:solidFill>
                           <a:latin typeface="Helvetica Neue"/>
                         </a:rPr>
-                        <a:t>same workload, list prices</a:t>
+                        <a:t>chips</a:t>
                       </a:r>
                     </a:p>
                   </a:txBody>
-                  <a:tcPr anchor="ctr" marL="91440" marT="18288" marB="18288">
+                  <a:tcPr anchor="ctr" marL="82296" marR="82296" marT="9144" marB="9144">
                     <a:solidFill>
                       <a:srgbClr val="FFFFFF"/>
                     </a:solidFill>
@@ -6957,15 +6123,86 @@
                       <a:r>
                         <a:rPr sz="1200">
                           <a:solidFill>
-                            <a:srgbClr val="1A1A1A"/>
+                            <a:srgbClr val="15171A"/>
                           </a:solidFill>
                           <a:latin typeface="Helvetica Neue"/>
                         </a:rPr>
-                        <a:t>$6.05</a:t>
+                        <a:t>—</a:t>
                       </a:r>
                     </a:p>
                   </a:txBody>
-                  <a:tcPr anchor="ctr" marL="91440" marT="18288" marB="18288">
+                  <a:tcPr anchor="ctr" marL="82296" marR="82296" marT="9144" marB="9144">
+                    <a:solidFill>
+                      <a:srgbClr val="FFFFFF"/>
+                    </a:solidFill>
+                  </a:tcPr>
+                </a:tc>
+                <a:tc>
+                  <a:txBody>
+                    <a:bodyPr/>
+                    <a:lstStyle/>
+                    <a:p>
+                      <a:pPr algn="r"/>
+                      <a:r>
+                        <a:rPr sz="1200" b="1">
+                          <a:solidFill>
+                            <a:srgbClr val="E8590C"/>
+                          </a:solidFill>
+                          <a:latin typeface="Helvetica Neue"/>
+                        </a:rPr>
+                        <a:t>1</a:t>
+                      </a:r>
+                    </a:p>
+                  </a:txBody>
+                  <a:tcPr anchor="ctr" marL="82296" marR="82296" marT="9144" marB="9144">
+                    <a:solidFill>
+                      <a:srgbClr val="FEF3EA"/>
+                    </a:solidFill>
+                  </a:tcPr>
+                </a:tc>
+                <a:tc>
+                  <a:txBody>
+                    <a:bodyPr/>
+                    <a:lstStyle/>
+                    <a:p>
+                      <a:pPr algn="r"/>
+                      <a:r>
+                        <a:rPr sz="1200">
+                          <a:solidFill>
+                            <a:srgbClr val="15171A"/>
+                          </a:solidFill>
+                          <a:latin typeface="Helvetica Neue"/>
+                        </a:rPr>
+                        <a:t>8</a:t>
+                      </a:r>
+                    </a:p>
+                  </a:txBody>
+                  <a:tcPr anchor="ctr" marL="82296" marR="82296" marT="9144" marB="9144">
+                    <a:solidFill>
+                      <a:srgbClr val="FFFFFF"/>
+                    </a:solidFill>
+                  </a:tcPr>
+                </a:tc>
+              </a:tr>
+              <a:tr h="301752">
+                <a:tc>
+                  <a:txBody>
+                    <a:bodyPr/>
+                    <a:lstStyle/>
+                    <a:p>
+                      <a:pPr algn="l"/>
+                      <a:r>
+                        <a:rPr sz="1200">
+                          <a:solidFill>
+                            <a:srgbClr val="15171A"/>
+                          </a:solidFill>
+                          <a:latin typeface="Helvetica Neue"/>
+                        </a:rPr>
+                        <a:t>median step</a:t>
+                      </a:r>
+                    </a:p>
+                  </a:txBody>
+                  <a:tcPr anchor="ctr" marL="82296" marR="82296" marT="9144" marB="9144">
                     <a:solidFill>
                       <a:srgbClr val="FFFFFF"/>
                     </a:solidFill>
@@ -6980,15 +6217,86 @@
                       <a:r>
                         <a:rPr sz="1200">
                           <a:solidFill>
-                            <a:srgbClr val="1A1A1A"/>
+                            <a:srgbClr val="15171A"/>
                           </a:solidFill>
                           <a:latin typeface="Helvetica Neue"/>
                         </a:rPr>
-                        <a:t>$1.03</a:t>
+                        <a:t>18.99 s</a:t>
                       </a:r>
                     </a:p>
                   </a:txBody>
-                  <a:tcPr anchor="ctr" marL="91440" marT="18288" marB="18288">
+                  <a:tcPr anchor="ctr" marL="82296" marR="82296" marT="9144" marB="9144">
+                    <a:solidFill>
+                      <a:srgbClr val="FFFFFF"/>
+                    </a:solidFill>
+                  </a:tcPr>
+                </a:tc>
+                <a:tc>
+                  <a:txBody>
+                    <a:bodyPr/>
+                    <a:lstStyle/>
+                    <a:p>
+                      <a:pPr algn="r"/>
+                      <a:r>
+                        <a:rPr sz="1200" b="1">
+                          <a:solidFill>
+                            <a:srgbClr val="E8590C"/>
+                          </a:solidFill>
+                          <a:latin typeface="Helvetica Neue"/>
+                        </a:rPr>
+                        <a:t>0.0798 s</a:t>
+                      </a:r>
+                    </a:p>
+                  </a:txBody>
+                  <a:tcPr anchor="ctr" marL="82296" marR="82296" marT="9144" marB="9144">
+                    <a:solidFill>
+                      <a:srgbClr val="FEF3EA"/>
+                    </a:solidFill>
+                  </a:tcPr>
+                </a:tc>
+                <a:tc>
+                  <a:txBody>
+                    <a:bodyPr/>
+                    <a:lstStyle/>
+                    <a:p>
+                      <a:pPr algn="r"/>
+                      <a:r>
+                        <a:rPr sz="1200">
+                          <a:solidFill>
+                            <a:srgbClr val="15171A"/>
+                          </a:solidFill>
+                          <a:latin typeface="Helvetica Neue"/>
+                        </a:rPr>
+                        <a:t>0.0800 s</a:t>
+                      </a:r>
+                    </a:p>
+                  </a:txBody>
+                  <a:tcPr anchor="ctr" marL="82296" marR="82296" marT="9144" marB="9144">
+                    <a:solidFill>
+                      <a:srgbClr val="FFFFFF"/>
+                    </a:solidFill>
+                  </a:tcPr>
+                </a:tc>
+              </a:tr>
+              <a:tr h="301752">
+                <a:tc>
+                  <a:txBody>
+                    <a:bodyPr/>
+                    <a:lstStyle/>
+                    <a:p>
+                      <a:pPr algn="l"/>
+                      <a:r>
+                        <a:rPr sz="1200">
+                          <a:solidFill>
+                            <a:srgbClr val="15171A"/>
+                          </a:solidFill>
+                          <a:latin typeface="Helvetica Neue"/>
+                        </a:rPr>
+                        <a:t>throughput</a:t>
+                      </a:r>
+                    </a:p>
+                  </a:txBody>
+                  <a:tcPr anchor="ctr" marL="82296" marR="82296" marT="9144" marB="9144">
                     <a:solidFill>
                       <a:srgbClr val="FFFFFF"/>
                     </a:solidFill>
@@ -7003,7 +6311,312 @@
                       <a:r>
                         <a:rPr sz="1200">
                           <a:solidFill>
-                            <a:srgbClr val="1A1A1A"/>
+                            <a:srgbClr val="15171A"/>
+                          </a:solidFill>
+                          <a:latin typeface="Helvetica Neue"/>
+                        </a:rPr>
+                        <a:t>54</a:t>
+                      </a:r>
+                    </a:p>
+                  </a:txBody>
+                  <a:tcPr anchor="ctr" marL="82296" marR="82296" marT="9144" marB="9144">
+                    <a:solidFill>
+                      <a:srgbClr val="FFFFFF"/>
+                    </a:solidFill>
+                  </a:tcPr>
+                </a:tc>
+                <a:tc>
+                  <a:txBody>
+                    <a:bodyPr/>
+                    <a:lstStyle/>
+                    <a:p>
+                      <a:pPr algn="r"/>
+                      <a:r>
+                        <a:rPr sz="1200" b="1">
+                          <a:solidFill>
+                            <a:srgbClr val="E8590C"/>
+                          </a:solidFill>
+                          <a:latin typeface="Helvetica Neue"/>
+                        </a:rPr>
+                        <a:t>12,834</a:t>
+                      </a:r>
+                    </a:p>
+                  </a:txBody>
+                  <a:tcPr anchor="ctr" marL="82296" marR="82296" marT="9144" marB="9144">
+                    <a:solidFill>
+                      <a:srgbClr val="FEF3EA"/>
+                    </a:solidFill>
+                  </a:tcPr>
+                </a:tc>
+                <a:tc>
+                  <a:txBody>
+                    <a:bodyPr/>
+                    <a:lstStyle/>
+                    <a:p>
+                      <a:pPr algn="r"/>
+                      <a:r>
+                        <a:rPr sz="1200">
+                          <a:solidFill>
+                            <a:srgbClr val="15171A"/>
+                          </a:solidFill>
+                          <a:latin typeface="Helvetica Neue"/>
+                        </a:rPr>
+                        <a:t>12,804</a:t>
+                      </a:r>
+                    </a:p>
+                  </a:txBody>
+                  <a:tcPr anchor="ctr" marL="82296" marR="82296" marT="9144" marB="9144">
+                    <a:solidFill>
+                      <a:srgbClr val="FFFFFF"/>
+                    </a:solidFill>
+                  </a:tcPr>
+                </a:tc>
+              </a:tr>
+              <a:tr h="301752">
+                <a:tc>
+                  <a:txBody>
+                    <a:bodyPr/>
+                    <a:lstStyle/>
+                    <a:p>
+                      <a:pPr algn="l"/>
+                      <a:r>
+                        <a:rPr sz="1200">
+                          <a:solidFill>
+                            <a:srgbClr val="15171A"/>
+                          </a:solidFill>
+                          <a:latin typeface="Helvetica Neue"/>
+                        </a:rPr>
+                        <a:t>speedup vs CPU</a:t>
+                      </a:r>
+                    </a:p>
+                  </a:txBody>
+                  <a:tcPr anchor="ctr" marL="82296" marR="82296" marT="9144" marB="9144">
+                    <a:solidFill>
+                      <a:srgbClr val="FFFFFF"/>
+                    </a:solidFill>
+                  </a:tcPr>
+                </a:tc>
+                <a:tc>
+                  <a:txBody>
+                    <a:bodyPr/>
+                    <a:lstStyle/>
+                    <a:p>
+                      <a:pPr algn="r"/>
+                      <a:r>
+                        <a:rPr sz="1200">
+                          <a:solidFill>
+                            <a:srgbClr val="15171A"/>
+                          </a:solidFill>
+                          <a:latin typeface="Helvetica Neue"/>
+                        </a:rPr>
+                        <a:t>1.0×</a:t>
+                      </a:r>
+                    </a:p>
+                  </a:txBody>
+                  <a:tcPr anchor="ctr" marL="82296" marR="82296" marT="9144" marB="9144">
+                    <a:solidFill>
+                      <a:srgbClr val="FFFFFF"/>
+                    </a:solidFill>
+                  </a:tcPr>
+                </a:tc>
+                <a:tc>
+                  <a:txBody>
+                    <a:bodyPr/>
+                    <a:lstStyle/>
+                    <a:p>
+                      <a:pPr algn="r"/>
+                      <a:r>
+                        <a:rPr sz="1200" b="1">
+                          <a:solidFill>
+                            <a:srgbClr val="E8590C"/>
+                          </a:solidFill>
+                          <a:latin typeface="Helvetica Neue"/>
+                        </a:rPr>
+                        <a:t>238×</a:t>
+                      </a:r>
+                    </a:p>
+                  </a:txBody>
+                  <a:tcPr anchor="ctr" marL="82296" marR="82296" marT="9144" marB="9144">
+                    <a:solidFill>
+                      <a:srgbClr val="FEF3EA"/>
+                    </a:solidFill>
+                  </a:tcPr>
+                </a:tc>
+                <a:tc>
+                  <a:txBody>
+                    <a:bodyPr/>
+                    <a:lstStyle/>
+                    <a:p>
+                      <a:pPr algn="r"/>
+                      <a:r>
+                        <a:rPr sz="1200">
+                          <a:solidFill>
+                            <a:srgbClr val="15171A"/>
+                          </a:solidFill>
+                          <a:latin typeface="Helvetica Neue"/>
+                        </a:rPr>
+                        <a:t>237×</a:t>
+                      </a:r>
+                    </a:p>
+                  </a:txBody>
+                  <a:tcPr anchor="ctr" marL="82296" marR="82296" marT="9144" marB="9144">
+                    <a:solidFill>
+                      <a:srgbClr val="FFFFFF"/>
+                    </a:solidFill>
+                  </a:tcPr>
+                </a:tc>
+              </a:tr>
+              <a:tr h="301752">
+                <a:tc>
+                  <a:txBody>
+                    <a:bodyPr/>
+                    <a:lstStyle/>
+                    <a:p>
+                      <a:pPr algn="l"/>
+                      <a:r>
+                        <a:rPr sz="1200">
+                          <a:solidFill>
+                            <a:srgbClr val="15171A"/>
+                          </a:solidFill>
+                          <a:latin typeface="Helvetica Neue"/>
+                        </a:rPr>
+                        <a:t>peak memory</a:t>
+                      </a:r>
+                    </a:p>
+                  </a:txBody>
+                  <a:tcPr anchor="ctr" marL="82296" marR="82296" marT="9144" marB="9144">
+                    <a:solidFill>
+                      <a:srgbClr val="FFFFFF"/>
+                    </a:solidFill>
+                  </a:tcPr>
+                </a:tc>
+                <a:tc>
+                  <a:txBody>
+                    <a:bodyPr/>
+                    <a:lstStyle/>
+                    <a:p>
+                      <a:pPr algn="r"/>
+                      <a:r>
+                        <a:rPr sz="1200">
+                          <a:solidFill>
+                            <a:srgbClr val="15171A"/>
+                          </a:solidFill>
+                          <a:latin typeface="Helvetica Neue"/>
+                        </a:rPr>
+                        <a:t>66 %</a:t>
+                      </a:r>
+                    </a:p>
+                  </a:txBody>
+                  <a:tcPr anchor="ctr" marL="82296" marR="82296" marT="9144" marB="9144">
+                    <a:solidFill>
+                      <a:srgbClr val="FFFFFF"/>
+                    </a:solidFill>
+                  </a:tcPr>
+                </a:tc>
+                <a:tc>
+                  <a:txBody>
+                    <a:bodyPr/>
+                    <a:lstStyle/>
+                    <a:p>
+                      <a:pPr algn="r"/>
+                      <a:r>
+                        <a:rPr sz="1200" b="1">
+                          <a:solidFill>
+                            <a:srgbClr val="E8590C"/>
+                          </a:solidFill>
+                          <a:latin typeface="Helvetica Neue"/>
+                        </a:rPr>
+                        <a:t>5.0 %</a:t>
+                      </a:r>
+                    </a:p>
+                  </a:txBody>
+                  <a:tcPr anchor="ctr" marL="82296" marR="82296" marT="9144" marB="9144">
+                    <a:solidFill>
+                      <a:srgbClr val="FEF3EA"/>
+                    </a:solidFill>
+                  </a:tcPr>
+                </a:tc>
+                <a:tc>
+                  <a:txBody>
+                    <a:bodyPr/>
+                    <a:lstStyle/>
+                    <a:p>
+                      <a:pPr algn="r"/>
+                      <a:r>
+                        <a:rPr sz="1200">
+                          <a:solidFill>
+                            <a:srgbClr val="15171A"/>
+                          </a:solidFill>
+                          <a:latin typeface="Helvetica Neue"/>
+                        </a:rPr>
+                        <a:t>7.3 %</a:t>
+                      </a:r>
+                    </a:p>
+                  </a:txBody>
+                  <a:tcPr anchor="ctr" marL="82296" marR="82296" marT="9144" marB="9144">
+                    <a:solidFill>
+                      <a:srgbClr val="FFFFFF"/>
+                    </a:solidFill>
+                  </a:tcPr>
+                </a:tc>
+              </a:tr>
+              <a:tr h="301752">
+                <a:tc>
+                  <a:txBody>
+                    <a:bodyPr/>
+                    <a:lstStyle/>
+                    <a:p>
+                      <a:pPr algn="l"/>
+                      <a:r>
+                        <a:rPr sz="1200">
+                          <a:solidFill>
+                            <a:srgbClr val="15171A"/>
+                          </a:solidFill>
+                          <a:latin typeface="Helvetica Neue"/>
+                        </a:rPr>
+                        <a:t>USD / 1 000 steps</a:t>
+                      </a:r>
+                    </a:p>
+                  </a:txBody>
+                  <a:tcPr anchor="ctr" marL="82296" marR="82296" marT="9144" marB="9144">
+                    <a:solidFill>
+                      <a:srgbClr val="FFFFFF"/>
+                    </a:solidFill>
+                  </a:tcPr>
+                </a:tc>
+                <a:tc>
+                  <a:txBody>
+                    <a:bodyPr/>
+                    <a:lstStyle/>
+                    <a:p>
+                      <a:pPr algn="r"/>
+                      <a:r>
+                        <a:rPr sz="1200">
+                          <a:solidFill>
+                            <a:srgbClr val="15171A"/>
+                          </a:solidFill>
+                          <a:latin typeface="Helvetica Neue"/>
+                        </a:rPr>
+                        <a:t>$6.05</a:t>
+                      </a:r>
+                    </a:p>
+                  </a:txBody>
+                  <a:tcPr anchor="ctr" marL="82296" marR="82296" marT="9144" marB="9144">
+                    <a:solidFill>
+                      <a:srgbClr val="FFFFFF"/>
+                    </a:solidFill>
+                  </a:tcPr>
+                </a:tc>
+                <a:tc>
+                  <a:txBody>
+                    <a:bodyPr/>
+                    <a:lstStyle/>
+                    <a:p>
+                      <a:pPr algn="r"/>
+                      <a:r>
+                        <a:rPr sz="1200" b="1">
+                          <a:solidFill>
+                            <a:srgbClr val="E8590C"/>
                           </a:solidFill>
                           <a:latin typeface="Helvetica Neue"/>
                         </a:rPr>
@@ -7011,7 +6624,30 @@
                       </a:r>
                     </a:p>
                   </a:txBody>
-                  <a:tcPr anchor="ctr" marL="91440" marT="18288" marB="18288">
+                  <a:tcPr anchor="ctr" marL="82296" marR="82296" marT="9144" marB="9144">
+                    <a:solidFill>
+                      <a:srgbClr val="FEF3EA"/>
+                    </a:solidFill>
+                  </a:tcPr>
+                </a:tc>
+                <a:tc>
+                  <a:txBody>
+                    <a:bodyPr/>
+                    <a:lstStyle/>
+                    <a:p>
+                      <a:pPr algn="r"/>
+                      <a:r>
+                        <a:rPr sz="1200">
+                          <a:solidFill>
+                            <a:srgbClr val="15171A"/>
+                          </a:solidFill>
+                          <a:latin typeface="Helvetica Neue"/>
+                        </a:rPr>
+                        <a:t>$1.03</a:t>
+                      </a:r>
+                    </a:p>
+                  </a:txBody>
+                  <a:tcPr anchor="ctr" marL="82296" marR="82296" marT="9144" marB="9144">
                     <a:solidFill>
                       <a:srgbClr val="FFFFFF"/>
                     </a:solidFill>
@@ -7024,14 +6660,14 @@
       </p:graphicFrame>
       <p:sp>
         <p:nvSpPr>
-          <p:cNvPr id="14" name="TextBox 13"/>
+          <p:cNvPr id="7" name="TextBox 6"/>
           <p:cNvSpPr txBox="1"/>
           <p:nvPr/>
         </p:nvSpPr>
         <p:spPr>
           <a:xfrm>
-            <a:off x="6309360" y="5074920"/>
-            <a:ext cx="5394960" cy="1371600"/>
+            <a:off x="7955279" y="1691640"/>
+            <a:ext cx="3657600" cy="777240"/>
           </a:xfrm>
           <a:prstGeom prst="rect">
             <a:avLst/>
@@ -7046,79 +6682,31 @@
           <a:p>
             <a:pPr algn="l">
               <a:spcAft>
-                <a:spcPts val="600"/>
-              </a:spcAft>
-            </a:pPr>
-            <a:r>
-              <a:rPr sz="1300" b="0">
-                <a:solidFill>
-                  <a:srgbClr val="1A1A1A"/>
-                </a:solidFill>
-                <a:latin typeface="Helvetica Neue"/>
-              </a:rPr>
-              <a:t>Identical step time, 7.9× the price: eight v5e chips against one</a:t>
-            </a:r>
-          </a:p>
-          <a:p>
-            <a:pPr algn="l">
-              <a:spcAft>
-                <a:spcPts val="600"/>
-              </a:spcAft>
-            </a:pPr>
-            <a:r>
-              <a:rPr sz="1300" b="0">
-                <a:solidFill>
-                  <a:srgbClr val="1A1A1A"/>
-                </a:solidFill>
-                <a:latin typeface="Helvetica Neue"/>
-              </a:rPr>
-              <a:t>Hopper. Do not scale out — amortise. Raise batch only until the chip is</a:t>
-            </a:r>
-          </a:p>
-          <a:p>
-            <a:pPr algn="l">
-              <a:spcAft>
-                <a:spcPts val="600"/>
-              </a:spcAft>
-            </a:pPr>
-            <a:r>
-              <a:rPr sz="1300" b="0">
-                <a:solidFill>
-                  <a:srgbClr val="1A1A1A"/>
-                </a:solidFill>
-                <a:latin typeface="Helvetica Neue"/>
-              </a:rPr>
-              <a:t>occupied, then attack fixed cost: persistent compile cache, warm workers</a:t>
-            </a:r>
-          </a:p>
-          <a:p>
-            <a:pPr algn="l">
-              <a:spcAft>
-                <a:spcPts val="600"/>
-              </a:spcAft>
-            </a:pPr>
-            <a:r>
-              <a:rPr sz="1300" b="0">
-                <a:solidFill>
-                  <a:srgbClr val="1A1A1A"/>
-                </a:solidFill>
-                <a:latin typeface="Helvetica Neue"/>
-              </a:rPr>
-              <a:t>instead of a pod per job, file cache on anything reading a checkpoint.</a:t>
-            </a:r>
-          </a:p>
-        </p:txBody>
-      </p:sp>
-      <p:sp>
-        <p:nvSpPr>
-          <p:cNvPr id="15" name="TextBox 14"/>
+                <a:spcPts val="0"/>
+              </a:spcAft>
+            </a:pPr>
+            <a:r>
+              <a:rPr sz="4000" b="1" i="0">
+                <a:solidFill>
+                  <a:srgbClr val="E8590C"/>
+                </a:solidFill>
+                <a:latin typeface="Helvetica Neue"/>
+              </a:rPr>
+              <a:t>0.23 %</a:t>
+            </a:r>
+          </a:p>
+        </p:txBody>
+      </p:sp>
+      <p:sp>
+        <p:nvSpPr>
+          <p:cNvPr id="8" name="TextBox 7"/>
           <p:cNvSpPr txBox="1"/>
           <p:nvPr/>
         </p:nvSpPr>
         <p:spPr>
           <a:xfrm>
-            <a:off x="548640" y="5989320"/>
-            <a:ext cx="11155680" cy="457200"/>
+            <a:off x="7955279" y="2350008"/>
+            <a:ext cx="3657600" cy="822960"/>
           </a:xfrm>
           <a:prstGeom prst="rect">
             <a:avLst/>
@@ -7131,15 +6719,1556 @@
           </a:bodyPr>
           <a:lstStyle/>
           <a:p>
+            <a:pPr algn="l">
+              <a:spcAft>
+                <a:spcPts val="200"/>
+              </a:spcAft>
+            </a:pPr>
+            <a:r>
+              <a:rPr sz="1200" b="0" i="0">
+                <a:solidFill>
+                  <a:srgbClr val="717A85"/>
+                </a:solidFill>
+                <a:latin typeface="Helvetica Neue"/>
+              </a:rPr>
+              <a:t>difference in step time between</a:t>
+            </a:r>
+          </a:p>
+          <a:p>
+            <a:pPr algn="l">
+              <a:spcAft>
+                <a:spcPts val="200"/>
+              </a:spcAft>
+            </a:pPr>
+            <a:r>
+              <a:rPr sz="1200" b="0" i="0">
+                <a:solidFill>
+                  <a:srgbClr val="717A85"/>
+                </a:solidFill>
+                <a:latin typeface="Helvetica Neue"/>
+              </a:rPr>
+              <a:t>one GH200 and eight v5e chips</a:t>
+            </a:r>
+          </a:p>
+        </p:txBody>
+      </p:sp>
+      <p:sp>
+        <p:nvSpPr>
+          <p:cNvPr id="9" name="TextBox 8"/>
+          <p:cNvSpPr txBox="1"/>
+          <p:nvPr/>
+        </p:nvSpPr>
+        <p:spPr>
+          <a:xfrm>
+            <a:off x="7955279" y="2880360"/>
+            <a:ext cx="3657600" cy="777240"/>
+          </a:xfrm>
+          <a:prstGeom prst="rect">
+            <a:avLst/>
+          </a:prstGeom>
+          <a:noFill/>
+        </p:spPr>
+        <p:txBody>
+          <a:bodyPr wrap="square" anchor="t">
+            <a:spAutoFit/>
+          </a:bodyPr>
+          <a:lstStyle/>
+          <a:p>
+            <a:pPr algn="l">
+              <a:spcAft>
+                <a:spcPts val="0"/>
+              </a:spcAft>
+            </a:pPr>
+            <a:r>
+              <a:rPr sz="4000" b="1" i="0">
+                <a:solidFill>
+                  <a:srgbClr val="E8590C"/>
+                </a:solidFill>
+                <a:latin typeface="Helvetica Neue"/>
+              </a:rPr>
+              <a:t>14.6×</a:t>
+            </a:r>
+          </a:p>
+        </p:txBody>
+      </p:sp>
+      <p:sp>
+        <p:nvSpPr>
+          <p:cNvPr id="10" name="TextBox 9"/>
+          <p:cNvSpPr txBox="1"/>
+          <p:nvPr/>
+        </p:nvSpPr>
+        <p:spPr>
+          <a:xfrm>
+            <a:off x="7955279" y="3538728"/>
+            <a:ext cx="3657600" cy="822960"/>
+          </a:xfrm>
+          <a:prstGeom prst="rect">
+            <a:avLst/>
+          </a:prstGeom>
+          <a:noFill/>
+        </p:spPr>
+        <p:txBody>
+          <a:bodyPr wrap="square" anchor="t">
+            <a:spAutoFit/>
+          </a:bodyPr>
+          <a:lstStyle/>
+          <a:p>
+            <a:pPr algn="l">
+              <a:spcAft>
+                <a:spcPts val="200"/>
+              </a:spcAft>
+            </a:pPr>
+            <a:r>
+              <a:rPr sz="1200" b="0" i="0">
+                <a:solidFill>
+                  <a:srgbClr val="717A85"/>
+                </a:solidFill>
+                <a:latin typeface="Helvetica Neue"/>
+              </a:rPr>
+              <a:t>faster checkpoint load from one</a:t>
+            </a:r>
+          </a:p>
+          <a:p>
+            <a:pPr algn="l">
+              <a:spcAft>
+                <a:spcPts val="200"/>
+              </a:spcAft>
+            </a:pPr>
+            <a:r>
+              <a:rPr sz="1200" b="0" i="0">
+                <a:solidFill>
+                  <a:srgbClr val="717A85"/>
+                </a:solidFill>
+                <a:latin typeface="Helvetica Neue"/>
+              </a:rPr>
+              <a:t>manifest line — 31 % off wall clock</a:t>
+            </a:r>
+          </a:p>
+        </p:txBody>
+      </p:sp>
+      <p:pic>
+        <p:nvPicPr>
+          <p:cNvPr id="11" name="Picture 10" descr="slide4-comparison.png"/>
+          <p:cNvPicPr>
+            <a:picLocks noChangeAspect="1"/>
+          </p:cNvPicPr>
+          <p:nvPr/>
+        </p:nvPicPr>
+        <p:blipFill>
+          <a:blip r:embed="rId2"/>
+          <a:stretch>
+            <a:fillRect/>
+          </a:stretch>
+        </p:blipFill>
+        <p:spPr>
+          <a:xfrm>
+            <a:off x="566928" y="3913632"/>
+            <a:ext cx="6766560" cy="2829483"/>
+          </a:xfrm>
+          <a:prstGeom prst="rect">
+            <a:avLst/>
+          </a:prstGeom>
+        </p:spPr>
+      </p:pic>
+      <p:sp>
+        <p:nvSpPr>
+          <p:cNvPr id="12" name="Rounded Rectangle 11"/>
+          <p:cNvSpPr/>
+          <p:nvPr/>
+        </p:nvSpPr>
+        <p:spPr>
+          <a:xfrm>
+            <a:off x="7955279" y="4160520"/>
+            <a:ext cx="3657600" cy="2011680"/>
+          </a:xfrm>
+          <a:prstGeom prst="roundRect">
+            <a:avLst>
+              <a:gd name="adj" fmla="val 4000"/>
+            </a:avLst>
+          </a:prstGeom>
+          <a:solidFill>
+            <a:srgbClr val="FEF3EA"/>
+          </a:solidFill>
+          <a:ln w="9525">
+            <a:solidFill>
+              <a:srgbClr val="E6E9EC"/>
+            </a:solidFill>
+          </a:ln>
+          <a:effectLst/>
+        </p:spPr>
+        <p:style>
+          <a:lnRef idx="1">
+            <a:schemeClr val="accent1"/>
+          </a:lnRef>
+          <a:fillRef idx="3">
+            <a:schemeClr val="accent1"/>
+          </a:fillRef>
+          <a:effectRef idx="2">
+            <a:schemeClr val="accent1"/>
+          </a:effectRef>
+          <a:fontRef idx="minor">
+            <a:schemeClr val="lt1"/>
+          </a:fontRef>
+        </p:style>
+        <p:txBody>
+          <a:bodyPr rtlCol="0" anchor="ctr"/>
+          <a:lstStyle/>
+          <a:p>
+            <a:pPr algn="ctr"/>
+          </a:p>
+        </p:txBody>
+      </p:sp>
+      <p:sp>
+        <p:nvSpPr>
+          <p:cNvPr id="13" name="TextBox 12"/>
+          <p:cNvSpPr txBox="1"/>
+          <p:nvPr/>
+        </p:nvSpPr>
+        <p:spPr>
+          <a:xfrm>
+            <a:off x="8229600" y="4343400"/>
+            <a:ext cx="3200400" cy="274320"/>
+          </a:xfrm>
+          <a:prstGeom prst="rect">
+            <a:avLst/>
+          </a:prstGeom>
+          <a:noFill/>
+        </p:spPr>
+        <p:txBody>
+          <a:bodyPr wrap="square" anchor="t">
+            <a:spAutoFit/>
+          </a:bodyPr>
+          <a:lstStyle/>
+          <a:p>
+            <a:pPr algn="l">
+              <a:spcAft>
+                <a:spcPts val="500"/>
+              </a:spcAft>
+            </a:pPr>
+            <a:r>
+              <a:rPr sz="1300" b="1" i="0">
+                <a:solidFill>
+                  <a:srgbClr val="E8590C"/>
+                </a:solidFill>
+                <a:latin typeface="Helvetica Neue"/>
+              </a:rPr>
+              <a:t>The control</a:t>
+            </a:r>
+          </a:p>
+        </p:txBody>
+      </p:sp>
+      <p:sp>
+        <p:nvSpPr>
+          <p:cNvPr id="14" name="TextBox 13"/>
+          <p:cNvSpPr txBox="1"/>
+          <p:nvPr/>
+        </p:nvSpPr>
+        <p:spPr>
+          <a:xfrm>
+            <a:off x="8229600" y="4681728"/>
+            <a:ext cx="3200400" cy="1463040"/>
+          </a:xfrm>
+          <a:prstGeom prst="rect">
+            <a:avLst/>
+          </a:prstGeom>
+          <a:noFill/>
+        </p:spPr>
+        <p:txBody>
+          <a:bodyPr wrap="square" anchor="t">
+            <a:spAutoFit/>
+          </a:bodyPr>
+          <a:lstStyle/>
+          <a:p>
+            <a:pPr algn="l">
+              <a:spcAft>
+                <a:spcPts val="200"/>
+              </a:spcAft>
+            </a:pPr>
+            <a:r>
+              <a:rPr sz="1150" b="0" i="0">
+                <a:solidFill>
+                  <a:srgbClr val="15171A"/>
+                </a:solidFill>
+                <a:latin typeface="Helvetica Neue"/>
+              </a:rPr>
+              <a:t>Median step time before and</a:t>
+            </a:r>
+          </a:p>
+          <a:p>
+            <a:pPr algn="l">
+              <a:spcAft>
+                <a:spcPts val="200"/>
+              </a:spcAft>
+            </a:pPr>
+            <a:r>
+              <a:rPr sz="1150" b="0" i="0">
+                <a:solidFill>
+                  <a:srgbClr val="15171A"/>
+                </a:solidFill>
+                <a:latin typeface="Helvetica Neue"/>
+              </a:rPr>
+              <a:t>after the cache:</a:t>
+            </a:r>
+          </a:p>
+          <a:p>
+            <a:pPr algn="l">
+              <a:spcAft>
+                <a:spcPts val="200"/>
+              </a:spcAft>
+            </a:pPr>
+            <a:r>
+              <a:rPr sz="1150" b="0" i="0">
+                <a:solidFill>
+                  <a:srgbClr val="15171A"/>
+                </a:solidFill>
+                <a:latin typeface="Helvetica Neue"/>
+              </a:rPr>
+              <a:t/>
+            </a:r>
+          </a:p>
+          <a:p>
+            <a:pPr algn="l">
+              <a:spcAft>
+                <a:spcPts val="200"/>
+              </a:spcAft>
+            </a:pPr>
+            <a:r>
+              <a:rPr sz="1150" b="0" i="0">
+                <a:solidFill>
+                  <a:srgbClr val="15171A"/>
+                </a:solidFill>
+                <a:latin typeface="Helvetica Neue"/>
+              </a:rPr>
+              <a:t>1.75122 s  →  1.75117 s</a:t>
+            </a:r>
+          </a:p>
+          <a:p>
+            <a:pPr algn="l">
+              <a:spcAft>
+                <a:spcPts val="200"/>
+              </a:spcAft>
+            </a:pPr>
+            <a:r>
+              <a:rPr sz="1150" b="0" i="0">
+                <a:solidFill>
+                  <a:srgbClr val="15171A"/>
+                </a:solidFill>
+                <a:latin typeface="Helvetica Neue"/>
+              </a:rPr>
+              <a:t/>
+            </a:r>
+          </a:p>
+          <a:p>
+            <a:pPr algn="l">
+              <a:spcAft>
+                <a:spcPts val="200"/>
+              </a:spcAft>
+            </a:pPr>
+            <a:r>
+              <a:rPr sz="1150" b="0" i="0">
+                <a:solidFill>
+                  <a:srgbClr val="15171A"/>
+                </a:solidFill>
+                <a:latin typeface="Helvetica Neue"/>
+              </a:rPr>
+              <a:t>The computation did not move.</a:t>
+            </a:r>
+          </a:p>
+          <a:p>
+            <a:pPr algn="l">
+              <a:spcAft>
+                <a:spcPts val="200"/>
+              </a:spcAft>
+            </a:pPr>
+            <a:r>
+              <a:rPr sz="1150" b="0" i="0">
+                <a:solidFill>
+                  <a:srgbClr val="15171A"/>
+                </a:solidFill>
+                <a:latin typeface="Helvetica Neue"/>
+              </a:rPr>
+              <a:t>Only I/O did — so the saving is</a:t>
+            </a:r>
+          </a:p>
+          <a:p>
+            <a:pPr algn="l">
+              <a:spcAft>
+                <a:spcPts val="200"/>
+              </a:spcAft>
+            </a:pPr>
+            <a:r>
+              <a:rPr sz="1150" b="0" i="0">
+                <a:solidFill>
+                  <a:srgbClr val="15171A"/>
+                </a:solidFill>
+                <a:latin typeface="Helvetica Neue"/>
+              </a:rPr>
+              <a:t>attributable, not noise.</a:t>
+            </a:r>
+          </a:p>
+        </p:txBody>
+      </p:sp>
+    </p:spTree>
+  </p:cSld>
+  <p:clrMapOvr>
+    <a:masterClrMapping/>
+  </p:clrMapOvr>
+</p:sld>
+</file>
+
+<file path=ppt/slides/slide5.xml><?xml version="1.0" encoding="utf-8"?>
+<p:sld xmlns:a="http://schemas.openxmlformats.org/drawingml/2006/main" xmlns:p="http://schemas.openxmlformats.org/presentationml/2006/main" xmlns:r="http://schemas.openxmlformats.org/officeDocument/2006/relationships">
+  <p:cSld>
+    <p:spTree>
+      <p:nvGrpSpPr>
+        <p:cNvPr id="1" name=""/>
+        <p:cNvGrpSpPr/>
+        <p:nvPr/>
+      </p:nvGrpSpPr>
+      <p:grpSpPr/>
+      <p:sp>
+        <p:nvSpPr>
+          <p:cNvPr id="2" name="Rectangle 1"/>
+          <p:cNvSpPr/>
+          <p:nvPr/>
+        </p:nvSpPr>
+        <p:spPr>
+          <a:xfrm>
+            <a:off x="0" y="0"/>
+            <a:ext cx="146304" cy="6858000"/>
+          </a:xfrm>
+          <a:prstGeom prst="rect">
+            <a:avLst/>
+          </a:prstGeom>
+          <a:solidFill>
+            <a:srgbClr val="E8590C"/>
+          </a:solidFill>
+          <a:ln>
+            <a:noFill/>
+          </a:ln>
+          <a:effectLst/>
+        </p:spPr>
+        <p:style>
+          <a:lnRef idx="1">
+            <a:schemeClr val="accent1"/>
+          </a:lnRef>
+          <a:fillRef idx="3">
+            <a:schemeClr val="accent1"/>
+          </a:fillRef>
+          <a:effectRef idx="2">
+            <a:schemeClr val="accent1"/>
+          </a:effectRef>
+          <a:fontRef idx="minor">
+            <a:schemeClr val="lt1"/>
+          </a:fontRef>
+        </p:style>
+        <p:txBody>
+          <a:bodyPr rtlCol="0" anchor="ctr"/>
+          <a:lstStyle/>
+          <a:p>
+            <a:pPr algn="ctr"/>
+          </a:p>
+        </p:txBody>
+      </p:sp>
+      <p:sp>
+        <p:nvSpPr>
+          <p:cNvPr id="3" name="TextBox 2"/>
+          <p:cNvSpPr txBox="1"/>
+          <p:nvPr/>
+        </p:nvSpPr>
+        <p:spPr>
+          <a:xfrm>
+            <a:off x="10881360" y="45720"/>
+            <a:ext cx="1188720" cy="1371600"/>
+          </a:xfrm>
+          <a:prstGeom prst="rect">
+            <a:avLst/>
+          </a:prstGeom>
+          <a:noFill/>
+        </p:spPr>
+        <p:txBody>
+          <a:bodyPr wrap="none">
+            <a:spAutoFit/>
+          </a:bodyPr>
+          <a:lstStyle/>
+          <a:p>
+            <a:pPr algn="r"/>
+            <a:r>
+              <a:rPr sz="7200" b="1">
+                <a:solidFill>
+                  <a:srgbClr val="E6E9EC"/>
+                </a:solidFill>
+                <a:latin typeface="Helvetica Neue"/>
+              </a:rPr>
+              <a:t>5</a:t>
+            </a:r>
+          </a:p>
+        </p:txBody>
+      </p:sp>
+      <p:sp>
+        <p:nvSpPr>
+          <p:cNvPr id="4" name="TextBox 3"/>
+          <p:cNvSpPr txBox="1"/>
+          <p:nvPr/>
+        </p:nvSpPr>
+        <p:spPr>
+          <a:xfrm>
+            <a:off x="566928" y="365760"/>
+            <a:ext cx="9601200" cy="274320"/>
+          </a:xfrm>
+          <a:prstGeom prst="rect">
+            <a:avLst/>
+          </a:prstGeom>
+          <a:noFill/>
+        </p:spPr>
+        <p:txBody>
+          <a:bodyPr wrap="square" anchor="t">
+            <a:spAutoFit/>
+          </a:bodyPr>
+          <a:lstStyle/>
+          <a:p>
+            <a:pPr algn="l">
+              <a:spcAft>
+                <a:spcPts val="500"/>
+              </a:spcAft>
+            </a:pPr>
+            <a:r>
+              <a:rPr sz="1200" b="1" i="0">
+                <a:solidFill>
+                  <a:srgbClr val="E8590C"/>
+                </a:solidFill>
+                <a:latin typeface="Helvetica Neue"/>
+              </a:rPr>
+              <a:t>CONCLUSION</a:t>
+            </a:r>
+          </a:p>
+        </p:txBody>
+      </p:sp>
+      <p:sp>
+        <p:nvSpPr>
+          <p:cNvPr id="5" name="TextBox 4"/>
+          <p:cNvSpPr txBox="1"/>
+          <p:nvPr/>
+        </p:nvSpPr>
+        <p:spPr>
+          <a:xfrm>
+            <a:off x="566928" y="658368"/>
+            <a:ext cx="10058400" cy="822960"/>
+          </a:xfrm>
+          <a:prstGeom prst="rect">
+            <a:avLst/>
+          </a:prstGeom>
+          <a:noFill/>
+        </p:spPr>
+        <p:txBody>
+          <a:bodyPr wrap="square" anchor="t">
+            <a:spAutoFit/>
+          </a:bodyPr>
+          <a:lstStyle/>
+          <a:p>
+            <a:pPr algn="l">
+              <a:spcAft>
+                <a:spcPts val="500"/>
+              </a:spcAft>
+            </a:pPr>
+            <a:r>
+              <a:rPr sz="3200" b="1" i="0">
+                <a:solidFill>
+                  <a:srgbClr val="15171A"/>
+                </a:solidFill>
+                <a:latin typeface="Helvetica Neue"/>
+              </a:rPr>
+              <a:t>The chip was never the bottleneck.</a:t>
+            </a:r>
+          </a:p>
+        </p:txBody>
+      </p:sp>
+      <p:sp>
+        <p:nvSpPr>
+          <p:cNvPr id="6" name="Rounded Rectangle 5"/>
+          <p:cNvSpPr/>
+          <p:nvPr/>
+        </p:nvSpPr>
+        <p:spPr>
+          <a:xfrm>
+            <a:off x="566928" y="1737360"/>
+            <a:ext cx="3520440" cy="2423160"/>
+          </a:xfrm>
+          <a:prstGeom prst="roundRect">
+            <a:avLst>
+              <a:gd name="adj" fmla="val 4000"/>
+            </a:avLst>
+          </a:prstGeom>
+          <a:solidFill>
+            <a:srgbClr val="FEF3EA"/>
+          </a:solidFill>
+          <a:ln w="9525">
+            <a:solidFill>
+              <a:srgbClr val="E6E9EC"/>
+            </a:solidFill>
+          </a:ln>
+          <a:effectLst/>
+        </p:spPr>
+        <p:style>
+          <a:lnRef idx="1">
+            <a:schemeClr val="accent1"/>
+          </a:lnRef>
+          <a:fillRef idx="3">
+            <a:schemeClr val="accent1"/>
+          </a:fillRef>
+          <a:effectRef idx="2">
+            <a:schemeClr val="accent1"/>
+          </a:effectRef>
+          <a:fontRef idx="minor">
+            <a:schemeClr val="lt1"/>
+          </a:fontRef>
+        </p:style>
+        <p:txBody>
+          <a:bodyPr rtlCol="0" anchor="ctr"/>
+          <a:lstStyle/>
+          <a:p>
+            <a:pPr algn="ctr"/>
+          </a:p>
+        </p:txBody>
+      </p:sp>
+      <p:sp>
+        <p:nvSpPr>
+          <p:cNvPr id="7" name="TextBox 6"/>
+          <p:cNvSpPr txBox="1"/>
+          <p:nvPr/>
+        </p:nvSpPr>
+        <p:spPr>
+          <a:xfrm>
+            <a:off x="822960" y="1874519"/>
+            <a:ext cx="3017520" cy="640080"/>
+          </a:xfrm>
+          <a:prstGeom prst="rect">
+            <a:avLst/>
+          </a:prstGeom>
+          <a:noFill/>
+        </p:spPr>
+        <p:txBody>
+          <a:bodyPr wrap="square" anchor="t">
+            <a:spAutoFit/>
+          </a:bodyPr>
+          <a:lstStyle/>
+          <a:p>
+            <a:pPr algn="l">
+              <a:spcAft>
+                <a:spcPts val="0"/>
+              </a:spcAft>
+            </a:pPr>
+            <a:r>
+              <a:rPr sz="3400" b="1" i="0">
+                <a:solidFill>
+                  <a:srgbClr val="E8590C"/>
+                </a:solidFill>
+                <a:latin typeface="Helvetica Neue"/>
+              </a:rPr>
+              <a:t>28 %</a:t>
+            </a:r>
+          </a:p>
+        </p:txBody>
+      </p:sp>
+      <p:sp>
+        <p:nvSpPr>
+          <p:cNvPr id="8" name="TextBox 7"/>
+          <p:cNvSpPr txBox="1"/>
+          <p:nvPr/>
+        </p:nvSpPr>
+        <p:spPr>
+          <a:xfrm>
+            <a:off x="822960" y="2450592"/>
+            <a:ext cx="3063240" cy="411480"/>
+          </a:xfrm>
+          <a:prstGeom prst="rect">
+            <a:avLst/>
+          </a:prstGeom>
+          <a:noFill/>
+        </p:spPr>
+        <p:txBody>
+          <a:bodyPr wrap="square" anchor="t">
+            <a:spAutoFit/>
+          </a:bodyPr>
+          <a:lstStyle/>
+          <a:p>
+            <a:pPr algn="l">
+              <a:spcAft>
+                <a:spcPts val="200"/>
+              </a:spcAft>
+            </a:pPr>
+            <a:r>
+              <a:rPr sz="1200" b="1" i="0">
+                <a:solidFill>
+                  <a:srgbClr val="15171A"/>
+                </a:solidFill>
+                <a:latin typeface="Helvetica Neue"/>
+              </a:rPr>
+              <a:t>of wall clock is arithmetic</a:t>
+            </a:r>
+          </a:p>
+        </p:txBody>
+      </p:sp>
+      <p:sp>
+        <p:nvSpPr>
+          <p:cNvPr id="9" name="TextBox 8"/>
+          <p:cNvSpPr txBox="1"/>
+          <p:nvPr/>
+        </p:nvSpPr>
+        <p:spPr>
+          <a:xfrm>
+            <a:off x="822960" y="2880360"/>
+            <a:ext cx="3063240" cy="1188720"/>
+          </a:xfrm>
+          <a:prstGeom prst="rect">
+            <a:avLst/>
+          </a:prstGeom>
+          <a:noFill/>
+        </p:spPr>
+        <p:txBody>
+          <a:bodyPr wrap="square" anchor="t">
+            <a:spAutoFit/>
+          </a:bodyPr>
+          <a:lstStyle/>
+          <a:p>
+            <a:pPr algn="l">
+              <a:spcAft>
+                <a:spcPts val="200"/>
+              </a:spcAft>
+            </a:pPr>
+            <a:r>
+              <a:rPr sz="1150" b="0" i="0">
+                <a:solidFill>
+                  <a:srgbClr val="717A85"/>
+                </a:solidFill>
+                <a:latin typeface="Helvetica Neue"/>
+              </a:rPr>
+              <a:t>Of 733 s, only 209 s computes.</a:t>
+            </a:r>
+          </a:p>
+          <a:p>
+            <a:pPr algn="l">
+              <a:spcAft>
+                <a:spcPts val="200"/>
+              </a:spcAft>
+            </a:pPr>
+            <a:r>
+              <a:rPr sz="1150" b="0" i="0">
+                <a:solidFill>
+                  <a:srgbClr val="717A85"/>
+                </a:solidFill>
+                <a:latin typeface="Helvetica Neue"/>
+              </a:rPr>
+              <a:t>The biggest single phase is</a:t>
+            </a:r>
+          </a:p>
+          <a:p>
+            <a:pPr algn="l">
+              <a:spcAft>
+                <a:spcPts val="200"/>
+              </a:spcAft>
+            </a:pPr>
+            <a:r>
+              <a:rPr sz="1150" b="0" i="0">
+                <a:solidFill>
+                  <a:srgbClr val="717A85"/>
+                </a:solidFill>
+                <a:latin typeface="Helvetica Neue"/>
+              </a:rPr>
+              <a:t>reading the checkpoint.</a:t>
+            </a:r>
+          </a:p>
+        </p:txBody>
+      </p:sp>
+      <p:sp>
+        <p:nvSpPr>
+          <p:cNvPr id="10" name="Rounded Rectangle 9"/>
+          <p:cNvSpPr/>
+          <p:nvPr/>
+        </p:nvSpPr>
+        <p:spPr>
+          <a:xfrm>
+            <a:off x="4361688" y="1737360"/>
+            <a:ext cx="3520440" cy="2423160"/>
+          </a:xfrm>
+          <a:prstGeom prst="roundRect">
+            <a:avLst>
+              <a:gd name="adj" fmla="val 4000"/>
+            </a:avLst>
+          </a:prstGeom>
+          <a:solidFill>
+            <a:srgbClr val="FEF3EA"/>
+          </a:solidFill>
+          <a:ln w="9525">
+            <a:solidFill>
+              <a:srgbClr val="E6E9EC"/>
+            </a:solidFill>
+          </a:ln>
+          <a:effectLst/>
+        </p:spPr>
+        <p:style>
+          <a:lnRef idx="1">
+            <a:schemeClr val="accent1"/>
+          </a:lnRef>
+          <a:fillRef idx="3">
+            <a:schemeClr val="accent1"/>
+          </a:fillRef>
+          <a:effectRef idx="2">
+            <a:schemeClr val="accent1"/>
+          </a:effectRef>
+          <a:fontRef idx="minor">
+            <a:schemeClr val="lt1"/>
+          </a:fontRef>
+        </p:style>
+        <p:txBody>
+          <a:bodyPr rtlCol="0" anchor="ctr"/>
+          <a:lstStyle/>
+          <a:p>
+            <a:pPr algn="ctr"/>
+          </a:p>
+        </p:txBody>
+      </p:sp>
+      <p:sp>
+        <p:nvSpPr>
+          <p:cNvPr id="11" name="TextBox 10"/>
+          <p:cNvSpPr txBox="1"/>
+          <p:nvPr/>
+        </p:nvSpPr>
+        <p:spPr>
+          <a:xfrm>
+            <a:off x="4617720" y="1874519"/>
+            <a:ext cx="3017520" cy="640080"/>
+          </a:xfrm>
+          <a:prstGeom prst="rect">
+            <a:avLst/>
+          </a:prstGeom>
+          <a:noFill/>
+        </p:spPr>
+        <p:txBody>
+          <a:bodyPr wrap="square" anchor="t">
+            <a:spAutoFit/>
+          </a:bodyPr>
+          <a:lstStyle/>
+          <a:p>
+            <a:pPr algn="l">
+              <a:spcAft>
+                <a:spcPts val="0"/>
+              </a:spcAft>
+            </a:pPr>
+            <a:r>
+              <a:rPr sz="3400" b="1" i="0">
+                <a:solidFill>
+                  <a:srgbClr val="E8590C"/>
+                </a:solidFill>
+                <a:latin typeface="Helvetica Neue"/>
+              </a:rPr>
+              <a:t>6.7×</a:t>
+            </a:r>
+          </a:p>
+        </p:txBody>
+      </p:sp>
+      <p:sp>
+        <p:nvSpPr>
+          <p:cNvPr id="12" name="TextBox 11"/>
+          <p:cNvSpPr txBox="1"/>
+          <p:nvPr/>
+        </p:nvSpPr>
+        <p:spPr>
+          <a:xfrm>
+            <a:off x="4617720" y="2450592"/>
+            <a:ext cx="3063240" cy="411480"/>
+          </a:xfrm>
+          <a:prstGeom prst="rect">
+            <a:avLst/>
+          </a:prstGeom>
+          <a:noFill/>
+        </p:spPr>
+        <p:txBody>
+          <a:bodyPr wrap="square" anchor="t">
+            <a:spAutoFit/>
+          </a:bodyPr>
+          <a:lstStyle/>
+          <a:p>
+            <a:pPr algn="l">
+              <a:spcAft>
+                <a:spcPts val="200"/>
+              </a:spcAft>
+            </a:pPr>
+            <a:r>
+              <a:rPr sz="1200" b="1" i="0">
+                <a:solidFill>
+                  <a:srgbClr val="15171A"/>
+                </a:solidFill>
+                <a:latin typeface="Helvetica Neue"/>
+              </a:rPr>
+              <a:t>more parameters — CPU stopped</a:t>
+            </a:r>
+          </a:p>
+        </p:txBody>
+      </p:sp>
+      <p:sp>
+        <p:nvSpPr>
+          <p:cNvPr id="13" name="TextBox 12"/>
+          <p:cNvSpPr txBox="1"/>
+          <p:nvPr/>
+        </p:nvSpPr>
+        <p:spPr>
+          <a:xfrm>
+            <a:off x="4617720" y="2880360"/>
+            <a:ext cx="3063240" cy="1188720"/>
+          </a:xfrm>
+          <a:prstGeom prst="rect">
+            <a:avLst/>
+          </a:prstGeom>
+          <a:noFill/>
+        </p:spPr>
+        <p:txBody>
+          <a:bodyPr wrap="square" anchor="t">
+            <a:spAutoFit/>
+          </a:bodyPr>
+          <a:lstStyle/>
+          <a:p>
+            <a:pPr algn="l">
+              <a:spcAft>
+                <a:spcPts val="200"/>
+              </a:spcAft>
+            </a:pPr>
+            <a:r>
+              <a:rPr sz="1150" b="0" i="0">
+                <a:solidFill>
+                  <a:srgbClr val="717A85"/>
+                </a:solidFill>
+                <a:latin typeface="Helvetica Neue"/>
+              </a:rPr>
+              <a:t>0.6B → 4B did not make the CPU</a:t>
+            </a:r>
+          </a:p>
+          <a:p>
+            <a:pPr algn="l">
+              <a:spcAft>
+                <a:spcPts val="200"/>
+              </a:spcAft>
+            </a:pPr>
+            <a:r>
+              <a:rPr sz="1150" b="0" i="0">
+                <a:solidFill>
+                  <a:srgbClr val="717A85"/>
+                </a:solidFill>
+                <a:latin typeface="Helvetica Neue"/>
+              </a:rPr>
+              <a:t>6.7× slower. XLA never finished</a:t>
+            </a:r>
+          </a:p>
+          <a:p>
+            <a:pPr algn="l">
+              <a:spcAft>
+                <a:spcPts val="200"/>
+              </a:spcAft>
+            </a:pPr>
+            <a:r>
+              <a:rPr sz="1150" b="0" i="0">
+                <a:solidFill>
+                  <a:srgbClr val="717A85"/>
+                </a:solidFill>
+                <a:latin typeface="Helvetica Neue"/>
+              </a:rPr>
+              <a:t>compiling; the kernel killed it</a:t>
+            </a:r>
+          </a:p>
+          <a:p>
+            <a:pPr algn="l">
+              <a:spcAft>
+                <a:spcPts val="200"/>
+              </a:spcAft>
+            </a:pPr>
+            <a:r>
+              <a:rPr sz="1150" b="0" i="0">
+                <a:solidFill>
+                  <a:srgbClr val="717A85"/>
+                </a:solidFill>
+                <a:latin typeface="Helvetica Neue"/>
+              </a:rPr>
+              <a:t>at 31.5 GB.</a:t>
+            </a:r>
+          </a:p>
+        </p:txBody>
+      </p:sp>
+      <p:sp>
+        <p:nvSpPr>
+          <p:cNvPr id="14" name="Rounded Rectangle 13"/>
+          <p:cNvSpPr/>
+          <p:nvPr/>
+        </p:nvSpPr>
+        <p:spPr>
+          <a:xfrm>
+            <a:off x="8156448" y="1737360"/>
+            <a:ext cx="3520440" cy="2423160"/>
+          </a:xfrm>
+          <a:prstGeom prst="roundRect">
+            <a:avLst>
+              <a:gd name="adj" fmla="val 4000"/>
+            </a:avLst>
+          </a:prstGeom>
+          <a:solidFill>
+            <a:srgbClr val="FEF3EA"/>
+          </a:solidFill>
+          <a:ln w="9525">
+            <a:solidFill>
+              <a:srgbClr val="E6E9EC"/>
+            </a:solidFill>
+          </a:ln>
+          <a:effectLst/>
+        </p:spPr>
+        <p:style>
+          <a:lnRef idx="1">
+            <a:schemeClr val="accent1"/>
+          </a:lnRef>
+          <a:fillRef idx="3">
+            <a:schemeClr val="accent1"/>
+          </a:fillRef>
+          <a:effectRef idx="2">
+            <a:schemeClr val="accent1"/>
+          </a:effectRef>
+          <a:fontRef idx="minor">
+            <a:schemeClr val="lt1"/>
+          </a:fontRef>
+        </p:style>
+        <p:txBody>
+          <a:bodyPr rtlCol="0" anchor="ctr"/>
+          <a:lstStyle/>
+          <a:p>
+            <a:pPr algn="ctr"/>
+          </a:p>
+        </p:txBody>
+      </p:sp>
+      <p:sp>
+        <p:nvSpPr>
+          <p:cNvPr id="15" name="TextBox 14"/>
+          <p:cNvSpPr txBox="1"/>
+          <p:nvPr/>
+        </p:nvSpPr>
+        <p:spPr>
+          <a:xfrm>
+            <a:off x="8412480" y="1874519"/>
+            <a:ext cx="3017520" cy="640080"/>
+          </a:xfrm>
+          <a:prstGeom prst="rect">
+            <a:avLst/>
+          </a:prstGeom>
+          <a:noFill/>
+        </p:spPr>
+        <p:txBody>
+          <a:bodyPr wrap="square" anchor="t">
+            <a:spAutoFit/>
+          </a:bodyPr>
+          <a:lstStyle/>
+          <a:p>
+            <a:pPr algn="l">
+              <a:spcAft>
+                <a:spcPts val="0"/>
+              </a:spcAft>
+            </a:pPr>
+            <a:r>
+              <a:rPr sz="3400" b="1" i="0">
+                <a:solidFill>
+                  <a:srgbClr val="E8590C"/>
+                </a:solidFill>
+                <a:latin typeface="Helvetica Neue"/>
+              </a:rPr>
+              <a:t>1 of 36</a:t>
+            </a:r>
+          </a:p>
+        </p:txBody>
+      </p:sp>
+      <p:sp>
+        <p:nvSpPr>
+          <p:cNvPr id="16" name="TextBox 15"/>
+          <p:cNvSpPr txBox="1"/>
+          <p:nvPr/>
+        </p:nvSpPr>
+        <p:spPr>
+          <a:xfrm>
+            <a:off x="8412480" y="2450592"/>
+            <a:ext cx="3063240" cy="411480"/>
+          </a:xfrm>
+          <a:prstGeom prst="rect">
+            <a:avLst/>
+          </a:prstGeom>
+          <a:noFill/>
+        </p:spPr>
+        <p:txBody>
+          <a:bodyPr wrap="square" anchor="t">
+            <a:spAutoFit/>
+          </a:bodyPr>
+          <a:lstStyle/>
+          <a:p>
+            <a:pPr algn="l">
+              <a:spcAft>
+                <a:spcPts val="200"/>
+              </a:spcAft>
+            </a:pPr>
+            <a:r>
+              <a:rPr sz="1200" b="1" i="0">
+                <a:solidFill>
+                  <a:srgbClr val="15171A"/>
+                </a:solidFill>
+                <a:latin typeface="Helvetica Neue"/>
+              </a:rPr>
+              <a:t>dependencies were TPU-bound</a:t>
+            </a:r>
+          </a:p>
+        </p:txBody>
+      </p:sp>
+      <p:sp>
+        <p:nvSpPr>
+          <p:cNvPr id="17" name="TextBox 16"/>
+          <p:cNvSpPr txBox="1"/>
+          <p:nvPr/>
+        </p:nvSpPr>
+        <p:spPr>
+          <a:xfrm>
+            <a:off x="8412480" y="2880360"/>
+            <a:ext cx="3063240" cy="1188720"/>
+          </a:xfrm>
+          <a:prstGeom prst="rect">
+            <a:avLst/>
+          </a:prstGeom>
+          <a:noFill/>
+        </p:spPr>
+        <p:txBody>
+          <a:bodyPr wrap="square" anchor="t">
+            <a:spAutoFit/>
+          </a:bodyPr>
+          <a:lstStyle/>
+          <a:p>
+            <a:pPr algn="l">
+              <a:spcAft>
+                <a:spcPts val="200"/>
+              </a:spcAft>
+            </a:pPr>
+            <a:r>
+              <a:rPr sz="1150" b="0" i="0">
+                <a:solidFill>
+                  <a:srgbClr val="717A85"/>
+                </a:solidFill>
+                <a:latin typeface="Helvetica Neue"/>
+              </a:rPr>
+              <a:t>The GH200 sat idle behind an</a:t>
+            </a:r>
+          </a:p>
+          <a:p>
+            <a:pPr algn="l">
+              <a:spcAft>
+                <a:spcPts val="200"/>
+              </a:spcAft>
+            </a:pPr>
+            <a:r>
+              <a:rPr sz="1150" b="0" i="0">
+                <a:solidFill>
+                  <a:srgbClr val="717A85"/>
+                </a:solidFill>
+                <a:latin typeface="Helvetica Neue"/>
+              </a:rPr>
+              <a:t>ARM64 host, a QEMU segfault</a:t>
+            </a:r>
+          </a:p>
+          <a:p>
+            <a:pPr algn="l">
+              <a:spcAft>
+                <a:spcPts val="200"/>
+              </a:spcAft>
+            </a:pPr>
+            <a:r>
+              <a:rPr sz="1150" b="0" i="0">
+                <a:solidFill>
+                  <a:srgbClr val="717A85"/>
+                </a:solidFill>
+                <a:latin typeface="Helvetica Neue"/>
+              </a:rPr>
+              <a:t>and a registry 403. Swapping</a:t>
+            </a:r>
+          </a:p>
+          <a:p>
+            <a:pPr algn="l">
+              <a:spcAft>
+                <a:spcPts val="200"/>
+              </a:spcAft>
+            </a:pPr>
+            <a:r>
+              <a:rPr sz="1150" b="0" i="0">
+                <a:solidFill>
+                  <a:srgbClr val="717A85"/>
+                </a:solidFill>
+                <a:latin typeface="Helvetica Neue"/>
+              </a:rPr>
+              <a:t>one pin is the whole port.</a:t>
+            </a:r>
+          </a:p>
+        </p:txBody>
+      </p:sp>
+      <p:sp>
+        <p:nvSpPr>
+          <p:cNvPr id="18" name="TextBox 17"/>
+          <p:cNvSpPr txBox="1"/>
+          <p:nvPr/>
+        </p:nvSpPr>
+        <p:spPr>
+          <a:xfrm>
+            <a:off x="566928" y="4389120"/>
+            <a:ext cx="5394960" cy="320040"/>
+          </a:xfrm>
+          <a:prstGeom prst="rect">
+            <a:avLst/>
+          </a:prstGeom>
+          <a:noFill/>
+        </p:spPr>
+        <p:txBody>
+          <a:bodyPr wrap="square" anchor="t">
+            <a:spAutoFit/>
+          </a:bodyPr>
+          <a:lstStyle/>
+          <a:p>
+            <a:pPr algn="l">
+              <a:spcAft>
+                <a:spcPts val="500"/>
+              </a:spcAft>
+            </a:pPr>
+            <a:r>
+              <a:rPr sz="1500" b="1" i="0">
+                <a:solidFill>
+                  <a:srgbClr val="E8590C"/>
+                </a:solidFill>
+                <a:latin typeface="Helvetica Neue"/>
+              </a:rPr>
+              <a:t>Scaling recommendation</a:t>
+            </a:r>
+          </a:p>
+        </p:txBody>
+      </p:sp>
+      <p:sp>
+        <p:nvSpPr>
+          <p:cNvPr id="19" name="TextBox 18"/>
+          <p:cNvSpPr txBox="1"/>
+          <p:nvPr/>
+        </p:nvSpPr>
+        <p:spPr>
+          <a:xfrm>
+            <a:off x="566928" y="4736592"/>
+            <a:ext cx="5394960" cy="1280160"/>
+          </a:xfrm>
+          <a:prstGeom prst="rect">
+            <a:avLst/>
+          </a:prstGeom>
+          <a:noFill/>
+        </p:spPr>
+        <p:txBody>
+          <a:bodyPr wrap="square" anchor="t">
+            <a:spAutoFit/>
+          </a:bodyPr>
+          <a:lstStyle/>
+          <a:p>
+            <a:pPr algn="l">
+              <a:spcAft>
+                <a:spcPts val="200"/>
+              </a:spcAft>
+            </a:pPr>
+            <a:r>
+              <a:rPr sz="1300" b="0" i="0">
+                <a:solidFill>
+                  <a:srgbClr val="15171A"/>
+                </a:solidFill>
+                <a:latin typeface="Helvetica Neue"/>
+              </a:rPr>
+              <a:t>Do not scale out — amortise. Raise batch only until</a:t>
+            </a:r>
+          </a:p>
+          <a:p>
+            <a:pPr algn="l">
+              <a:spcAft>
+                <a:spcPts val="200"/>
+              </a:spcAft>
+            </a:pPr>
+            <a:r>
+              <a:rPr sz="1300" b="0" i="0">
+                <a:solidFill>
+                  <a:srgbClr val="15171A"/>
+                </a:solidFill>
+                <a:latin typeface="Helvetica Neue"/>
+              </a:rPr>
+              <a:t>the chip is occupied, then attack fixed cost:</a:t>
+            </a:r>
+          </a:p>
+          <a:p>
+            <a:pPr algn="l">
+              <a:spcAft>
+                <a:spcPts val="200"/>
+              </a:spcAft>
+            </a:pPr>
+            <a:r>
+              <a:rPr sz="1300" b="0" i="0">
+                <a:solidFill>
+                  <a:srgbClr val="15171A"/>
+                </a:solidFill>
+                <a:latin typeface="Helvetica Neue"/>
+              </a:rPr>
+              <a:t>persistent compile caches, warm workers instead of</a:t>
+            </a:r>
+          </a:p>
+          <a:p>
+            <a:pPr algn="l">
+              <a:spcAft>
+                <a:spcPts val="200"/>
+              </a:spcAft>
+            </a:pPr>
+            <a:r>
+              <a:rPr sz="1300" b="0" i="0">
+                <a:solidFill>
+                  <a:srgbClr val="15171A"/>
+                </a:solidFill>
+                <a:latin typeface="Helvetica Neue"/>
+              </a:rPr>
+              <a:t>a pod per job, file cache on anything reading a</a:t>
+            </a:r>
+          </a:p>
+          <a:p>
+            <a:pPr algn="l">
+              <a:spcAft>
+                <a:spcPts val="200"/>
+              </a:spcAft>
+            </a:pPr>
+            <a:r>
+              <a:rPr sz="1300" b="0" i="0">
+                <a:solidFill>
+                  <a:srgbClr val="15171A"/>
+                </a:solidFill>
+                <a:latin typeface="Helvetica Neue"/>
+              </a:rPr>
+              <a:t>checkpoint.</a:t>
+            </a:r>
+          </a:p>
+        </p:txBody>
+      </p:sp>
+      <p:sp>
+        <p:nvSpPr>
+          <p:cNvPr id="20" name="Rounded Rectangle 19"/>
+          <p:cNvSpPr/>
+          <p:nvPr/>
+        </p:nvSpPr>
+        <p:spPr>
+          <a:xfrm>
+            <a:off x="6217920" y="4315968"/>
+            <a:ext cx="5394960" cy="1691640"/>
+          </a:xfrm>
+          <a:prstGeom prst="roundRect">
+            <a:avLst>
+              <a:gd name="adj" fmla="val 4000"/>
+            </a:avLst>
+          </a:prstGeom>
+          <a:solidFill>
+            <a:srgbClr val="FEF3EA"/>
+          </a:solidFill>
+          <a:ln w="9525">
+            <a:solidFill>
+              <a:srgbClr val="E6E9EC"/>
+            </a:solidFill>
+          </a:ln>
+          <a:effectLst/>
+        </p:spPr>
+        <p:style>
+          <a:lnRef idx="1">
+            <a:schemeClr val="accent1"/>
+          </a:lnRef>
+          <a:fillRef idx="3">
+            <a:schemeClr val="accent1"/>
+          </a:fillRef>
+          <a:effectRef idx="2">
+            <a:schemeClr val="accent1"/>
+          </a:effectRef>
+          <a:fontRef idx="minor">
+            <a:schemeClr val="lt1"/>
+          </a:fontRef>
+        </p:style>
+        <p:txBody>
+          <a:bodyPr rtlCol="0" anchor="ctr"/>
+          <a:lstStyle/>
+          <a:p>
+            <a:pPr algn="ctr"/>
+          </a:p>
+        </p:txBody>
+      </p:sp>
+      <p:sp>
+        <p:nvSpPr>
+          <p:cNvPr id="21" name="TextBox 20"/>
+          <p:cNvSpPr txBox="1"/>
+          <p:nvPr/>
+        </p:nvSpPr>
+        <p:spPr>
+          <a:xfrm>
+            <a:off x="6492240" y="4480560"/>
+            <a:ext cx="4937760" cy="320040"/>
+          </a:xfrm>
+          <a:prstGeom prst="rect">
+            <a:avLst/>
+          </a:prstGeom>
+          <a:noFill/>
+        </p:spPr>
+        <p:txBody>
+          <a:bodyPr wrap="square" anchor="t">
+            <a:spAutoFit/>
+          </a:bodyPr>
+          <a:lstStyle/>
+          <a:p>
+            <a:pPr algn="l">
+              <a:spcAft>
+                <a:spcPts val="500"/>
+              </a:spcAft>
+            </a:pPr>
+            <a:r>
+              <a:rPr sz="1500" b="1" i="0">
+                <a:solidFill>
+                  <a:srgbClr val="E8590C"/>
+                </a:solidFill>
+                <a:latin typeface="Helvetica Neue"/>
+              </a:rPr>
+              <a:t>What this means for Dr. Findus</a:t>
+            </a:r>
+          </a:p>
+        </p:txBody>
+      </p:sp>
+      <p:sp>
+        <p:nvSpPr>
+          <p:cNvPr id="22" name="TextBox 21"/>
+          <p:cNvSpPr txBox="1"/>
+          <p:nvPr/>
+        </p:nvSpPr>
+        <p:spPr>
+          <a:xfrm>
+            <a:off x="6492240" y="4828032"/>
+            <a:ext cx="4937760" cy="1097280"/>
+          </a:xfrm>
+          <a:prstGeom prst="rect">
+            <a:avLst/>
+          </a:prstGeom>
+          <a:noFill/>
+        </p:spPr>
+        <p:txBody>
+          <a:bodyPr wrap="square" anchor="t">
+            <a:spAutoFit/>
+          </a:bodyPr>
+          <a:lstStyle/>
+          <a:p>
+            <a:pPr algn="l">
+              <a:spcAft>
+                <a:spcPts val="200"/>
+              </a:spcAft>
+            </a:pPr>
+            <a:r>
+              <a:rPr sz="1250" b="0" i="0">
+                <a:solidFill>
+                  <a:srgbClr val="15171A"/>
+                </a:solidFill>
+                <a:latin typeface="Helvetica Neue"/>
+              </a:rPr>
+              <a:t>At $0.131 per 1 000 steps on one GH200 —</a:t>
+            </a:r>
+          </a:p>
+          <a:p>
+            <a:pPr algn="l">
+              <a:spcAft>
+                <a:spcPts val="200"/>
+              </a:spcAft>
+            </a:pPr>
+            <a:r>
+              <a:rPr sz="1250" b="0" i="0">
+                <a:solidFill>
+                  <a:srgbClr val="15171A"/>
+                </a:solidFill>
+                <a:latin typeface="Helvetica Neue"/>
+              </a:rPr>
+              <a:t>8× cheaper than eight TPU chips at the same</a:t>
+            </a:r>
+          </a:p>
+          <a:p>
+            <a:pPr algn="l">
+              <a:spcAft>
+                <a:spcPts val="200"/>
+              </a:spcAft>
+            </a:pPr>
+            <a:r>
+              <a:rPr sz="1250" b="0" i="0">
+                <a:solidFill>
+                  <a:srgbClr val="15171A"/>
+                </a:solidFill>
+                <a:latin typeface="Helvetica Neue"/>
+              </a:rPr>
+              <a:t>speed — self-hosting is not the cost problem we</a:t>
+            </a:r>
+          </a:p>
+          <a:p>
+            <a:pPr algn="l">
+              <a:spcAft>
+                <a:spcPts val="200"/>
+              </a:spcAft>
+            </a:pPr>
+            <a:r>
+              <a:rPr sz="1250" b="0" i="0">
+                <a:solidFill>
+                  <a:srgbClr val="15171A"/>
+                </a:solidFill>
+                <a:latin typeface="Helvetica Neue"/>
+              </a:rPr>
+              <a:t>assumed. The real cost is fixed overhead per job:</a:t>
+            </a:r>
+          </a:p>
+          <a:p>
+            <a:pPr algn="l">
+              <a:spcAft>
+                <a:spcPts val="200"/>
+              </a:spcAft>
+            </a:pPr>
+            <a:r>
+              <a:rPr sz="1250" b="0" i="0">
+                <a:solidFill>
+                  <a:srgbClr val="15171A"/>
+                </a:solidFill>
+                <a:latin typeface="Helvetica Neue"/>
+              </a:rPr>
+              <a:t>an architecture decision, not a hardware purchase.</a:t>
+            </a:r>
+          </a:p>
+        </p:txBody>
+      </p:sp>
+      <p:sp>
+        <p:nvSpPr>
+          <p:cNvPr id="23" name="TextBox 22"/>
+          <p:cNvSpPr txBox="1"/>
+          <p:nvPr/>
+        </p:nvSpPr>
+        <p:spPr>
+          <a:xfrm>
+            <a:off x="566928" y="6172200"/>
+            <a:ext cx="11064240" cy="365760"/>
+          </a:xfrm>
+          <a:prstGeom prst="rect">
+            <a:avLst/>
+          </a:prstGeom>
+          <a:noFill/>
+        </p:spPr>
+        <p:txBody>
+          <a:bodyPr wrap="square" anchor="t">
+            <a:spAutoFit/>
+          </a:bodyPr>
+          <a:lstStyle/>
+          <a:p>
             <a:pPr algn="ctr">
               <a:spcAft>
-                <a:spcPts val="600"/>
-              </a:spcAft>
-            </a:pPr>
-            <a:r>
-              <a:rPr sz="1200" b="0">
-                <a:solidFill>
-                  <a:srgbClr val="6B7280"/>
+                <a:spcPts val="500"/>
+              </a:spcAft>
+            </a:pPr>
+            <a:r>
+              <a:rPr sz="1100" b="0" i="0">
+                <a:solidFill>
+                  <a:srgbClr val="717A85"/>
                 </a:solidFill>
                 <a:latin typeface="Helvetica Neue"/>
               </a:rPr>

--- a/slides/ME344_Final_Arnold_Hambuch.pptx
+++ b/slides/ME344_Final_Arnold_Hambuch.pptx
@@ -3331,7 +3331,7 @@
                 </a:solidFill>
                 <a:latin typeface="Helvetica Neue"/>
               </a:rPr>
-              <a:t>Dr. Findus — our startup, Berlin</a:t>
+              <a:t>Dr. Findus, our startup in Berlin</a:t>
             </a:r>
           </a:p>
         </p:txBody>
@@ -3402,7 +3402,7 @@
                 </a:solidFill>
                 <a:latin typeface="Helvetica Neue"/>
               </a:rPr>
-              <a:t>the physician confirms each one — a legal</a:t>
+              <a:t>the physician confirms each one. A legal</a:t>
             </a:r>
           </a:p>
           <a:p>
@@ -3528,7 +3528,7 @@
                 </a:solidFill>
                 <a:latin typeface="Helvetica Neue"/>
               </a:rPr>
-              <a:t>An infrastructure question, not a model one —</a:t>
+              <a:t>An infrastructure question, not a model one.</a:t>
             </a:r>
           </a:p>
           <a:p>
@@ -3764,7 +3764,7 @@
                 </a:solidFill>
                 <a:latin typeface="Helvetica Neue"/>
               </a:rPr>
-              <a:t>tokens in the longest case —</a:t>
+              <a:t>tokens in the longest case.</a:t>
             </a:r>
           </a:p>
           <a:p>
@@ -3780,7 +3780,7 @@
                 </a:solidFill>
                 <a:latin typeface="Helvetica Neue"/>
               </a:rPr>
-              <a:t>sequence length is not free</a:t>
+              <a:t>Sequence length is not free</a:t>
             </a:r>
           </a:p>
         </p:txBody>
@@ -3913,7 +3913,7 @@
                 </a:solidFill>
                 <a:latin typeface="Helvetica Neue"/>
               </a:rPr>
-              <a:t>Where does the time actually go — and what does it take to run this at all?</a:t>
+              <a:t>Where does the time actually go, and what does it take to run this at all?</a:t>
             </a:r>
           </a:p>
         </p:txBody>
@@ -3952,7 +3952,7 @@
                 </a:solidFill>
                 <a:latin typeface="Helvetica Neue"/>
               </a:rPr>
-              <a:t>No patient data was used. Model accuracy earns no marks here — the object of study is the infrastructure.</a:t>
+              <a:t>No patient data was used. Model accuracy earns no marks here. The object of study is the infrastructure.</a:t>
             </a:r>
           </a:p>
         </p:txBody>
@@ -4317,7 +4317,7 @@
                 </a:solidFill>
                 <a:latin typeface="Helvetica Neue"/>
               </a:rPr>
-              <a:t>Tunix — no per-backend</a:t>
+              <a:t>Tunix, no per-backend</a:t>
             </a:r>
           </a:p>
           <a:p>
@@ -4729,7 +4729,7 @@
                 </a:solidFill>
                 <a:latin typeface="Helvetica Neue"/>
               </a:rPr>
-              <a:t>knob rather than fixed —</a:t>
+              <a:t>knob rather than fixed -</a:t>
             </a:r>
           </a:p>
           <a:p>
@@ -5109,7 +5109,7 @@
                           </a:solidFill>
                           <a:latin typeface="Helvetica Neue"/>
                         </a:rPr>
-                        <a:t>v5e 2×4 — 8 chips</a:t>
+                        <a:t>v5e 2×4, 8 chips</a:t>
                       </a:r>
                     </a:p>
                   </a:txBody>
@@ -5434,7 +5434,7 @@
                 </a:solidFill>
                 <a:latin typeface="Helvetica Neue"/>
               </a:rPr>
-              <a:t>into six phases — scheduling, image pull,</a:t>
+              <a:t>into six phases: scheduling, image pull,</a:t>
             </a:r>
           </a:p>
           <a:p>
@@ -5530,7 +5530,7 @@
                 </a:solidFill>
                 <a:latin typeface="Helvetica Neue"/>
               </a:rPr>
-              <a:t>never dropped — the boundary is the</a:t>
+              <a:t>never dropped. The boundary is the</a:t>
             </a:r>
           </a:p>
           <a:p>
@@ -5760,7 +5760,7 @@
                 </a:solidFill>
                 <a:latin typeface="Helvetica Neue"/>
               </a:rPr>
-              <a:t>Impossible — yet it carried status "ok".</a:t>
+              <a:t>Impossible, yet it carried status "ok".</a:t>
             </a:r>
           </a:p>
           <a:p>
@@ -6127,7 +6127,7 @@
                           </a:solidFill>
                           <a:latin typeface="Helvetica Neue"/>
                         </a:rPr>
-                        <a:t>—</a:t>
+                        <a:t>-</a:t>
                       </a:r>
                     </a:p>
                   </a:txBody>
@@ -6841,7 +6841,7 @@
                 </a:solidFill>
                 <a:latin typeface="Helvetica Neue"/>
               </a:rPr>
-              <a:t>manifest line — 31 % off wall clock</a:t>
+              <a:t>manifest line, 31 % off wall clock</a:t>
             </a:r>
           </a:p>
         </p:txBody>
@@ -7039,7 +7039,7 @@
                 </a:solidFill>
                 <a:latin typeface="Helvetica Neue"/>
               </a:rPr>
-              <a:t>1.75122 s  →  1.75117 s</a:t>
+              <a:t>1.75122 s  to  1.75117 s</a:t>
             </a:r>
           </a:p>
           <a:p>
@@ -7087,7 +7087,7 @@
                 </a:solidFill>
                 <a:latin typeface="Helvetica Neue"/>
               </a:rPr>
-              <a:t>Only I/O did — so the saving is</a:t>
+              <a:t>Only I/O did, so the saving is</a:t>
             </a:r>
           </a:p>
           <a:p>
@@ -7601,7 +7601,7 @@
                 </a:solidFill>
                 <a:latin typeface="Helvetica Neue"/>
               </a:rPr>
-              <a:t>more parameters — CPU stopped</a:t>
+              <a:t>more parameters, CPU stopped</a:t>
             </a:r>
           </a:p>
         </p:txBody>
@@ -7640,7 +7640,7 @@
                 </a:solidFill>
                 <a:latin typeface="Helvetica Neue"/>
               </a:rPr>
-              <a:t>0.6B → 4B did not make the CPU</a:t>
+              <a:t>0.6B to 4B did not make the CPU</a:t>
             </a:r>
           </a:p>
           <a:p>
@@ -7979,7 +7979,7 @@
                 </a:solidFill>
                 <a:latin typeface="Helvetica Neue"/>
               </a:rPr>
-              <a:t>Do not scale out — amortise. Raise batch only until</a:t>
+              <a:t>Do not scale out. Amortise: raise batch only until</a:t>
             </a:r>
           </a:p>
           <a:p>
@@ -8169,7 +8169,7 @@
                 </a:solidFill>
                 <a:latin typeface="Helvetica Neue"/>
               </a:rPr>
-              <a:t>At $0.131 per 1 000 steps on one GH200 —</a:t>
+              <a:t>At $0.131 per 1 000 steps on one GH200,</a:t>
             </a:r>
           </a:p>
           <a:p>
@@ -8201,7 +8201,7 @@
                 </a:solidFill>
                 <a:latin typeface="Helvetica Neue"/>
               </a:rPr>
-              <a:t>speed — self-hosting is not the cost problem we</a:t>
+              <a:t>speed, self-hosting is not the cost problem we</a:t>
             </a:r>
           </a:p>
           <a:p>

--- a/slides/ME344_Final_Arnold_Hambuch.pptx
+++ b/slides/ME344_Final_Arnold_Hambuch.pptx
@@ -3257,8 +3257,8 @@
         </p:nvSpPr>
         <p:spPr>
           <a:xfrm>
-            <a:off x="566928" y="1691640"/>
-            <a:ext cx="5486400" cy="2148840"/>
+            <a:off x="566928" y="1645920"/>
+            <a:ext cx="5394960" cy="2103120"/>
           </a:xfrm>
           <a:prstGeom prst="roundRect">
             <a:avLst>
@@ -3305,8 +3305,8 @@
         </p:nvSpPr>
         <p:spPr>
           <a:xfrm>
-            <a:off x="841248" y="1901952"/>
-            <a:ext cx="5029200" cy="320040"/>
+            <a:off x="868680" y="1874519"/>
+            <a:ext cx="4846320" cy="320040"/>
           </a:xfrm>
           <a:prstGeom prst="rect">
             <a:avLst/>
@@ -3325,7 +3325,7 @@
               </a:spcAft>
             </a:pPr>
             <a:r>
-              <a:rPr sz="1400" b="1" i="0">
+              <a:rPr sz="1500" b="1" i="0">
                 <a:solidFill>
                   <a:srgbClr val="15171A"/>
                 </a:solidFill>
@@ -3344,8 +3344,8 @@
         </p:nvSpPr>
         <p:spPr>
           <a:xfrm>
-            <a:off x="841248" y="2286000"/>
-            <a:ext cx="5029200" cy="1463040"/>
+            <a:off x="868680" y="2304288"/>
+            <a:ext cx="4846320" cy="1371600"/>
           </a:xfrm>
           <a:prstGeom prst="rect">
             <a:avLst/>
@@ -3360,81 +3360,65 @@
           <a:p>
             <a:pPr algn="l">
               <a:spcAft>
-                <a:spcPts val="300"/>
-              </a:spcAft>
-            </a:pPr>
-            <a:r>
-              <a:rPr sz="1300" b="0" i="0">
+                <a:spcPts val="600"/>
+              </a:spcAft>
+            </a:pPr>
+            <a:r>
+              <a:rPr sz="1400" b="0" i="0">
                 <a:solidFill>
                   <a:srgbClr val="15171A"/>
                 </a:solidFill>
                 <a:latin typeface="Helvetica Neue"/>
               </a:rPr>
-              <a:t>German GPs must code every consultation.</a:t>
-            </a:r>
-          </a:p>
-          <a:p>
-            <a:pPr algn="l">
-              <a:spcAft>
-                <a:spcPts val="300"/>
-              </a:spcAft>
-            </a:pPr>
-            <a:r>
-              <a:rPr sz="1300" b="0" i="0">
+              <a:t>German GPs code every consultation.</a:t>
+            </a:r>
+          </a:p>
+          <a:p>
+            <a:pPr algn="l">
+              <a:spcAft>
+                <a:spcPts val="600"/>
+              </a:spcAft>
+            </a:pPr>
+            <a:r>
+              <a:rPr sz="1400" b="0" i="0">
                 <a:solidFill>
                   <a:srgbClr val="15171A"/>
                 </a:solidFill>
                 <a:latin typeface="Helvetica Neue"/>
               </a:rPr>
-              <a:t>We read the note and propose the codes;</a:t>
-            </a:r>
-          </a:p>
-          <a:p>
-            <a:pPr algn="l">
-              <a:spcAft>
-                <a:spcPts val="300"/>
-              </a:spcAft>
-            </a:pPr>
-            <a:r>
-              <a:rPr sz="1300" b="0" i="0">
+              <a:t>We propose, the physician confirms.</a:t>
+            </a:r>
+          </a:p>
+          <a:p>
+            <a:pPr algn="l">
+              <a:spcAft>
+                <a:spcPts val="600"/>
+              </a:spcAft>
+            </a:pPr>
+            <a:r>
+              <a:rPr sz="1400" b="0" i="0">
                 <a:solidFill>
                   <a:srgbClr val="15171A"/>
                 </a:solidFill>
                 <a:latin typeface="Helvetica Neue"/>
               </a:rPr>
-              <a:t>the physician confirms each one. A legal</a:t>
-            </a:r>
-          </a:p>
-          <a:p>
-            <a:pPr algn="l">
-              <a:spcAft>
-                <a:spcPts val="300"/>
-              </a:spcAft>
-            </a:pPr>
-            <a:r>
-              <a:rPr sz="1300" b="0" i="0">
+              <a:t>Reliability is the product.</a:t>
+            </a:r>
+          </a:p>
+          <a:p>
+            <a:pPr algn="l">
+              <a:spcAft>
+                <a:spcPts val="600"/>
+              </a:spcAft>
+            </a:pPr>
+            <a:r>
+              <a:rPr sz="1400" b="0" i="0">
                 <a:solidFill>
                   <a:srgbClr val="15171A"/>
                 </a:solidFill>
                 <a:latin typeface="Helvetica Neue"/>
               </a:rPr>
-              <a:t>requirement here. Reliability is the product:</a:t>
-            </a:r>
-          </a:p>
-          <a:p>
-            <a:pPr algn="l">
-              <a:spcAft>
-                <a:spcPts val="300"/>
-              </a:spcAft>
-            </a:pPr>
-            <a:r>
-              <a:rPr sz="1300" b="0" i="0">
-                <a:solidFill>
-                  <a:srgbClr val="15171A"/>
-                </a:solidFill>
-                <a:latin typeface="Helvetica Neue"/>
-              </a:rPr>
-              <a:t>over-coding is fraud exposure, not error.</a:t>
+              <a:t>Today it runs on hosted APIs.</a:t>
             </a:r>
           </a:p>
         </p:txBody>
@@ -3447,8 +3431,8 @@
         </p:nvSpPr>
         <p:spPr>
           <a:xfrm>
-            <a:off x="6400800" y="1783080"/>
-            <a:ext cx="5212080" cy="731520"/>
+            <a:off x="6400800" y="1874519"/>
+            <a:ext cx="5212080" cy="914400"/>
           </a:xfrm>
           <a:prstGeom prst="rect">
             <a:avLst/>
@@ -3467,13 +3451,13 @@
               </a:spcAft>
             </a:pPr>
             <a:r>
-              <a:rPr sz="1600" b="1" i="0">
-                <a:solidFill>
-                  <a:srgbClr val="15171A"/>
-                </a:solidFill>
-                <a:latin typeface="Helvetica Neue"/>
-              </a:rPr>
-              <a:t>Today that runs on hosted APIs.</a:t>
+              <a:rPr sz="2400" b="1" i="0">
+                <a:solidFill>
+                  <a:srgbClr val="E8590C"/>
+                </a:solidFill>
+                <a:latin typeface="Helvetica Neue"/>
+              </a:rPr>
+              <a:t>Could it run on</a:t>
             </a:r>
           </a:p>
           <a:p>
@@ -3483,13 +3467,13 @@
               </a:spcAft>
             </a:pPr>
             <a:r>
-              <a:rPr sz="1600" b="1" i="0">
-                <a:solidFill>
-                  <a:srgbClr val="15171A"/>
-                </a:solidFill>
-                <a:latin typeface="Helvetica Neue"/>
-              </a:rPr>
-              <a:t>Could it run on our own hardware?</a:t>
+              <a:rPr sz="2400" b="1" i="0">
+                <a:solidFill>
+                  <a:srgbClr val="E8590C"/>
+                </a:solidFill>
+                <a:latin typeface="Helvetica Neue"/>
+              </a:rPr>
+              <a:t>our own hardware?</a:t>
             </a:r>
           </a:p>
         </p:txBody>
@@ -3502,8 +3486,8 @@
         </p:nvSpPr>
         <p:spPr>
           <a:xfrm>
-            <a:off x="6400800" y="2606040"/>
-            <a:ext cx="5212080" cy="1280160"/>
+            <a:off x="6400800" y="3063240"/>
+            <a:ext cx="5212080" cy="731520"/>
           </a:xfrm>
           <a:prstGeom prst="rect">
             <a:avLst/>
@@ -3528,7 +3512,7 @@
                 </a:solidFill>
                 <a:latin typeface="Helvetica Neue"/>
               </a:rPr>
-              <a:t>An infrastructure question, not a model one.</a:t>
+              <a:t>Qwen3 + LoRA on CodiEsp.</a:t>
             </a:r>
           </a:p>
           <a:p>
@@ -3544,55 +3528,7 @@
                 </a:solidFill>
                 <a:latin typeface="Helvetica Neue"/>
               </a:rPr>
-              <a:t>so we built the workload and measured it.</a:t>
-            </a:r>
-          </a:p>
-          <a:p>
-            <a:pPr algn="l">
-              <a:spcAft>
-                <a:spcPts val="300"/>
-              </a:spcAft>
-            </a:pPr>
-            <a:r>
-              <a:rPr sz="1300" b="0" i="0">
-                <a:solidFill>
-                  <a:srgbClr val="717A85"/>
-                </a:solidFill>
-                <a:latin typeface="Helvetica Neue"/>
-              </a:rPr>
-              <a:t/>
-            </a:r>
-          </a:p>
-          <a:p>
-            <a:pPr algn="l">
-              <a:spcAft>
-                <a:spcPts val="300"/>
-              </a:spcAft>
-            </a:pPr>
-            <a:r>
-              <a:rPr sz="1300" b="0" i="0">
-                <a:solidFill>
-                  <a:srgbClr val="717A85"/>
-                </a:solidFill>
-                <a:latin typeface="Helvetica Neue"/>
-              </a:rPr>
-              <a:t>Qwen3 + LoRA on CodiEsp: 1 000 clinical case</a:t>
-            </a:r>
-          </a:p>
-          <a:p>
-            <a:pPr algn="l">
-              <a:spcAft>
-                <a:spcPts val="300"/>
-              </a:spcAft>
-            </a:pPr>
-            <a:r>
-              <a:rPr sz="1300" b="0" i="0">
-                <a:solidFill>
-                  <a:srgbClr val="717A85"/>
-                </a:solidFill>
-                <a:latin typeface="Helvetica Neue"/>
-              </a:rPr>
-              <a:t>reports, ICD-10 labelled, CC-BY 4.0.</a:t>
+              <a:t>1 000 clinical case reports, ICD-10, CC-BY 4.0.</a:t>
             </a:r>
           </a:p>
         </p:txBody>
@@ -3606,7 +3542,7 @@
         <p:spPr>
           <a:xfrm>
             <a:off x="566928" y="4160520"/>
-            <a:ext cx="2743200" cy="777240"/>
+            <a:ext cx="10972800" cy="320040"/>
           </a:xfrm>
           <a:prstGeom prst="rect">
             <a:avLst/>
@@ -3621,17 +3557,17 @@
           <a:p>
             <a:pPr algn="l">
               <a:spcAft>
-                <a:spcPts val="0"/>
-              </a:spcAft>
-            </a:pPr>
-            <a:r>
-              <a:rPr sz="4400" b="1" i="0">
+                <a:spcPts val="500"/>
+              </a:spcAft>
+            </a:pPr>
+            <a:r>
+              <a:rPr sz="1400" b="1" i="0">
                 <a:solidFill>
                   <a:srgbClr val="E8590C"/>
                 </a:solidFill>
                 <a:latin typeface="Helvetica Neue"/>
               </a:rPr>
-              <a:t>8 GB</a:t>
+              <a:t>The resource problem</a:t>
             </a:r>
           </a:p>
         </p:txBody>
@@ -3644,8 +3580,8 @@
         </p:nvSpPr>
         <p:spPr>
           <a:xfrm>
-            <a:off x="566928" y="4818888"/>
-            <a:ext cx="2743200" cy="822960"/>
+            <a:off x="566928" y="4526280"/>
+            <a:ext cx="10972800" cy="1005840"/>
           </a:xfrm>
           <a:prstGeom prst="rect">
             <a:avLst/>
@@ -3660,33 +3596,33 @@
           <a:p>
             <a:pPr algn="l">
               <a:spcAft>
-                <a:spcPts val="200"/>
-              </a:spcAft>
-            </a:pPr>
-            <a:r>
-              <a:rPr sz="1200" b="0" i="0">
-                <a:solidFill>
-                  <a:srgbClr val="717A85"/>
-                </a:solidFill>
-                <a:latin typeface="Helvetica Neue"/>
-              </a:rPr>
-              <a:t>of weights at 4B, before a single</a:t>
-            </a:r>
-          </a:p>
-          <a:p>
-            <a:pPr algn="l">
-              <a:spcAft>
-                <a:spcPts val="200"/>
-              </a:spcAft>
-            </a:pPr>
-            <a:r>
-              <a:rPr sz="1200" b="0" i="0">
-                <a:solidFill>
-                  <a:srgbClr val="717A85"/>
-                </a:solidFill>
-                <a:latin typeface="Helvetica Neue"/>
-              </a:rPr>
-              <a:t>activation exists</a:t>
+                <a:spcPts val="800"/>
+              </a:spcAft>
+            </a:pPr>
+            <a:r>
+              <a:rPr sz="1700" b="0" i="0">
+                <a:solidFill>
+                  <a:srgbClr val="15171A"/>
+                </a:solidFill>
+                <a:latin typeface="Helvetica Neue"/>
+              </a:rPr>
+              <a:t>8 GB of weights at 4B before a single activation.  Cases up to 2 489 tokens.</a:t>
+            </a:r>
+          </a:p>
+          <a:p>
+            <a:pPr algn="l">
+              <a:spcAft>
+                <a:spcPts val="800"/>
+              </a:spcAft>
+            </a:pPr>
+            <a:r>
+              <a:rPr sz="1700" b="0" i="0">
+                <a:solidFill>
+                  <a:srgbClr val="15171A"/>
+                </a:solidFill>
+                <a:latin typeface="Helvetica Neue"/>
+              </a:rPr>
+              <a:t>One JAX program, lowered by XLA to CPU, GPU and TPU.</a:t>
             </a:r>
           </a:p>
         </p:txBody>
@@ -3699,8 +3635,8 @@
         </p:nvSpPr>
         <p:spPr>
           <a:xfrm>
-            <a:off x="3657600" y="4160520"/>
-            <a:ext cx="2743200" cy="777240"/>
+            <a:off x="566928" y="5897880"/>
+            <a:ext cx="10972800" cy="640080"/>
           </a:xfrm>
           <a:prstGeom prst="rect">
             <a:avLst/>
@@ -3715,244 +3651,17 @@
           <a:p>
             <a:pPr algn="l">
               <a:spcAft>
-                <a:spcPts val="0"/>
-              </a:spcAft>
-            </a:pPr>
-            <a:r>
-              <a:rPr sz="4400" b="1" i="0">
-                <a:solidFill>
-                  <a:srgbClr val="E8590C"/>
-                </a:solidFill>
-                <a:latin typeface="Helvetica Neue"/>
-              </a:rPr>
-              <a:t>2 489</a:t>
-            </a:r>
-          </a:p>
-        </p:txBody>
-      </p:sp>
-      <p:sp>
-        <p:nvSpPr>
-          <p:cNvPr id="14" name="TextBox 13"/>
-          <p:cNvSpPr txBox="1"/>
-          <p:nvPr/>
-        </p:nvSpPr>
-        <p:spPr>
-          <a:xfrm>
-            <a:off x="3657600" y="4818888"/>
-            <a:ext cx="2743200" cy="822960"/>
-          </a:xfrm>
-          <a:prstGeom prst="rect">
-            <a:avLst/>
-          </a:prstGeom>
-          <a:noFill/>
-        </p:spPr>
-        <p:txBody>
-          <a:bodyPr wrap="square" anchor="t">
-            <a:spAutoFit/>
-          </a:bodyPr>
-          <a:lstStyle/>
-          <a:p>
-            <a:pPr algn="l">
-              <a:spcAft>
-                <a:spcPts val="200"/>
-              </a:spcAft>
-            </a:pPr>
-            <a:r>
-              <a:rPr sz="1200" b="0" i="0">
-                <a:solidFill>
-                  <a:srgbClr val="717A85"/>
-                </a:solidFill>
-                <a:latin typeface="Helvetica Neue"/>
-              </a:rPr>
-              <a:t>tokens in the longest case.</a:t>
-            </a:r>
-          </a:p>
-          <a:p>
-            <a:pPr algn="l">
-              <a:spcAft>
-                <a:spcPts val="200"/>
-              </a:spcAft>
-            </a:pPr>
-            <a:r>
-              <a:rPr sz="1200" b="0" i="0">
-                <a:solidFill>
-                  <a:srgbClr val="717A85"/>
-                </a:solidFill>
-                <a:latin typeface="Helvetica Neue"/>
-              </a:rPr>
-              <a:t>Sequence length is not free</a:t>
-            </a:r>
-          </a:p>
-        </p:txBody>
-      </p:sp>
-      <p:sp>
-        <p:nvSpPr>
-          <p:cNvPr id="15" name="TextBox 14"/>
-          <p:cNvSpPr txBox="1"/>
-          <p:nvPr/>
-        </p:nvSpPr>
-        <p:spPr>
-          <a:xfrm>
-            <a:off x="6766560" y="4160520"/>
-            <a:ext cx="4846320" cy="777240"/>
-          </a:xfrm>
-          <a:prstGeom prst="rect">
-            <a:avLst/>
-          </a:prstGeom>
-          <a:noFill/>
-        </p:spPr>
-        <p:txBody>
-          <a:bodyPr wrap="square" anchor="t">
-            <a:spAutoFit/>
-          </a:bodyPr>
-          <a:lstStyle/>
-          <a:p>
-            <a:pPr algn="l">
-              <a:spcAft>
-                <a:spcPts val="0"/>
-              </a:spcAft>
-            </a:pPr>
-            <a:r>
-              <a:rPr sz="4400" b="1" i="0">
-                <a:solidFill>
-                  <a:srgbClr val="E8590C"/>
-                </a:solidFill>
-                <a:latin typeface="Helvetica Neue"/>
-              </a:rPr>
-              <a:t>3 backends</a:t>
-            </a:r>
-          </a:p>
-        </p:txBody>
-      </p:sp>
-      <p:sp>
-        <p:nvSpPr>
-          <p:cNvPr id="16" name="TextBox 15"/>
-          <p:cNvSpPr txBox="1"/>
-          <p:nvPr/>
-        </p:nvSpPr>
-        <p:spPr>
-          <a:xfrm>
-            <a:off x="6766560" y="4818888"/>
-            <a:ext cx="4846320" cy="822960"/>
-          </a:xfrm>
-          <a:prstGeom prst="rect">
-            <a:avLst/>
-          </a:prstGeom>
-          <a:noFill/>
-        </p:spPr>
-        <p:txBody>
-          <a:bodyPr wrap="square" anchor="t">
-            <a:spAutoFit/>
-          </a:bodyPr>
-          <a:lstStyle/>
-          <a:p>
-            <a:pPr algn="l">
-              <a:spcAft>
-                <a:spcPts val="200"/>
-              </a:spcAft>
-            </a:pPr>
-            <a:r>
-              <a:rPr sz="1200" b="0" i="0">
-                <a:solidFill>
-                  <a:srgbClr val="717A85"/>
-                </a:solidFill>
-                <a:latin typeface="Helvetica Neue"/>
-              </a:rPr>
-              <a:t>CPU · GPU · TPU, one JAX program,</a:t>
-            </a:r>
-          </a:p>
-          <a:p>
-            <a:pPr algn="l">
-              <a:spcAft>
-                <a:spcPts val="200"/>
-              </a:spcAft>
-            </a:pPr>
-            <a:r>
-              <a:rPr sz="1200" b="0" i="0">
-                <a:solidFill>
-                  <a:srgbClr val="717A85"/>
-                </a:solidFill>
-                <a:latin typeface="Helvetica Neue"/>
-              </a:rPr>
-              <a:t>no per-backend reimplementation</a:t>
-            </a:r>
-          </a:p>
-        </p:txBody>
-      </p:sp>
-      <p:sp>
-        <p:nvSpPr>
-          <p:cNvPr id="17" name="TextBox 16"/>
-          <p:cNvSpPr txBox="1"/>
-          <p:nvPr/>
-        </p:nvSpPr>
-        <p:spPr>
-          <a:xfrm>
-            <a:off x="566928" y="5806440"/>
-            <a:ext cx="10972800" cy="640080"/>
-          </a:xfrm>
-          <a:prstGeom prst="rect">
-            <a:avLst/>
-          </a:prstGeom>
-          <a:noFill/>
-        </p:spPr>
-        <p:txBody>
-          <a:bodyPr wrap="square" anchor="t">
-            <a:spAutoFit/>
-          </a:bodyPr>
-          <a:lstStyle/>
-          <a:p>
-            <a:pPr algn="l">
-              <a:spcAft>
                 <a:spcPts val="500"/>
               </a:spcAft>
             </a:pPr>
             <a:r>
-              <a:rPr sz="1900" b="1" i="0">
-                <a:solidFill>
-                  <a:srgbClr val="E8590C"/>
-                </a:solidFill>
-                <a:latin typeface="Helvetica Neue"/>
-              </a:rPr>
-              <a:t>Where does the time actually go, and what does it take to run this at all?</a:t>
-            </a:r>
-          </a:p>
-        </p:txBody>
-      </p:sp>
-      <p:sp>
-        <p:nvSpPr>
-          <p:cNvPr id="18" name="TextBox 17"/>
-          <p:cNvSpPr txBox="1"/>
-          <p:nvPr/>
-        </p:nvSpPr>
-        <p:spPr>
-          <a:xfrm>
-            <a:off x="566928" y="6263640"/>
-            <a:ext cx="10972800" cy="365760"/>
-          </a:xfrm>
-          <a:prstGeom prst="rect">
-            <a:avLst/>
-          </a:prstGeom>
-          <a:noFill/>
-        </p:spPr>
-        <p:txBody>
-          <a:bodyPr wrap="square" anchor="t">
-            <a:spAutoFit/>
-          </a:bodyPr>
-          <a:lstStyle/>
-          <a:p>
-            <a:pPr algn="l">
-              <a:spcAft>
-                <a:spcPts val="500"/>
-              </a:spcAft>
-            </a:pPr>
-            <a:r>
-              <a:rPr sz="1100" b="0" i="1">
-                <a:solidFill>
-                  <a:srgbClr val="717A85"/>
-                </a:solidFill>
-                <a:latin typeface="Helvetica Neue"/>
-              </a:rPr>
-              <a:t>No patient data was used. Model accuracy earns no marks here. The object of study is the infrastructure.</a:t>
+              <a:rPr sz="2200" b="1" i="0">
+                <a:solidFill>
+                  <a:srgbClr val="15171A"/>
+                </a:solidFill>
+                <a:latin typeface="Helvetica Neue"/>
+              </a:rPr>
+              <a:t>Where does the time go, and what does it take to run this at all?</a:t>
             </a:r>
           </a:p>
         </p:txBody>
@@ -4141,7 +3850,7 @@
         <p:spPr>
           <a:xfrm>
             <a:off x="566928" y="1783080"/>
-            <a:ext cx="3520440" cy="2286000"/>
+            <a:ext cx="3520440" cy="1691640"/>
           </a:xfrm>
           <a:prstGeom prst="roundRect">
             <a:avLst>
@@ -4227,8 +3936,8 @@
         </p:nvSpPr>
         <p:spPr>
           <a:xfrm>
-            <a:off x="822960" y="2359152"/>
-            <a:ext cx="3063240" cy="1645920"/>
+            <a:off x="822960" y="2377440"/>
+            <a:ext cx="3108960" cy="1097280"/>
           </a:xfrm>
           <a:prstGeom prst="rect">
             <a:avLst/>
@@ -4243,97 +3952,49 @@
           <a:p>
             <a:pPr algn="l">
               <a:spcAft>
-                <a:spcPts val="200"/>
-              </a:spcAft>
-            </a:pPr>
-            <a:r>
-              <a:rPr sz="1200" b="0" i="0">
+                <a:spcPts val="700"/>
+              </a:spcAft>
+            </a:pPr>
+            <a:r>
+              <a:rPr sz="1300" b="0" i="0">
                 <a:solidFill>
                   <a:srgbClr val="15171A"/>
                 </a:solidFill>
                 <a:latin typeface="Helvetica Neue"/>
               </a:rPr>
-              <a:t>One JAX / Flax program.</a:t>
-            </a:r>
-          </a:p>
-          <a:p>
-            <a:pPr algn="l">
-              <a:spcAft>
-                <a:spcPts val="200"/>
-              </a:spcAft>
-            </a:pPr>
-            <a:r>
-              <a:rPr sz="1200" b="0" i="0">
+              <a:t>One JAX program</a:t>
+            </a:r>
+          </a:p>
+          <a:p>
+            <a:pPr algn="l">
+              <a:spcAft>
+                <a:spcPts val="700"/>
+              </a:spcAft>
+            </a:pPr>
+            <a:r>
+              <a:rPr sz="1300" b="0" i="0">
                 <a:solidFill>
                   <a:srgbClr val="15171A"/>
                 </a:solidFill>
                 <a:latin typeface="Helvetica Neue"/>
               </a:rPr>
-              <a:t>XLA lowers it to CPU, CUDA</a:t>
-            </a:r>
-          </a:p>
-          <a:p>
-            <a:pPr algn="l">
-              <a:spcAft>
-                <a:spcPts val="200"/>
-              </a:spcAft>
-            </a:pPr>
-            <a:r>
-              <a:rPr sz="1200" b="0" i="0">
+              <a:t>XLA lowers it to all three</a:t>
+            </a:r>
+          </a:p>
+          <a:p>
+            <a:pPr algn="l">
+              <a:spcAft>
+                <a:spcPts val="700"/>
+              </a:spcAft>
+            </a:pPr>
+            <a:r>
+              <a:rPr sz="1300" b="0" i="0">
                 <a:solidFill>
                   <a:srgbClr val="15171A"/>
                 </a:solidFill>
                 <a:latin typeface="Helvetica Neue"/>
               </a:rPr>
-              <a:t>and TPU.</a:t>
-            </a:r>
-          </a:p>
-          <a:p>
-            <a:pPr algn="l">
-              <a:spcAft>
-                <a:spcPts val="200"/>
-              </a:spcAft>
-            </a:pPr>
-            <a:r>
-              <a:rPr sz="1200" b="0" i="0">
-                <a:solidFill>
-                  <a:srgbClr val="15171A"/>
-                </a:solidFill>
-                <a:latin typeface="Helvetica Neue"/>
-              </a:rPr>
-              <a:t>LoRA via qwix, training via</a:t>
-            </a:r>
-          </a:p>
-          <a:p>
-            <a:pPr algn="l">
-              <a:spcAft>
-                <a:spcPts val="200"/>
-              </a:spcAft>
-            </a:pPr>
-            <a:r>
-              <a:rPr sz="1200" b="0" i="0">
-                <a:solidFill>
-                  <a:srgbClr val="15171A"/>
-                </a:solidFill>
-                <a:latin typeface="Helvetica Neue"/>
-              </a:rPr>
-              <a:t>Tunix, no per-backend</a:t>
-            </a:r>
-          </a:p>
-          <a:p>
-            <a:pPr algn="l">
-              <a:spcAft>
-                <a:spcPts val="200"/>
-              </a:spcAft>
-            </a:pPr>
-            <a:r>
-              <a:rPr sz="1200" b="0" i="0">
-                <a:solidFill>
-                  <a:srgbClr val="15171A"/>
-                </a:solidFill>
-                <a:latin typeface="Helvetica Neue"/>
-              </a:rPr>
-              <a:t>reimplementation.</a:t>
+              <a:t>LoRA via qwix, Tunix trainer</a:t>
             </a:r>
           </a:p>
         </p:txBody>
@@ -4347,7 +4008,7 @@
         <p:spPr>
           <a:xfrm>
             <a:off x="4361688" y="1783080"/>
-            <a:ext cx="3520440" cy="2286000"/>
+            <a:ext cx="3520440" cy="1691640"/>
           </a:xfrm>
           <a:prstGeom prst="roundRect">
             <a:avLst>
@@ -4433,8 +4094,8 @@
         </p:nvSpPr>
         <p:spPr>
           <a:xfrm>
-            <a:off x="4617720" y="2359152"/>
-            <a:ext cx="3063240" cy="1645920"/>
+            <a:off x="4617720" y="2377440"/>
+            <a:ext cx="3108960" cy="1097280"/>
           </a:xfrm>
           <a:prstGeom prst="rect">
             <a:avLst/>
@@ -4449,97 +4110,49 @@
           <a:p>
             <a:pPr algn="l">
               <a:spcAft>
-                <a:spcPts val="200"/>
-              </a:spcAft>
-            </a:pPr>
-            <a:r>
-              <a:rPr sz="1200" b="0" i="0">
+                <a:spcPts val="700"/>
+              </a:spcAft>
+            </a:pPr>
+            <a:r>
+              <a:rPr sz="1300" b="0" i="0">
                 <a:solidFill>
                   <a:srgbClr val="15171A"/>
                 </a:solidFill>
                 <a:latin typeface="Helvetica Neue"/>
               </a:rPr>
-              <a:t>3 pinned Docker images.</a:t>
-            </a:r>
-          </a:p>
-          <a:p>
-            <a:pPr algn="l">
-              <a:spcAft>
-                <a:spcPts val="200"/>
-              </a:spcAft>
-            </a:pPr>
-            <a:r>
-              <a:rPr sz="1200" b="0" i="0">
+              <a:t>3 pinned Docker images</a:t>
+            </a:r>
+          </a:p>
+          <a:p>
+            <a:pPr algn="l">
+              <a:spcAft>
+                <a:spcPts val="700"/>
+              </a:spcAft>
+            </a:pPr>
+            <a:r>
+              <a:rPr sz="1300" b="0" i="0">
                 <a:solidFill>
                   <a:srgbClr val="15171A"/>
                 </a:solidFill>
                 <a:latin typeface="Helvetica Neue"/>
               </a:rPr>
-              <a:t>Kubernetes Jobs across two</a:t>
-            </a:r>
-          </a:p>
-          <a:p>
-            <a:pPr algn="l">
-              <a:spcAft>
-                <a:spcPts val="200"/>
-              </a:spcAft>
-            </a:pPr>
-            <a:r>
-              <a:rPr sz="1200" b="0" i="0">
+              <a:t>Kubernetes across 2 clusters</a:t>
+            </a:r>
+          </a:p>
+          <a:p>
+            <a:pPr algn="l">
+              <a:spcAft>
+                <a:spcPts val="700"/>
+              </a:spcAft>
+            </a:pPr>
+            <a:r>
+              <a:rPr sz="1300" b="0" i="0">
                 <a:solidFill>
                   <a:srgbClr val="15171A"/>
                 </a:solidFill>
                 <a:latin typeface="Helvetica Neue"/>
               </a:rPr>
-              <a:t>clusters.</a:t>
-            </a:r>
-          </a:p>
-          <a:p>
-            <a:pPr algn="l">
-              <a:spcAft>
-                <a:spcPts val="200"/>
-              </a:spcAft>
-            </a:pPr>
-            <a:r>
-              <a:rPr sz="1200" b="0" i="0">
-                <a:solidFill>
-                  <a:srgbClr val="15171A"/>
-                </a:solidFill>
-                <a:latin typeface="Helvetica Neue"/>
-              </a:rPr>
-              <a:t>Kueue admission on the TPU</a:t>
-            </a:r>
-          </a:p>
-          <a:p>
-            <a:pPr algn="l">
-              <a:spcAft>
-                <a:spcPts val="200"/>
-              </a:spcAft>
-            </a:pPr>
-            <a:r>
-              <a:rPr sz="1200" b="0" i="0">
-                <a:solidFill>
-                  <a:srgbClr val="15171A"/>
-                </a:solidFill>
-                <a:latin typeface="Helvetica Neue"/>
-              </a:rPr>
-              <a:t>pool. Every manifest states</a:t>
-            </a:r>
-          </a:p>
-          <a:p>
-            <a:pPr algn="l">
-              <a:spcAft>
-                <a:spcPts val="200"/>
-              </a:spcAft>
-            </a:pPr>
-            <a:r>
-              <a:rPr sz="1200" b="0" i="0">
-                <a:solidFill>
-                  <a:srgbClr val="15171A"/>
-                </a:solidFill>
-                <a:latin typeface="Helvetica Neue"/>
-              </a:rPr>
-              <a:t>its CPU, memory and chips.</a:t>
+              <a:t>Kueue admission, explicit limits</a:t>
             </a:r>
           </a:p>
         </p:txBody>
@@ -4553,7 +4166,7 @@
         <p:spPr>
           <a:xfrm>
             <a:off x="8156448" y="1783080"/>
-            <a:ext cx="3520440" cy="2286000"/>
+            <a:ext cx="3520440" cy="1691640"/>
           </a:xfrm>
           <a:prstGeom prst="roundRect">
             <a:avLst>
@@ -4639,8 +4252,8 @@
         </p:nvSpPr>
         <p:spPr>
           <a:xfrm>
-            <a:off x="8412480" y="2359152"/>
-            <a:ext cx="3063240" cy="1645920"/>
+            <a:off x="8412480" y="2377440"/>
+            <a:ext cx="3108960" cy="1097280"/>
           </a:xfrm>
           <a:prstGeom prst="rect">
             <a:avLst/>
@@ -4655,113 +4268,49 @@
           <a:p>
             <a:pPr algn="l">
               <a:spcAft>
-                <a:spcPts val="200"/>
-              </a:spcAft>
-            </a:pPr>
-            <a:r>
-              <a:rPr sz="1200" b="0" i="0">
+                <a:spcPts val="700"/>
+              </a:spcAft>
+            </a:pPr>
+            <a:r>
+              <a:rPr sz="1300" b="0" i="0">
                 <a:solidFill>
                   <a:srgbClr val="15171A"/>
                 </a:solidFill>
                 <a:latin typeface="Helvetica Neue"/>
               </a:rPr>
-              <a:t>gcsfuse CSI, implicit-dirs.</a:t>
-            </a:r>
-          </a:p>
-          <a:p>
-            <a:pPr algn="l">
-              <a:spcAft>
-                <a:spcPts val="200"/>
-              </a:spcAft>
-            </a:pPr>
-            <a:r>
-              <a:rPr sz="1200" b="0" i="0">
+              <a:t>gcsfuse CSI, implicit-dirs</a:t>
+            </a:r>
+          </a:p>
+          <a:p>
+            <a:pPr algn="l">
+              <a:spcAft>
+                <a:spcPts val="700"/>
+              </a:spcAft>
+            </a:pPr>
+            <a:r>
+              <a:rPr sz="1300" b="0" i="0">
                 <a:solidFill>
                   <a:srgbClr val="15171A"/>
                 </a:solidFill>
                 <a:latin typeface="Helvetica Neue"/>
               </a:rPr>
-              <a:t>An 8 GB checkpoint read</a:t>
-            </a:r>
-          </a:p>
-          <a:p>
-            <a:pPr algn="l">
-              <a:spcAft>
-                <a:spcPts val="200"/>
-              </a:spcAft>
-            </a:pPr>
-            <a:r>
-              <a:rPr sz="1200" b="0" i="0">
+              <a:t>8 GB checkpoint from a bucket</a:t>
+            </a:r>
+          </a:p>
+          <a:p>
+            <a:pPr algn="l">
+              <a:spcAft>
+                <a:spcPts val="700"/>
+              </a:spcAft>
+            </a:pPr>
+            <a:r>
+              <a:rPr sz="1300" b="0" i="0">
                 <a:solidFill>
                   <a:srgbClr val="15171A"/>
                 </a:solidFill>
                 <a:latin typeface="Helvetica Neue"/>
               </a:rPr>
-              <a:t>from a bucket.</a:t>
-            </a:r>
-          </a:p>
-          <a:p>
-            <a:pPr algn="l">
-              <a:spcAft>
-                <a:spcPts val="200"/>
-              </a:spcAft>
-            </a:pPr>
-            <a:r>
-              <a:rPr sz="1200" b="0" i="0">
-                <a:solidFill>
-                  <a:srgbClr val="15171A"/>
-                </a:solidFill>
-                <a:latin typeface="Helvetica Neue"/>
-              </a:rPr>
-              <a:t>The file cache was left as a</a:t>
-            </a:r>
-          </a:p>
-          <a:p>
-            <a:pPr algn="l">
-              <a:spcAft>
-                <a:spcPts val="200"/>
-              </a:spcAft>
-            </a:pPr>
-            <a:r>
-              <a:rPr sz="1200" b="0" i="0">
-                <a:solidFill>
-                  <a:srgbClr val="15171A"/>
-                </a:solidFill>
-                <a:latin typeface="Helvetica Neue"/>
-              </a:rPr>
-              <a:t>knob rather than fixed -</a:t>
-            </a:r>
-          </a:p>
-          <a:p>
-            <a:pPr algn="l">
-              <a:spcAft>
-                <a:spcPts val="200"/>
-              </a:spcAft>
-            </a:pPr>
-            <a:r>
-              <a:rPr sz="1200" b="0" i="0">
-                <a:solidFill>
-                  <a:srgbClr val="15171A"/>
-                </a:solidFill>
-                <a:latin typeface="Helvetica Neue"/>
-              </a:rPr>
-              <a:t>that knob became the</a:t>
-            </a:r>
-          </a:p>
-          <a:p>
-            <a:pPr algn="l">
-              <a:spcAft>
-                <a:spcPts val="200"/>
-              </a:spcAft>
-            </a:pPr>
-            <a:r>
-              <a:rPr sz="1200" b="0" i="0">
-                <a:solidFill>
-                  <a:srgbClr val="15171A"/>
-                </a:solidFill>
-                <a:latin typeface="Helvetica Neue"/>
-              </a:rPr>
-              <a:t>experiment.</a:t>
+              <a:t>File cache left as a knob</a:t>
             </a:r>
           </a:p>
         </p:txBody>
@@ -4775,7 +4324,7 @@
           <p:nvPr/>
         </p:nvGraphicFramePr>
         <p:xfrm>
-          <a:off x="566928" y="4343400"/>
+          <a:off x="566928" y="3977639"/>
           <a:ext cx="11064238" cy="1463040"/>
         </p:xfrm>
         <a:graphic>
@@ -5178,8 +4727,8 @@
         </p:nvSpPr>
         <p:spPr>
           <a:xfrm>
-            <a:off x="566928" y="5989320"/>
-            <a:ext cx="10972800" cy="548640"/>
+            <a:off x="566928" y="5623560"/>
+            <a:ext cx="10972800" cy="457200"/>
           </a:xfrm>
           <a:prstGeom prst="rect">
             <a:avLst/>
@@ -5198,13 +4747,13 @@
               </a:spcAft>
             </a:pPr>
             <a:r>
-              <a:rPr sz="1300" b="0" i="1">
-                <a:solidFill>
-                  <a:srgbClr val="717A85"/>
-                </a:solidFill>
-                <a:latin typeface="Helvetica Neue"/>
-              </a:rPr>
-              <a:t>Note the middle row: the GH200's host is ARM64, not x86. That single fact cost us five separate blockers.</a:t>
+              <a:rPr sz="1500" b="1" i="0">
+                <a:solidFill>
+                  <a:srgbClr val="E8590C"/>
+                </a:solidFill>
+                <a:latin typeface="Helvetica Neue"/>
+              </a:rPr>
+              <a:t>The GH200 host is ARM64. That one fact cost five separate blockers.</a:t>
             </a:r>
           </a:p>
         </p:txBody>
@@ -5392,8 +4941,8 @@
         </p:nvSpPr>
         <p:spPr>
           <a:xfrm>
-            <a:off x="566928" y="1783080"/>
-            <a:ext cx="4846320" cy="2377440"/>
+            <a:off x="566928" y="1874519"/>
+            <a:ext cx="4937760" cy="2194560"/>
           </a:xfrm>
           <a:prstGeom prst="rect">
             <a:avLst/>
@@ -5408,193 +4957,65 @@
           <a:p>
             <a:pPr algn="l">
               <a:spcAft>
-                <a:spcPts val="300"/>
-              </a:spcAft>
-            </a:pPr>
-            <a:r>
-              <a:rPr sz="1300" b="0" i="0">
+                <a:spcPts val="1800"/>
+              </a:spcAft>
+            </a:pPr>
+            <a:r>
+              <a:rPr sz="1600" b="0" i="0">
                 <a:solidFill>
                   <a:srgbClr val="15171A"/>
                 </a:solidFill>
                 <a:latin typeface="Helvetica Neue"/>
               </a:rPr>
-              <a:t>Every run takes its own wall clock apart</a:t>
-            </a:r>
-          </a:p>
-          <a:p>
-            <a:pPr algn="l">
-              <a:spcAft>
-                <a:spcPts val="300"/>
-              </a:spcAft>
-            </a:pPr>
-            <a:r>
-              <a:rPr sz="1300" b="0" i="0">
+              <a:t>Six phases per run, not one total</a:t>
+            </a:r>
+          </a:p>
+          <a:p>
+            <a:pPr algn="l">
+              <a:spcAft>
+                <a:spcPts val="1800"/>
+              </a:spcAft>
+            </a:pPr>
+            <a:r>
+              <a:rPr sz="1600" b="0" i="0">
                 <a:solidFill>
                   <a:srgbClr val="15171A"/>
                 </a:solidFill>
                 <a:latin typeface="Helvetica Neue"/>
               </a:rPr>
-              <a:t>into six phases: scheduling, image pull,</a:t>
-            </a:r>
-          </a:p>
-          <a:p>
-            <a:pPr algn="l">
-              <a:spcAft>
-                <a:spcPts val="300"/>
-              </a:spcAft>
-            </a:pPr>
-            <a:r>
-              <a:rPr sz="1300" b="0" i="0">
+              <a:t>Sweeps walked into OOM, failed cells kept</a:t>
+            </a:r>
+          </a:p>
+          <a:p>
+            <a:pPr algn="l">
+              <a:spcAft>
+                <a:spcPts val="1800"/>
+              </a:spcAft>
+            </a:pPr>
+            <a:r>
+              <a:rPr sz="1600" b="0" i="0">
                 <a:solidFill>
                   <a:srgbClr val="15171A"/>
                 </a:solidFill>
                 <a:latin typeface="Helvetica Neue"/>
               </a:rPr>
-              <a:t>checkpoint load, XLA compile, the steady-</a:t>
-            </a:r>
-          </a:p>
-          <a:p>
-            <a:pPr algn="l">
-              <a:spcAft>
-                <a:spcPts val="300"/>
-              </a:spcAft>
-            </a:pPr>
-            <a:r>
-              <a:rPr sz="1300" b="0" i="0">
+              <a:t>One schema, one JSON per run</a:t>
+            </a:r>
+          </a:p>
+          <a:p>
+            <a:pPr algn="l">
+              <a:spcAft>
+                <a:spcPts val="1800"/>
+              </a:spcAft>
+            </a:pPr>
+            <a:r>
+              <a:rPr sz="1600" b="0" i="0">
                 <a:solidFill>
                   <a:srgbClr val="15171A"/>
                 </a:solidFill>
                 <a:latin typeface="Helvetica Neue"/>
               </a:rPr>
-              <a:t>state steps, checkpoint write.</a:t>
-            </a:r>
-          </a:p>
-          <a:p>
-            <a:pPr algn="l">
-              <a:spcAft>
-                <a:spcPts val="300"/>
-              </a:spcAft>
-            </a:pPr>
-            <a:r>
-              <a:rPr sz="1300" b="0" i="0">
-                <a:solidFill>
-                  <a:srgbClr val="15171A"/>
-                </a:solidFill>
-                <a:latin typeface="Helvetica Neue"/>
-              </a:rPr>
-              <a:t/>
-            </a:r>
-          </a:p>
-          <a:p>
-            <a:pPr algn="l">
-              <a:spcAft>
-                <a:spcPts val="300"/>
-              </a:spcAft>
-            </a:pPr>
-            <a:r>
-              <a:rPr sz="1300" b="0" i="0">
-                <a:solidFill>
-                  <a:srgbClr val="15171A"/>
-                </a:solidFill>
-                <a:latin typeface="Helvetica Neue"/>
-              </a:rPr>
-              <a:t>Batch and sequence sweeps walked until</a:t>
-            </a:r>
-          </a:p>
-          <a:p>
-            <a:pPr algn="l">
-              <a:spcAft>
-                <a:spcPts val="300"/>
-              </a:spcAft>
-            </a:pPr>
-            <a:r>
-              <a:rPr sz="1300" b="0" i="0">
-                <a:solidFill>
-                  <a:srgbClr val="15171A"/>
-                </a:solidFill>
-                <a:latin typeface="Helvetica Neue"/>
-              </a:rPr>
-              <a:t>the job dies. A failed cell is recorded,</a:t>
-            </a:r>
-          </a:p>
-          <a:p>
-            <a:pPr algn="l">
-              <a:spcAft>
-                <a:spcPts val="300"/>
-              </a:spcAft>
-            </a:pPr>
-            <a:r>
-              <a:rPr sz="1300" b="0" i="0">
-                <a:solidFill>
-                  <a:srgbClr val="15171A"/>
-                </a:solidFill>
-                <a:latin typeface="Helvetica Neue"/>
-              </a:rPr>
-              <a:t>never dropped. The boundary is the</a:t>
-            </a:r>
-          </a:p>
-          <a:p>
-            <a:pPr algn="l">
-              <a:spcAft>
-                <a:spcPts val="300"/>
-              </a:spcAft>
-            </a:pPr>
-            <a:r>
-              <a:rPr sz="1300" b="0" i="0">
-                <a:solidFill>
-                  <a:srgbClr val="15171A"/>
-                </a:solidFill>
-                <a:latin typeface="Helvetica Neue"/>
-              </a:rPr>
-              <a:t>measurement.</a:t>
-            </a:r>
-          </a:p>
-          <a:p>
-            <a:pPr algn="l">
-              <a:spcAft>
-                <a:spcPts val="300"/>
-              </a:spcAft>
-            </a:pPr>
-            <a:r>
-              <a:rPr sz="1300" b="0" i="0">
-                <a:solidFill>
-                  <a:srgbClr val="15171A"/>
-                </a:solidFill>
-                <a:latin typeface="Helvetica Neue"/>
-              </a:rPr>
-              <a:t/>
-            </a:r>
-          </a:p>
-          <a:p>
-            <a:pPr algn="l">
-              <a:spcAft>
-                <a:spcPts val="300"/>
-              </a:spcAft>
-            </a:pPr>
-            <a:r>
-              <a:rPr sz="1300" b="0" i="0">
-                <a:solidFill>
-                  <a:srgbClr val="15171A"/>
-                </a:solidFill>
-                <a:latin typeface="Helvetica Neue"/>
-              </a:rPr>
-              <a:t>One schema, one JSON per run. Every figure</a:t>
-            </a:r>
-          </a:p>
-          <a:p>
-            <a:pPr algn="l">
-              <a:spcAft>
-                <a:spcPts val="300"/>
-              </a:spcAft>
-            </a:pPr>
-            <a:r>
-              <a:rPr sz="1300" b="0" i="0">
-                <a:solidFill>
-                  <a:srgbClr val="15171A"/>
-                </a:solidFill>
-                <a:latin typeface="Helvetica Neue"/>
-              </a:rPr>
-              <a:t>here reads those files and nothing else.</a:t>
+              <a:t>Every figure reads only those files</a:t>
             </a:r>
           </a:p>
         </p:txBody>
@@ -5734,65 +5155,81 @@
           <a:p>
             <a:pPr algn="l">
               <a:spcAft>
-                <a:spcPts val="200"/>
-              </a:spcAft>
-            </a:pPr>
-            <a:r>
-              <a:rPr sz="1200" b="0" i="0">
+                <a:spcPts val="400"/>
+              </a:spcAft>
+            </a:pPr>
+            <a:r>
+              <a:rPr sz="1300" b="0" i="0">
                 <a:solidFill>
                   <a:srgbClr val="15171A"/>
                 </a:solidFill>
                 <a:latin typeface="Helvetica Neue"/>
               </a:rPr>
-              <a:t>One run reported 93 µs per step and 11 M tokens/s.</a:t>
-            </a:r>
-          </a:p>
-          <a:p>
-            <a:pPr algn="l">
-              <a:spcAft>
-                <a:spcPts val="200"/>
-              </a:spcAft>
-            </a:pPr>
-            <a:r>
-              <a:rPr sz="1200" b="0" i="0">
+              <a:t>93 µs per step. 11 M tokens/s. Impossible,</a:t>
+            </a:r>
+          </a:p>
+          <a:p>
+            <a:pPr algn="l">
+              <a:spcAft>
+                <a:spcPts val="400"/>
+              </a:spcAft>
+            </a:pPr>
+            <a:r>
+              <a:rPr sz="1300" b="0" i="0">
                 <a:solidFill>
                   <a:srgbClr val="15171A"/>
                 </a:solidFill>
                 <a:latin typeface="Helvetica Neue"/>
               </a:rPr>
-              <a:t>Impossible, yet it carried status "ok".</a:t>
-            </a:r>
-          </a:p>
-          <a:p>
-            <a:pPr algn="l">
-              <a:spcAft>
-                <a:spcPts val="200"/>
-              </a:spcAft>
-            </a:pPr>
-            <a:r>
-              <a:rPr sz="1200" b="0" i="0">
+              <a:t>yet it carried status "ok".</a:t>
+            </a:r>
+          </a:p>
+          <a:p>
+            <a:pPr algn="l">
+              <a:spcAft>
+                <a:spcPts val="400"/>
+              </a:spcAft>
+            </a:pPr>
+            <a:r>
+              <a:rPr sz="1300" b="0" i="0">
                 <a:solidFill>
                   <a:srgbClr val="15171A"/>
                 </a:solidFill>
                 <a:latin typeface="Helvetica Neue"/>
               </a:rPr>
-              <a:t>Its own notes flagged that it may have timed</a:t>
-            </a:r>
-          </a:p>
-          <a:p>
-            <a:pPr algn="l">
-              <a:spcAft>
-                <a:spcPts val="200"/>
-              </a:spcAft>
-            </a:pPr>
-            <a:r>
-              <a:rPr sz="1200" b="0" i="0">
+              <a:t/>
+            </a:r>
+          </a:p>
+          <a:p>
+            <a:pPr algn="l">
+              <a:spcAft>
+                <a:spcPts val="400"/>
+              </a:spcAft>
+            </a:pPr>
+            <a:r>
+              <a:rPr sz="1300" b="0" i="0">
                 <a:solidFill>
                   <a:srgbClr val="15171A"/>
                 </a:solidFill>
                 <a:latin typeface="Helvetica Neue"/>
               </a:rPr>
-              <a:t>dispatch, not completion. Discarded, repeated.</a:t>
+              <a:t>Its own notes admitted it may have timed</a:t>
+            </a:r>
+          </a:p>
+          <a:p>
+            <a:pPr algn="l">
+              <a:spcAft>
+                <a:spcPts val="400"/>
+              </a:spcAft>
+            </a:pPr>
+            <a:r>
+              <a:rPr sz="1300" b="0" i="0">
+                <a:solidFill>
+                  <a:srgbClr val="15171A"/>
+                </a:solidFill>
+                <a:latin typeface="Helvetica Neue"/>
+              </a:rPr>
+              <a:t>dispatch, not completion. Discarded.</a:t>
             </a:r>
           </a:p>
         </p:txBody>
@@ -5967,7 +5404,7 @@
                 </a:solidFill>
                 <a:latin typeface="Helvetica Neue"/>
               </a:rPr>
-              <a:t>One Hopper chip kept up with eight TPU chips.</a:t>
+              <a:t>Under load, one GH200 beats eight TPU chips.</a:t>
             </a:r>
           </a:p>
         </p:txBody>
@@ -5981,8 +5418,8 @@
           <p:nvPr/>
         </p:nvGraphicFramePr>
         <p:xfrm>
-          <a:off x="566928" y="1664208"/>
-          <a:ext cx="6629400" cy="2112264"/>
+          <a:off x="566928" y="1691640"/>
+          <a:ext cx="7040880" cy="1920240"/>
         </p:xfrm>
         <a:graphic>
           <a:graphicData uri="http://schemas.openxmlformats.org/drawingml/2006/table">
@@ -5991,12 +5428,12 @@
                 <a:tableStyleId>{5C22544A-7EE6-4342-B048-85BDC9FD1C3A}</a:tableStyleId>
               </a:tblPr>
               <a:tblGrid>
-                <a:gridCol w="2377440"/>
-                <a:gridCol w="1325880"/>
-                <a:gridCol w="1463040"/>
-                <a:gridCol w="1463040"/>
+                <a:gridCol w="2286000"/>
+                <a:gridCol w="1828800"/>
+                <a:gridCol w="1828800"/>
+                <a:gridCol w="1097280"/>
               </a:tblGrid>
-              <a:tr h="301752">
+              <a:tr h="384048">
                 <a:tc>
                   <a:txBody>
                     <a:bodyPr/>
@@ -6004,13 +5441,13 @@
                     <a:p>
                       <a:pPr algn="l"/>
                       <a:r>
-                        <a:rPr sz="1200" b="1">
+                        <a:rPr sz="1300" b="1">
                           <a:solidFill>
                             <a:srgbClr val="FFFFFF"/>
                           </a:solidFill>
                           <a:latin typeface="Helvetica Neue"/>
                         </a:rPr>
-                        <a:t>Qwen3-0.6B · bs 1 · seq 1024</a:t>
+                        <a:t>Qwen3-4B, seq 1024</a:t>
                       </a:r>
                     </a:p>
                   </a:txBody>
@@ -6027,13 +5464,13 @@
                     <a:p>
                       <a:pPr algn="r"/>
                       <a:r>
-                        <a:rPr sz="1200" b="1">
+                        <a:rPr sz="1300" b="1">
                           <a:solidFill>
                             <a:srgbClr val="FFFFFF"/>
                           </a:solidFill>
                           <a:latin typeface="Helvetica Neue"/>
                         </a:rPr>
-                        <a:t>CPU</a:t>
+                        <a:t>GH200  1 chip</a:t>
                       </a:r>
                     </a:p>
                   </a:txBody>
@@ -6050,13 +5487,13 @@
                     <a:p>
                       <a:pPr algn="r"/>
                       <a:r>
-                        <a:rPr sz="1200" b="1">
+                        <a:rPr sz="1300" b="1">
                           <a:solidFill>
                             <a:srgbClr val="FFFFFF"/>
                           </a:solidFill>
                           <a:latin typeface="Helvetica Neue"/>
                         </a:rPr>
-                        <a:t>GPU GH200</a:t>
+                        <a:t>v5e  8 chips</a:t>
                       </a:r>
                     </a:p>
                   </a:txBody>
@@ -6073,13 +5510,13 @@
                     <a:p>
                       <a:pPr algn="r"/>
                       <a:r>
-                        <a:rPr sz="1200" b="1">
+                        <a:rPr sz="1300" b="1">
                           <a:solidFill>
                             <a:srgbClr val="FFFFFF"/>
                           </a:solidFill>
                           <a:latin typeface="Helvetica Neue"/>
                         </a:rPr>
-                        <a:t>TPU v5e 2×4</a:t>
+                        <a:t>ratio</a:t>
                       </a:r>
                     </a:p>
                   </a:txBody>
@@ -6090,7 +5527,7 @@
                   </a:tcPr>
                 </a:tc>
               </a:tr>
-              <a:tr h="301752">
+              <a:tr h="384048">
                 <a:tc>
                   <a:txBody>
                     <a:bodyPr/>
@@ -6098,13 +5535,13 @@
                     <a:p>
                       <a:pPr algn="l"/>
                       <a:r>
-                        <a:rPr sz="1200">
+                        <a:rPr sz="1300">
                           <a:solidFill>
                             <a:srgbClr val="15171A"/>
                           </a:solidFill>
                           <a:latin typeface="Helvetica Neue"/>
                         </a:rPr>
-                        <a:t>chips</a:t>
+                        <a:t>batch 8</a:t>
                       </a:r>
                     </a:p>
                   </a:txBody>
@@ -6121,13 +5558,36 @@
                     <a:p>
                       <a:pPr algn="r"/>
                       <a:r>
-                        <a:rPr sz="1200">
+                        <a:rPr sz="1300" b="1">
+                          <a:solidFill>
+                            <a:srgbClr val="E8590C"/>
+                          </a:solidFill>
+                          <a:latin typeface="Helvetica Neue"/>
+                        </a:rPr>
+                        <a:t>11,557 tok/s</a:t>
+                      </a:r>
+                    </a:p>
+                  </a:txBody>
+                  <a:tcPr anchor="ctr" marL="82296" marR="82296" marT="9144" marB="9144">
+                    <a:solidFill>
+                      <a:srgbClr val="FEF3EA"/>
+                    </a:solidFill>
+                  </a:tcPr>
+                </a:tc>
+                <a:tc>
+                  <a:txBody>
+                    <a:bodyPr/>
+                    <a:lstStyle/>
+                    <a:p>
+                      <a:pPr algn="r"/>
+                      <a:r>
+                        <a:rPr sz="1300">
                           <a:solidFill>
                             <a:srgbClr val="15171A"/>
                           </a:solidFill>
                           <a:latin typeface="Helvetica Neue"/>
                         </a:rPr>
-                        <a:t>-</a:t>
+                        <a:t>4,678 tok/s</a:t>
                       </a:r>
                     </a:p>
                   </a:txBody>
@@ -6144,13 +5604,61 @@
                     <a:p>
                       <a:pPr algn="r"/>
                       <a:r>
-                        <a:rPr sz="1200" b="1">
+                        <a:rPr sz="1300">
+                          <a:solidFill>
+                            <a:srgbClr val="15171A"/>
+                          </a:solidFill>
+                          <a:latin typeface="Helvetica Neue"/>
+                        </a:rPr>
+                        <a:t>2.5x</a:t>
+                      </a:r>
+                    </a:p>
+                  </a:txBody>
+                  <a:tcPr anchor="ctr" marL="82296" marR="82296" marT="9144" marB="9144">
+                    <a:solidFill>
+                      <a:srgbClr val="FFFFFF"/>
+                    </a:solidFill>
+                  </a:tcPr>
+                </a:tc>
+              </a:tr>
+              <a:tr h="384048">
+                <a:tc>
+                  <a:txBody>
+                    <a:bodyPr/>
+                    <a:lstStyle/>
+                    <a:p>
+                      <a:pPr algn="l"/>
+                      <a:r>
+                        <a:rPr sz="1300">
+                          <a:solidFill>
+                            <a:srgbClr val="15171A"/>
+                          </a:solidFill>
+                          <a:latin typeface="Helvetica Neue"/>
+                        </a:rPr>
+                        <a:t>batch 16</a:t>
+                      </a:r>
+                    </a:p>
+                  </a:txBody>
+                  <a:tcPr anchor="ctr" marL="82296" marR="82296" marT="9144" marB="9144">
+                    <a:solidFill>
+                      <a:srgbClr val="FFFFFF"/>
+                    </a:solidFill>
+                  </a:tcPr>
+                </a:tc>
+                <a:tc>
+                  <a:txBody>
+                    <a:bodyPr/>
+                    <a:lstStyle/>
+                    <a:p>
+                      <a:pPr algn="r"/>
+                      <a:r>
+                        <a:rPr sz="1300" b="1">
                           <a:solidFill>
                             <a:srgbClr val="E8590C"/>
                           </a:solidFill>
                           <a:latin typeface="Helvetica Neue"/>
                         </a:rPr>
-                        <a:t>1</a:t>
+                        <a:t>12,504 tok/s</a:t>
                       </a:r>
                     </a:p>
                   </a:txBody>
@@ -6167,38 +5675,13 @@
                     <a:p>
                       <a:pPr algn="r"/>
                       <a:r>
-                        <a:rPr sz="1200">
+                        <a:rPr sz="1300">
                           <a:solidFill>
                             <a:srgbClr val="15171A"/>
                           </a:solidFill>
                           <a:latin typeface="Helvetica Neue"/>
                         </a:rPr>
-                        <a:t>8</a:t>
-                      </a:r>
-                    </a:p>
-                  </a:txBody>
-                  <a:tcPr anchor="ctr" marL="82296" marR="82296" marT="9144" marB="9144">
-                    <a:solidFill>
-                      <a:srgbClr val="FFFFFF"/>
-                    </a:solidFill>
-                  </a:tcPr>
-                </a:tc>
-              </a:tr>
-              <a:tr h="301752">
-                <a:tc>
-                  <a:txBody>
-                    <a:bodyPr/>
-                    <a:lstStyle/>
-                    <a:p>
-                      <a:pPr algn="l"/>
-                      <a:r>
-                        <a:rPr sz="1200">
-                          <a:solidFill>
-                            <a:srgbClr val="15171A"/>
-                          </a:solidFill>
-                          <a:latin typeface="Helvetica Neue"/>
-                        </a:rPr>
-                        <a:t>median step</a:t>
+                        <a:t>4,596 tok/s</a:t>
                       </a:r>
                     </a:p>
                   </a:txBody>
@@ -6215,13 +5698,38 @@
                     <a:p>
                       <a:pPr algn="r"/>
                       <a:r>
-                        <a:rPr sz="1200">
+                        <a:rPr sz="1300">
                           <a:solidFill>
                             <a:srgbClr val="15171A"/>
                           </a:solidFill>
                           <a:latin typeface="Helvetica Neue"/>
                         </a:rPr>
-                        <a:t>18.99 s</a:t>
+                        <a:t>2.7x</a:t>
+                      </a:r>
+                    </a:p>
+                  </a:txBody>
+                  <a:tcPr anchor="ctr" marL="82296" marR="82296" marT="9144" marB="9144">
+                    <a:solidFill>
+                      <a:srgbClr val="FFFFFF"/>
+                    </a:solidFill>
+                  </a:tcPr>
+                </a:tc>
+              </a:tr>
+              <a:tr h="384048">
+                <a:tc>
+                  <a:txBody>
+                    <a:bodyPr/>
+                    <a:lstStyle/>
+                    <a:p>
+                      <a:pPr algn="l"/>
+                      <a:r>
+                        <a:rPr sz="1300">
+                          <a:solidFill>
+                            <a:srgbClr val="15171A"/>
+                          </a:solidFill>
+                          <a:latin typeface="Helvetica Neue"/>
+                        </a:rPr>
+                        <a:t>batch 32</a:t>
                       </a:r>
                     </a:p>
                   </a:txBody>
@@ -6238,13 +5746,13 @@
                     <a:p>
                       <a:pPr algn="r"/>
                       <a:r>
-                        <a:rPr sz="1200" b="1">
+                        <a:rPr sz="1300" b="1">
                           <a:solidFill>
                             <a:srgbClr val="E8590C"/>
                           </a:solidFill>
                           <a:latin typeface="Helvetica Neue"/>
                         </a:rPr>
-                        <a:t>0.0798 s</a:t>
+                        <a:t>13,218 tok/s</a:t>
                       </a:r>
                     </a:p>
                   </a:txBody>
@@ -6261,38 +5769,13 @@
                     <a:p>
                       <a:pPr algn="r"/>
                       <a:r>
-                        <a:rPr sz="1200">
+                        <a:rPr sz="1300">
                           <a:solidFill>
                             <a:srgbClr val="15171A"/>
                           </a:solidFill>
                           <a:latin typeface="Helvetica Neue"/>
                         </a:rPr>
-                        <a:t>0.0800 s</a:t>
-                      </a:r>
-                    </a:p>
-                  </a:txBody>
-                  <a:tcPr anchor="ctr" marL="82296" marR="82296" marT="9144" marB="9144">
-                    <a:solidFill>
-                      <a:srgbClr val="FFFFFF"/>
-                    </a:solidFill>
-                  </a:tcPr>
-                </a:tc>
-              </a:tr>
-              <a:tr h="301752">
-                <a:tc>
-                  <a:txBody>
-                    <a:bodyPr/>
-                    <a:lstStyle/>
-                    <a:p>
-                      <a:pPr algn="l"/>
-                      <a:r>
-                        <a:rPr sz="1200">
-                          <a:solidFill>
-                            <a:srgbClr val="15171A"/>
-                          </a:solidFill>
-                          <a:latin typeface="Helvetica Neue"/>
-                        </a:rPr>
-                        <a:t>throughput</a:t>
+                        <a:t>out of memory</a:t>
                       </a:r>
                     </a:p>
                   </a:txBody>
@@ -6309,13 +5792,38 @@
                     <a:p>
                       <a:pPr algn="r"/>
                       <a:r>
-                        <a:rPr sz="1200">
+                        <a:rPr sz="1300">
                           <a:solidFill>
                             <a:srgbClr val="15171A"/>
                           </a:solidFill>
                           <a:latin typeface="Helvetica Neue"/>
                         </a:rPr>
-                        <a:t>54</a:t>
+                        <a:t/>
+                      </a:r>
+                    </a:p>
+                  </a:txBody>
+                  <a:tcPr anchor="ctr" marL="82296" marR="82296" marT="9144" marB="9144">
+                    <a:solidFill>
+                      <a:srgbClr val="FFFFFF"/>
+                    </a:solidFill>
+                  </a:tcPr>
+                </a:tc>
+              </a:tr>
+              <a:tr h="384048">
+                <a:tc>
+                  <a:txBody>
+                    <a:bodyPr/>
+                    <a:lstStyle/>
+                    <a:p>
+                      <a:pPr algn="l"/>
+                      <a:r>
+                        <a:rPr sz="1300">
+                          <a:solidFill>
+                            <a:srgbClr val="15171A"/>
+                          </a:solidFill>
+                          <a:latin typeface="Helvetica Neue"/>
+                        </a:rPr>
+                        <a:t>batch 64</a:t>
                       </a:r>
                     </a:p>
                   </a:txBody>
@@ -6332,13 +5840,13 @@
                     <a:p>
                       <a:pPr algn="r"/>
                       <a:r>
-                        <a:rPr sz="1200" b="1">
+                        <a:rPr sz="1300" b="1">
                           <a:solidFill>
                             <a:srgbClr val="E8590C"/>
                           </a:solidFill>
                           <a:latin typeface="Helvetica Neue"/>
                         </a:rPr>
-                        <a:t>12,834</a:t>
+                        <a:t>out of memory</a:t>
                       </a:r>
                     </a:p>
                   </a:txBody>
@@ -6355,38 +5863,13 @@
                     <a:p>
                       <a:pPr algn="r"/>
                       <a:r>
-                        <a:rPr sz="1200">
+                        <a:rPr sz="1300">
                           <a:solidFill>
                             <a:srgbClr val="15171A"/>
                           </a:solidFill>
                           <a:latin typeface="Helvetica Neue"/>
                         </a:rPr>
-                        <a:t>12,804</a:t>
-                      </a:r>
-                    </a:p>
-                  </a:txBody>
-                  <a:tcPr anchor="ctr" marL="82296" marR="82296" marT="9144" marB="9144">
-                    <a:solidFill>
-                      <a:srgbClr val="FFFFFF"/>
-                    </a:solidFill>
-                  </a:tcPr>
-                </a:tc>
-              </a:tr>
-              <a:tr h="301752">
-                <a:tc>
-                  <a:txBody>
-                    <a:bodyPr/>
-                    <a:lstStyle/>
-                    <a:p>
-                      <a:pPr algn="l"/>
-                      <a:r>
-                        <a:rPr sz="1200">
-                          <a:solidFill>
-                            <a:srgbClr val="15171A"/>
-                          </a:solidFill>
-                          <a:latin typeface="Helvetica Neue"/>
-                        </a:rPr>
-                        <a:t>speedup vs CPU</a:t>
+                        <a:t/>
                       </a:r>
                     </a:p>
                   </a:txBody>
@@ -6403,247 +5886,13 @@
                     <a:p>
                       <a:pPr algn="r"/>
                       <a:r>
-                        <a:rPr sz="1200">
+                        <a:rPr sz="1300">
                           <a:solidFill>
                             <a:srgbClr val="15171A"/>
                           </a:solidFill>
                           <a:latin typeface="Helvetica Neue"/>
                         </a:rPr>
-                        <a:t>1.0×</a:t>
-                      </a:r>
-                    </a:p>
-                  </a:txBody>
-                  <a:tcPr anchor="ctr" marL="82296" marR="82296" marT="9144" marB="9144">
-                    <a:solidFill>
-                      <a:srgbClr val="FFFFFF"/>
-                    </a:solidFill>
-                  </a:tcPr>
-                </a:tc>
-                <a:tc>
-                  <a:txBody>
-                    <a:bodyPr/>
-                    <a:lstStyle/>
-                    <a:p>
-                      <a:pPr algn="r"/>
-                      <a:r>
-                        <a:rPr sz="1200" b="1">
-                          <a:solidFill>
-                            <a:srgbClr val="E8590C"/>
-                          </a:solidFill>
-                          <a:latin typeface="Helvetica Neue"/>
-                        </a:rPr>
-                        <a:t>238×</a:t>
-                      </a:r>
-                    </a:p>
-                  </a:txBody>
-                  <a:tcPr anchor="ctr" marL="82296" marR="82296" marT="9144" marB="9144">
-                    <a:solidFill>
-                      <a:srgbClr val="FEF3EA"/>
-                    </a:solidFill>
-                  </a:tcPr>
-                </a:tc>
-                <a:tc>
-                  <a:txBody>
-                    <a:bodyPr/>
-                    <a:lstStyle/>
-                    <a:p>
-                      <a:pPr algn="r"/>
-                      <a:r>
-                        <a:rPr sz="1200">
-                          <a:solidFill>
-                            <a:srgbClr val="15171A"/>
-                          </a:solidFill>
-                          <a:latin typeface="Helvetica Neue"/>
-                        </a:rPr>
-                        <a:t>237×</a:t>
-                      </a:r>
-                    </a:p>
-                  </a:txBody>
-                  <a:tcPr anchor="ctr" marL="82296" marR="82296" marT="9144" marB="9144">
-                    <a:solidFill>
-                      <a:srgbClr val="FFFFFF"/>
-                    </a:solidFill>
-                  </a:tcPr>
-                </a:tc>
-              </a:tr>
-              <a:tr h="301752">
-                <a:tc>
-                  <a:txBody>
-                    <a:bodyPr/>
-                    <a:lstStyle/>
-                    <a:p>
-                      <a:pPr algn="l"/>
-                      <a:r>
-                        <a:rPr sz="1200">
-                          <a:solidFill>
-                            <a:srgbClr val="15171A"/>
-                          </a:solidFill>
-                          <a:latin typeface="Helvetica Neue"/>
-                        </a:rPr>
-                        <a:t>peak memory</a:t>
-                      </a:r>
-                    </a:p>
-                  </a:txBody>
-                  <a:tcPr anchor="ctr" marL="82296" marR="82296" marT="9144" marB="9144">
-                    <a:solidFill>
-                      <a:srgbClr val="FFFFFF"/>
-                    </a:solidFill>
-                  </a:tcPr>
-                </a:tc>
-                <a:tc>
-                  <a:txBody>
-                    <a:bodyPr/>
-                    <a:lstStyle/>
-                    <a:p>
-                      <a:pPr algn="r"/>
-                      <a:r>
-                        <a:rPr sz="1200">
-                          <a:solidFill>
-                            <a:srgbClr val="15171A"/>
-                          </a:solidFill>
-                          <a:latin typeface="Helvetica Neue"/>
-                        </a:rPr>
-                        <a:t>66 %</a:t>
-                      </a:r>
-                    </a:p>
-                  </a:txBody>
-                  <a:tcPr anchor="ctr" marL="82296" marR="82296" marT="9144" marB="9144">
-                    <a:solidFill>
-                      <a:srgbClr val="FFFFFF"/>
-                    </a:solidFill>
-                  </a:tcPr>
-                </a:tc>
-                <a:tc>
-                  <a:txBody>
-                    <a:bodyPr/>
-                    <a:lstStyle/>
-                    <a:p>
-                      <a:pPr algn="r"/>
-                      <a:r>
-                        <a:rPr sz="1200" b="1">
-                          <a:solidFill>
-                            <a:srgbClr val="E8590C"/>
-                          </a:solidFill>
-                          <a:latin typeface="Helvetica Neue"/>
-                        </a:rPr>
-                        <a:t>5.0 %</a:t>
-                      </a:r>
-                    </a:p>
-                  </a:txBody>
-                  <a:tcPr anchor="ctr" marL="82296" marR="82296" marT="9144" marB="9144">
-                    <a:solidFill>
-                      <a:srgbClr val="FEF3EA"/>
-                    </a:solidFill>
-                  </a:tcPr>
-                </a:tc>
-                <a:tc>
-                  <a:txBody>
-                    <a:bodyPr/>
-                    <a:lstStyle/>
-                    <a:p>
-                      <a:pPr algn="r"/>
-                      <a:r>
-                        <a:rPr sz="1200">
-                          <a:solidFill>
-                            <a:srgbClr val="15171A"/>
-                          </a:solidFill>
-                          <a:latin typeface="Helvetica Neue"/>
-                        </a:rPr>
-                        <a:t>7.3 %</a:t>
-                      </a:r>
-                    </a:p>
-                  </a:txBody>
-                  <a:tcPr anchor="ctr" marL="82296" marR="82296" marT="9144" marB="9144">
-                    <a:solidFill>
-                      <a:srgbClr val="FFFFFF"/>
-                    </a:solidFill>
-                  </a:tcPr>
-                </a:tc>
-              </a:tr>
-              <a:tr h="301752">
-                <a:tc>
-                  <a:txBody>
-                    <a:bodyPr/>
-                    <a:lstStyle/>
-                    <a:p>
-                      <a:pPr algn="l"/>
-                      <a:r>
-                        <a:rPr sz="1200">
-                          <a:solidFill>
-                            <a:srgbClr val="15171A"/>
-                          </a:solidFill>
-                          <a:latin typeface="Helvetica Neue"/>
-                        </a:rPr>
-                        <a:t>USD / 1 000 steps</a:t>
-                      </a:r>
-                    </a:p>
-                  </a:txBody>
-                  <a:tcPr anchor="ctr" marL="82296" marR="82296" marT="9144" marB="9144">
-                    <a:solidFill>
-                      <a:srgbClr val="FFFFFF"/>
-                    </a:solidFill>
-                  </a:tcPr>
-                </a:tc>
-                <a:tc>
-                  <a:txBody>
-                    <a:bodyPr/>
-                    <a:lstStyle/>
-                    <a:p>
-                      <a:pPr algn="r"/>
-                      <a:r>
-                        <a:rPr sz="1200">
-                          <a:solidFill>
-                            <a:srgbClr val="15171A"/>
-                          </a:solidFill>
-                          <a:latin typeface="Helvetica Neue"/>
-                        </a:rPr>
-                        <a:t>$6.05</a:t>
-                      </a:r>
-                    </a:p>
-                  </a:txBody>
-                  <a:tcPr anchor="ctr" marL="82296" marR="82296" marT="9144" marB="9144">
-                    <a:solidFill>
-                      <a:srgbClr val="FFFFFF"/>
-                    </a:solidFill>
-                  </a:tcPr>
-                </a:tc>
-                <a:tc>
-                  <a:txBody>
-                    <a:bodyPr/>
-                    <a:lstStyle/>
-                    <a:p>
-                      <a:pPr algn="r"/>
-                      <a:r>
-                        <a:rPr sz="1200" b="1">
-                          <a:solidFill>
-                            <a:srgbClr val="E8590C"/>
-                          </a:solidFill>
-                          <a:latin typeface="Helvetica Neue"/>
-                        </a:rPr>
-                        <a:t>$0.131</a:t>
-                      </a:r>
-                    </a:p>
-                  </a:txBody>
-                  <a:tcPr anchor="ctr" marL="82296" marR="82296" marT="9144" marB="9144">
-                    <a:solidFill>
-                      <a:srgbClr val="FEF3EA"/>
-                    </a:solidFill>
-                  </a:tcPr>
-                </a:tc>
-                <a:tc>
-                  <a:txBody>
-                    <a:bodyPr/>
-                    <a:lstStyle/>
-                    <a:p>
-                      <a:pPr algn="r"/>
-                      <a:r>
-                        <a:rPr sz="1200">
-                          <a:solidFill>
-                            <a:srgbClr val="15171A"/>
-                          </a:solidFill>
-                          <a:latin typeface="Helvetica Neue"/>
-                        </a:rPr>
-                        <a:t>$1.03</a:t>
+                        <a:t/>
                       </a:r>
                     </a:p>
                   </a:txBody>
@@ -6666,8 +5915,8 @@
         </p:nvSpPr>
         <p:spPr>
           <a:xfrm>
-            <a:off x="7955279" y="1691640"/>
-            <a:ext cx="3657600" cy="777240"/>
+            <a:off x="566928" y="3794760"/>
+            <a:ext cx="6858000" cy="685800"/>
           </a:xfrm>
           <a:prstGeom prst="rect">
             <a:avLst/>
@@ -6682,173 +5931,24 @@
           <a:p>
             <a:pPr algn="l">
               <a:spcAft>
-                <a:spcPts val="0"/>
-              </a:spcAft>
-            </a:pPr>
-            <a:r>
-              <a:rPr sz="4000" b="1" i="0">
-                <a:solidFill>
-                  <a:srgbClr val="E8590C"/>
-                </a:solidFill>
-                <a:latin typeface="Helvetica Neue"/>
-              </a:rPr>
-              <a:t>0.23 %</a:t>
-            </a:r>
-          </a:p>
-        </p:txBody>
-      </p:sp>
-      <p:sp>
-        <p:nvSpPr>
-          <p:cNvPr id="8" name="TextBox 7"/>
-          <p:cNvSpPr txBox="1"/>
-          <p:nvPr/>
-        </p:nvSpPr>
-        <p:spPr>
-          <a:xfrm>
-            <a:off x="7955279" y="2350008"/>
-            <a:ext cx="3657600" cy="822960"/>
-          </a:xfrm>
-          <a:prstGeom prst="rect">
-            <a:avLst/>
-          </a:prstGeom>
-          <a:noFill/>
-        </p:spPr>
-        <p:txBody>
-          <a:bodyPr wrap="square" anchor="t">
-            <a:spAutoFit/>
-          </a:bodyPr>
-          <a:lstStyle/>
-          <a:p>
-            <a:pPr algn="l">
-              <a:spcAft>
-                <a:spcPts val="200"/>
-              </a:spcAft>
-            </a:pPr>
-            <a:r>
-              <a:rPr sz="1200" b="0" i="0">
-                <a:solidFill>
-                  <a:srgbClr val="717A85"/>
-                </a:solidFill>
-                <a:latin typeface="Helvetica Neue"/>
-              </a:rPr>
-              <a:t>difference in step time between</a:t>
-            </a:r>
-          </a:p>
-          <a:p>
-            <a:pPr algn="l">
-              <a:spcAft>
-                <a:spcPts val="200"/>
-              </a:spcAft>
-            </a:pPr>
-            <a:r>
-              <a:rPr sz="1200" b="0" i="0">
-                <a:solidFill>
-                  <a:srgbClr val="717A85"/>
-                </a:solidFill>
-                <a:latin typeface="Helvetica Neue"/>
-              </a:rPr>
-              <a:t>one GH200 and eight v5e chips</a:t>
-            </a:r>
-          </a:p>
-        </p:txBody>
-      </p:sp>
-      <p:sp>
-        <p:nvSpPr>
-          <p:cNvPr id="9" name="TextBox 8"/>
-          <p:cNvSpPr txBox="1"/>
-          <p:nvPr/>
-        </p:nvSpPr>
-        <p:spPr>
-          <a:xfrm>
-            <a:off x="7955279" y="2880360"/>
-            <a:ext cx="3657600" cy="777240"/>
-          </a:xfrm>
-          <a:prstGeom prst="rect">
-            <a:avLst/>
-          </a:prstGeom>
-          <a:noFill/>
-        </p:spPr>
-        <p:txBody>
-          <a:bodyPr wrap="square" anchor="t">
-            <a:spAutoFit/>
-          </a:bodyPr>
-          <a:lstStyle/>
-          <a:p>
-            <a:pPr algn="l">
-              <a:spcAft>
-                <a:spcPts val="0"/>
-              </a:spcAft>
-            </a:pPr>
-            <a:r>
-              <a:rPr sz="4000" b="1" i="0">
-                <a:solidFill>
-                  <a:srgbClr val="E8590C"/>
-                </a:solidFill>
-                <a:latin typeface="Helvetica Neue"/>
-              </a:rPr>
-              <a:t>14.6×</a:t>
-            </a:r>
-          </a:p>
-        </p:txBody>
-      </p:sp>
-      <p:sp>
-        <p:nvSpPr>
-          <p:cNvPr id="10" name="TextBox 9"/>
-          <p:cNvSpPr txBox="1"/>
-          <p:nvPr/>
-        </p:nvSpPr>
-        <p:spPr>
-          <a:xfrm>
-            <a:off x="7955279" y="3538728"/>
-            <a:ext cx="3657600" cy="822960"/>
-          </a:xfrm>
-          <a:prstGeom prst="rect">
-            <a:avLst/>
-          </a:prstGeom>
-          <a:noFill/>
-        </p:spPr>
-        <p:txBody>
-          <a:bodyPr wrap="square" anchor="t">
-            <a:spAutoFit/>
-          </a:bodyPr>
-          <a:lstStyle/>
-          <a:p>
-            <a:pPr algn="l">
-              <a:spcAft>
-                <a:spcPts val="200"/>
-              </a:spcAft>
-            </a:pPr>
-            <a:r>
-              <a:rPr sz="1200" b="0" i="0">
-                <a:solidFill>
-                  <a:srgbClr val="717A85"/>
-                </a:solidFill>
-                <a:latin typeface="Helvetica Neue"/>
-              </a:rPr>
-              <a:t>faster checkpoint load from one</a:t>
-            </a:r>
-          </a:p>
-          <a:p>
-            <a:pPr algn="l">
-              <a:spcAft>
-                <a:spcPts val="200"/>
-              </a:spcAft>
-            </a:pPr>
-            <a:r>
-              <a:rPr sz="1200" b="0" i="0">
-                <a:solidFill>
-                  <a:srgbClr val="717A85"/>
-                </a:solidFill>
-                <a:latin typeface="Helvetica Neue"/>
-              </a:rPr>
-              <a:t>manifest line, 31 % off wall clock</a:t>
+                <a:spcPts val="300"/>
+              </a:spcAft>
+            </a:pPr>
+            <a:r>
+              <a:rPr sz="1500" b="1" i="0">
+                <a:solidFill>
+                  <a:srgbClr val="15171A"/>
+                </a:solidFill>
+                <a:latin typeface="Helvetica Neue"/>
+              </a:rPr>
+              <a:t>At batch 1 both chips idle and tie to within 0.23 %. That tie was an artefact.</a:t>
             </a:r>
           </a:p>
         </p:txBody>
       </p:sp>
       <p:pic>
         <p:nvPicPr>
-          <p:cNvPr id="11" name="Picture 10" descr="slide4-comparison.png"/>
+          <p:cNvPr id="8" name="Picture 7" descr="slide4-sweep.png"/>
           <p:cNvPicPr>
             <a:picLocks noChangeAspect="1"/>
           </p:cNvPicPr>
@@ -6862,8 +5962,8 @@
         </p:blipFill>
         <p:spPr>
           <a:xfrm>
-            <a:off x="566928" y="3913632"/>
-            <a:ext cx="6766560" cy="2829483"/>
+            <a:off x="566928" y="4526280"/>
+            <a:ext cx="6858000" cy="1769806"/>
           </a:xfrm>
           <a:prstGeom prst="rect">
             <a:avLst/>
@@ -6872,14 +5972,108 @@
       </p:pic>
       <p:sp>
         <p:nvSpPr>
-          <p:cNvPr id="12" name="Rounded Rectangle 11"/>
+          <p:cNvPr id="9" name="TextBox 8"/>
+          <p:cNvSpPr txBox="1"/>
+          <p:nvPr/>
+        </p:nvSpPr>
+        <p:spPr>
+          <a:xfrm>
+            <a:off x="7955279" y="1691640"/>
+            <a:ext cx="3657600" cy="777240"/>
+          </a:xfrm>
+          <a:prstGeom prst="rect">
+            <a:avLst/>
+          </a:prstGeom>
+          <a:noFill/>
+        </p:spPr>
+        <p:txBody>
+          <a:bodyPr wrap="square" anchor="t">
+            <a:spAutoFit/>
+          </a:bodyPr>
+          <a:lstStyle/>
+          <a:p>
+            <a:pPr algn="l">
+              <a:spcAft>
+                <a:spcPts val="0"/>
+              </a:spcAft>
+            </a:pPr>
+            <a:r>
+              <a:rPr sz="5200" b="1" i="0">
+                <a:solidFill>
+                  <a:srgbClr val="E8590C"/>
+                </a:solidFill>
+                <a:latin typeface="Helvetica Neue"/>
+              </a:rPr>
+              <a:t>2.7x</a:t>
+            </a:r>
+          </a:p>
+        </p:txBody>
+      </p:sp>
+      <p:sp>
+        <p:nvSpPr>
+          <p:cNvPr id="10" name="TextBox 9"/>
+          <p:cNvSpPr txBox="1"/>
+          <p:nvPr/>
+        </p:nvSpPr>
+        <p:spPr>
+          <a:xfrm>
+            <a:off x="7955279" y="2350008"/>
+            <a:ext cx="3657600" cy="822960"/>
+          </a:xfrm>
+          <a:prstGeom prst="rect">
+            <a:avLst/>
+          </a:prstGeom>
+          <a:noFill/>
+        </p:spPr>
+        <p:txBody>
+          <a:bodyPr wrap="square" anchor="t">
+            <a:spAutoFit/>
+          </a:bodyPr>
+          <a:lstStyle/>
+          <a:p>
+            <a:pPr algn="l">
+              <a:spcAft>
+                <a:spcPts val="200"/>
+              </a:spcAft>
+            </a:pPr>
+            <a:r>
+              <a:rPr sz="1200" b="0" i="0">
+                <a:solidFill>
+                  <a:srgbClr val="717A85"/>
+                </a:solidFill>
+                <a:latin typeface="Helvetica Neue"/>
+              </a:rPr>
+              <a:t>the throughput of an eight-chip v5e</a:t>
+            </a:r>
+          </a:p>
+          <a:p>
+            <a:pPr algn="l">
+              <a:spcAft>
+                <a:spcPts val="200"/>
+              </a:spcAft>
+            </a:pPr>
+            <a:r>
+              <a:rPr sz="1200" b="0" i="0">
+                <a:solidFill>
+                  <a:srgbClr val="717A85"/>
+                </a:solidFill>
+                <a:latin typeface="Helvetica Neue"/>
+              </a:rPr>
+              <a:t>slice, from a single Hopper chip</a:t>
+            </a:r>
+          </a:p>
+        </p:txBody>
+      </p:sp>
+      <p:sp>
+        <p:nvSpPr>
+          <p:cNvPr id="11" name="Rounded Rectangle 10"/>
           <p:cNvSpPr/>
           <p:nvPr/>
         </p:nvSpPr>
         <p:spPr>
           <a:xfrm>
-            <a:off x="7955279" y="4160520"/>
-            <a:ext cx="3657600" cy="2011680"/>
+            <a:off x="7955279" y="3291840"/>
+            <a:ext cx="3657600" cy="1371600"/>
           </a:xfrm>
           <a:prstGeom prst="roundRect">
             <a:avLst>
@@ -6920,13 +6114,13 @@
       </p:sp>
       <p:sp>
         <p:nvSpPr>
-          <p:cNvPr id="13" name="TextBox 12"/>
+          <p:cNvPr id="12" name="TextBox 11"/>
           <p:cNvSpPr txBox="1"/>
           <p:nvPr/>
         </p:nvSpPr>
         <p:spPr>
           <a:xfrm>
-            <a:off x="8229600" y="4343400"/>
+            <a:off x="8229600" y="3474720"/>
             <a:ext cx="3200400" cy="274320"/>
           </a:xfrm>
           <a:prstGeom prst="rect">
@@ -6946,27 +6140,27 @@
               </a:spcAft>
             </a:pPr>
             <a:r>
-              <a:rPr sz="1300" b="1" i="0">
+              <a:rPr sz="1400" b="1" i="0">
                 <a:solidFill>
                   <a:srgbClr val="E8590C"/>
                 </a:solidFill>
                 <a:latin typeface="Helvetica Neue"/>
               </a:rPr>
-              <a:t>The control</a:t>
-            </a:r>
-          </a:p>
-        </p:txBody>
-      </p:sp>
-      <p:sp>
-        <p:nvSpPr>
-          <p:cNvPr id="14" name="TextBox 13"/>
+              <a:t>Memory boundary</a:t>
+            </a:r>
+          </a:p>
+        </p:txBody>
+      </p:sp>
+      <p:sp>
+        <p:nvSpPr>
+          <p:cNvPr id="13" name="TextBox 12"/>
           <p:cNvSpPr txBox="1"/>
           <p:nvPr/>
         </p:nvSpPr>
         <p:spPr>
           <a:xfrm>
-            <a:off x="8229600" y="4681728"/>
-            <a:ext cx="3200400" cy="1463040"/>
+            <a:off x="8229600" y="3794760"/>
+            <a:ext cx="3200400" cy="822960"/>
           </a:xfrm>
           <a:prstGeom prst="rect">
             <a:avLst/>
@@ -6981,129 +6175,207 @@
           <a:p>
             <a:pPr algn="l">
               <a:spcAft>
-                <a:spcPts val="200"/>
-              </a:spcAft>
-            </a:pPr>
-            <a:r>
-              <a:rPr sz="1150" b="0" i="0">
+                <a:spcPts val="400"/>
+              </a:spcAft>
+            </a:pPr>
+            <a:r>
+              <a:rPr sz="1400" b="0" i="0">
                 <a:solidFill>
                   <a:srgbClr val="15171A"/>
                 </a:solidFill>
                 <a:latin typeface="Helvetica Neue"/>
               </a:rPr>
-              <a:t>Median step time before and</a:t>
-            </a:r>
-          </a:p>
-          <a:p>
-            <a:pPr algn="l">
-              <a:spcAft>
-                <a:spcPts val="200"/>
-              </a:spcAft>
-            </a:pPr>
-            <a:r>
-              <a:rPr sz="1150" b="0" i="0">
+              <a:t>GH200 fails between 32 and 64</a:t>
+            </a:r>
+          </a:p>
+          <a:p>
+            <a:pPr algn="l">
+              <a:spcAft>
+                <a:spcPts val="400"/>
+              </a:spcAft>
+            </a:pPr>
+            <a:r>
+              <a:rPr sz="1400" b="0" i="0">
                 <a:solidFill>
                   <a:srgbClr val="15171A"/>
                 </a:solidFill>
                 <a:latin typeface="Helvetica Neue"/>
               </a:rPr>
-              <a:t>after the cache:</a:t>
-            </a:r>
-          </a:p>
-          <a:p>
-            <a:pPr algn="l">
-              <a:spcAft>
-                <a:spcPts val="200"/>
-              </a:spcAft>
-            </a:pPr>
-            <a:r>
-              <a:rPr sz="1150" b="0" i="0">
+              <a:t>v5e fails between 16 and 32</a:t>
+            </a:r>
+          </a:p>
+        </p:txBody>
+      </p:sp>
+      <p:sp>
+        <p:nvSpPr>
+          <p:cNvPr id="14" name="Rounded Rectangle 13"/>
+          <p:cNvSpPr/>
+          <p:nvPr/>
+        </p:nvSpPr>
+        <p:spPr>
+          <a:xfrm>
+            <a:off x="7955279" y="4846320"/>
+            <a:ext cx="3657600" cy="1417320"/>
+          </a:xfrm>
+          <a:prstGeom prst="roundRect">
+            <a:avLst>
+              <a:gd name="adj" fmla="val 4000"/>
+            </a:avLst>
+          </a:prstGeom>
+          <a:solidFill>
+            <a:srgbClr val="FEF3EA"/>
+          </a:solidFill>
+          <a:ln w="9525">
+            <a:solidFill>
+              <a:srgbClr val="E6E9EC"/>
+            </a:solidFill>
+          </a:ln>
+          <a:effectLst/>
+        </p:spPr>
+        <p:style>
+          <a:lnRef idx="1">
+            <a:schemeClr val="accent1"/>
+          </a:lnRef>
+          <a:fillRef idx="3">
+            <a:schemeClr val="accent1"/>
+          </a:fillRef>
+          <a:effectRef idx="2">
+            <a:schemeClr val="accent1"/>
+          </a:effectRef>
+          <a:fontRef idx="minor">
+            <a:schemeClr val="lt1"/>
+          </a:fontRef>
+        </p:style>
+        <p:txBody>
+          <a:bodyPr rtlCol="0" anchor="ctr"/>
+          <a:lstStyle/>
+          <a:p>
+            <a:pPr algn="ctr"/>
+          </a:p>
+        </p:txBody>
+      </p:sp>
+      <p:sp>
+        <p:nvSpPr>
+          <p:cNvPr id="15" name="TextBox 14"/>
+          <p:cNvSpPr txBox="1"/>
+          <p:nvPr/>
+        </p:nvSpPr>
+        <p:spPr>
+          <a:xfrm>
+            <a:off x="8229600" y="5029200"/>
+            <a:ext cx="3200400" cy="274320"/>
+          </a:xfrm>
+          <a:prstGeom prst="rect">
+            <a:avLst/>
+          </a:prstGeom>
+          <a:noFill/>
+        </p:spPr>
+        <p:txBody>
+          <a:bodyPr wrap="square" anchor="t">
+            <a:spAutoFit/>
+          </a:bodyPr>
+          <a:lstStyle/>
+          <a:p>
+            <a:pPr algn="l">
+              <a:spcAft>
+                <a:spcPts val="500"/>
+              </a:spcAft>
+            </a:pPr>
+            <a:r>
+              <a:rPr sz="1400" b="1" i="0">
+                <a:solidFill>
+                  <a:srgbClr val="E8590C"/>
+                </a:solidFill>
+                <a:latin typeface="Helvetica Neue"/>
+              </a:rPr>
+              <a:t>The mitigation, controlled</a:t>
+            </a:r>
+          </a:p>
+        </p:txBody>
+      </p:sp>
+      <p:sp>
+        <p:nvSpPr>
+          <p:cNvPr id="16" name="TextBox 15"/>
+          <p:cNvSpPr txBox="1"/>
+          <p:nvPr/>
+        </p:nvSpPr>
+        <p:spPr>
+          <a:xfrm>
+            <a:off x="8229600" y="5349240"/>
+            <a:ext cx="3200400" cy="914400"/>
+          </a:xfrm>
+          <a:prstGeom prst="rect">
+            <a:avLst/>
+          </a:prstGeom>
+          <a:noFill/>
+        </p:spPr>
+        <p:txBody>
+          <a:bodyPr wrap="square" anchor="t">
+            <a:spAutoFit/>
+          </a:bodyPr>
+          <a:lstStyle/>
+          <a:p>
+            <a:pPr algn="l">
+              <a:spcAft>
+                <a:spcPts val="300"/>
+              </a:spcAft>
+            </a:pPr>
+            <a:r>
+              <a:rPr sz="1300" b="0" i="0">
                 <a:solidFill>
                   <a:srgbClr val="15171A"/>
                 </a:solidFill>
                 <a:latin typeface="Helvetica Neue"/>
               </a:rPr>
-              <a:t/>
-            </a:r>
-          </a:p>
-          <a:p>
-            <a:pPr algn="l">
-              <a:spcAft>
-                <a:spcPts val="200"/>
-              </a:spcAft>
-            </a:pPr>
-            <a:r>
-              <a:rPr sz="1150" b="0" i="0">
+              <a:t>File cache: load 14.6x faster,</a:t>
+            </a:r>
+          </a:p>
+          <a:p>
+            <a:pPr algn="l">
+              <a:spcAft>
+                <a:spcPts val="300"/>
+              </a:spcAft>
+            </a:pPr>
+            <a:r>
+              <a:rPr sz="1300" b="0" i="0">
                 <a:solidFill>
                   <a:srgbClr val="15171A"/>
                 </a:solidFill>
                 <a:latin typeface="Helvetica Neue"/>
               </a:rPr>
-              <a:t>1.75122 s  to  1.75117 s</a:t>
-            </a:r>
-          </a:p>
-          <a:p>
-            <a:pPr algn="l">
-              <a:spcAft>
-                <a:spcPts val="200"/>
-              </a:spcAft>
-            </a:pPr>
-            <a:r>
-              <a:rPr sz="1150" b="0" i="0">
+              <a:t>31 % off wall clock.</a:t>
+            </a:r>
+          </a:p>
+          <a:p>
+            <a:pPr algn="l">
+              <a:spcAft>
+                <a:spcPts val="300"/>
+              </a:spcAft>
+            </a:pPr>
+            <a:r>
+              <a:rPr sz="1300" b="0" i="0">
                 <a:solidFill>
                   <a:srgbClr val="15171A"/>
                 </a:solidFill>
                 <a:latin typeface="Helvetica Neue"/>
               </a:rPr>
-              <a:t/>
-            </a:r>
-          </a:p>
-          <a:p>
-            <a:pPr algn="l">
-              <a:spcAft>
-                <a:spcPts val="200"/>
-              </a:spcAft>
-            </a:pPr>
-            <a:r>
-              <a:rPr sz="1150" b="0" i="0">
+              <a:t>Step time unchanged to the</a:t>
+            </a:r>
+          </a:p>
+          <a:p>
+            <a:pPr algn="l">
+              <a:spcAft>
+                <a:spcPts val="300"/>
+              </a:spcAft>
+            </a:pPr>
+            <a:r>
+              <a:rPr sz="1300" b="0" i="0">
                 <a:solidFill>
                   <a:srgbClr val="15171A"/>
                 </a:solidFill>
                 <a:latin typeface="Helvetica Neue"/>
               </a:rPr>
-              <a:t>The computation did not move.</a:t>
-            </a:r>
-          </a:p>
-          <a:p>
-            <a:pPr algn="l">
-              <a:spcAft>
-                <a:spcPts val="200"/>
-              </a:spcAft>
-            </a:pPr>
-            <a:r>
-              <a:rPr sz="1150" b="0" i="0">
-                <a:solidFill>
-                  <a:srgbClr val="15171A"/>
-                </a:solidFill>
-                <a:latin typeface="Helvetica Neue"/>
-              </a:rPr>
-              <a:t>Only I/O did, so the saving is</a:t>
-            </a:r>
-          </a:p>
-          <a:p>
-            <a:pPr algn="l">
-              <a:spcAft>
-                <a:spcPts val="200"/>
-              </a:spcAft>
-            </a:pPr>
-            <a:r>
-              <a:rPr sz="1150" b="0" i="0">
-                <a:solidFill>
-                  <a:srgbClr val="15171A"/>
-                </a:solidFill>
-                <a:latin typeface="Helvetica Neue"/>
-              </a:rPr>
-              <a:t>attributable, not noise.</a:t>
+              <a:t>fourth decimal.</a:t>
             </a:r>
           </a:p>
         </p:txBody>
@@ -7556,9 +6828,9 @@
               </a:spcAft>
             </a:pPr>
             <a:r>
-              <a:rPr sz="3400" b="1" i="0">
-                <a:solidFill>
-                  <a:srgbClr val="E8590C"/>
+              <a:rPr sz="2600" b="1" i="0">
+                <a:solidFill>
+                  <a:srgbClr val="15171A"/>
                 </a:solidFill>
                 <a:latin typeface="Helvetica Neue"/>
               </a:rPr>
@@ -7769,9 +7041,9 @@
               </a:spcAft>
             </a:pPr>
             <a:r>
-              <a:rPr sz="3400" b="1" i="0">
-                <a:solidFill>
-                  <a:srgbClr val="E8590C"/>
+              <a:rPr sz="2600" b="1" i="0">
+                <a:solidFill>
+                  <a:srgbClr val="15171A"/>
                 </a:solidFill>
                 <a:latin typeface="Helvetica Neue"/>
               </a:rPr>
@@ -8056,8 +7328,8 @@
         </p:nvSpPr>
         <p:spPr>
           <a:xfrm>
-            <a:off x="6217920" y="4315968"/>
-            <a:ext cx="5394960" cy="1691640"/>
+            <a:off x="6217920" y="4261104"/>
+            <a:ext cx="5394960" cy="1874519"/>
           </a:xfrm>
           <a:prstGeom prst="roundRect">
             <a:avLst>
@@ -8104,7 +7376,7 @@
         </p:nvSpPr>
         <p:spPr>
           <a:xfrm>
-            <a:off x="6492240" y="4480560"/>
+            <a:off x="6492240" y="4425696"/>
             <a:ext cx="4937760" cy="320040"/>
           </a:xfrm>
           <a:prstGeom prst="rect">
@@ -8143,8 +7415,8 @@
         </p:nvSpPr>
         <p:spPr>
           <a:xfrm>
-            <a:off x="6492240" y="4828032"/>
-            <a:ext cx="4937760" cy="1097280"/>
+            <a:off x="6492240" y="4773168"/>
+            <a:ext cx="4937760" cy="1280160"/>
           </a:xfrm>
           <a:prstGeom prst="rect">
             <a:avLst/>
@@ -8169,7 +7441,7 @@
                 </a:solidFill>
                 <a:latin typeface="Helvetica Neue"/>
               </a:rPr>
-              <a:t>At $0.131 per 1 000 steps on one GH200,</a:t>
+              <a:t>On the real 4B workload one GH200 runs 2.7x faster</a:t>
             </a:r>
           </a:p>
           <a:p>
@@ -8185,7 +7457,7 @@
                 </a:solidFill>
                 <a:latin typeface="Helvetica Neue"/>
               </a:rPr>
-              <a:t>8× cheaper than eight TPU chips at the same</a:t>
+              <a:t>than eight TPU chips and costs 10x less:</a:t>
             </a:r>
           </a:p>
           <a:p>
@@ -8201,7 +7473,7 @@
                 </a:solidFill>
                 <a:latin typeface="Helvetica Neue"/>
               </a:rPr>
-              <a:t>speed, self-hosting is not the cost problem we</a:t>
+              <a:t>$0.56 against $5.72 per 1 000 steps.</a:t>
             </a:r>
           </a:p>
           <a:p>
@@ -8217,7 +7489,7 @@
                 </a:solidFill>
                 <a:latin typeface="Helvetica Neue"/>
               </a:rPr>
-              <a:t>assumed. The real cost is fixed overhead per job:</a:t>
+              <a:t/>
             </a:r>
           </a:p>
           <a:p>
@@ -8233,7 +7505,23 @@
                 </a:solidFill>
                 <a:latin typeface="Helvetica Neue"/>
               </a:rPr>
-              <a:t>an architecture decision, not a hardware purchase.</a:t>
+              <a:t>Self-hosting is not the cost problem we assumed.</a:t>
+            </a:r>
+          </a:p>
+          <a:p>
+            <a:pPr algn="l">
+              <a:spcAft>
+                <a:spcPts val="200"/>
+              </a:spcAft>
+            </a:pPr>
+            <a:r>
+              <a:rPr sz="1250" b="0" i="0">
+                <a:solidFill>
+                  <a:srgbClr val="15171A"/>
+                </a:solidFill>
+                <a:latin typeface="Helvetica Neue"/>
+              </a:rPr>
+              <a:t>The real cost is fixed overhead per job.</a:t>
             </a:r>
           </a:p>
         </p:txBody>
@@ -8272,7 +7560,7 @@
                 </a:solidFill>
                 <a:latin typeface="Helvetica Neue"/>
               </a:rPr>
-              <a:t>9 measured runs · 15 commits · github.com/RN0L/me344-qwen3-icd10-profiling</a:t>
+              <a:t>13 measured runs  ·  github.com/RN0L/me344-qwen3-icd10-profiling</a:t>
             </a:r>
           </a:p>
         </p:txBody>

--- a/slides/ME344_Final_Arnold_Hambuch.pptx
+++ b/slides/ME344_Final_Arnold_Hambuch.pptx
@@ -3244,7 +3244,7 @@
                 </a:solidFill>
                 <a:latin typeface="Helvetica Neue"/>
               </a:rPr>
-              <a:t>Can a clinic afford to run its own coding model?</a:t>
+              <a:t>Can a clinic afford to run its own ICD-10 model?</a:t>
             </a:r>
           </a:p>
         </p:txBody>
@@ -3257,8 +3257,8 @@
         </p:nvSpPr>
         <p:spPr>
           <a:xfrm>
-            <a:off x="566928" y="1645920"/>
-            <a:ext cx="5394960" cy="2103120"/>
+            <a:off x="566928" y="1664208"/>
+            <a:ext cx="5120640" cy="1966955"/>
           </a:xfrm>
           <a:prstGeom prst="roundRect">
             <a:avLst>
@@ -3305,8 +3305,8 @@
         </p:nvSpPr>
         <p:spPr>
           <a:xfrm>
-            <a:off x="868680" y="1874519"/>
-            <a:ext cx="4846320" cy="320040"/>
+            <a:off x="822960" y="1901952"/>
+            <a:ext cx="4645152" cy="251460"/>
           </a:xfrm>
           <a:prstGeom prst="rect">
             <a:avLst/>
@@ -3344,8 +3344,8 @@
         </p:nvSpPr>
         <p:spPr>
           <a:xfrm>
-            <a:off x="868680" y="2304288"/>
-            <a:ext cx="4846320" cy="1371600"/>
+            <a:off x="822960" y="2244852"/>
+            <a:ext cx="4645152" cy="1215136"/>
           </a:xfrm>
           <a:prstGeom prst="rect">
             <a:avLst/>
@@ -3431,8 +3431,8 @@
         </p:nvSpPr>
         <p:spPr>
           <a:xfrm>
-            <a:off x="6400800" y="1874519"/>
-            <a:ext cx="5212080" cy="914400"/>
+            <a:off x="5989320" y="1755648"/>
+            <a:ext cx="5623560" cy="914400"/>
           </a:xfrm>
           <a:prstGeom prst="rect">
             <a:avLst/>
@@ -3486,8 +3486,8 @@
         </p:nvSpPr>
         <p:spPr>
           <a:xfrm>
-            <a:off x="6400800" y="3063240"/>
-            <a:ext cx="5212080" cy="731520"/>
+            <a:off x="5989320" y="2761488"/>
+            <a:ext cx="5623560" cy="731520"/>
           </a:xfrm>
           <a:prstGeom prst="rect">
             <a:avLst/>
@@ -3512,7 +3512,7 @@
                 </a:solidFill>
                 <a:latin typeface="Helvetica Neue"/>
               </a:rPr>
-              <a:t>Qwen3 + LoRA on CodiEsp.</a:t>
+              <a:t>Qwen3-4B + LoRA on CodiEsp: 500 train / 250 dev</a:t>
             </a:r>
           </a:p>
           <a:p>
@@ -3528,7 +3528,7 @@
                 </a:solidFill>
                 <a:latin typeface="Helvetica Neue"/>
               </a:rPr>
-              <a:t>1 000 clinical case reports, ICD-10, CC-BY 4.0.</a:t>
+              <a:t>Spanish case reports, ICD-10 coded, CC-BY 4.0.</a:t>
             </a:r>
           </a:p>
         </p:txBody>
@@ -3541,8 +3541,8 @@
         </p:nvSpPr>
         <p:spPr>
           <a:xfrm>
-            <a:off x="566928" y="4160520"/>
-            <a:ext cx="10972800" cy="320040"/>
+            <a:off x="566928" y="3730752"/>
+            <a:ext cx="5394960" cy="320040"/>
           </a:xfrm>
           <a:prstGeom prst="rect">
             <a:avLst/>
@@ -3580,8 +3580,8 @@
         </p:nvSpPr>
         <p:spPr>
           <a:xfrm>
-            <a:off x="566928" y="4526280"/>
-            <a:ext cx="10972800" cy="1005840"/>
+            <a:off x="566928" y="4096512"/>
+            <a:ext cx="5394960" cy="1280160"/>
           </a:xfrm>
           <a:prstGeom prst="rect">
             <a:avLst/>
@@ -3596,46 +3596,86 @@
           <a:p>
             <a:pPr algn="l">
               <a:spcAft>
-                <a:spcPts val="800"/>
-              </a:spcAft>
-            </a:pPr>
-            <a:r>
-              <a:rPr sz="1700" b="0" i="0">
+                <a:spcPts val="900"/>
+              </a:spcAft>
+            </a:pPr>
+            <a:r>
+              <a:rPr sz="1500" b="0" i="0">
                 <a:solidFill>
                   <a:srgbClr val="15171A"/>
                 </a:solidFill>
                 <a:latin typeface="Helvetica Neue"/>
               </a:rPr>
-              <a:t>8 GB of weights at 4B before a single activation.  Cases up to 2 489 tokens.</a:t>
-            </a:r>
-          </a:p>
-          <a:p>
-            <a:pPr algn="l">
-              <a:spcAft>
-                <a:spcPts val="800"/>
-              </a:spcAft>
-            </a:pPr>
-            <a:r>
-              <a:rPr sz="1700" b="0" i="0">
+              <a:t>8 GB of weights at 4B before a single activation.</a:t>
+            </a:r>
+          </a:p>
+          <a:p>
+            <a:pPr algn="l">
+              <a:spcAft>
+                <a:spcPts val="900"/>
+              </a:spcAft>
+            </a:pPr>
+            <a:r>
+              <a:rPr sz="1500" b="0" i="0">
                 <a:solidFill>
                   <a:srgbClr val="15171A"/>
                 </a:solidFill>
                 <a:latin typeface="Helvetica Neue"/>
               </a:rPr>
+              <a:t>Median case 802 tokens, longest 2,489.</a:t>
+            </a:r>
+          </a:p>
+          <a:p>
+            <a:pPr algn="l">
+              <a:spcAft>
+                <a:spcPts val="900"/>
+              </a:spcAft>
+            </a:pPr>
+            <a:r>
+              <a:rPr sz="1500" b="0" i="0">
+                <a:solidFill>
+                  <a:srgbClr val="15171A"/>
+                </a:solidFill>
+                <a:latin typeface="Helvetica Neue"/>
+              </a:rPr>
               <a:t>One JAX program, lowered by XLA to CPU, GPU and TPU.</a:t>
             </a:r>
           </a:p>
         </p:txBody>
       </p:sp>
-      <p:sp>
-        <p:nvSpPr>
-          <p:cNvPr id="13" name="TextBox 12"/>
+      <p:pic>
+        <p:nvPicPr>
+          <p:cNvPr id="13" name="Picture 12" descr="slide1-coverage.png"/>
+          <p:cNvPicPr>
+            <a:picLocks noChangeAspect="1"/>
+          </p:cNvPicPr>
+          <p:nvPr/>
+        </p:nvPicPr>
+        <p:blipFill>
+          <a:blip r:embed="rId2"/>
+          <a:stretch>
+            <a:fillRect/>
+          </a:stretch>
+        </p:blipFill>
+        <p:spPr>
+          <a:xfrm>
+            <a:off x="5989320" y="3675887"/>
+            <a:ext cx="5669280" cy="1639947"/>
+          </a:xfrm>
+          <a:prstGeom prst="rect">
+            <a:avLst/>
+          </a:prstGeom>
+        </p:spPr>
+      </p:pic>
+      <p:sp>
+        <p:nvSpPr>
+          <p:cNvPr id="14" name="TextBox 13"/>
           <p:cNvSpPr txBox="1"/>
           <p:nvPr/>
         </p:nvSpPr>
         <p:spPr>
           <a:xfrm>
-            <a:off x="566928" y="5897880"/>
+            <a:off x="566928" y="5870448"/>
             <a:ext cx="10972800" cy="640080"/>
           </a:xfrm>
           <a:prstGeom prst="rect">
@@ -3849,8 +3889,8 @@
         </p:nvSpPr>
         <p:spPr>
           <a:xfrm>
-            <a:off x="566928" y="1783080"/>
-            <a:ext cx="3520440" cy="1691640"/>
+            <a:off x="566928" y="1645920"/>
+            <a:ext cx="3520440" cy="1669267"/>
           </a:xfrm>
           <a:prstGeom prst="roundRect">
             <a:avLst>
@@ -3897,8 +3937,8 @@
         </p:nvSpPr>
         <p:spPr>
           <a:xfrm>
-            <a:off x="822960" y="1965960"/>
-            <a:ext cx="3017520" cy="365760"/>
+            <a:off x="822960" y="1883664"/>
+            <a:ext cx="3044952" cy="268224"/>
           </a:xfrm>
           <a:prstGeom prst="rect">
             <a:avLst/>
@@ -3936,8 +3976,8 @@
         </p:nvSpPr>
         <p:spPr>
           <a:xfrm>
-            <a:off x="822960" y="2377440"/>
-            <a:ext cx="3108960" cy="1097280"/>
+            <a:off x="822960" y="2243328"/>
+            <a:ext cx="3044952" cy="900683"/>
           </a:xfrm>
           <a:prstGeom prst="rect">
             <a:avLst/>
@@ -4007,8 +4047,8 @@
         </p:nvSpPr>
         <p:spPr>
           <a:xfrm>
-            <a:off x="4361688" y="1783080"/>
-            <a:ext cx="3520440" cy="1691640"/>
+            <a:off x="4361688" y="1645920"/>
+            <a:ext cx="3520440" cy="1669267"/>
           </a:xfrm>
           <a:prstGeom prst="roundRect">
             <a:avLst>
@@ -4055,8 +4095,8 @@
         </p:nvSpPr>
         <p:spPr>
           <a:xfrm>
-            <a:off x="4617720" y="1965960"/>
-            <a:ext cx="3017520" cy="365760"/>
+            <a:off x="4617720" y="1883664"/>
+            <a:ext cx="3044952" cy="268224"/>
           </a:xfrm>
           <a:prstGeom prst="rect">
             <a:avLst/>
@@ -4094,8 +4134,8 @@
         </p:nvSpPr>
         <p:spPr>
           <a:xfrm>
-            <a:off x="4617720" y="2377440"/>
-            <a:ext cx="3108960" cy="1097280"/>
+            <a:off x="4617720" y="2243328"/>
+            <a:ext cx="3044952" cy="900683"/>
           </a:xfrm>
           <a:prstGeom prst="rect">
             <a:avLst/>
@@ -4165,8 +4205,8 @@
         </p:nvSpPr>
         <p:spPr>
           <a:xfrm>
-            <a:off x="8156448" y="1783080"/>
-            <a:ext cx="3520440" cy="1691640"/>
+            <a:off x="8156448" y="1645920"/>
+            <a:ext cx="3520440" cy="1669267"/>
           </a:xfrm>
           <a:prstGeom prst="roundRect">
             <a:avLst>
@@ -4213,8 +4253,8 @@
         </p:nvSpPr>
         <p:spPr>
           <a:xfrm>
-            <a:off x="8412480" y="1965960"/>
-            <a:ext cx="3017520" cy="365760"/>
+            <a:off x="8412480" y="1883664"/>
+            <a:ext cx="3044952" cy="268224"/>
           </a:xfrm>
           <a:prstGeom prst="rect">
             <a:avLst/>
@@ -4252,8 +4292,8 @@
         </p:nvSpPr>
         <p:spPr>
           <a:xfrm>
-            <a:off x="8412480" y="2377440"/>
-            <a:ext cx="3108960" cy="1097280"/>
+            <a:off x="8412480" y="2243328"/>
+            <a:ext cx="3044952" cy="900683"/>
           </a:xfrm>
           <a:prstGeom prst="rect">
             <a:avLst/>
@@ -4315,17 +4355,104 @@
           </a:p>
         </p:txBody>
       </p:sp>
+      <p:sp>
+        <p:nvSpPr>
+          <p:cNvPr id="15" name="Rounded Rectangle 14"/>
+          <p:cNvSpPr/>
+          <p:nvPr/>
+        </p:nvSpPr>
+        <p:spPr>
+          <a:xfrm>
+            <a:off x="566928" y="3493008"/>
+            <a:ext cx="11064240" cy="603504"/>
+          </a:xfrm>
+          <a:prstGeom prst="roundRect">
+            <a:avLst>
+              <a:gd name="adj" fmla="val 4000"/>
+            </a:avLst>
+          </a:prstGeom>
+          <a:solidFill>
+            <a:srgbClr val="FFFFFF"/>
+          </a:solidFill>
+          <a:ln w="9525">
+            <a:solidFill>
+              <a:srgbClr val="FB923C"/>
+            </a:solidFill>
+          </a:ln>
+          <a:effectLst/>
+        </p:spPr>
+        <p:style>
+          <a:lnRef idx="1">
+            <a:schemeClr val="accent1"/>
+          </a:lnRef>
+          <a:fillRef idx="3">
+            <a:schemeClr val="accent1"/>
+          </a:fillRef>
+          <a:effectRef idx="2">
+            <a:schemeClr val="accent1"/>
+          </a:effectRef>
+          <a:fontRef idx="minor">
+            <a:schemeClr val="lt1"/>
+          </a:fontRef>
+        </p:style>
+        <p:txBody>
+          <a:bodyPr rtlCol="0" anchor="ctr"/>
+          <a:lstStyle/>
+          <a:p>
+            <a:pPr algn="ctr"/>
+          </a:p>
+        </p:txBody>
+      </p:sp>
+      <p:sp>
+        <p:nvSpPr>
+          <p:cNvPr id="16" name="TextBox 15"/>
+          <p:cNvSpPr txBox="1"/>
+          <p:nvPr/>
+        </p:nvSpPr>
+        <p:spPr>
+          <a:xfrm>
+            <a:off x="566928" y="3639312"/>
+            <a:ext cx="11064240" cy="320040"/>
+          </a:xfrm>
+          <a:prstGeom prst="rect">
+            <a:avLst/>
+          </a:prstGeom>
+          <a:noFill/>
+        </p:spPr>
+        <p:txBody>
+          <a:bodyPr wrap="square" anchor="t">
+            <a:spAutoFit/>
+          </a:bodyPr>
+          <a:lstStyle/>
+          <a:p>
+            <a:pPr algn="ctr">
+              <a:spcAft>
+                <a:spcPts val="0"/>
+              </a:spcAft>
+            </a:pPr>
+            <a:r>
+              <a:rPr sz="1350" b="1" i="0">
+                <a:solidFill>
+                  <a:srgbClr val="15171A"/>
+                </a:solidFill>
+                <a:latin typeface="Helvetica Neue"/>
+              </a:rPr>
+              <a:t>gs://me344-tpu-labs-west4   →   gcsfuse CSI sidecar   →   /gcs in the pod   →   8 GB checkpoint   →   HBM</a:t>
+            </a:r>
+          </a:p>
+        </p:txBody>
+      </p:sp>
       <p:graphicFrame>
         <p:nvGraphicFramePr>
-          <p:cNvPr id="15" name="Table 14"/>
+          <p:cNvPr id="17" name="Table 16"/>
           <p:cNvGraphicFramePr>
             <a:graphicFrameLocks noGrp="1"/>
           </p:cNvGraphicFramePr>
           <p:nvPr/>
         </p:nvGraphicFramePr>
         <p:xfrm>
-          <a:off x="566928" y="3977639"/>
-          <a:ext cx="11064238" cy="1463040"/>
+          <a:off x="566928" y="4315968"/>
+          <a:ext cx="11064238" cy="1499616"/>
         </p:xfrm>
         <a:graphic>
           <a:graphicData uri="http://schemas.openxmlformats.org/drawingml/2006/table">
@@ -4339,7 +4466,7 @@
                 <a:gridCol w="2194560"/>
                 <a:gridCol w="3749039"/>
               </a:tblGrid>
-              <a:tr h="365760">
+              <a:tr h="374904">
                 <a:tc>
                   <a:txBody>
                     <a:bodyPr/>
@@ -4433,7 +4560,7 @@
                   </a:tcPr>
                 </a:tc>
               </a:tr>
-              <a:tr h="365760">
+              <a:tr h="374904">
                 <a:tc>
                   <a:txBody>
                     <a:bodyPr/>
@@ -4516,7 +4643,7 @@
                           </a:solidFill>
                           <a:latin typeface="Helvetica Neue"/>
                         </a:rPr>
-                        <a:t>bare node</a:t>
+                        <a:t>bare node, podman</a:t>
                       </a:r>
                     </a:p>
                   </a:txBody>
@@ -4527,7 +4654,7 @@
                   </a:tcPr>
                 </a:tc>
               </a:tr>
-              <a:tr h="365760">
+              <a:tr h="374904">
                 <a:tc>
                   <a:txBody>
                     <a:bodyPr/>
@@ -4621,7 +4748,7 @@
                   </a:tcPr>
                 </a:tc>
               </a:tr>
-              <a:tr h="365760">
+              <a:tr h="374904">
                 <a:tc>
                   <a:txBody>
                     <a:bodyPr/>
@@ -4721,13 +4848,13 @@
       </p:graphicFrame>
       <p:sp>
         <p:nvSpPr>
-          <p:cNvPr id="16" name="TextBox 15"/>
+          <p:cNvPr id="18" name="TextBox 17"/>
           <p:cNvSpPr txBox="1"/>
           <p:nvPr/>
         </p:nvSpPr>
         <p:spPr>
           <a:xfrm>
-            <a:off x="566928" y="5623560"/>
+            <a:off x="566928" y="5989320"/>
             <a:ext cx="10972800" cy="457200"/>
           </a:xfrm>
           <a:prstGeom prst="rect">
@@ -4747,7 +4874,7 @@
               </a:spcAft>
             </a:pPr>
             <a:r>
-              <a:rPr sz="1500" b="1" i="0">
+              <a:rPr sz="1600" b="1" i="0">
                 <a:solidFill>
                   <a:srgbClr val="E8590C"/>
                 </a:solidFill>
@@ -4933,16 +5060,282 @@
           </a:p>
         </p:txBody>
       </p:sp>
-      <p:sp>
-        <p:nvSpPr>
-          <p:cNvPr id="6" name="TextBox 5"/>
+      <p:graphicFrame>
+        <p:nvGraphicFramePr>
+          <p:cNvPr id="6" name="Table 5"/>
+          <p:cNvGraphicFramePr>
+            <a:graphicFrameLocks noGrp="1"/>
+          </p:cNvGraphicFramePr>
+          <p:nvPr/>
+        </p:nvGraphicFramePr>
+        <p:xfrm>
+          <a:off x="566928" y="1664208"/>
+          <a:ext cx="5029200" cy="1828800"/>
+        </p:xfrm>
+        <a:graphic>
+          <a:graphicData uri="http://schemas.openxmlformats.org/drawingml/2006/table">
+            <a:tbl>
+              <a:tblPr firstRow="1" bandRow="1">
+                <a:tableStyleId>{5C22544A-7EE6-4342-B048-85BDC9FD1C3A}</a:tableStyleId>
+              </a:tblPr>
+              <a:tblGrid>
+                <a:gridCol w="1965960"/>
+                <a:gridCol w="3063240"/>
+              </a:tblGrid>
+              <a:tr h="365760">
+                <a:tc>
+                  <a:txBody>
+                    <a:bodyPr/>
+                    <a:lstStyle/>
+                    <a:p>
+                      <a:pPr algn="l"/>
+                      <a:r>
+                        <a:rPr sz="1250" b="1">
+                          <a:solidFill>
+                            <a:srgbClr val="FFFFFF"/>
+                          </a:solidFill>
+                          <a:latin typeface="Helvetica Neue"/>
+                        </a:rPr>
+                        <a:t>What we sample</a:t>
+                      </a:r>
+                    </a:p>
+                  </a:txBody>
+                  <a:tcPr anchor="ctr" marL="82296" marR="82296" marT="9144" marB="9144">
+                    <a:solidFill>
+                      <a:srgbClr val="15171A"/>
+                    </a:solidFill>
+                  </a:tcPr>
+                </a:tc>
+                <a:tc>
+                  <a:txBody>
+                    <a:bodyPr/>
+                    <a:lstStyle/>
+                    <a:p>
+                      <a:pPr algn="l"/>
+                      <a:r>
+                        <a:rPr sz="1250" b="1">
+                          <a:solidFill>
+                            <a:srgbClr val="FFFFFF"/>
+                          </a:solidFill>
+                          <a:latin typeface="Helvetica Neue"/>
+                        </a:rPr>
+                        <a:t>Instrument</a:t>
+                      </a:r>
+                    </a:p>
+                  </a:txBody>
+                  <a:tcPr anchor="ctr" marL="82296" marR="82296" marT="9144" marB="9144">
+                    <a:solidFill>
+                      <a:srgbClr val="15171A"/>
+                    </a:solidFill>
+                  </a:tcPr>
+                </a:tc>
+              </a:tr>
+              <a:tr h="365760">
+                <a:tc>
+                  <a:txBody>
+                    <a:bodyPr/>
+                    <a:lstStyle/>
+                    <a:p>
+                      <a:pPr algn="l"/>
+                      <a:r>
+                        <a:rPr sz="1250">
+                          <a:solidFill>
+                            <a:srgbClr val="15171A"/>
+                          </a:solidFill>
+                          <a:latin typeface="Helvetica Neue"/>
+                        </a:rPr>
+                        <a:t>Chip utilisation</a:t>
+                      </a:r>
+                    </a:p>
+                  </a:txBody>
+                  <a:tcPr anchor="ctr" marL="82296" marR="82296" marT="9144" marB="9144">
+                    <a:solidFill>
+                      <a:srgbClr val="FFFFFF"/>
+                    </a:solidFill>
+                  </a:tcPr>
+                </a:tc>
+                <a:tc>
+                  <a:txBody>
+                    <a:bodyPr/>
+                    <a:lstStyle/>
+                    <a:p>
+                      <a:pPr algn="l"/>
+                      <a:r>
+                        <a:rPr sz="1250">
+                          <a:solidFill>
+                            <a:srgbClr val="15171A"/>
+                          </a:solidFill>
+                          <a:latin typeface="Helvetica Neue"/>
+                        </a:rPr>
+                        <a:t>nvidia-smi 1 Hz · psutil on CPU</a:t>
+                      </a:r>
+                    </a:p>
+                  </a:txBody>
+                  <a:tcPr anchor="ctr" marL="82296" marR="82296" marT="9144" marB="9144">
+                    <a:solidFill>
+                      <a:srgbClr val="FFFFFF"/>
+                    </a:solidFill>
+                  </a:tcPr>
+                </a:tc>
+              </a:tr>
+              <a:tr h="365760">
+                <a:tc>
+                  <a:txBody>
+                    <a:bodyPr/>
+                    <a:lstStyle/>
+                    <a:p>
+                      <a:pPr algn="l"/>
+                      <a:r>
+                        <a:rPr sz="1250">
+                          <a:solidFill>
+                            <a:srgbClr val="15171A"/>
+                          </a:solidFill>
+                          <a:latin typeface="Helvetica Neue"/>
+                        </a:rPr>
+                        <a:t>Peak memory</a:t>
+                      </a:r>
+                    </a:p>
+                  </a:txBody>
+                  <a:tcPr anchor="ctr" marL="82296" marR="82296" marT="9144" marB="9144">
+                    <a:solidFill>
+                      <a:srgbClr val="FFFFFF"/>
+                    </a:solidFill>
+                  </a:tcPr>
+                </a:tc>
+                <a:tc>
+                  <a:txBody>
+                    <a:bodyPr/>
+                    <a:lstStyle/>
+                    <a:p>
+                      <a:pPr algn="l"/>
+                      <a:r>
+                        <a:rPr sz="1250">
+                          <a:solidFill>
+                            <a:srgbClr val="15171A"/>
+                          </a:solidFill>
+                          <a:latin typeface="Helvetica Neue"/>
+                        </a:rPr>
+                        <a:t>jax memory_stats() · peak RSS</a:t>
+                      </a:r>
+                    </a:p>
+                  </a:txBody>
+                  <a:tcPr anchor="ctr" marL="82296" marR="82296" marT="9144" marB="9144">
+                    <a:solidFill>
+                      <a:srgbClr val="FFFFFF"/>
+                    </a:solidFill>
+                  </a:tcPr>
+                </a:tc>
+              </a:tr>
+              <a:tr h="365760">
+                <a:tc>
+                  <a:txBody>
+                    <a:bodyPr/>
+                    <a:lstStyle/>
+                    <a:p>
+                      <a:pPr algn="l"/>
+                      <a:r>
+                        <a:rPr sz="1250">
+                          <a:solidFill>
+                            <a:srgbClr val="15171A"/>
+                          </a:solidFill>
+                          <a:latin typeface="Helvetica Neue"/>
+                        </a:rPr>
+                        <a:t>Step time</a:t>
+                      </a:r>
+                    </a:p>
+                  </a:txBody>
+                  <a:tcPr anchor="ctr" marL="82296" marR="82296" marT="9144" marB="9144">
+                    <a:solidFill>
+                      <a:srgbClr val="FFFFFF"/>
+                    </a:solidFill>
+                  </a:tcPr>
+                </a:tc>
+                <a:tc>
+                  <a:txBody>
+                    <a:bodyPr/>
+                    <a:lstStyle/>
+                    <a:p>
+                      <a:pPr algn="l"/>
+                      <a:r>
+                        <a:rPr sz="1250">
+                          <a:solidFill>
+                            <a:srgbClr val="15171A"/>
+                          </a:solidFill>
+                          <a:latin typeface="Helvetica Neue"/>
+                        </a:rPr>
+                        <a:t>median, p10, p90, warmup excluded</a:t>
+                      </a:r>
+                    </a:p>
+                  </a:txBody>
+                  <a:tcPr anchor="ctr" marL="82296" marR="82296" marT="9144" marB="9144">
+                    <a:solidFill>
+                      <a:srgbClr val="FFFFFF"/>
+                    </a:solidFill>
+                  </a:tcPr>
+                </a:tc>
+              </a:tr>
+              <a:tr h="365760">
+                <a:tc>
+                  <a:txBody>
+                    <a:bodyPr/>
+                    <a:lstStyle/>
+                    <a:p>
+                      <a:pPr algn="l"/>
+                      <a:r>
+                        <a:rPr sz="1250">
+                          <a:solidFill>
+                            <a:srgbClr val="15171A"/>
+                          </a:solidFill>
+                          <a:latin typeface="Helvetica Neue"/>
+                        </a:rPr>
+                        <a:t>Wall clock</a:t>
+                      </a:r>
+                    </a:p>
+                  </a:txBody>
+                  <a:tcPr anchor="ctr" marL="82296" marR="82296" marT="9144" marB="9144">
+                    <a:solidFill>
+                      <a:srgbClr val="FFFFFF"/>
+                    </a:solidFill>
+                  </a:tcPr>
+                </a:tc>
+                <a:tc>
+                  <a:txBody>
+                    <a:bodyPr/>
+                    <a:lstStyle/>
+                    <a:p>
+                      <a:pPr algn="l"/>
+                      <a:r>
+                        <a:rPr sz="1250">
+                          <a:solidFill>
+                            <a:srgbClr val="15171A"/>
+                          </a:solidFill>
+                          <a:latin typeface="Helvetica Neue"/>
+                        </a:rPr>
+                        <a:t>six phases, must sum to total</a:t>
+                      </a:r>
+                    </a:p>
+                  </a:txBody>
+                  <a:tcPr anchor="ctr" marL="82296" marR="82296" marT="9144" marB="9144">
+                    <a:solidFill>
+                      <a:srgbClr val="FFFFFF"/>
+                    </a:solidFill>
+                  </a:tcPr>
+                </a:tc>
+              </a:tr>
+            </a:tbl>
+          </a:graphicData>
+        </a:graphic>
+      </p:graphicFrame>
+      <p:sp>
+        <p:nvSpPr>
+          <p:cNvPr id="7" name="TextBox 6"/>
           <p:cNvSpPr txBox="1"/>
           <p:nvPr/>
         </p:nvSpPr>
         <p:spPr>
           <a:xfrm>
-            <a:off x="566928" y="1874519"/>
-            <a:ext cx="4937760" cy="2194560"/>
+            <a:off x="566928" y="3639312"/>
+            <a:ext cx="5029200" cy="640080"/>
           </a:xfrm>
           <a:prstGeom prst="rect">
             <a:avLst/>
@@ -4957,93 +5350,37 @@
           <a:p>
             <a:pPr algn="l">
               <a:spcAft>
-                <a:spcPts val="1800"/>
-              </a:spcAft>
-            </a:pPr>
-            <a:r>
-              <a:rPr sz="1600" b="0" i="0">
-                <a:solidFill>
-                  <a:srgbClr val="15171A"/>
-                </a:solidFill>
-                <a:latin typeface="Helvetica Neue"/>
-              </a:rPr>
-              <a:t>Six phases per run, not one total</a:t>
-            </a:r>
-          </a:p>
-          <a:p>
-            <a:pPr algn="l">
-              <a:spcAft>
-                <a:spcPts val="1800"/>
-              </a:spcAft>
-            </a:pPr>
-            <a:r>
-              <a:rPr sz="1600" b="0" i="0">
-                <a:solidFill>
-                  <a:srgbClr val="15171A"/>
-                </a:solidFill>
-                <a:latin typeface="Helvetica Neue"/>
-              </a:rPr>
-              <a:t>Sweeps walked into OOM, failed cells kept</a:t>
-            </a:r>
-          </a:p>
-          <a:p>
-            <a:pPr algn="l">
-              <a:spcAft>
-                <a:spcPts val="1800"/>
-              </a:spcAft>
-            </a:pPr>
-            <a:r>
-              <a:rPr sz="1600" b="0" i="0">
-                <a:solidFill>
-                  <a:srgbClr val="15171A"/>
-                </a:solidFill>
-                <a:latin typeface="Helvetica Neue"/>
-              </a:rPr>
-              <a:t>One schema, one JSON per run</a:t>
-            </a:r>
-          </a:p>
-          <a:p>
-            <a:pPr algn="l">
-              <a:spcAft>
-                <a:spcPts val="1800"/>
-              </a:spcAft>
-            </a:pPr>
-            <a:r>
-              <a:rPr sz="1600" b="0" i="0">
-                <a:solidFill>
-                  <a:srgbClr val="15171A"/>
-                </a:solidFill>
-                <a:latin typeface="Helvetica Neue"/>
-              </a:rPr>
-              <a:t>Every figure reads only those files</a:t>
-            </a:r>
-          </a:p>
-        </p:txBody>
-      </p:sp>
-      <p:pic>
-        <p:nvPicPr>
-          <p:cNvPr id="7" name="Picture 6" descr="slide3-walltime.png"/>
-          <p:cNvPicPr>
-            <a:picLocks noChangeAspect="1"/>
-          </p:cNvPicPr>
-          <p:nvPr/>
-        </p:nvPicPr>
-        <p:blipFill>
-          <a:blip r:embed="rId2"/>
-          <a:stretch>
-            <a:fillRect/>
-          </a:stretch>
-        </p:blipFill>
-        <p:spPr>
-          <a:xfrm>
-            <a:off x="5852160" y="1828800"/>
-            <a:ext cx="5760720" cy="1228350"/>
-          </a:xfrm>
-          <a:prstGeom prst="rect">
-            <a:avLst/>
-          </a:prstGeom>
-        </p:spPr>
-      </p:pic>
+                <a:spcPts val="200"/>
+              </a:spcAft>
+            </a:pPr>
+            <a:r>
+              <a:rPr sz="1200" b="0" i="0">
+                <a:solidFill>
+                  <a:srgbClr val="717A85"/>
+                </a:solidFill>
+                <a:latin typeface="Helvetica Neue"/>
+              </a:rPr>
+              <a:t>One schema, one JSON per run. Every figure in this</a:t>
+            </a:r>
+          </a:p>
+          <a:p>
+            <a:pPr algn="l">
+              <a:spcAft>
+                <a:spcPts val="200"/>
+              </a:spcAft>
+            </a:pPr>
+            <a:r>
+              <a:rPr sz="1200" b="0" i="0">
+                <a:solidFill>
+                  <a:srgbClr val="717A85"/>
+                </a:solidFill>
+                <a:latin typeface="Helvetica Neue"/>
+              </a:rPr>
+              <a:t>deck reads those files and nothing else.</a:t>
+            </a:r>
+          </a:p>
+        </p:txBody>
+      </p:sp>
       <p:sp>
         <p:nvSpPr>
           <p:cNvPr id="8" name="Rounded Rectangle 7"/>
@@ -5052,8 +5389,8 @@
         </p:nvSpPr>
         <p:spPr>
           <a:xfrm>
-            <a:off x="5852160" y="3520440"/>
-            <a:ext cx="5760720" cy="2148840"/>
+            <a:off x="566928" y="4133087"/>
+            <a:ext cx="5029200" cy="2021819"/>
           </a:xfrm>
           <a:prstGeom prst="roundRect">
             <a:avLst>
@@ -5100,8 +5437,8 @@
         </p:nvSpPr>
         <p:spPr>
           <a:xfrm>
-            <a:off x="6144768" y="3730752"/>
-            <a:ext cx="5212080" cy="320040"/>
+            <a:off x="822960" y="4370831"/>
+            <a:ext cx="4553712" cy="251460"/>
           </a:xfrm>
           <a:prstGeom prst="rect">
             <a:avLst/>
@@ -5139,8 +5476,8 @@
         </p:nvSpPr>
         <p:spPr>
           <a:xfrm>
-            <a:off x="6144768" y="4114800"/>
-            <a:ext cx="5212080" cy="1463040"/>
+            <a:off x="822960" y="4713731"/>
+            <a:ext cx="4553712" cy="1270000"/>
           </a:xfrm>
           <a:prstGeom prst="rect">
             <a:avLst/>
@@ -5159,7 +5496,7 @@
               </a:spcAft>
             </a:pPr>
             <a:r>
-              <a:rPr sz="1300" b="0" i="0">
+              <a:rPr sz="1250" b="0" i="0">
                 <a:solidFill>
                   <a:srgbClr val="15171A"/>
                 </a:solidFill>
@@ -5175,7 +5512,7 @@
               </a:spcAft>
             </a:pPr>
             <a:r>
-              <a:rPr sz="1300" b="0" i="0">
+              <a:rPr sz="1250" b="0" i="0">
                 <a:solidFill>
                   <a:srgbClr val="15171A"/>
                 </a:solidFill>
@@ -5191,7 +5528,7 @@
               </a:spcAft>
             </a:pPr>
             <a:r>
-              <a:rPr sz="1300" b="0" i="0">
+              <a:rPr sz="1250" b="0" i="0">
                 <a:solidFill>
                   <a:srgbClr val="15171A"/>
                 </a:solidFill>
@@ -5207,7 +5544,7 @@
               </a:spcAft>
             </a:pPr>
             <a:r>
-              <a:rPr sz="1300" b="0" i="0">
+              <a:rPr sz="1250" b="0" i="0">
                 <a:solidFill>
                   <a:srgbClr val="15171A"/>
                 </a:solidFill>
@@ -5223,13 +5560,403 @@
               </a:spcAft>
             </a:pPr>
             <a:r>
-              <a:rPr sz="1300" b="0" i="0">
+              <a:rPr sz="1250" b="0" i="0">
                 <a:solidFill>
                   <a:srgbClr val="15171A"/>
                 </a:solidFill>
                 <a:latin typeface="Helvetica Neue"/>
               </a:rPr>
-              <a:t>dispatch, not completion. Discarded.</a:t>
+              <a:t>dispatch, not completion. Discarded and re-run.</a:t>
+            </a:r>
+          </a:p>
+        </p:txBody>
+      </p:sp>
+      <p:pic>
+        <p:nvPicPr>
+          <p:cNvPr id="11" name="Picture 10" descr="slide3-walltime.png"/>
+          <p:cNvPicPr>
+            <a:picLocks noChangeAspect="1"/>
+          </p:cNvPicPr>
+          <p:nvPr/>
+        </p:nvPicPr>
+        <p:blipFill>
+          <a:blip r:embed="rId2"/>
+          <a:stretch>
+            <a:fillRect/>
+          </a:stretch>
+        </p:blipFill>
+        <p:spPr>
+          <a:xfrm>
+            <a:off x="5852160" y="1627632"/>
+            <a:ext cx="5760720" cy="1827189"/>
+          </a:xfrm>
+          <a:prstGeom prst="rect">
+            <a:avLst/>
+          </a:prstGeom>
+        </p:spPr>
+      </p:pic>
+      <p:graphicFrame>
+        <p:nvGraphicFramePr>
+          <p:cNvPr id="12" name="Table 11"/>
+          <p:cNvGraphicFramePr>
+            <a:graphicFrameLocks noGrp="1"/>
+          </p:cNvGraphicFramePr>
+          <p:nvPr/>
+        </p:nvGraphicFramePr>
+        <p:xfrm>
+          <a:off x="5852160" y="3710852"/>
+          <a:ext cx="5760720" cy="1463040"/>
+        </p:xfrm>
+        <a:graphic>
+          <a:graphicData uri="http://schemas.openxmlformats.org/drawingml/2006/table">
+            <a:tbl>
+              <a:tblPr firstRow="1" bandRow="1">
+                <a:tableStyleId>{5C22544A-7EE6-4342-B048-85BDC9FD1C3A}</a:tableStyleId>
+              </a:tblPr>
+              <a:tblGrid>
+                <a:gridCol w="1463040"/>
+                <a:gridCol w="2788920"/>
+                <a:gridCol w="1508760"/>
+              </a:tblGrid>
+              <a:tr h="365760">
+                <a:tc>
+                  <a:txBody>
+                    <a:bodyPr/>
+                    <a:lstStyle/>
+                    <a:p>
+                      <a:pPr algn="l"/>
+                      <a:r>
+                        <a:rPr sz="1200" b="1">
+                          <a:solidFill>
+                            <a:srgbClr val="FFFFFF"/>
+                          </a:solidFill>
+                          <a:latin typeface="Helvetica Neue"/>
+                        </a:rPr>
+                        <a:t>Backend</a:t>
+                      </a:r>
+                    </a:p>
+                  </a:txBody>
+                  <a:tcPr anchor="ctr" marL="82296" marR="82296" marT="9144" marB="9144">
+                    <a:solidFill>
+                      <a:srgbClr val="15171A"/>
+                    </a:solidFill>
+                  </a:tcPr>
+                </a:tc>
+                <a:tc>
+                  <a:txBody>
+                    <a:bodyPr/>
+                    <a:lstStyle/>
+                    <a:p>
+                      <a:pPr algn="l"/>
+                      <a:r>
+                        <a:rPr sz="1200" b="1">
+                          <a:solidFill>
+                            <a:srgbClr val="FFFFFF"/>
+                          </a:solidFill>
+                          <a:latin typeface="Helvetica Neue"/>
+                        </a:rPr>
+                        <a:t>Peak memory, largest fitting run</a:t>
+                      </a:r>
+                    </a:p>
+                  </a:txBody>
+                  <a:tcPr anchor="ctr" marL="82296" marR="82296" marT="9144" marB="9144">
+                    <a:solidFill>
+                      <a:srgbClr val="15171A"/>
+                    </a:solidFill>
+                  </a:tcPr>
+                </a:tc>
+                <a:tc>
+                  <a:txBody>
+                    <a:bodyPr/>
+                    <a:lstStyle/>
+                    <a:p>
+                      <a:pPr algn="l"/>
+                      <a:r>
+                        <a:rPr sz="1200" b="1">
+                          <a:solidFill>
+                            <a:srgbClr val="FFFFFF"/>
+                          </a:solidFill>
+                          <a:latin typeface="Helvetica Neue"/>
+                        </a:rPr>
+                        <a:t>Next step up</a:t>
+                      </a:r>
+                    </a:p>
+                  </a:txBody>
+                  <a:tcPr anchor="ctr" marL="82296" marR="82296" marT="9144" marB="9144">
+                    <a:solidFill>
+                      <a:srgbClr val="15171A"/>
+                    </a:solidFill>
+                  </a:tcPr>
+                </a:tc>
+              </a:tr>
+              <a:tr h="365760">
+                <a:tc>
+                  <a:txBody>
+                    <a:bodyPr/>
+                    <a:lstStyle/>
+                    <a:p>
+                      <a:pPr algn="l"/>
+                      <a:r>
+                        <a:rPr sz="1200">
+                          <a:solidFill>
+                            <a:srgbClr val="15171A"/>
+                          </a:solidFill>
+                          <a:latin typeface="Helvetica Neue"/>
+                        </a:rPr>
+                        <a:t>CPU 32-core</a:t>
+                      </a:r>
+                    </a:p>
+                  </a:txBody>
+                  <a:tcPr anchor="ctr" marL="82296" marR="82296" marT="9144" marB="9144">
+                    <a:solidFill>
+                      <a:srgbClr val="FFFFFF"/>
+                    </a:solidFill>
+                  </a:tcPr>
+                </a:tc>
+                <a:tc>
+                  <a:txBody>
+                    <a:bodyPr/>
+                    <a:lstStyle/>
+                    <a:p>
+                      <a:pPr algn="l"/>
+                      <a:r>
+                        <a:rPr sz="1200">
+                          <a:solidFill>
+                            <a:srgbClr val="15171A"/>
+                          </a:solidFill>
+                          <a:latin typeface="Helvetica Neue"/>
+                        </a:rPr>
+                        <a:t>66.1 % of 31 GiB (RSS)</a:t>
+                      </a:r>
+                    </a:p>
+                  </a:txBody>
+                  <a:tcPr anchor="ctr" marL="82296" marR="82296" marT="9144" marB="9144">
+                    <a:solidFill>
+                      <a:srgbClr val="FFFFFF"/>
+                    </a:solidFill>
+                  </a:tcPr>
+                </a:tc>
+                <a:tc>
+                  <a:txBody>
+                    <a:bodyPr/>
+                    <a:lstStyle/>
+                    <a:p>
+                      <a:pPr algn="l"/>
+                      <a:r>
+                        <a:rPr sz="1200">
+                          <a:solidFill>
+                            <a:srgbClr val="15171A"/>
+                          </a:solidFill>
+                          <a:latin typeface="Helvetica Neue"/>
+                        </a:rPr>
+                        <a:t>4B never ran</a:t>
+                      </a:r>
+                    </a:p>
+                  </a:txBody>
+                  <a:tcPr anchor="ctr" marL="82296" marR="82296" marT="9144" marB="9144">
+                    <a:solidFill>
+                      <a:srgbClr val="FFFFFF"/>
+                    </a:solidFill>
+                  </a:tcPr>
+                </a:tc>
+              </a:tr>
+              <a:tr h="365760">
+                <a:tc>
+                  <a:txBody>
+                    <a:bodyPr/>
+                    <a:lstStyle/>
+                    <a:p>
+                      <a:pPr algn="l"/>
+                      <a:r>
+                        <a:rPr sz="1200">
+                          <a:solidFill>
+                            <a:srgbClr val="15171A"/>
+                          </a:solidFill>
+                          <a:latin typeface="Helvetica Neue"/>
+                        </a:rPr>
+                        <a:t>GH200</a:t>
+                      </a:r>
+                    </a:p>
+                  </a:txBody>
+                  <a:tcPr anchor="ctr" marL="82296" marR="82296" marT="9144" marB="9144">
+                    <a:solidFill>
+                      <a:srgbClr val="FFFFFF"/>
+                    </a:solidFill>
+                  </a:tcPr>
+                </a:tc>
+                <a:tc>
+                  <a:txBody>
+                    <a:bodyPr/>
+                    <a:lstStyle/>
+                    <a:p>
+                      <a:pPr algn="l"/>
+                      <a:r>
+                        <a:rPr sz="1200">
+                          <a:solidFill>
+                            <a:srgbClr val="15171A"/>
+                          </a:solidFill>
+                          <a:latin typeface="Helvetica Neue"/>
+                        </a:rPr>
+                        <a:t>67.8 % of 96 GiB HBM</a:t>
+                      </a:r>
+                    </a:p>
+                  </a:txBody>
+                  <a:tcPr anchor="ctr" marL="82296" marR="82296" marT="9144" marB="9144">
+                    <a:solidFill>
+                      <a:srgbClr val="FFFFFF"/>
+                    </a:solidFill>
+                  </a:tcPr>
+                </a:tc>
+                <a:tc>
+                  <a:txBody>
+                    <a:bodyPr/>
+                    <a:lstStyle/>
+                    <a:p>
+                      <a:pPr algn="l"/>
+                      <a:r>
+                        <a:rPr sz="1200">
+                          <a:solidFill>
+                            <a:srgbClr val="15171A"/>
+                          </a:solidFill>
+                          <a:latin typeface="Helvetica Neue"/>
+                        </a:rPr>
+                        <a:t>batch 64 OOM</a:t>
+                      </a:r>
+                    </a:p>
+                  </a:txBody>
+                  <a:tcPr anchor="ctr" marL="82296" marR="82296" marT="9144" marB="9144">
+                    <a:solidFill>
+                      <a:srgbClr val="FFFFFF"/>
+                    </a:solidFill>
+                  </a:tcPr>
+                </a:tc>
+              </a:tr>
+              <a:tr h="365760">
+                <a:tc>
+                  <a:txBody>
+                    <a:bodyPr/>
+                    <a:lstStyle/>
+                    <a:p>
+                      <a:pPr algn="l"/>
+                      <a:r>
+                        <a:rPr sz="1200">
+                          <a:solidFill>
+                            <a:srgbClr val="15171A"/>
+                          </a:solidFill>
+                          <a:latin typeface="Helvetica Neue"/>
+                        </a:rPr>
+                        <a:t>v5e, 8 chips</a:t>
+                      </a:r>
+                    </a:p>
+                  </a:txBody>
+                  <a:tcPr anchor="ctr" marL="82296" marR="82296" marT="9144" marB="9144">
+                    <a:solidFill>
+                      <a:srgbClr val="FFFFFF"/>
+                    </a:solidFill>
+                  </a:tcPr>
+                </a:tc>
+                <a:tc>
+                  <a:txBody>
+                    <a:bodyPr/>
+                    <a:lstStyle/>
+                    <a:p>
+                      <a:pPr algn="l"/>
+                      <a:r>
+                        <a:rPr sz="1200">
+                          <a:solidFill>
+                            <a:srgbClr val="15171A"/>
+                          </a:solidFill>
+                          <a:latin typeface="Helvetica Neue"/>
+                        </a:rPr>
+                        <a:t>65.5 % of 16 GiB/chip</a:t>
+                      </a:r>
+                    </a:p>
+                  </a:txBody>
+                  <a:tcPr anchor="ctr" marL="82296" marR="82296" marT="9144" marB="9144">
+                    <a:solidFill>
+                      <a:srgbClr val="FFFFFF"/>
+                    </a:solidFill>
+                  </a:tcPr>
+                </a:tc>
+                <a:tc>
+                  <a:txBody>
+                    <a:bodyPr/>
+                    <a:lstStyle/>
+                    <a:p>
+                      <a:pPr algn="l"/>
+                      <a:r>
+                        <a:rPr sz="1200">
+                          <a:solidFill>
+                            <a:srgbClr val="15171A"/>
+                          </a:solidFill>
+                          <a:latin typeface="Helvetica Neue"/>
+                        </a:rPr>
+                        <a:t>batch 32 OOM</a:t>
+                      </a:r>
+                    </a:p>
+                  </a:txBody>
+                  <a:tcPr anchor="ctr" marL="82296" marR="82296" marT="9144" marB="9144">
+                    <a:solidFill>
+                      <a:srgbClr val="FFFFFF"/>
+                    </a:solidFill>
+                  </a:tcPr>
+                </a:tc>
+              </a:tr>
+            </a:tbl>
+          </a:graphicData>
+        </a:graphic>
+      </p:graphicFrame>
+      <p:sp>
+        <p:nvSpPr>
+          <p:cNvPr id="13" name="TextBox 12"/>
+          <p:cNvSpPr txBox="1"/>
+          <p:nvPr/>
+        </p:nvSpPr>
+        <p:spPr>
+          <a:xfrm>
+            <a:off x="5852160" y="5301908"/>
+            <a:ext cx="5760720" cy="548640"/>
+          </a:xfrm>
+          <a:prstGeom prst="rect">
+            <a:avLst/>
+          </a:prstGeom>
+          <a:noFill/>
+        </p:spPr>
+        <p:txBody>
+          <a:bodyPr wrap="square" anchor="t">
+            <a:spAutoFit/>
+          </a:bodyPr>
+          <a:lstStyle/>
+          <a:p>
+            <a:pPr algn="l">
+              <a:spcAft>
+                <a:spcPts val="200"/>
+              </a:spcAft>
+            </a:pPr>
+            <a:r>
+              <a:rPr sz="1350" b="1" i="0">
+                <a:solidFill>
+                  <a:srgbClr val="E8590C"/>
+                </a:solidFill>
+                <a:latin typeface="Helvetica Neue"/>
+              </a:rPr>
+              <a:t>Memory is what ends every sweep. One batch step past</a:t>
+            </a:r>
+          </a:p>
+          <a:p>
+            <a:pPr algn="l">
+              <a:spcAft>
+                <a:spcPts val="200"/>
+              </a:spcAft>
+            </a:pPr>
+            <a:r>
+              <a:rPr sz="1350" b="1" i="0">
+                <a:solidFill>
+                  <a:srgbClr val="E8590C"/>
+                </a:solidFill>
+                <a:latin typeface="Helvetica Neue"/>
+              </a:rPr>
+              <a:t>these numbers, all three fail.</a:t>
             </a:r>
           </a:p>
         </p:txBody>
@@ -5418,8 +6145,8 @@
           <p:nvPr/>
         </p:nvGraphicFramePr>
         <p:xfrm>
-          <a:off x="566928" y="1691640"/>
-          <a:ext cx="7040880" cy="1920240"/>
+          <a:off x="566928" y="1591056"/>
+          <a:ext cx="6903720" cy="1714500"/>
         </p:xfrm>
         <a:graphic>
           <a:graphicData uri="http://schemas.openxmlformats.org/drawingml/2006/table">
@@ -5428,12 +6155,12 @@
                 <a:tableStyleId>{5C22544A-7EE6-4342-B048-85BDC9FD1C3A}</a:tableStyleId>
               </a:tblPr>
               <a:tblGrid>
-                <a:gridCol w="2286000"/>
-                <a:gridCol w="1828800"/>
-                <a:gridCol w="1828800"/>
-                <a:gridCol w="1097280"/>
+                <a:gridCol w="2240280"/>
+                <a:gridCol w="1554480"/>
+                <a:gridCol w="1554480"/>
+                <a:gridCol w="1554480"/>
               </a:tblGrid>
-              <a:tr h="384048">
+              <a:tr h="342900">
                 <a:tc>
                   <a:txBody>
                     <a:bodyPr/>
@@ -5441,13 +6168,13 @@
                     <a:p>
                       <a:pPr algn="l"/>
                       <a:r>
-                        <a:rPr sz="1300" b="1">
+                        <a:rPr sz="1250" b="1">
                           <a:solidFill>
                             <a:srgbClr val="FFFFFF"/>
                           </a:solidFill>
                           <a:latin typeface="Helvetica Neue"/>
                         </a:rPr>
-                        <a:t>Qwen3-4B, seq 1024</a:t>
+                        <a:t>Qwen3-0.6B, batch 1</a:t>
                       </a:r>
                     </a:p>
                   </a:txBody>
@@ -5464,7 +6191,30 @@
                     <a:p>
                       <a:pPr algn="r"/>
                       <a:r>
-                        <a:rPr sz="1300" b="1">
+                        <a:rPr sz="1250" b="1">
+                          <a:solidFill>
+                            <a:srgbClr val="FFFFFF"/>
+                          </a:solidFill>
+                          <a:latin typeface="Helvetica Neue"/>
+                        </a:rPr>
+                        <a:t>CPU 32-core</a:t>
+                      </a:r>
+                    </a:p>
+                  </a:txBody>
+                  <a:tcPr anchor="ctr" marL="82296" marR="82296" marT="9144" marB="9144">
+                    <a:solidFill>
+                      <a:srgbClr val="15171A"/>
+                    </a:solidFill>
+                  </a:tcPr>
+                </a:tc>
+                <a:tc>
+                  <a:txBody>
+                    <a:bodyPr/>
+                    <a:lstStyle/>
+                    <a:p>
+                      <a:pPr algn="r"/>
+                      <a:r>
+                        <a:rPr sz="1250" b="1">
                           <a:solidFill>
                             <a:srgbClr val="FFFFFF"/>
                           </a:solidFill>
@@ -5487,7 +6237,7 @@
                     <a:p>
                       <a:pPr algn="r"/>
                       <a:r>
-                        <a:rPr sz="1300" b="1">
+                        <a:rPr sz="1250" b="1">
                           <a:solidFill>
                             <a:srgbClr val="FFFFFF"/>
                           </a:solidFill>
@@ -5503,31 +6253,8 @@
                     </a:solidFill>
                   </a:tcPr>
                 </a:tc>
-                <a:tc>
-                  <a:txBody>
-                    <a:bodyPr/>
-                    <a:lstStyle/>
-                    <a:p>
-                      <a:pPr algn="r"/>
-                      <a:r>
-                        <a:rPr sz="1300" b="1">
-                          <a:solidFill>
-                            <a:srgbClr val="FFFFFF"/>
-                          </a:solidFill>
-                          <a:latin typeface="Helvetica Neue"/>
-                        </a:rPr>
-                        <a:t>ratio</a:t>
-                      </a:r>
-                    </a:p>
-                  </a:txBody>
-                  <a:tcPr anchor="ctr" marL="82296" marR="82296" marT="9144" marB="9144">
-                    <a:solidFill>
-                      <a:srgbClr val="15171A"/>
-                    </a:solidFill>
-                  </a:tcPr>
-                </a:tc>
               </a:tr>
-              <a:tr h="384048">
+              <a:tr h="342900">
                 <a:tc>
                   <a:txBody>
                     <a:bodyPr/>
@@ -5535,13 +6262,13 @@
                     <a:p>
                       <a:pPr algn="l"/>
                       <a:r>
-                        <a:rPr sz="1300">
+                        <a:rPr sz="1250">
                           <a:solidFill>
                             <a:srgbClr val="15171A"/>
                           </a:solidFill>
                           <a:latin typeface="Helvetica Neue"/>
                         </a:rPr>
-                        <a:t>batch 8</a:t>
+                        <a:t>Median step time</a:t>
                       </a:r>
                     </a:p>
                   </a:txBody>
@@ -5558,13 +6285,84 @@
                     <a:p>
                       <a:pPr algn="r"/>
                       <a:r>
-                        <a:rPr sz="1300" b="1">
+                        <a:rPr sz="1250">
                           <a:solidFill>
-                            <a:srgbClr val="E8590C"/>
+                            <a:srgbClr val="15171A"/>
                           </a:solidFill>
                           <a:latin typeface="Helvetica Neue"/>
                         </a:rPr>
-                        <a:t>11,557 tok/s</a:t>
+                        <a:t>18.99 s</a:t>
+                      </a:r>
+                    </a:p>
+                  </a:txBody>
+                  <a:tcPr anchor="ctr" marL="82296" marR="82296" marT="9144" marB="9144">
+                    <a:solidFill>
+                      <a:srgbClr val="FFFFFF"/>
+                    </a:solidFill>
+                  </a:tcPr>
+                </a:tc>
+                <a:tc>
+                  <a:txBody>
+                    <a:bodyPr/>
+                    <a:lstStyle/>
+                    <a:p>
+                      <a:pPr algn="r"/>
+                      <a:r>
+                        <a:rPr sz="1250">
+                          <a:solidFill>
+                            <a:srgbClr val="15171A"/>
+                          </a:solidFill>
+                          <a:latin typeface="Helvetica Neue"/>
+                        </a:rPr>
+                        <a:t>0.0798 s</a:t>
+                      </a:r>
+                    </a:p>
+                  </a:txBody>
+                  <a:tcPr anchor="ctr" marL="82296" marR="82296" marT="9144" marB="9144">
+                    <a:solidFill>
+                      <a:srgbClr val="FFFFFF"/>
+                    </a:solidFill>
+                  </a:tcPr>
+                </a:tc>
+                <a:tc>
+                  <a:txBody>
+                    <a:bodyPr/>
+                    <a:lstStyle/>
+                    <a:p>
+                      <a:pPr algn="r"/>
+                      <a:r>
+                        <a:rPr sz="1250">
+                          <a:solidFill>
+                            <a:srgbClr val="15171A"/>
+                          </a:solidFill>
+                          <a:latin typeface="Helvetica Neue"/>
+                        </a:rPr>
+                        <a:t>0.0800 s</a:t>
+                      </a:r>
+                    </a:p>
+                  </a:txBody>
+                  <a:tcPr anchor="ctr" marL="82296" marR="82296" marT="9144" marB="9144">
+                    <a:solidFill>
+                      <a:srgbClr val="FFFFFF"/>
+                    </a:solidFill>
+                  </a:tcPr>
+                </a:tc>
+              </a:tr>
+              <a:tr h="342900">
+                <a:tc>
+                  <a:txBody>
+                    <a:bodyPr/>
+                    <a:lstStyle/>
+                    <a:p>
+                      <a:pPr algn="l"/>
+                      <a:r>
+                        <a:rPr sz="1250">
+                          <a:solidFill>
+                            <a:srgbClr val="15171A"/>
+                          </a:solidFill>
+                          <a:latin typeface="Helvetica Neue"/>
+                        </a:rPr>
+                        <a:t>Speedup vs CPU</a:t>
                       </a:r>
                     </a:p>
                   </a:txBody>
@@ -5581,13 +6379,84 @@
                     <a:p>
                       <a:pPr algn="r"/>
                       <a:r>
-                        <a:rPr sz="1300">
+                        <a:rPr sz="1250">
                           <a:solidFill>
                             <a:srgbClr val="15171A"/>
                           </a:solidFill>
                           <a:latin typeface="Helvetica Neue"/>
                         </a:rPr>
-                        <a:t>4,678 tok/s</a:t>
+                        <a:t>1.0×</a:t>
+                      </a:r>
+                    </a:p>
+                  </a:txBody>
+                  <a:tcPr anchor="ctr" marL="82296" marR="82296" marT="9144" marB="9144">
+                    <a:solidFill>
+                      <a:srgbClr val="FEF3EA"/>
+                    </a:solidFill>
+                  </a:tcPr>
+                </a:tc>
+                <a:tc>
+                  <a:txBody>
+                    <a:bodyPr/>
+                    <a:lstStyle/>
+                    <a:p>
+                      <a:pPr algn="r"/>
+                      <a:r>
+                        <a:rPr sz="1250">
+                          <a:solidFill>
+                            <a:srgbClr val="15171A"/>
+                          </a:solidFill>
+                          <a:latin typeface="Helvetica Neue"/>
+                        </a:rPr>
+                        <a:t>238×</a:t>
+                      </a:r>
+                    </a:p>
+                  </a:txBody>
+                  <a:tcPr anchor="ctr" marL="82296" marR="82296" marT="9144" marB="9144">
+                    <a:solidFill>
+                      <a:srgbClr val="FEF3EA"/>
+                    </a:solidFill>
+                  </a:tcPr>
+                </a:tc>
+                <a:tc>
+                  <a:txBody>
+                    <a:bodyPr/>
+                    <a:lstStyle/>
+                    <a:p>
+                      <a:pPr algn="r"/>
+                      <a:r>
+                        <a:rPr sz="1250">
+                          <a:solidFill>
+                            <a:srgbClr val="15171A"/>
+                          </a:solidFill>
+                          <a:latin typeface="Helvetica Neue"/>
+                        </a:rPr>
+                        <a:t>237×</a:t>
+                      </a:r>
+                    </a:p>
+                  </a:txBody>
+                  <a:tcPr anchor="ctr" marL="82296" marR="82296" marT="9144" marB="9144">
+                    <a:solidFill>
+                      <a:srgbClr val="FEF3EA"/>
+                    </a:solidFill>
+                  </a:tcPr>
+                </a:tc>
+              </a:tr>
+              <a:tr h="342900">
+                <a:tc>
+                  <a:txBody>
+                    <a:bodyPr/>
+                    <a:lstStyle/>
+                    <a:p>
+                      <a:pPr algn="l"/>
+                      <a:r>
+                        <a:rPr sz="1250">
+                          <a:solidFill>
+                            <a:srgbClr val="15171A"/>
+                          </a:solidFill>
+                          <a:latin typeface="Helvetica Neue"/>
+                        </a:rPr>
+                        <a:t>Mean chip utilisation</a:t>
                       </a:r>
                     </a:p>
                   </a:txBody>
@@ -5604,38 +6473,13 @@
                     <a:p>
                       <a:pPr algn="r"/>
                       <a:r>
-                        <a:rPr sz="1300">
+                        <a:rPr sz="1250">
                           <a:solidFill>
                             <a:srgbClr val="15171A"/>
                           </a:solidFill>
                           <a:latin typeface="Helvetica Neue"/>
                         </a:rPr>
-                        <a:t>2.5x</a:t>
-                      </a:r>
-                    </a:p>
-                  </a:txBody>
-                  <a:tcPr anchor="ctr" marL="82296" marR="82296" marT="9144" marB="9144">
-                    <a:solidFill>
-                      <a:srgbClr val="FFFFFF"/>
-                    </a:solidFill>
-                  </a:tcPr>
-                </a:tc>
-              </a:tr>
-              <a:tr h="384048">
-                <a:tc>
-                  <a:txBody>
-                    <a:bodyPr/>
-                    <a:lstStyle/>
-                    <a:p>
-                      <a:pPr algn="l"/>
-                      <a:r>
-                        <a:rPr sz="1300">
-                          <a:solidFill>
-                            <a:srgbClr val="15171A"/>
-                          </a:solidFill>
-                          <a:latin typeface="Helvetica Neue"/>
-                        </a:rPr>
-                        <a:t>batch 16</a:t>
+                        <a:t>44.3 %</a:t>
                       </a:r>
                     </a:p>
                   </a:txBody>
@@ -5652,36 +6496,13 @@
                     <a:p>
                       <a:pPr algn="r"/>
                       <a:r>
-                        <a:rPr sz="1300" b="1">
-                          <a:solidFill>
-                            <a:srgbClr val="E8590C"/>
-                          </a:solidFill>
-                          <a:latin typeface="Helvetica Neue"/>
-                        </a:rPr>
-                        <a:t>12,504 tok/s</a:t>
-                      </a:r>
-                    </a:p>
-                  </a:txBody>
-                  <a:tcPr anchor="ctr" marL="82296" marR="82296" marT="9144" marB="9144">
-                    <a:solidFill>
-                      <a:srgbClr val="FEF3EA"/>
-                    </a:solidFill>
-                  </a:tcPr>
-                </a:tc>
-                <a:tc>
-                  <a:txBody>
-                    <a:bodyPr/>
-                    <a:lstStyle/>
-                    <a:p>
-                      <a:pPr algn="r"/>
-                      <a:r>
-                        <a:rPr sz="1300">
+                        <a:rPr sz="1250">
                           <a:solidFill>
                             <a:srgbClr val="15171A"/>
                           </a:solidFill>
                           <a:latin typeface="Helvetica Neue"/>
                         </a:rPr>
-                        <a:t>4,596 tok/s</a:t>
+                        <a:t>1.59 %</a:t>
                       </a:r>
                     </a:p>
                   </a:txBody>
@@ -5698,13 +6519,13 @@
                     <a:p>
                       <a:pPr algn="r"/>
                       <a:r>
-                        <a:rPr sz="1300">
+                        <a:rPr sz="1250">
                           <a:solidFill>
                             <a:srgbClr val="15171A"/>
                           </a:solidFill>
                           <a:latin typeface="Helvetica Neue"/>
                         </a:rPr>
-                        <a:t>2.7x</a:t>
+                        <a:t>no counter exists</a:t>
                       </a:r>
                     </a:p>
                   </a:txBody>
@@ -5715,7 +6536,7 @@
                   </a:tcPr>
                 </a:tc>
               </a:tr>
-              <a:tr h="384048">
+              <a:tr h="342900">
                 <a:tc>
                   <a:txBody>
                     <a:bodyPr/>
@@ -5723,13 +6544,13 @@
                     <a:p>
                       <a:pPr algn="l"/>
                       <a:r>
-                        <a:rPr sz="1300">
+                        <a:rPr sz="1250">
                           <a:solidFill>
                             <a:srgbClr val="15171A"/>
                           </a:solidFill>
                           <a:latin typeface="Helvetica Neue"/>
                         </a:rPr>
-                        <a:t>batch 32</a:t>
+                        <a:t>Peak memory</a:t>
                       </a:r>
                     </a:p>
                   </a:txBody>
@@ -5746,36 +6567,13 @@
                     <a:p>
                       <a:pPr algn="r"/>
                       <a:r>
-                        <a:rPr sz="1300" b="1">
-                          <a:solidFill>
-                            <a:srgbClr val="E8590C"/>
-                          </a:solidFill>
-                          <a:latin typeface="Helvetica Neue"/>
-                        </a:rPr>
-                        <a:t>13,218 tok/s</a:t>
-                      </a:r>
-                    </a:p>
-                  </a:txBody>
-                  <a:tcPr anchor="ctr" marL="82296" marR="82296" marT="9144" marB="9144">
-                    <a:solidFill>
-                      <a:srgbClr val="FEF3EA"/>
-                    </a:solidFill>
-                  </a:tcPr>
-                </a:tc>
-                <a:tc>
-                  <a:txBody>
-                    <a:bodyPr/>
-                    <a:lstStyle/>
-                    <a:p>
-                      <a:pPr algn="r"/>
-                      <a:r>
-                        <a:rPr sz="1300">
+                        <a:rPr sz="1250">
                           <a:solidFill>
                             <a:srgbClr val="15171A"/>
                           </a:solidFill>
                           <a:latin typeface="Helvetica Neue"/>
                         </a:rPr>
-                        <a:t>out of memory</a:t>
+                        <a:t>66.1 %</a:t>
                       </a:r>
                     </a:p>
                   </a:txBody>
@@ -5792,38 +6590,13 @@
                     <a:p>
                       <a:pPr algn="r"/>
                       <a:r>
-                        <a:rPr sz="1300">
+                        <a:rPr sz="1250">
                           <a:solidFill>
                             <a:srgbClr val="15171A"/>
                           </a:solidFill>
                           <a:latin typeface="Helvetica Neue"/>
                         </a:rPr>
-                        <a:t/>
-                      </a:r>
-                    </a:p>
-                  </a:txBody>
-                  <a:tcPr anchor="ctr" marL="82296" marR="82296" marT="9144" marB="9144">
-                    <a:solidFill>
-                      <a:srgbClr val="FFFFFF"/>
-                    </a:solidFill>
-                  </a:tcPr>
-                </a:tc>
-              </a:tr>
-              <a:tr h="384048">
-                <a:tc>
-                  <a:txBody>
-                    <a:bodyPr/>
-                    <a:lstStyle/>
-                    <a:p>
-                      <a:pPr algn="l"/>
-                      <a:r>
-                        <a:rPr sz="1300">
-                          <a:solidFill>
-                            <a:srgbClr val="15171A"/>
-                          </a:solidFill>
-                          <a:latin typeface="Helvetica Neue"/>
-                        </a:rPr>
-                        <a:t>batch 64</a:t>
+                        <a:t>5.0 %</a:t>
                       </a:r>
                     </a:p>
                   </a:txBody>
@@ -5840,59 +6613,13 @@
                     <a:p>
                       <a:pPr algn="r"/>
                       <a:r>
-                        <a:rPr sz="1300" b="1">
-                          <a:solidFill>
-                            <a:srgbClr val="E8590C"/>
-                          </a:solidFill>
-                          <a:latin typeface="Helvetica Neue"/>
-                        </a:rPr>
-                        <a:t>out of memory</a:t>
-                      </a:r>
-                    </a:p>
-                  </a:txBody>
-                  <a:tcPr anchor="ctr" marL="82296" marR="82296" marT="9144" marB="9144">
-                    <a:solidFill>
-                      <a:srgbClr val="FEF3EA"/>
-                    </a:solidFill>
-                  </a:tcPr>
-                </a:tc>
-                <a:tc>
-                  <a:txBody>
-                    <a:bodyPr/>
-                    <a:lstStyle/>
-                    <a:p>
-                      <a:pPr algn="r"/>
-                      <a:r>
-                        <a:rPr sz="1300">
+                        <a:rPr sz="1250">
                           <a:solidFill>
                             <a:srgbClr val="15171A"/>
                           </a:solidFill>
                           <a:latin typeface="Helvetica Neue"/>
                         </a:rPr>
-                        <a:t/>
-                      </a:r>
-                    </a:p>
-                  </a:txBody>
-                  <a:tcPr anchor="ctr" marL="82296" marR="82296" marT="9144" marB="9144">
-                    <a:solidFill>
-                      <a:srgbClr val="FFFFFF"/>
-                    </a:solidFill>
-                  </a:tcPr>
-                </a:tc>
-                <a:tc>
-                  <a:txBody>
-                    <a:bodyPr/>
-                    <a:lstStyle/>
-                    <a:p>
-                      <a:pPr algn="r"/>
-                      <a:r>
-                        <a:rPr sz="1300">
-                          <a:solidFill>
-                            <a:srgbClr val="15171A"/>
-                          </a:solidFill>
-                          <a:latin typeface="Helvetica Neue"/>
-                        </a:rPr>
-                        <a:t/>
+                        <a:t>7.3 %</a:t>
                       </a:r>
                     </a:p>
                   </a:txBody>
@@ -5915,8 +6642,8 @@
         </p:nvSpPr>
         <p:spPr>
           <a:xfrm>
-            <a:off x="566928" y="3794760"/>
-            <a:ext cx="6858000" cy="685800"/>
+            <a:off x="566928" y="3433572"/>
+            <a:ext cx="6903720" cy="640080"/>
           </a:xfrm>
           <a:prstGeom prst="rect">
             <a:avLst/>
@@ -5935,13 +6662,29 @@
               </a:spcAft>
             </a:pPr>
             <a:r>
-              <a:rPr sz="1500" b="1" i="0">
+              <a:rPr sz="1450" b="1" i="0">
                 <a:solidFill>
                   <a:srgbClr val="15171A"/>
                 </a:solidFill>
                 <a:latin typeface="Helvetica Neue"/>
               </a:rPr>
-              <a:t>At batch 1 both chips idle and tie to within 0.23 %. That tie was an artefact.</a:t>
+              <a:t>Both accelerators are ~238× the CPU and tie with each other to 0.23 %.</a:t>
+            </a:r>
+          </a:p>
+          <a:p>
+            <a:pPr algn="l">
+              <a:spcAft>
+                <a:spcPts val="300"/>
+              </a:spcAft>
+            </a:pPr>
+            <a:r>
+              <a:rPr sz="1450" b="1" i="0">
+                <a:solidFill>
+                  <a:srgbClr val="15171A"/>
+                </a:solidFill>
+                <a:latin typeface="Helvetica Neue"/>
+              </a:rPr>
+              <a:t>At batch 1 neither is busy. That tie is an artefact.</a:t>
             </a:r>
           </a:p>
         </p:txBody>
@@ -5962,8 +6705,8 @@
         </p:blipFill>
         <p:spPr>
           <a:xfrm>
-            <a:off x="566928" y="4526280"/>
-            <a:ext cx="6858000" cy="1769806"/>
+            <a:off x="566928" y="4041648"/>
+            <a:ext cx="6903720" cy="1877182"/>
           </a:xfrm>
           <a:prstGeom prst="rect">
             <a:avLst/>
@@ -5978,8 +6721,8 @@
         </p:nvSpPr>
         <p:spPr>
           <a:xfrm>
-            <a:off x="7955279" y="1691640"/>
-            <a:ext cx="3657600" cy="777240"/>
+            <a:off x="7726679" y="1591056"/>
+            <a:ext cx="3886200" cy="777240"/>
           </a:xfrm>
           <a:prstGeom prst="rect">
             <a:avLst/>
@@ -6017,8 +6760,8 @@
         </p:nvSpPr>
         <p:spPr>
           <a:xfrm>
-            <a:off x="7955279" y="2350008"/>
-            <a:ext cx="3657600" cy="822960"/>
+            <a:off x="7744967" y="2249424"/>
+            <a:ext cx="3886200" cy="822960"/>
           </a:xfrm>
           <a:prstGeom prst="rect">
             <a:avLst/>
@@ -6072,8 +6815,8 @@
         </p:nvSpPr>
         <p:spPr>
           <a:xfrm>
-            <a:off x="7955279" y="3291840"/>
-            <a:ext cx="3657600" cy="1371600"/>
+            <a:off x="7726679" y="3218688"/>
+            <a:ext cx="3886200" cy="1275567"/>
           </a:xfrm>
           <a:prstGeom prst="roundRect">
             <a:avLst>
@@ -6120,8 +6863,8 @@
         </p:nvSpPr>
         <p:spPr>
           <a:xfrm>
-            <a:off x="8229600" y="3474720"/>
-            <a:ext cx="3200400" cy="274320"/>
+            <a:off x="7982711" y="3456432"/>
+            <a:ext cx="3410712" cy="234696"/>
           </a:xfrm>
           <a:prstGeom prst="rect">
             <a:avLst/>
@@ -6159,8 +6902,8 @@
         </p:nvSpPr>
         <p:spPr>
           <a:xfrm>
-            <a:off x="8229600" y="3794760"/>
-            <a:ext cx="3200400" cy="822960"/>
+            <a:off x="7982711" y="3782568"/>
+            <a:ext cx="3410712" cy="540512"/>
           </a:xfrm>
           <a:prstGeom prst="rect">
             <a:avLst/>
@@ -6179,7 +6922,7 @@
               </a:spcAft>
             </a:pPr>
             <a:r>
-              <a:rPr sz="1400" b="0" i="0">
+              <a:rPr sz="1350" b="0" i="0">
                 <a:solidFill>
                   <a:srgbClr val="15171A"/>
                 </a:solidFill>
@@ -6195,7 +6938,7 @@
               </a:spcAft>
             </a:pPr>
             <a:r>
-              <a:rPr sz="1400" b="0" i="0">
+              <a:rPr sz="1350" b="0" i="0">
                 <a:solidFill>
                   <a:srgbClr val="15171A"/>
                 </a:solidFill>
@@ -6214,8 +6957,8 @@
         </p:nvSpPr>
         <p:spPr>
           <a:xfrm>
-            <a:off x="7955279" y="4846320"/>
-            <a:ext cx="3657600" cy="1417320"/>
+            <a:off x="7726679" y="4590288"/>
+            <a:ext cx="3886200" cy="1732767"/>
           </a:xfrm>
           <a:prstGeom prst="roundRect">
             <a:avLst>
@@ -6262,8 +7005,8 @@
         </p:nvSpPr>
         <p:spPr>
           <a:xfrm>
-            <a:off x="8229600" y="5029200"/>
-            <a:ext cx="3200400" cy="274320"/>
+            <a:off x="7982711" y="4828032"/>
+            <a:ext cx="3410712" cy="234696"/>
           </a:xfrm>
           <a:prstGeom prst="rect">
             <a:avLst/>
@@ -6301,8 +7044,8 @@
         </p:nvSpPr>
         <p:spPr>
           <a:xfrm>
-            <a:off x="8229600" y="5349240"/>
-            <a:ext cx="3200400" cy="914400"/>
+            <a:off x="7982711" y="5154168"/>
+            <a:ext cx="3410712" cy="997712"/>
           </a:xfrm>
           <a:prstGeom prst="rect">
             <a:avLst/>
@@ -6327,7 +7070,7 @@
                 </a:solidFill>
                 <a:latin typeface="Helvetica Neue"/>
               </a:rPr>
-              <a:t>File cache: load 14.6x faster,</a:t>
+              <a:t>File cache on: checkpoint load</a:t>
             </a:r>
           </a:p>
           <a:p>
@@ -6343,7 +7086,7 @@
                 </a:solidFill>
                 <a:latin typeface="Helvetica Neue"/>
               </a:rPr>
-              <a:t>31 % off wall clock.</a:t>
+              <a:t>14.6× faster, 31 % off wall clock.</a:t>
             </a:r>
           </a:p>
           <a:p>
@@ -6359,7 +7102,7 @@
                 </a:solidFill>
                 <a:latin typeface="Helvetica Neue"/>
               </a:rPr>
-              <a:t>Step time unchanged to the</a:t>
+              <a:t>Median step time unchanged to</a:t>
             </a:r>
           </a:p>
           <a:p>
@@ -6375,7 +7118,7 @@
                 </a:solidFill>
                 <a:latin typeface="Helvetica Neue"/>
               </a:rPr>
-              <a:t>fourth decimal.</a:t>
+              <a:t>the fourth decimal.</a:t>
             </a:r>
           </a:p>
         </p:txBody>
@@ -6563,8 +7306,8 @@
         </p:nvSpPr>
         <p:spPr>
           <a:xfrm>
-            <a:off x="566928" y="1737360"/>
-            <a:ext cx="3520440" cy="2423160"/>
+            <a:off x="566928" y="1645920"/>
+            <a:ext cx="3520440" cy="2286000"/>
           </a:xfrm>
           <a:prstGeom prst="roundRect">
             <a:avLst>
@@ -6611,7 +7354,7 @@
         </p:nvSpPr>
         <p:spPr>
           <a:xfrm>
-            <a:off x="822960" y="1874519"/>
+            <a:off x="822960" y="1773936"/>
             <a:ext cx="3017520" cy="640080"/>
           </a:xfrm>
           <a:prstGeom prst="rect">
@@ -6650,7 +7393,7 @@
         </p:nvSpPr>
         <p:spPr>
           <a:xfrm>
-            <a:off x="822960" y="2450592"/>
+            <a:off x="822960" y="2340864"/>
             <a:ext cx="3063240" cy="411480"/>
           </a:xfrm>
           <a:prstGeom prst="rect">
@@ -6689,7 +7432,7 @@
         </p:nvSpPr>
         <p:spPr>
           <a:xfrm>
-            <a:off x="822960" y="2880360"/>
+            <a:off x="822960" y="2770632"/>
             <a:ext cx="3063240" cy="1188720"/>
           </a:xfrm>
           <a:prstGeom prst="rect">
@@ -6747,7 +7490,7 @@
                 </a:solidFill>
                 <a:latin typeface="Helvetica Neue"/>
               </a:rPr>
-              <a:t>reading the checkpoint.</a:t>
+              <a:t>reading the checkpoint: 32 %.</a:t>
             </a:r>
           </a:p>
         </p:txBody>
@@ -6760,8 +7503,8 @@
         </p:nvSpPr>
         <p:spPr>
           <a:xfrm>
-            <a:off x="4361688" y="1737360"/>
-            <a:ext cx="3520440" cy="2423160"/>
+            <a:off x="4361688" y="1645920"/>
+            <a:ext cx="3520440" cy="2286000"/>
           </a:xfrm>
           <a:prstGeom prst="roundRect">
             <a:avLst>
@@ -6808,7 +7551,7 @@
         </p:nvSpPr>
         <p:spPr>
           <a:xfrm>
-            <a:off x="4617720" y="1874519"/>
+            <a:off x="4617720" y="1773936"/>
             <a:ext cx="3017520" cy="640080"/>
           </a:xfrm>
           <a:prstGeom prst="rect">
@@ -6847,7 +7590,7 @@
         </p:nvSpPr>
         <p:spPr>
           <a:xfrm>
-            <a:off x="4617720" y="2450592"/>
+            <a:off x="4617720" y="2340864"/>
             <a:ext cx="3063240" cy="411480"/>
           </a:xfrm>
           <a:prstGeom prst="rect">
@@ -6886,7 +7629,7 @@
         </p:nvSpPr>
         <p:spPr>
           <a:xfrm>
-            <a:off x="4617720" y="2880360"/>
+            <a:off x="4617720" y="2770632"/>
             <a:ext cx="3063240" cy="1188720"/>
           </a:xfrm>
           <a:prstGeom prst="rect">
@@ -6973,8 +7716,8 @@
         </p:nvSpPr>
         <p:spPr>
           <a:xfrm>
-            <a:off x="8156448" y="1737360"/>
-            <a:ext cx="3520440" cy="2423160"/>
+            <a:off x="8156448" y="1645920"/>
+            <a:ext cx="3520440" cy="2286000"/>
           </a:xfrm>
           <a:prstGeom prst="roundRect">
             <a:avLst>
@@ -7021,7 +7764,7 @@
         </p:nvSpPr>
         <p:spPr>
           <a:xfrm>
-            <a:off x="8412480" y="1874519"/>
+            <a:off x="8412480" y="1773936"/>
             <a:ext cx="3017520" cy="640080"/>
           </a:xfrm>
           <a:prstGeom prst="rect">
@@ -7060,7 +7803,7 @@
         </p:nvSpPr>
         <p:spPr>
           <a:xfrm>
-            <a:off x="8412480" y="2450592"/>
+            <a:off x="8412480" y="2340864"/>
             <a:ext cx="3063240" cy="411480"/>
           </a:xfrm>
           <a:prstGeom prst="rect">
@@ -7099,7 +7842,7 @@
         </p:nvSpPr>
         <p:spPr>
           <a:xfrm>
-            <a:off x="8412480" y="2880360"/>
+            <a:off x="8412480" y="2770632"/>
             <a:ext cx="3063240" cy="1188720"/>
           </a:xfrm>
           <a:prstGeom prst="rect">
@@ -7186,7 +7929,7 @@
         </p:nvSpPr>
         <p:spPr>
           <a:xfrm>
-            <a:off x="566928" y="4389120"/>
+            <a:off x="566928" y="4224528"/>
             <a:ext cx="5394960" cy="320040"/>
           </a:xfrm>
           <a:prstGeom prst="rect">
@@ -7225,7 +7968,7 @@
         </p:nvSpPr>
         <p:spPr>
           <a:xfrm>
-            <a:off x="566928" y="4736592"/>
+            <a:off x="566928" y="4572000"/>
             <a:ext cx="5394960" cy="1280160"/>
           </a:xfrm>
           <a:prstGeom prst="rect">
@@ -7328,8 +8071,8 @@
         </p:nvSpPr>
         <p:spPr>
           <a:xfrm>
-            <a:off x="6217920" y="4261104"/>
-            <a:ext cx="5394960" cy="1874519"/>
+            <a:off x="6217920" y="4078224"/>
+            <a:ext cx="5394960" cy="2392659"/>
           </a:xfrm>
           <a:prstGeom prst="roundRect">
             <a:avLst>
@@ -7376,8 +8119,8 @@
         </p:nvSpPr>
         <p:spPr>
           <a:xfrm>
-            <a:off x="6492240" y="4425696"/>
-            <a:ext cx="4937760" cy="320040"/>
+            <a:off x="6473952" y="4315968"/>
+            <a:ext cx="4919472" cy="251460"/>
           </a:xfrm>
           <a:prstGeom prst="rect">
             <a:avLst/>
@@ -7415,8 +8158,8 @@
         </p:nvSpPr>
         <p:spPr>
           <a:xfrm>
-            <a:off x="6492240" y="4773168"/>
-            <a:ext cx="4937760" cy="1280160"/>
+            <a:off x="6473952" y="4658868"/>
+            <a:ext cx="4919472" cy="1371600"/>
           </a:xfrm>
           <a:prstGeom prst="rect">
             <a:avLst/>
@@ -7441,7 +8184,7 @@
                 </a:solidFill>
                 <a:latin typeface="Helvetica Neue"/>
               </a:rPr>
-              <a:t>On the real 4B workload one GH200 runs 2.7x faster</a:t>
+              <a:t>At batch 8, the slice's own best point: one GH200 runs</a:t>
             </a:r>
           </a:p>
           <a:p>
@@ -7457,7 +8200,7 @@
                 </a:solidFill>
                 <a:latin typeface="Helvetica Neue"/>
               </a:rPr>
-              <a:t>than eight TPU chips and costs 10x less:</a:t>
+              <a:t>2.5× faster than eight TPU chips and costs 10× less,</a:t>
             </a:r>
           </a:p>
           <a:p>
@@ -7473,7 +8216,7 @@
                 </a:solidFill>
                 <a:latin typeface="Helvetica Neue"/>
               </a:rPr>
-              <a:t>$0.56 against $5.72 per 1 000 steps.</a:t>
+              <a:t>$0.56 against $5.72 per 1,000 steps.</a:t>
             </a:r>
           </a:p>
           <a:p>
@@ -7534,8 +8277,47 @@
         </p:nvSpPr>
         <p:spPr>
           <a:xfrm>
-            <a:off x="566928" y="6172200"/>
-            <a:ext cx="11064240" cy="365760"/>
+            <a:off x="6473952" y="6103620"/>
+            <a:ext cx="4919472" cy="269240"/>
+          </a:xfrm>
+          <a:prstGeom prst="rect">
+            <a:avLst/>
+          </a:prstGeom>
+          <a:noFill/>
+        </p:spPr>
+        <p:txBody>
+          <a:bodyPr wrap="square" anchor="t">
+            <a:spAutoFit/>
+          </a:bodyPr>
+          <a:lstStyle/>
+          <a:p>
+            <a:pPr algn="l">
+              <a:spcAft>
+                <a:spcPts val="200"/>
+              </a:spcAft>
+            </a:pPr>
+            <a:r>
+              <a:rPr sz="1050" b="0" i="0">
+                <a:solidFill>
+                  <a:srgbClr val="717A85"/>
+                </a:solidFill>
+                <a:latin typeface="Helvetica Neue"/>
+              </a:rPr>
+              <a:t>TPU rate billed; the GH200 rate is a market proxy.</a:t>
+            </a:r>
+          </a:p>
+        </p:txBody>
+      </p:sp>
+      <p:sp>
+        <p:nvSpPr>
+          <p:cNvPr id="24" name="TextBox 23"/>
+          <p:cNvSpPr txBox="1"/>
+          <p:nvPr/>
+        </p:nvSpPr>
+        <p:spPr>
+          <a:xfrm>
+            <a:off x="566928" y="6382512"/>
+            <a:ext cx="11064240" cy="274320"/>
           </a:xfrm>
           <a:prstGeom prst="rect">
             <a:avLst/>

--- a/slides/ME344_Final_Arnold_Hambuch.pptx
+++ b/slides/ME344_Final_Arnold_Hambuch.pptx
@@ -8342,7 +8342,7 @@
                 </a:solidFill>
                 <a:latin typeface="Helvetica Neue"/>
               </a:rPr>
-              <a:t>13 measured runs  ·  github.com/RN0L/me344-qwen3-icd10-profiling</a:t>
+              <a:t>13 measured runs  ·  github.com/RN0L/qwen3-icd10-scaling</a:t>
             </a:r>
           </a:p>
         </p:txBody>

--- a/slides/ME344_Final_Arnold_Hambuch.pptx
+++ b/slides/ME344_Final_Arnold_Hambuch.pptx
@@ -3251,27 +3251,393 @@
       </p:sp>
       <p:sp>
         <p:nvSpPr>
-          <p:cNvPr id="6" name="Rounded Rectangle 5"/>
+          <p:cNvPr id="6" name="TextBox 5"/>
+          <p:cNvSpPr txBox="1"/>
+          <p:nvPr/>
+        </p:nvSpPr>
+        <p:spPr>
+          <a:xfrm>
+            <a:off x="566928" y="1755648"/>
+            <a:ext cx="5120640" cy="320040"/>
+          </a:xfrm>
+          <a:prstGeom prst="rect">
+            <a:avLst/>
+          </a:prstGeom>
+          <a:noFill/>
+        </p:spPr>
+        <p:txBody>
+          <a:bodyPr wrap="square" anchor="t">
+            <a:spAutoFit/>
+          </a:bodyPr>
+          <a:lstStyle/>
+          <a:p>
+            <a:pPr algn="l">
+              <a:spcAft>
+                <a:spcPts val="0"/>
+              </a:spcAft>
+            </a:pPr>
+            <a:r>
+              <a:rPr sz="1500" b="1" i="0">
+                <a:solidFill>
+                  <a:srgbClr val="15171A"/>
+                </a:solidFill>
+                <a:latin typeface="Helvetica Neue"/>
+              </a:rPr>
+              <a:t>Dr. Findus, our startup in Berlin</a:t>
+            </a:r>
+          </a:p>
+        </p:txBody>
+      </p:sp>
+      <p:sp>
+        <p:nvSpPr>
+          <p:cNvPr id="7" name="TextBox 6"/>
+          <p:cNvSpPr txBox="1"/>
+          <p:nvPr/>
+        </p:nvSpPr>
+        <p:spPr>
+          <a:xfrm>
+            <a:off x="566928" y="2139696"/>
+            <a:ext cx="5120640" cy="1371600"/>
+          </a:xfrm>
+          <a:prstGeom prst="rect">
+            <a:avLst/>
+          </a:prstGeom>
+          <a:noFill/>
+        </p:spPr>
+        <p:txBody>
+          <a:bodyPr wrap="square" anchor="t">
+            <a:spAutoFit/>
+          </a:bodyPr>
+          <a:lstStyle/>
+          <a:p>
+            <a:pPr algn="l">
+              <a:spcAft>
+                <a:spcPts val="600"/>
+              </a:spcAft>
+            </a:pPr>
+            <a:r>
+              <a:rPr sz="1400" b="0" i="0">
+                <a:solidFill>
+                  <a:srgbClr val="717A85"/>
+                </a:solidFill>
+                <a:latin typeface="Helvetica Neue"/>
+              </a:rPr>
+              <a:t>German GPs code every consultation.</a:t>
+            </a:r>
+          </a:p>
+          <a:p>
+            <a:pPr algn="l">
+              <a:spcAft>
+                <a:spcPts val="600"/>
+              </a:spcAft>
+            </a:pPr>
+            <a:r>
+              <a:rPr sz="1400" b="0" i="0">
+                <a:solidFill>
+                  <a:srgbClr val="717A85"/>
+                </a:solidFill>
+                <a:latin typeface="Helvetica Neue"/>
+              </a:rPr>
+              <a:t>We propose, the physician confirms.</a:t>
+            </a:r>
+          </a:p>
+          <a:p>
+            <a:pPr algn="l">
+              <a:spcAft>
+                <a:spcPts val="600"/>
+              </a:spcAft>
+            </a:pPr>
+            <a:r>
+              <a:rPr sz="1400" b="0" i="0">
+                <a:solidFill>
+                  <a:srgbClr val="717A85"/>
+                </a:solidFill>
+                <a:latin typeface="Helvetica Neue"/>
+              </a:rPr>
+              <a:t>Reliability is the product.</a:t>
+            </a:r>
+          </a:p>
+          <a:p>
+            <a:pPr algn="l">
+              <a:spcAft>
+                <a:spcPts val="600"/>
+              </a:spcAft>
+            </a:pPr>
+            <a:r>
+              <a:rPr sz="1400" b="0" i="0">
+                <a:solidFill>
+                  <a:srgbClr val="717A85"/>
+                </a:solidFill>
+                <a:latin typeface="Helvetica Neue"/>
+              </a:rPr>
+              <a:t>Today it runs on hosted APIs.</a:t>
+            </a:r>
+          </a:p>
+        </p:txBody>
+      </p:sp>
+      <p:sp>
+        <p:nvSpPr>
+          <p:cNvPr id="8" name="TextBox 7"/>
+          <p:cNvSpPr txBox="1"/>
+          <p:nvPr/>
+        </p:nvSpPr>
+        <p:spPr>
+          <a:xfrm>
+            <a:off x="5989320" y="1755648"/>
+            <a:ext cx="5623560" cy="914400"/>
+          </a:xfrm>
+          <a:prstGeom prst="rect">
+            <a:avLst/>
+          </a:prstGeom>
+          <a:noFill/>
+        </p:spPr>
+        <p:txBody>
+          <a:bodyPr wrap="square" anchor="t">
+            <a:spAutoFit/>
+          </a:bodyPr>
+          <a:lstStyle/>
+          <a:p>
+            <a:pPr algn="l">
+              <a:spcAft>
+                <a:spcPts val="200"/>
+              </a:spcAft>
+            </a:pPr>
+            <a:r>
+              <a:rPr sz="2400" b="1" i="0">
+                <a:solidFill>
+                  <a:srgbClr val="E8590C"/>
+                </a:solidFill>
+                <a:latin typeface="Helvetica Neue"/>
+              </a:rPr>
+              <a:t>Could it run on</a:t>
+            </a:r>
+          </a:p>
+          <a:p>
+            <a:pPr algn="l">
+              <a:spcAft>
+                <a:spcPts val="200"/>
+              </a:spcAft>
+            </a:pPr>
+            <a:r>
+              <a:rPr sz="2400" b="1" i="0">
+                <a:solidFill>
+                  <a:srgbClr val="E8590C"/>
+                </a:solidFill>
+                <a:latin typeface="Helvetica Neue"/>
+              </a:rPr>
+              <a:t>our own hardware?</a:t>
+            </a:r>
+          </a:p>
+        </p:txBody>
+      </p:sp>
+      <p:sp>
+        <p:nvSpPr>
+          <p:cNvPr id="9" name="TextBox 8"/>
+          <p:cNvSpPr txBox="1"/>
+          <p:nvPr/>
+        </p:nvSpPr>
+        <p:spPr>
+          <a:xfrm>
+            <a:off x="5989320" y="2761488"/>
+            <a:ext cx="5623560" cy="731520"/>
+          </a:xfrm>
+          <a:prstGeom prst="rect">
+            <a:avLst/>
+          </a:prstGeom>
+          <a:noFill/>
+        </p:spPr>
+        <p:txBody>
+          <a:bodyPr wrap="square" anchor="t">
+            <a:spAutoFit/>
+          </a:bodyPr>
+          <a:lstStyle/>
+          <a:p>
+            <a:pPr algn="l">
+              <a:spcAft>
+                <a:spcPts val="300"/>
+              </a:spcAft>
+            </a:pPr>
+            <a:r>
+              <a:rPr sz="1300" b="0" i="0">
+                <a:solidFill>
+                  <a:srgbClr val="717A85"/>
+                </a:solidFill>
+                <a:latin typeface="Helvetica Neue"/>
+              </a:rPr>
+              <a:t>Qwen3-4B + LoRA on CodiEsp: 500 train / 250 dev</a:t>
+            </a:r>
+          </a:p>
+          <a:p>
+            <a:pPr algn="l">
+              <a:spcAft>
+                <a:spcPts val="300"/>
+              </a:spcAft>
+            </a:pPr>
+            <a:r>
+              <a:rPr sz="1300" b="0" i="0">
+                <a:solidFill>
+                  <a:srgbClr val="717A85"/>
+                </a:solidFill>
+                <a:latin typeface="Helvetica Neue"/>
+              </a:rPr>
+              <a:t>Spanish case reports, ICD-10 coded, CC-BY 4.0.</a:t>
+            </a:r>
+          </a:p>
+        </p:txBody>
+      </p:sp>
+      <p:sp>
+        <p:nvSpPr>
+          <p:cNvPr id="10" name="TextBox 9"/>
+          <p:cNvSpPr txBox="1"/>
+          <p:nvPr/>
+        </p:nvSpPr>
+        <p:spPr>
+          <a:xfrm>
+            <a:off x="566928" y="3803904"/>
+            <a:ext cx="5394960" cy="320040"/>
+          </a:xfrm>
+          <a:prstGeom prst="rect">
+            <a:avLst/>
+          </a:prstGeom>
+          <a:noFill/>
+        </p:spPr>
+        <p:txBody>
+          <a:bodyPr wrap="square" anchor="t">
+            <a:spAutoFit/>
+          </a:bodyPr>
+          <a:lstStyle/>
+          <a:p>
+            <a:pPr algn="l">
+              <a:spcAft>
+                <a:spcPts val="500"/>
+              </a:spcAft>
+            </a:pPr>
+            <a:r>
+              <a:rPr sz="1400" b="1" i="0">
+                <a:solidFill>
+                  <a:srgbClr val="E8590C"/>
+                </a:solidFill>
+                <a:latin typeface="Helvetica Neue"/>
+              </a:rPr>
+              <a:t>The resource problem</a:t>
+            </a:r>
+          </a:p>
+        </p:txBody>
+      </p:sp>
+      <p:sp>
+        <p:nvSpPr>
+          <p:cNvPr id="11" name="TextBox 10"/>
+          <p:cNvSpPr txBox="1"/>
+          <p:nvPr/>
+        </p:nvSpPr>
+        <p:spPr>
+          <a:xfrm>
+            <a:off x="566928" y="4169663"/>
+            <a:ext cx="5394960" cy="1280160"/>
+          </a:xfrm>
+          <a:prstGeom prst="rect">
+            <a:avLst/>
+          </a:prstGeom>
+          <a:noFill/>
+        </p:spPr>
+        <p:txBody>
+          <a:bodyPr wrap="square" anchor="t">
+            <a:spAutoFit/>
+          </a:bodyPr>
+          <a:lstStyle/>
+          <a:p>
+            <a:pPr algn="l">
+              <a:spcAft>
+                <a:spcPts val="900"/>
+              </a:spcAft>
+            </a:pPr>
+            <a:r>
+              <a:rPr sz="1500" b="0" i="0">
+                <a:solidFill>
+                  <a:srgbClr val="15171A"/>
+                </a:solidFill>
+                <a:latin typeface="Helvetica Neue"/>
+              </a:rPr>
+              <a:t>8 GB of weights at 4B before a single activation.</a:t>
+            </a:r>
+          </a:p>
+          <a:p>
+            <a:pPr algn="l">
+              <a:spcAft>
+                <a:spcPts val="900"/>
+              </a:spcAft>
+            </a:pPr>
+            <a:r>
+              <a:rPr sz="1500" b="0" i="0">
+                <a:solidFill>
+                  <a:srgbClr val="15171A"/>
+                </a:solidFill>
+                <a:latin typeface="Helvetica Neue"/>
+              </a:rPr>
+              <a:t>Median case 802 tokens, longest 2,489.</a:t>
+            </a:r>
+          </a:p>
+          <a:p>
+            <a:pPr algn="l">
+              <a:spcAft>
+                <a:spcPts val="900"/>
+              </a:spcAft>
+            </a:pPr>
+            <a:r>
+              <a:rPr sz="1500" b="0" i="0">
+                <a:solidFill>
+                  <a:srgbClr val="15171A"/>
+                </a:solidFill>
+                <a:latin typeface="Helvetica Neue"/>
+              </a:rPr>
+              <a:t>One JAX program, lowered by XLA to CPU, GPU and TPU.</a:t>
+            </a:r>
+          </a:p>
+        </p:txBody>
+      </p:sp>
+      <p:pic>
+        <p:nvPicPr>
+          <p:cNvPr id="12" name="Picture 11" descr="slide1-coverage.png"/>
+          <p:cNvPicPr>
+            <a:picLocks noChangeAspect="1"/>
+          </p:cNvPicPr>
+          <p:nvPr/>
+        </p:nvPicPr>
+        <p:blipFill>
+          <a:blip r:embed="rId2"/>
+          <a:stretch>
+            <a:fillRect/>
+          </a:stretch>
+        </p:blipFill>
+        <p:spPr>
+          <a:xfrm>
+            <a:off x="5989320" y="3675887"/>
+            <a:ext cx="5669280" cy="1639947"/>
+          </a:xfrm>
+          <a:prstGeom prst="rect">
+            <a:avLst/>
+          </a:prstGeom>
+        </p:spPr>
+      </p:pic>
+      <p:sp>
+        <p:nvSpPr>
+          <p:cNvPr id="13" name="Rectangle 12"/>
           <p:cNvSpPr/>
           <p:nvPr/>
         </p:nvSpPr>
         <p:spPr>
           <a:xfrm>
-            <a:off x="566928" y="1664208"/>
-            <a:ext cx="5120640" cy="1966955"/>
-          </a:xfrm>
-          <a:prstGeom prst="roundRect">
-            <a:avLst>
-              <a:gd name="adj" fmla="val 4000"/>
-            </a:avLst>
+            <a:off x="566928" y="5614416"/>
+            <a:ext cx="11018520" cy="12700"/>
+          </a:xfrm>
+          <a:prstGeom prst="rect">
+            <a:avLst/>
           </a:prstGeom>
           <a:solidFill>
-            <a:srgbClr val="FEF3EA"/>
+            <a:srgbClr val="E6E9EC"/>
           </a:solidFill>
-          <a:ln w="9525">
-            <a:solidFill>
-              <a:srgbClr val="E6E9EC"/>
-            </a:solidFill>
+          <a:ln>
+            <a:noFill/>
           </a:ln>
           <a:effectLst/>
         </p:spPr>
@@ -3299,14 +3665,14 @@
       </p:sp>
       <p:sp>
         <p:nvSpPr>
-          <p:cNvPr id="7" name="TextBox 6"/>
+          <p:cNvPr id="14" name="TextBox 13"/>
           <p:cNvSpPr txBox="1"/>
           <p:nvPr/>
         </p:nvSpPr>
         <p:spPr>
           <a:xfrm>
-            <a:off x="822960" y="1901952"/>
-            <a:ext cx="4645152" cy="251460"/>
+            <a:off x="566928" y="5852160"/>
+            <a:ext cx="10972800" cy="502920"/>
           </a:xfrm>
           <a:prstGeom prst="rect">
             <a:avLst/>
@@ -3325,377 +3691,7 @@
               </a:spcAft>
             </a:pPr>
             <a:r>
-              <a:rPr sz="1500" b="1" i="0">
-                <a:solidFill>
-                  <a:srgbClr val="15171A"/>
-                </a:solidFill>
-                <a:latin typeface="Helvetica Neue"/>
-              </a:rPr>
-              <a:t>Dr. Findus, our startup in Berlin</a:t>
-            </a:r>
-          </a:p>
-        </p:txBody>
-      </p:sp>
-      <p:sp>
-        <p:nvSpPr>
-          <p:cNvPr id="8" name="TextBox 7"/>
-          <p:cNvSpPr txBox="1"/>
-          <p:nvPr/>
-        </p:nvSpPr>
-        <p:spPr>
-          <a:xfrm>
-            <a:off x="822960" y="2244852"/>
-            <a:ext cx="4645152" cy="1215136"/>
-          </a:xfrm>
-          <a:prstGeom prst="rect">
-            <a:avLst/>
-          </a:prstGeom>
-          <a:noFill/>
-        </p:spPr>
-        <p:txBody>
-          <a:bodyPr wrap="square" anchor="t">
-            <a:spAutoFit/>
-          </a:bodyPr>
-          <a:lstStyle/>
-          <a:p>
-            <a:pPr algn="l">
-              <a:spcAft>
-                <a:spcPts val="600"/>
-              </a:spcAft>
-            </a:pPr>
-            <a:r>
-              <a:rPr sz="1400" b="0" i="0">
-                <a:solidFill>
-                  <a:srgbClr val="15171A"/>
-                </a:solidFill>
-                <a:latin typeface="Helvetica Neue"/>
-              </a:rPr>
-              <a:t>German GPs code every consultation.</a:t>
-            </a:r>
-          </a:p>
-          <a:p>
-            <a:pPr algn="l">
-              <a:spcAft>
-                <a:spcPts val="600"/>
-              </a:spcAft>
-            </a:pPr>
-            <a:r>
-              <a:rPr sz="1400" b="0" i="0">
-                <a:solidFill>
-                  <a:srgbClr val="15171A"/>
-                </a:solidFill>
-                <a:latin typeface="Helvetica Neue"/>
-              </a:rPr>
-              <a:t>We propose, the physician confirms.</a:t>
-            </a:r>
-          </a:p>
-          <a:p>
-            <a:pPr algn="l">
-              <a:spcAft>
-                <a:spcPts val="600"/>
-              </a:spcAft>
-            </a:pPr>
-            <a:r>
-              <a:rPr sz="1400" b="0" i="0">
-                <a:solidFill>
-                  <a:srgbClr val="15171A"/>
-                </a:solidFill>
-                <a:latin typeface="Helvetica Neue"/>
-              </a:rPr>
-              <a:t>Reliability is the product.</a:t>
-            </a:r>
-          </a:p>
-          <a:p>
-            <a:pPr algn="l">
-              <a:spcAft>
-                <a:spcPts val="600"/>
-              </a:spcAft>
-            </a:pPr>
-            <a:r>
-              <a:rPr sz="1400" b="0" i="0">
-                <a:solidFill>
-                  <a:srgbClr val="15171A"/>
-                </a:solidFill>
-                <a:latin typeface="Helvetica Neue"/>
-              </a:rPr>
-              <a:t>Today it runs on hosted APIs.</a:t>
-            </a:r>
-          </a:p>
-        </p:txBody>
-      </p:sp>
-      <p:sp>
-        <p:nvSpPr>
-          <p:cNvPr id="9" name="TextBox 8"/>
-          <p:cNvSpPr txBox="1"/>
-          <p:nvPr/>
-        </p:nvSpPr>
-        <p:spPr>
-          <a:xfrm>
-            <a:off x="5989320" y="1755648"/>
-            <a:ext cx="5623560" cy="914400"/>
-          </a:xfrm>
-          <a:prstGeom prst="rect">
-            <a:avLst/>
-          </a:prstGeom>
-          <a:noFill/>
-        </p:spPr>
-        <p:txBody>
-          <a:bodyPr wrap="square" anchor="t">
-            <a:spAutoFit/>
-          </a:bodyPr>
-          <a:lstStyle/>
-          <a:p>
-            <a:pPr algn="l">
-              <a:spcAft>
-                <a:spcPts val="200"/>
-              </a:spcAft>
-            </a:pPr>
-            <a:r>
-              <a:rPr sz="2400" b="1" i="0">
-                <a:solidFill>
-                  <a:srgbClr val="E8590C"/>
-                </a:solidFill>
-                <a:latin typeface="Helvetica Neue"/>
-              </a:rPr>
-              <a:t>Could it run on</a:t>
-            </a:r>
-          </a:p>
-          <a:p>
-            <a:pPr algn="l">
-              <a:spcAft>
-                <a:spcPts val="200"/>
-              </a:spcAft>
-            </a:pPr>
-            <a:r>
-              <a:rPr sz="2400" b="1" i="0">
-                <a:solidFill>
-                  <a:srgbClr val="E8590C"/>
-                </a:solidFill>
-                <a:latin typeface="Helvetica Neue"/>
-              </a:rPr>
-              <a:t>our own hardware?</a:t>
-            </a:r>
-          </a:p>
-        </p:txBody>
-      </p:sp>
-      <p:sp>
-        <p:nvSpPr>
-          <p:cNvPr id="10" name="TextBox 9"/>
-          <p:cNvSpPr txBox="1"/>
-          <p:nvPr/>
-        </p:nvSpPr>
-        <p:spPr>
-          <a:xfrm>
-            <a:off x="5989320" y="2761488"/>
-            <a:ext cx="5623560" cy="731520"/>
-          </a:xfrm>
-          <a:prstGeom prst="rect">
-            <a:avLst/>
-          </a:prstGeom>
-          <a:noFill/>
-        </p:spPr>
-        <p:txBody>
-          <a:bodyPr wrap="square" anchor="t">
-            <a:spAutoFit/>
-          </a:bodyPr>
-          <a:lstStyle/>
-          <a:p>
-            <a:pPr algn="l">
-              <a:spcAft>
-                <a:spcPts val="300"/>
-              </a:spcAft>
-            </a:pPr>
-            <a:r>
-              <a:rPr sz="1300" b="0" i="0">
-                <a:solidFill>
-                  <a:srgbClr val="717A85"/>
-                </a:solidFill>
-                <a:latin typeface="Helvetica Neue"/>
-              </a:rPr>
-              <a:t>Qwen3-4B + LoRA on CodiEsp: 500 train / 250 dev</a:t>
-            </a:r>
-          </a:p>
-          <a:p>
-            <a:pPr algn="l">
-              <a:spcAft>
-                <a:spcPts val="300"/>
-              </a:spcAft>
-            </a:pPr>
-            <a:r>
-              <a:rPr sz="1300" b="0" i="0">
-                <a:solidFill>
-                  <a:srgbClr val="717A85"/>
-                </a:solidFill>
-                <a:latin typeface="Helvetica Neue"/>
-              </a:rPr>
-              <a:t>Spanish case reports, ICD-10 coded, CC-BY 4.0.</a:t>
-            </a:r>
-          </a:p>
-        </p:txBody>
-      </p:sp>
-      <p:sp>
-        <p:nvSpPr>
-          <p:cNvPr id="11" name="TextBox 10"/>
-          <p:cNvSpPr txBox="1"/>
-          <p:nvPr/>
-        </p:nvSpPr>
-        <p:spPr>
-          <a:xfrm>
-            <a:off x="566928" y="3730752"/>
-            <a:ext cx="5394960" cy="320040"/>
-          </a:xfrm>
-          <a:prstGeom prst="rect">
-            <a:avLst/>
-          </a:prstGeom>
-          <a:noFill/>
-        </p:spPr>
-        <p:txBody>
-          <a:bodyPr wrap="square" anchor="t">
-            <a:spAutoFit/>
-          </a:bodyPr>
-          <a:lstStyle/>
-          <a:p>
-            <a:pPr algn="l">
-              <a:spcAft>
-                <a:spcPts val="500"/>
-              </a:spcAft>
-            </a:pPr>
-            <a:r>
-              <a:rPr sz="1400" b="1" i="0">
-                <a:solidFill>
-                  <a:srgbClr val="E8590C"/>
-                </a:solidFill>
-                <a:latin typeface="Helvetica Neue"/>
-              </a:rPr>
-              <a:t>The resource problem</a:t>
-            </a:r>
-          </a:p>
-        </p:txBody>
-      </p:sp>
-      <p:sp>
-        <p:nvSpPr>
-          <p:cNvPr id="12" name="TextBox 11"/>
-          <p:cNvSpPr txBox="1"/>
-          <p:nvPr/>
-        </p:nvSpPr>
-        <p:spPr>
-          <a:xfrm>
-            <a:off x="566928" y="4096512"/>
-            <a:ext cx="5394960" cy="1280160"/>
-          </a:xfrm>
-          <a:prstGeom prst="rect">
-            <a:avLst/>
-          </a:prstGeom>
-          <a:noFill/>
-        </p:spPr>
-        <p:txBody>
-          <a:bodyPr wrap="square" anchor="t">
-            <a:spAutoFit/>
-          </a:bodyPr>
-          <a:lstStyle/>
-          <a:p>
-            <a:pPr algn="l">
-              <a:spcAft>
-                <a:spcPts val="900"/>
-              </a:spcAft>
-            </a:pPr>
-            <a:r>
-              <a:rPr sz="1500" b="0" i="0">
-                <a:solidFill>
-                  <a:srgbClr val="15171A"/>
-                </a:solidFill>
-                <a:latin typeface="Helvetica Neue"/>
-              </a:rPr>
-              <a:t>8 GB of weights at 4B before a single activation.</a:t>
-            </a:r>
-          </a:p>
-          <a:p>
-            <a:pPr algn="l">
-              <a:spcAft>
-                <a:spcPts val="900"/>
-              </a:spcAft>
-            </a:pPr>
-            <a:r>
-              <a:rPr sz="1500" b="0" i="0">
-                <a:solidFill>
-                  <a:srgbClr val="15171A"/>
-                </a:solidFill>
-                <a:latin typeface="Helvetica Neue"/>
-              </a:rPr>
-              <a:t>Median case 802 tokens, longest 2,489.</a:t>
-            </a:r>
-          </a:p>
-          <a:p>
-            <a:pPr algn="l">
-              <a:spcAft>
-                <a:spcPts val="900"/>
-              </a:spcAft>
-            </a:pPr>
-            <a:r>
-              <a:rPr sz="1500" b="0" i="0">
-                <a:solidFill>
-                  <a:srgbClr val="15171A"/>
-                </a:solidFill>
-                <a:latin typeface="Helvetica Neue"/>
-              </a:rPr>
-              <a:t>One JAX program, lowered by XLA to CPU, GPU and TPU.</a:t>
-            </a:r>
-          </a:p>
-        </p:txBody>
-      </p:sp>
-      <p:pic>
-        <p:nvPicPr>
-          <p:cNvPr id="13" name="Picture 12" descr="slide1-coverage.png"/>
-          <p:cNvPicPr>
-            <a:picLocks noChangeAspect="1"/>
-          </p:cNvPicPr>
-          <p:nvPr/>
-        </p:nvPicPr>
-        <p:blipFill>
-          <a:blip r:embed="rId2"/>
-          <a:stretch>
-            <a:fillRect/>
-          </a:stretch>
-        </p:blipFill>
-        <p:spPr>
-          <a:xfrm>
-            <a:off x="5989320" y="3675887"/>
-            <a:ext cx="5669280" cy="1639947"/>
-          </a:xfrm>
-          <a:prstGeom prst="rect">
-            <a:avLst/>
-          </a:prstGeom>
-        </p:spPr>
-      </p:pic>
-      <p:sp>
-        <p:nvSpPr>
-          <p:cNvPr id="14" name="TextBox 13"/>
-          <p:cNvSpPr txBox="1"/>
-          <p:nvPr/>
-        </p:nvSpPr>
-        <p:spPr>
-          <a:xfrm>
-            <a:off x="566928" y="5870448"/>
-            <a:ext cx="10972800" cy="640080"/>
-          </a:xfrm>
-          <a:prstGeom prst="rect">
-            <a:avLst/>
-          </a:prstGeom>
-          <a:noFill/>
-        </p:spPr>
-        <p:txBody>
-          <a:bodyPr wrap="square" anchor="t">
-            <a:spAutoFit/>
-          </a:bodyPr>
-          <a:lstStyle/>
-          <a:p>
-            <a:pPr algn="l">
-              <a:spcAft>
-                <a:spcPts val="500"/>
-              </a:spcAft>
-            </a:pPr>
-            <a:r>
-              <a:rPr sz="2200" b="1" i="0">
+              <a:rPr sz="2300" b="1" i="0">
                 <a:solidFill>
                   <a:srgbClr val="15171A"/>
                 </a:solidFill>
@@ -3883,27 +3879,23 @@
       </p:sp>
       <p:sp>
         <p:nvSpPr>
-          <p:cNvPr id="6" name="Rounded Rectangle 5"/>
+          <p:cNvPr id="6" name="Rectangle 5"/>
           <p:cNvSpPr/>
           <p:nvPr/>
         </p:nvSpPr>
         <p:spPr>
           <a:xfrm>
-            <a:off x="566928" y="1645920"/>
-            <a:ext cx="3520440" cy="1669267"/>
-          </a:xfrm>
-          <a:prstGeom prst="roundRect">
-            <a:avLst>
-              <a:gd name="adj" fmla="val 4000"/>
-            </a:avLst>
+            <a:off x="566928" y="1627632"/>
+            <a:ext cx="11064240" cy="12700"/>
+          </a:xfrm>
+          <a:prstGeom prst="rect">
+            <a:avLst/>
           </a:prstGeom>
           <a:solidFill>
-            <a:srgbClr val="FEF3EA"/>
+            <a:srgbClr val="E6E9EC"/>
           </a:solidFill>
-          <a:ln w="9525">
-            <a:solidFill>
-              <a:srgbClr val="E6E9EC"/>
-            </a:solidFill>
+          <a:ln>
+            <a:noFill/>
           </a:ln>
           <a:effectLst/>
         </p:spPr>
@@ -3937,8 +3929,8 @@
         </p:nvSpPr>
         <p:spPr>
           <a:xfrm>
-            <a:off x="822960" y="1883664"/>
-            <a:ext cx="3044952" cy="268224"/>
+            <a:off x="566928" y="1828800"/>
+            <a:ext cx="3520440" cy="320040"/>
           </a:xfrm>
           <a:prstGeom prst="rect">
             <a:avLst/>
@@ -3953,7 +3945,7 @@
           <a:p>
             <a:pPr algn="l">
               <a:spcAft>
-                <a:spcPts val="500"/>
+                <a:spcPts val="0"/>
               </a:spcAft>
             </a:pPr>
             <a:r>
@@ -3976,8 +3968,8 @@
         </p:nvSpPr>
         <p:spPr>
           <a:xfrm>
-            <a:off x="822960" y="2243328"/>
-            <a:ext cx="3044952" cy="900683"/>
+            <a:off x="566928" y="2231136"/>
+            <a:ext cx="3429000" cy="1005840"/>
           </a:xfrm>
           <a:prstGeom prst="rect">
             <a:avLst/>
@@ -3998,7 +3990,7 @@
             <a:r>
               <a:rPr sz="1300" b="0" i="0">
                 <a:solidFill>
-                  <a:srgbClr val="15171A"/>
+                  <a:srgbClr val="717A85"/>
                 </a:solidFill>
                 <a:latin typeface="Helvetica Neue"/>
               </a:rPr>
@@ -4014,7 +4006,7 @@
             <a:r>
               <a:rPr sz="1300" b="0" i="0">
                 <a:solidFill>
-                  <a:srgbClr val="15171A"/>
+                  <a:srgbClr val="717A85"/>
                 </a:solidFill>
                 <a:latin typeface="Helvetica Neue"/>
               </a:rPr>
@@ -4030,7 +4022,7 @@
             <a:r>
               <a:rPr sz="1300" b="0" i="0">
                 <a:solidFill>
-                  <a:srgbClr val="15171A"/>
+                  <a:srgbClr val="717A85"/>
                 </a:solidFill>
                 <a:latin typeface="Helvetica Neue"/>
               </a:rPr>
@@ -4041,27 +4033,23 @@
       </p:sp>
       <p:sp>
         <p:nvSpPr>
-          <p:cNvPr id="9" name="Rounded Rectangle 8"/>
+          <p:cNvPr id="9" name="Rectangle 8"/>
           <p:cNvSpPr/>
           <p:nvPr/>
         </p:nvSpPr>
         <p:spPr>
           <a:xfrm>
-            <a:off x="4361688" y="1645920"/>
-            <a:ext cx="3520440" cy="1669267"/>
-          </a:xfrm>
-          <a:prstGeom prst="roundRect">
-            <a:avLst>
-              <a:gd name="adj" fmla="val 4000"/>
-            </a:avLst>
+            <a:off x="4178808" y="1792224"/>
+            <a:ext cx="12700" cy="1298448"/>
+          </a:xfrm>
+          <a:prstGeom prst="rect">
+            <a:avLst/>
           </a:prstGeom>
           <a:solidFill>
-            <a:srgbClr val="FEF3EA"/>
+            <a:srgbClr val="E6E9EC"/>
           </a:solidFill>
-          <a:ln w="9525">
-            <a:solidFill>
-              <a:srgbClr val="E6E9EC"/>
-            </a:solidFill>
+          <a:ln>
+            <a:noFill/>
           </a:ln>
           <a:effectLst/>
         </p:spPr>
@@ -4095,8 +4083,8 @@
         </p:nvSpPr>
         <p:spPr>
           <a:xfrm>
-            <a:off x="4617720" y="1883664"/>
-            <a:ext cx="3044952" cy="268224"/>
+            <a:off x="4361688" y="1828800"/>
+            <a:ext cx="3520440" cy="320040"/>
           </a:xfrm>
           <a:prstGeom prst="rect">
             <a:avLst/>
@@ -4111,7 +4099,7 @@
           <a:p>
             <a:pPr algn="l">
               <a:spcAft>
-                <a:spcPts val="500"/>
+                <a:spcPts val="0"/>
               </a:spcAft>
             </a:pPr>
             <a:r>
@@ -4134,8 +4122,8 @@
         </p:nvSpPr>
         <p:spPr>
           <a:xfrm>
-            <a:off x="4617720" y="2243328"/>
-            <a:ext cx="3044952" cy="900683"/>
+            <a:off x="4361688" y="2231136"/>
+            <a:ext cx="3429000" cy="1005840"/>
           </a:xfrm>
           <a:prstGeom prst="rect">
             <a:avLst/>
@@ -4156,7 +4144,7 @@
             <a:r>
               <a:rPr sz="1300" b="0" i="0">
                 <a:solidFill>
-                  <a:srgbClr val="15171A"/>
+                  <a:srgbClr val="717A85"/>
                 </a:solidFill>
                 <a:latin typeface="Helvetica Neue"/>
               </a:rPr>
@@ -4172,7 +4160,7 @@
             <a:r>
               <a:rPr sz="1300" b="0" i="0">
                 <a:solidFill>
-                  <a:srgbClr val="15171A"/>
+                  <a:srgbClr val="717A85"/>
                 </a:solidFill>
                 <a:latin typeface="Helvetica Neue"/>
               </a:rPr>
@@ -4188,7 +4176,7 @@
             <a:r>
               <a:rPr sz="1300" b="0" i="0">
                 <a:solidFill>
-                  <a:srgbClr val="15171A"/>
+                  <a:srgbClr val="717A85"/>
                 </a:solidFill>
                 <a:latin typeface="Helvetica Neue"/>
               </a:rPr>
@@ -4199,27 +4187,23 @@
       </p:sp>
       <p:sp>
         <p:nvSpPr>
-          <p:cNvPr id="12" name="Rounded Rectangle 11"/>
+          <p:cNvPr id="12" name="Rectangle 11"/>
           <p:cNvSpPr/>
           <p:nvPr/>
         </p:nvSpPr>
         <p:spPr>
           <a:xfrm>
-            <a:off x="8156448" y="1645920"/>
-            <a:ext cx="3520440" cy="1669267"/>
-          </a:xfrm>
-          <a:prstGeom prst="roundRect">
-            <a:avLst>
-              <a:gd name="adj" fmla="val 4000"/>
-            </a:avLst>
+            <a:off x="7973568" y="1792224"/>
+            <a:ext cx="12700" cy="1298448"/>
+          </a:xfrm>
+          <a:prstGeom prst="rect">
+            <a:avLst/>
           </a:prstGeom>
           <a:solidFill>
-            <a:srgbClr val="FEF3EA"/>
+            <a:srgbClr val="E6E9EC"/>
           </a:solidFill>
-          <a:ln w="9525">
-            <a:solidFill>
-              <a:srgbClr val="E6E9EC"/>
-            </a:solidFill>
+          <a:ln>
+            <a:noFill/>
           </a:ln>
           <a:effectLst/>
         </p:spPr>
@@ -4253,8 +4237,8 @@
         </p:nvSpPr>
         <p:spPr>
           <a:xfrm>
-            <a:off x="8412480" y="1883664"/>
-            <a:ext cx="3044952" cy="268224"/>
+            <a:off x="8156448" y="1828800"/>
+            <a:ext cx="3520440" cy="320040"/>
           </a:xfrm>
           <a:prstGeom prst="rect">
             <a:avLst/>
@@ -4269,7 +4253,7 @@
           <a:p>
             <a:pPr algn="l">
               <a:spcAft>
-                <a:spcPts val="500"/>
+                <a:spcPts val="0"/>
               </a:spcAft>
             </a:pPr>
             <a:r>
@@ -4292,8 +4276,8 @@
         </p:nvSpPr>
         <p:spPr>
           <a:xfrm>
-            <a:off x="8412480" y="2243328"/>
-            <a:ext cx="3044952" cy="900683"/>
+            <a:off x="8156448" y="2231136"/>
+            <a:ext cx="3429000" cy="1005840"/>
           </a:xfrm>
           <a:prstGeom prst="rect">
             <a:avLst/>
@@ -4314,7 +4298,7 @@
             <a:r>
               <a:rPr sz="1300" b="0" i="0">
                 <a:solidFill>
-                  <a:srgbClr val="15171A"/>
+                  <a:srgbClr val="717A85"/>
                 </a:solidFill>
                 <a:latin typeface="Helvetica Neue"/>
               </a:rPr>
@@ -4330,7 +4314,7 @@
             <a:r>
               <a:rPr sz="1300" b="0" i="0">
                 <a:solidFill>
-                  <a:srgbClr val="15171A"/>
+                  <a:srgbClr val="717A85"/>
                 </a:solidFill>
                 <a:latin typeface="Helvetica Neue"/>
               </a:rPr>
@@ -4346,7 +4330,7 @@
             <a:r>
               <a:rPr sz="1300" b="0" i="0">
                 <a:solidFill>
-                  <a:srgbClr val="15171A"/>
+                  <a:srgbClr val="717A85"/>
                 </a:solidFill>
                 <a:latin typeface="Helvetica Neue"/>
               </a:rPr>
@@ -6722,7 +6706,7 @@
         <p:spPr>
           <a:xfrm>
             <a:off x="7726679" y="1591056"/>
-            <a:ext cx="3886200" cy="777240"/>
+            <a:ext cx="3886200" cy="832611"/>
           </a:xfrm>
           <a:prstGeom prst="rect">
             <a:avLst/>
@@ -6760,7 +6744,7 @@
         </p:nvSpPr>
         <p:spPr>
           <a:xfrm>
-            <a:off x="7744967" y="2249424"/>
+            <a:off x="7744967" y="2423667"/>
             <a:ext cx="3886200" cy="822960"/>
           </a:xfrm>
           <a:prstGeom prst="rect">
@@ -6809,27 +6793,23 @@
       </p:sp>
       <p:sp>
         <p:nvSpPr>
-          <p:cNvPr id="11" name="Rounded Rectangle 10"/>
+          <p:cNvPr id="11" name="Rectangle 10"/>
           <p:cNvSpPr/>
           <p:nvPr/>
         </p:nvSpPr>
         <p:spPr>
           <a:xfrm>
-            <a:off x="7726679" y="3218688"/>
-            <a:ext cx="3886200" cy="1275567"/>
-          </a:xfrm>
-          <a:prstGeom prst="roundRect">
-            <a:avLst>
-              <a:gd name="adj" fmla="val 4000"/>
-            </a:avLst>
+            <a:off x="7726679" y="3163824"/>
+            <a:ext cx="3886200" cy="12700"/>
+          </a:xfrm>
+          <a:prstGeom prst="rect">
+            <a:avLst/>
           </a:prstGeom>
           <a:solidFill>
-            <a:srgbClr val="FEF3EA"/>
+            <a:srgbClr val="E6E9EC"/>
           </a:solidFill>
-          <a:ln w="9525">
-            <a:solidFill>
-              <a:srgbClr val="E6E9EC"/>
-            </a:solidFill>
+          <a:ln>
+            <a:noFill/>
           </a:ln>
           <a:effectLst/>
         </p:spPr>
@@ -6863,8 +6843,8 @@
         </p:nvSpPr>
         <p:spPr>
           <a:xfrm>
-            <a:off x="7982711" y="3456432"/>
-            <a:ext cx="3410712" cy="234696"/>
+            <a:off x="7726679" y="3364992"/>
+            <a:ext cx="3886200" cy="310896"/>
           </a:xfrm>
           <a:prstGeom prst="rect">
             <a:avLst/>
@@ -6879,17 +6859,17 @@
           <a:p>
             <a:pPr algn="l">
               <a:spcAft>
-                <a:spcPts val="500"/>
+                <a:spcPts val="0"/>
               </a:spcAft>
             </a:pPr>
             <a:r>
               <a:rPr sz="1400" b="1" i="0">
                 <a:solidFill>
-                  <a:srgbClr val="E8590C"/>
+                  <a:srgbClr val="15171A"/>
                 </a:solidFill>
                 <a:latin typeface="Helvetica Neue"/>
               </a:rPr>
-              <a:t>Memory boundary</a:t>
+              <a:t>Where each one runs out of memory</a:t>
             </a:r>
           </a:p>
         </p:txBody>
@@ -6902,8 +6882,8 @@
         </p:nvSpPr>
         <p:spPr>
           <a:xfrm>
-            <a:off x="7982711" y="3782568"/>
-            <a:ext cx="3410712" cy="540512"/>
+            <a:off x="7726679" y="3712463"/>
+            <a:ext cx="3886200" cy="548640"/>
           </a:xfrm>
           <a:prstGeom prst="rect">
             <a:avLst/>
@@ -6924,11 +6904,11 @@
             <a:r>
               <a:rPr sz="1350" b="0" i="0">
                 <a:solidFill>
-                  <a:srgbClr val="15171A"/>
+                  <a:srgbClr val="717A85"/>
                 </a:solidFill>
                 <a:latin typeface="Helvetica Neue"/>
               </a:rPr>
-              <a:t>GH200 fails between 32 and 64</a:t>
+              <a:t>GH200 between batch 32 and 64</a:t>
             </a:r>
           </a:p>
           <a:p>
@@ -6940,38 +6920,34 @@
             <a:r>
               <a:rPr sz="1350" b="0" i="0">
                 <a:solidFill>
-                  <a:srgbClr val="15171A"/>
+                  <a:srgbClr val="717A85"/>
                 </a:solidFill>
                 <a:latin typeface="Helvetica Neue"/>
               </a:rPr>
-              <a:t>v5e fails between 16 and 32</a:t>
-            </a:r>
-          </a:p>
-        </p:txBody>
-      </p:sp>
-      <p:sp>
-        <p:nvSpPr>
-          <p:cNvPr id="14" name="Rounded Rectangle 13"/>
+              <a:t>v5e between batch 16 and 32</a:t>
+            </a:r>
+          </a:p>
+        </p:txBody>
+      </p:sp>
+      <p:sp>
+        <p:nvSpPr>
+          <p:cNvPr id="14" name="Rectangle 13"/>
           <p:cNvSpPr/>
           <p:nvPr/>
         </p:nvSpPr>
         <p:spPr>
           <a:xfrm>
             <a:off x="7726679" y="4590288"/>
-            <a:ext cx="3886200" cy="1732767"/>
-          </a:xfrm>
-          <a:prstGeom prst="roundRect">
-            <a:avLst>
-              <a:gd name="adj" fmla="val 4000"/>
-            </a:avLst>
+            <a:ext cx="3886200" cy="12700"/>
+          </a:xfrm>
+          <a:prstGeom prst="rect">
+            <a:avLst/>
           </a:prstGeom>
           <a:solidFill>
-            <a:srgbClr val="FEF3EA"/>
+            <a:srgbClr val="E6E9EC"/>
           </a:solidFill>
-          <a:ln w="9525">
-            <a:solidFill>
-              <a:srgbClr val="E6E9EC"/>
-            </a:solidFill>
+          <a:ln>
+            <a:noFill/>
           </a:ln>
           <a:effectLst/>
         </p:spPr>
@@ -7005,8 +6981,8 @@
         </p:nvSpPr>
         <p:spPr>
           <a:xfrm>
-            <a:off x="7982711" y="4828032"/>
-            <a:ext cx="3410712" cy="234696"/>
+            <a:off x="7726679" y="4791456"/>
+            <a:ext cx="3886200" cy="310896"/>
           </a:xfrm>
           <a:prstGeom prst="rect">
             <a:avLst/>
@@ -7021,13 +6997,13 @@
           <a:p>
             <a:pPr algn="l">
               <a:spcAft>
-                <a:spcPts val="500"/>
+                <a:spcPts val="0"/>
               </a:spcAft>
             </a:pPr>
             <a:r>
               <a:rPr sz="1400" b="1" i="0">
                 <a:solidFill>
-                  <a:srgbClr val="E8590C"/>
+                  <a:srgbClr val="15171A"/>
                 </a:solidFill>
                 <a:latin typeface="Helvetica Neue"/>
               </a:rPr>
@@ -7044,8 +7020,8 @@
         </p:nvSpPr>
         <p:spPr>
           <a:xfrm>
-            <a:off x="7982711" y="5154168"/>
-            <a:ext cx="3410712" cy="997712"/>
+            <a:off x="7726679" y="5138928"/>
+            <a:ext cx="3886200" cy="822960"/>
           </a:xfrm>
           <a:prstGeom prst="rect">
             <a:avLst/>
@@ -7060,65 +7036,49 @@
           <a:p>
             <a:pPr algn="l">
               <a:spcAft>
-                <a:spcPts val="300"/>
+                <a:spcPts val="400"/>
               </a:spcAft>
             </a:pPr>
             <a:r>
               <a:rPr sz="1300" b="0" i="0">
                 <a:solidFill>
-                  <a:srgbClr val="15171A"/>
+                  <a:srgbClr val="717A85"/>
                 </a:solidFill>
                 <a:latin typeface="Helvetica Neue"/>
               </a:rPr>
-              <a:t>File cache on: checkpoint load</a:t>
+              <a:t>Checkpoint load 14.6× faster, 31 % off wall</a:t>
             </a:r>
           </a:p>
           <a:p>
             <a:pPr algn="l">
               <a:spcAft>
-                <a:spcPts val="300"/>
+                <a:spcPts val="400"/>
               </a:spcAft>
             </a:pPr>
             <a:r>
               <a:rPr sz="1300" b="0" i="0">
                 <a:solidFill>
-                  <a:srgbClr val="15171A"/>
+                  <a:srgbClr val="717A85"/>
                 </a:solidFill>
                 <a:latin typeface="Helvetica Neue"/>
               </a:rPr>
-              <a:t>14.6× faster, 31 % off wall clock.</a:t>
+              <a:t>clock, and median step time unchanged</a:t>
             </a:r>
           </a:p>
           <a:p>
             <a:pPr algn="l">
               <a:spcAft>
-                <a:spcPts val="300"/>
+                <a:spcPts val="400"/>
               </a:spcAft>
             </a:pPr>
             <a:r>
               <a:rPr sz="1300" b="0" i="0">
                 <a:solidFill>
-                  <a:srgbClr val="15171A"/>
+                  <a:srgbClr val="717A85"/>
                 </a:solidFill>
                 <a:latin typeface="Helvetica Neue"/>
               </a:rPr>
-              <a:t>Median step time unchanged to</a:t>
-            </a:r>
-          </a:p>
-          <a:p>
-            <a:pPr algn="l">
-              <a:spcAft>
-                <a:spcPts val="300"/>
-              </a:spcAft>
-            </a:pPr>
-            <a:r>
-              <a:rPr sz="1300" b="0" i="0">
-                <a:solidFill>
-                  <a:srgbClr val="15171A"/>
-                </a:solidFill>
-                <a:latin typeface="Helvetica Neue"/>
-              </a:rPr>
-              <a:t>the fourth decimal.</a:t>
+              <a:t>to the fourth decimal.</a:t>
             </a:r>
           </a:p>
         </p:txBody>
@@ -7300,27 +7260,156 @@
       </p:sp>
       <p:sp>
         <p:nvSpPr>
-          <p:cNvPr id="6" name="Rounded Rectangle 5"/>
+          <p:cNvPr id="6" name="TextBox 5"/>
+          <p:cNvSpPr txBox="1"/>
+          <p:nvPr/>
+        </p:nvSpPr>
+        <p:spPr>
+          <a:xfrm>
+            <a:off x="566928" y="1572768"/>
+            <a:ext cx="4754880" cy="1371600"/>
+          </a:xfrm>
+          <a:prstGeom prst="rect">
+            <a:avLst/>
+          </a:prstGeom>
+          <a:noFill/>
+        </p:spPr>
+        <p:txBody>
+          <a:bodyPr wrap="square" anchor="t">
+            <a:spAutoFit/>
+          </a:bodyPr>
+          <a:lstStyle/>
+          <a:p>
+            <a:pPr algn="l">
+              <a:spcAft>
+                <a:spcPts val="0"/>
+              </a:spcAft>
+            </a:pPr>
+            <a:r>
+              <a:rPr sz="9600" b="1" i="0">
+                <a:solidFill>
+                  <a:srgbClr val="E8590C"/>
+                </a:solidFill>
+                <a:latin typeface="Helvetica Neue"/>
+              </a:rPr>
+              <a:t>28 %</a:t>
+            </a:r>
+          </a:p>
+        </p:txBody>
+      </p:sp>
+      <p:sp>
+        <p:nvSpPr>
+          <p:cNvPr id="7" name="TextBox 6"/>
+          <p:cNvSpPr txBox="1"/>
+          <p:nvPr/>
+        </p:nvSpPr>
+        <p:spPr>
+          <a:xfrm>
+            <a:off x="640080" y="3054096"/>
+            <a:ext cx="4572000" cy="365760"/>
+          </a:xfrm>
+          <a:prstGeom prst="rect">
+            <a:avLst/>
+          </a:prstGeom>
+          <a:noFill/>
+        </p:spPr>
+        <p:txBody>
+          <a:bodyPr wrap="square" anchor="t">
+            <a:spAutoFit/>
+          </a:bodyPr>
+          <a:lstStyle/>
+          <a:p>
+            <a:pPr algn="l">
+              <a:spcAft>
+                <a:spcPts val="0"/>
+              </a:spcAft>
+            </a:pPr>
+            <a:r>
+              <a:rPr sz="1900" b="1" i="0">
+                <a:solidFill>
+                  <a:srgbClr val="15171A"/>
+                </a:solidFill>
+                <a:latin typeface="Helvetica Neue"/>
+              </a:rPr>
+              <a:t>of the wall clock is arithmetic</a:t>
+            </a:r>
+          </a:p>
+        </p:txBody>
+      </p:sp>
+      <p:sp>
+        <p:nvSpPr>
+          <p:cNvPr id="8" name="TextBox 7"/>
+          <p:cNvSpPr txBox="1"/>
+          <p:nvPr/>
+        </p:nvSpPr>
+        <p:spPr>
+          <a:xfrm>
+            <a:off x="640080" y="3474720"/>
+            <a:ext cx="4480560" cy="822960"/>
+          </a:xfrm>
+          <a:prstGeom prst="rect">
+            <a:avLst/>
+          </a:prstGeom>
+          <a:noFill/>
+        </p:spPr>
+        <p:txBody>
+          <a:bodyPr wrap="square" anchor="t">
+            <a:spAutoFit/>
+          </a:bodyPr>
+          <a:lstStyle/>
+          <a:p>
+            <a:pPr algn="l">
+              <a:spcAft>
+                <a:spcPts val="300"/>
+              </a:spcAft>
+            </a:pPr>
+            <a:r>
+              <a:rPr sz="1300" b="0" i="0">
+                <a:solidFill>
+                  <a:srgbClr val="717A85"/>
+                </a:solidFill>
+                <a:latin typeface="Helvetica Neue"/>
+              </a:rPr>
+              <a:t>Of 733 s, 209 s computes. The largest</a:t>
+            </a:r>
+          </a:p>
+          <a:p>
+            <a:pPr algn="l">
+              <a:spcAft>
+                <a:spcPts val="300"/>
+              </a:spcAft>
+            </a:pPr>
+            <a:r>
+              <a:rPr sz="1300" b="0" i="0">
+                <a:solidFill>
+                  <a:srgbClr val="717A85"/>
+                </a:solidFill>
+                <a:latin typeface="Helvetica Neue"/>
+              </a:rPr>
+              <a:t>single phase is reading the checkpoint: 32 %.</a:t>
+            </a:r>
+          </a:p>
+        </p:txBody>
+      </p:sp>
+      <p:sp>
+        <p:nvSpPr>
+          <p:cNvPr id="9" name="Rectangle 8"/>
           <p:cNvSpPr/>
           <p:nvPr/>
         </p:nvSpPr>
         <p:spPr>
           <a:xfrm>
-            <a:off x="566928" y="1645920"/>
-            <a:ext cx="3520440" cy="2286000"/>
-          </a:xfrm>
-          <a:prstGeom prst="roundRect">
-            <a:avLst>
-              <a:gd name="adj" fmla="val 4000"/>
-            </a:avLst>
+            <a:off x="5532120" y="1737360"/>
+            <a:ext cx="12700" cy="2240280"/>
+          </a:xfrm>
+          <a:prstGeom prst="rect">
+            <a:avLst/>
           </a:prstGeom>
           <a:solidFill>
-            <a:srgbClr val="FEF3EA"/>
+            <a:srgbClr val="E6E9EC"/>
           </a:solidFill>
-          <a:ln w="9525">
-            <a:solidFill>
-              <a:srgbClr val="E6E9EC"/>
-            </a:solidFill>
+          <a:ln>
+            <a:noFill/>
           </a:ln>
           <a:effectLst/>
         </p:spPr>
@@ -7348,14 +7437,14 @@
       </p:sp>
       <p:sp>
         <p:nvSpPr>
-          <p:cNvPr id="7" name="TextBox 6"/>
+          <p:cNvPr id="10" name="TextBox 9"/>
           <p:cNvSpPr txBox="1"/>
           <p:nvPr/>
         </p:nvSpPr>
         <p:spPr>
           <a:xfrm>
-            <a:off x="822960" y="1773936"/>
-            <a:ext cx="3017520" cy="640080"/>
+            <a:off x="5989320" y="1810512"/>
+            <a:ext cx="5577840" cy="365760"/>
           </a:xfrm>
           <a:prstGeom prst="rect">
             <a:avLst/>
@@ -7374,27 +7463,27 @@
               </a:spcAft>
             </a:pPr>
             <a:r>
-              <a:rPr sz="3400" b="1" i="0">
-                <a:solidFill>
-                  <a:srgbClr val="E8590C"/>
+              <a:rPr sz="1700" b="1" i="0">
+                <a:solidFill>
+                  <a:srgbClr val="15171A"/>
                 </a:solidFill>
                 <a:latin typeface="Helvetica Neue"/>
               </a:rPr>
-              <a:t>28 %</a:t>
-            </a:r>
-          </a:p>
-        </p:txBody>
-      </p:sp>
-      <p:sp>
-        <p:nvSpPr>
-          <p:cNvPr id="8" name="TextBox 7"/>
+              <a:t>6.7× more parameters, and the CPU stopped</a:t>
+            </a:r>
+          </a:p>
+        </p:txBody>
+      </p:sp>
+      <p:sp>
+        <p:nvSpPr>
+          <p:cNvPr id="11" name="TextBox 10"/>
           <p:cNvSpPr txBox="1"/>
           <p:nvPr/>
         </p:nvSpPr>
         <p:spPr>
           <a:xfrm>
-            <a:off x="822960" y="2340864"/>
-            <a:ext cx="3063240" cy="411480"/>
+            <a:off x="5989320" y="2176272"/>
+            <a:ext cx="5577840" cy="731520"/>
           </a:xfrm>
           <a:prstGeom prst="rect">
             <a:avLst/>
@@ -7409,31 +7498,47 @@
           <a:p>
             <a:pPr algn="l">
               <a:spcAft>
-                <a:spcPts val="200"/>
+                <a:spcPts val="300"/>
               </a:spcAft>
             </a:pPr>
             <a:r>
-              <a:rPr sz="1200" b="1" i="0">
-                <a:solidFill>
-                  <a:srgbClr val="15171A"/>
+              <a:rPr sz="1300" b="0" i="0">
+                <a:solidFill>
+                  <a:srgbClr val="717A85"/>
                 </a:solidFill>
                 <a:latin typeface="Helvetica Neue"/>
               </a:rPr>
-              <a:t>of wall clock is arithmetic</a:t>
-            </a:r>
-          </a:p>
-        </p:txBody>
-      </p:sp>
-      <p:sp>
-        <p:nvSpPr>
-          <p:cNvPr id="9" name="TextBox 8"/>
+              <a:t>Not 6.7× slower. XLA never finished compiling, and</a:t>
+            </a:r>
+          </a:p>
+          <a:p>
+            <a:pPr algn="l">
+              <a:spcAft>
+                <a:spcPts val="300"/>
+              </a:spcAft>
+            </a:pPr>
+            <a:r>
+              <a:rPr sz="1300" b="0" i="0">
+                <a:solidFill>
+                  <a:srgbClr val="717A85"/>
+                </a:solidFill>
+                <a:latin typeface="Helvetica Neue"/>
+              </a:rPr>
+              <a:t>without remat the kernel killed it at 31.5 GB.</a:t>
+            </a:r>
+          </a:p>
+        </p:txBody>
+      </p:sp>
+      <p:sp>
+        <p:nvSpPr>
+          <p:cNvPr id="12" name="TextBox 11"/>
           <p:cNvSpPr txBox="1"/>
           <p:nvPr/>
         </p:nvSpPr>
         <p:spPr>
           <a:xfrm>
-            <a:off x="822960" y="2770632"/>
-            <a:ext cx="3063240" cy="1188720"/>
+            <a:off x="5989320" y="2999232"/>
+            <a:ext cx="5577840" cy="365760"/>
           </a:xfrm>
           <a:prstGeom prst="rect">
             <a:avLst/>
@@ -7448,76 +7553,95 @@
           <a:p>
             <a:pPr algn="l">
               <a:spcAft>
-                <a:spcPts val="200"/>
+                <a:spcPts val="0"/>
               </a:spcAft>
             </a:pPr>
             <a:r>
-              <a:rPr sz="1150" b="0" i="0">
-                <a:solidFill>
-                  <a:srgbClr val="717A85"/>
+              <a:rPr sz="1700" b="1" i="0">
+                <a:solidFill>
+                  <a:srgbClr val="15171A"/>
                 </a:solidFill>
                 <a:latin typeface="Helvetica Neue"/>
               </a:rPr>
-              <a:t>Of 733 s, only 209 s computes.</a:t>
-            </a:r>
-          </a:p>
+              <a:t>1 of 36 dependencies was TPU-bound</a:t>
+            </a:r>
+          </a:p>
+        </p:txBody>
+      </p:sp>
+      <p:sp>
+        <p:nvSpPr>
+          <p:cNvPr id="13" name="TextBox 12"/>
+          <p:cNvSpPr txBox="1"/>
+          <p:nvPr/>
+        </p:nvSpPr>
+        <p:spPr>
+          <a:xfrm>
+            <a:off x="5989320" y="3364992"/>
+            <a:ext cx="5577840" cy="731520"/>
+          </a:xfrm>
+          <a:prstGeom prst="rect">
+            <a:avLst/>
+          </a:prstGeom>
+          <a:noFill/>
+        </p:spPr>
+        <p:txBody>
+          <a:bodyPr wrap="square" anchor="t">
+            <a:spAutoFit/>
+          </a:bodyPr>
+          <a:lstStyle/>
           <a:p>
             <a:pPr algn="l">
               <a:spcAft>
-                <a:spcPts val="200"/>
+                <a:spcPts val="300"/>
               </a:spcAft>
             </a:pPr>
             <a:r>
-              <a:rPr sz="1150" b="0" i="0">
+              <a:rPr sz="1300" b="0" i="0">
                 <a:solidFill>
                   <a:srgbClr val="717A85"/>
                 </a:solidFill>
                 <a:latin typeface="Helvetica Neue"/>
               </a:rPr>
-              <a:t>The biggest single phase is</a:t>
+              <a:t>The GH200 sat idle behind an ARM64 host, a QEMU</a:t>
             </a:r>
           </a:p>
           <a:p>
             <a:pPr algn="l">
               <a:spcAft>
-                <a:spcPts val="200"/>
+                <a:spcPts val="300"/>
               </a:spcAft>
             </a:pPr>
             <a:r>
-              <a:rPr sz="1150" b="0" i="0">
+              <a:rPr sz="1300" b="0" i="0">
                 <a:solidFill>
                   <a:srgbClr val="717A85"/>
                 </a:solidFill>
                 <a:latin typeface="Helvetica Neue"/>
               </a:rPr>
-              <a:t>reading the checkpoint: 32 %.</a:t>
-            </a:r>
-          </a:p>
-        </p:txBody>
-      </p:sp>
-      <p:sp>
-        <p:nvSpPr>
-          <p:cNvPr id="10" name="Rounded Rectangle 9"/>
+              <a:t>segfault and a registry 403. One pin is the whole port.</a:t>
+            </a:r>
+          </a:p>
+        </p:txBody>
+      </p:sp>
+      <p:sp>
+        <p:nvSpPr>
+          <p:cNvPr id="14" name="Rectangle 13"/>
           <p:cNvSpPr/>
           <p:nvPr/>
         </p:nvSpPr>
         <p:spPr>
           <a:xfrm>
-            <a:off x="4361688" y="1645920"/>
-            <a:ext cx="3520440" cy="2286000"/>
-          </a:xfrm>
-          <a:prstGeom prst="roundRect">
-            <a:avLst>
-              <a:gd name="adj" fmla="val 4000"/>
-            </a:avLst>
+            <a:off x="566928" y="4443984"/>
+            <a:ext cx="11018520" cy="12700"/>
+          </a:xfrm>
+          <a:prstGeom prst="rect">
+            <a:avLst/>
           </a:prstGeom>
           <a:solidFill>
-            <a:srgbClr val="FEF3EA"/>
+            <a:srgbClr val="E6E9EC"/>
           </a:solidFill>
-          <a:ln w="9525">
-            <a:solidFill>
-              <a:srgbClr val="E6E9EC"/>
-            </a:solidFill>
+          <a:ln>
+            <a:noFill/>
           </a:ln>
           <a:effectLst/>
         </p:spPr>
@@ -7545,14 +7669,14 @@
       </p:sp>
       <p:sp>
         <p:nvSpPr>
-          <p:cNvPr id="11" name="TextBox 10"/>
+          <p:cNvPr id="15" name="TextBox 14"/>
           <p:cNvSpPr txBox="1"/>
           <p:nvPr/>
         </p:nvSpPr>
         <p:spPr>
           <a:xfrm>
-            <a:off x="4617720" y="1773936"/>
-            <a:ext cx="3017520" cy="640080"/>
+            <a:off x="566928" y="4700016"/>
+            <a:ext cx="6035040" cy="411480"/>
           </a:xfrm>
           <a:prstGeom prst="rect">
             <a:avLst/>
@@ -7571,27 +7695,27 @@
               </a:spcAft>
             </a:pPr>
             <a:r>
-              <a:rPr sz="2600" b="1" i="0">
+              <a:rPr sz="2400" b="1" i="0">
                 <a:solidFill>
                   <a:srgbClr val="15171A"/>
                 </a:solidFill>
                 <a:latin typeface="Helvetica Neue"/>
               </a:rPr>
-              <a:t>6.7×</a:t>
-            </a:r>
-          </a:p>
-        </p:txBody>
-      </p:sp>
-      <p:sp>
-        <p:nvSpPr>
-          <p:cNvPr id="12" name="TextBox 11"/>
+              <a:t>Do not scale out. Amortise.</a:t>
+            </a:r>
+          </a:p>
+        </p:txBody>
+      </p:sp>
+      <p:sp>
+        <p:nvSpPr>
+          <p:cNvPr id="16" name="TextBox 15"/>
           <p:cNvSpPr txBox="1"/>
           <p:nvPr/>
         </p:nvSpPr>
         <p:spPr>
           <a:xfrm>
-            <a:off x="4617720" y="2340864"/>
-            <a:ext cx="3063240" cy="411480"/>
+            <a:off x="585216" y="5175504"/>
+            <a:ext cx="5943600" cy="822960"/>
           </a:xfrm>
           <a:prstGeom prst="rect">
             <a:avLst/>
@@ -7606,166 +7730,47 @@
           <a:p>
             <a:pPr algn="l">
               <a:spcAft>
-                <a:spcPts val="200"/>
+                <a:spcPts val="300"/>
               </a:spcAft>
             </a:pPr>
             <a:r>
-              <a:rPr sz="1200" b="1" i="0">
-                <a:solidFill>
-                  <a:srgbClr val="15171A"/>
+              <a:rPr sz="1300" b="0" i="0">
+                <a:solidFill>
+                  <a:srgbClr val="717A85"/>
                 </a:solidFill>
                 <a:latin typeface="Helvetica Neue"/>
               </a:rPr>
-              <a:t>more parameters, CPU stopped</a:t>
-            </a:r>
-          </a:p>
-        </p:txBody>
-      </p:sp>
-      <p:sp>
-        <p:nvSpPr>
-          <p:cNvPr id="13" name="TextBox 12"/>
+              <a:t>Persistent compile cache  ·  warm workers, not a pod per job</a:t>
+            </a:r>
+          </a:p>
+          <a:p>
+            <a:pPr algn="l">
+              <a:spcAft>
+                <a:spcPts val="300"/>
+              </a:spcAft>
+            </a:pPr>
+            <a:r>
+              <a:rPr sz="1300" b="0" i="0">
+                <a:solidFill>
+                  <a:srgbClr val="717A85"/>
+                </a:solidFill>
+                <a:latin typeface="Helvetica Neue"/>
+              </a:rPr>
+              <a:t>file cache on anything that reads a checkpoint</a:t>
+            </a:r>
+          </a:p>
+        </p:txBody>
+      </p:sp>
+      <p:sp>
+        <p:nvSpPr>
+          <p:cNvPr id="17" name="TextBox 16"/>
           <p:cNvSpPr txBox="1"/>
           <p:nvPr/>
         </p:nvSpPr>
         <p:spPr>
           <a:xfrm>
-            <a:off x="4617720" y="2770632"/>
-            <a:ext cx="3063240" cy="1188720"/>
-          </a:xfrm>
-          <a:prstGeom prst="rect">
-            <a:avLst/>
-          </a:prstGeom>
-          <a:noFill/>
-        </p:spPr>
-        <p:txBody>
-          <a:bodyPr wrap="square" anchor="t">
-            <a:spAutoFit/>
-          </a:bodyPr>
-          <a:lstStyle/>
-          <a:p>
-            <a:pPr algn="l">
-              <a:spcAft>
-                <a:spcPts val="200"/>
-              </a:spcAft>
-            </a:pPr>
-            <a:r>
-              <a:rPr sz="1150" b="0" i="0">
-                <a:solidFill>
-                  <a:srgbClr val="717A85"/>
-                </a:solidFill>
-                <a:latin typeface="Helvetica Neue"/>
-              </a:rPr>
-              <a:t>0.6B to 4B did not make the CPU</a:t>
-            </a:r>
-          </a:p>
-          <a:p>
-            <a:pPr algn="l">
-              <a:spcAft>
-                <a:spcPts val="200"/>
-              </a:spcAft>
-            </a:pPr>
-            <a:r>
-              <a:rPr sz="1150" b="0" i="0">
-                <a:solidFill>
-                  <a:srgbClr val="717A85"/>
-                </a:solidFill>
-                <a:latin typeface="Helvetica Neue"/>
-              </a:rPr>
-              <a:t>6.7× slower. XLA never finished</a:t>
-            </a:r>
-          </a:p>
-          <a:p>
-            <a:pPr algn="l">
-              <a:spcAft>
-                <a:spcPts val="200"/>
-              </a:spcAft>
-            </a:pPr>
-            <a:r>
-              <a:rPr sz="1150" b="0" i="0">
-                <a:solidFill>
-                  <a:srgbClr val="717A85"/>
-                </a:solidFill>
-                <a:latin typeface="Helvetica Neue"/>
-              </a:rPr>
-              <a:t>compiling; the kernel killed it</a:t>
-            </a:r>
-          </a:p>
-          <a:p>
-            <a:pPr algn="l">
-              <a:spcAft>
-                <a:spcPts val="200"/>
-              </a:spcAft>
-            </a:pPr>
-            <a:r>
-              <a:rPr sz="1150" b="0" i="0">
-                <a:solidFill>
-                  <a:srgbClr val="717A85"/>
-                </a:solidFill>
-                <a:latin typeface="Helvetica Neue"/>
-              </a:rPr>
-              <a:t>at 31.5 GB.</a:t>
-            </a:r>
-          </a:p>
-        </p:txBody>
-      </p:sp>
-      <p:sp>
-        <p:nvSpPr>
-          <p:cNvPr id="14" name="Rounded Rectangle 13"/>
-          <p:cNvSpPr/>
-          <p:nvPr/>
-        </p:nvSpPr>
-        <p:spPr>
-          <a:xfrm>
-            <a:off x="8156448" y="1645920"/>
-            <a:ext cx="3520440" cy="2286000"/>
-          </a:xfrm>
-          <a:prstGeom prst="roundRect">
-            <a:avLst>
-              <a:gd name="adj" fmla="val 4000"/>
-            </a:avLst>
-          </a:prstGeom>
-          <a:solidFill>
-            <a:srgbClr val="FEF3EA"/>
-          </a:solidFill>
-          <a:ln w="9525">
-            <a:solidFill>
-              <a:srgbClr val="E6E9EC"/>
-            </a:solidFill>
-          </a:ln>
-          <a:effectLst/>
-        </p:spPr>
-        <p:style>
-          <a:lnRef idx="1">
-            <a:schemeClr val="accent1"/>
-          </a:lnRef>
-          <a:fillRef idx="3">
-            <a:schemeClr val="accent1"/>
-          </a:fillRef>
-          <a:effectRef idx="2">
-            <a:schemeClr val="accent1"/>
-          </a:effectRef>
-          <a:fontRef idx="minor">
-            <a:schemeClr val="lt1"/>
-          </a:fontRef>
-        </p:style>
-        <p:txBody>
-          <a:bodyPr rtlCol="0" anchor="ctr"/>
-          <a:lstStyle/>
-          <a:p>
-            <a:pPr algn="ctr"/>
-          </a:p>
-        </p:txBody>
-      </p:sp>
-      <p:sp>
-        <p:nvSpPr>
-          <p:cNvPr id="15" name="TextBox 14"/>
-          <p:cNvSpPr txBox="1"/>
-          <p:nvPr/>
-        </p:nvSpPr>
-        <p:spPr>
-          <a:xfrm>
-            <a:off x="8412480" y="1773936"/>
-            <a:ext cx="3017520" cy="640080"/>
+            <a:off x="7589520" y="4663440"/>
+            <a:ext cx="1371600" cy="548640"/>
           </a:xfrm>
           <a:prstGeom prst="rect">
             <a:avLst/>
@@ -7784,27 +7789,27 @@
               </a:spcAft>
             </a:pPr>
             <a:r>
-              <a:rPr sz="2600" b="1" i="0">
+              <a:rPr sz="4000" b="1" i="0">
                 <a:solidFill>
                   <a:srgbClr val="15171A"/>
                 </a:solidFill>
                 <a:latin typeface="Helvetica Neue"/>
               </a:rPr>
-              <a:t>1 of 36</a:t>
-            </a:r>
-          </a:p>
-        </p:txBody>
-      </p:sp>
-      <p:sp>
-        <p:nvSpPr>
-          <p:cNvPr id="16" name="TextBox 15"/>
+              <a:t>$0.56</a:t>
+            </a:r>
+          </a:p>
+        </p:txBody>
+      </p:sp>
+      <p:sp>
+        <p:nvSpPr>
+          <p:cNvPr id="18" name="TextBox 17"/>
           <p:cNvSpPr txBox="1"/>
           <p:nvPr/>
         </p:nvSpPr>
         <p:spPr>
           <a:xfrm>
-            <a:off x="8412480" y="2340864"/>
-            <a:ext cx="3063240" cy="411480"/>
+            <a:off x="8915400" y="4809744"/>
+            <a:ext cx="2743200" cy="365760"/>
           </a:xfrm>
           <a:prstGeom prst="rect">
             <a:avLst/>
@@ -7819,31 +7824,31 @@
           <a:p>
             <a:pPr algn="l">
               <a:spcAft>
-                <a:spcPts val="200"/>
+                <a:spcPts val="0"/>
               </a:spcAft>
             </a:pPr>
             <a:r>
-              <a:rPr sz="1200" b="1" i="0">
-                <a:solidFill>
-                  <a:srgbClr val="15171A"/>
+              <a:rPr sz="1700" b="1" i="0">
+                <a:solidFill>
+                  <a:srgbClr val="717A85"/>
                 </a:solidFill>
                 <a:latin typeface="Helvetica Neue"/>
               </a:rPr>
-              <a:t>dependencies were TPU-bound</a:t>
-            </a:r>
-          </a:p>
-        </p:txBody>
-      </p:sp>
-      <p:sp>
-        <p:nvSpPr>
-          <p:cNvPr id="17" name="TextBox 16"/>
+              <a:t>against $5.72</a:t>
+            </a:r>
+          </a:p>
+        </p:txBody>
+      </p:sp>
+      <p:sp>
+        <p:nvSpPr>
+          <p:cNvPr id="19" name="TextBox 18"/>
           <p:cNvSpPr txBox="1"/>
           <p:nvPr/>
         </p:nvSpPr>
         <p:spPr>
           <a:xfrm>
-            <a:off x="8412480" y="2770632"/>
-            <a:ext cx="3063240" cy="1188720"/>
+            <a:off x="7607808" y="5285232"/>
+            <a:ext cx="4023360" cy="640080"/>
           </a:xfrm>
           <a:prstGeom prst="rect">
             <a:avLst/>
@@ -7858,79 +7863,47 @@
           <a:p>
             <a:pPr algn="l">
               <a:spcAft>
-                <a:spcPts val="200"/>
+                <a:spcPts val="300"/>
               </a:spcAft>
             </a:pPr>
             <a:r>
-              <a:rPr sz="1150" b="0" i="0">
+              <a:rPr sz="1250" b="0" i="0">
                 <a:solidFill>
                   <a:srgbClr val="717A85"/>
                 </a:solidFill>
                 <a:latin typeface="Helvetica Neue"/>
               </a:rPr>
-              <a:t>The GH200 sat idle behind an</a:t>
+              <a:t>per 1,000 steps at 4B, batch 8: one GH200</a:t>
             </a:r>
           </a:p>
           <a:p>
             <a:pPr algn="l">
               <a:spcAft>
-                <a:spcPts val="200"/>
+                <a:spcPts val="300"/>
               </a:spcAft>
             </a:pPr>
             <a:r>
-              <a:rPr sz="1150" b="0" i="0">
+              <a:rPr sz="1250" b="0" i="0">
                 <a:solidFill>
                   <a:srgbClr val="717A85"/>
                 </a:solidFill>
                 <a:latin typeface="Helvetica Neue"/>
               </a:rPr>
-              <a:t>ARM64 host, a QEMU segfault</a:t>
-            </a:r>
-          </a:p>
-          <a:p>
-            <a:pPr algn="l">
-              <a:spcAft>
-                <a:spcPts val="200"/>
-              </a:spcAft>
-            </a:pPr>
-            <a:r>
-              <a:rPr sz="1150" b="0" i="0">
-                <a:solidFill>
-                  <a:srgbClr val="717A85"/>
-                </a:solidFill>
-                <a:latin typeface="Helvetica Neue"/>
-              </a:rPr>
-              <a:t>and a registry 403. Swapping</a:t>
-            </a:r>
-          </a:p>
-          <a:p>
-            <a:pPr algn="l">
-              <a:spcAft>
-                <a:spcPts val="200"/>
-              </a:spcAft>
-            </a:pPr>
-            <a:r>
-              <a:rPr sz="1150" b="0" i="0">
-                <a:solidFill>
-                  <a:srgbClr val="717A85"/>
-                </a:solidFill>
-                <a:latin typeface="Helvetica Neue"/>
-              </a:rPr>
-              <a:t>one pin is the whole port.</a:t>
-            </a:r>
-          </a:p>
-        </p:txBody>
-      </p:sp>
-      <p:sp>
-        <p:nvSpPr>
-          <p:cNvPr id="18" name="TextBox 17"/>
+              <a:t>against eight v5e chips, 10× less</a:t>
+            </a:r>
+          </a:p>
+        </p:txBody>
+      </p:sp>
+      <p:sp>
+        <p:nvSpPr>
+          <p:cNvPr id="20" name="TextBox 19"/>
           <p:cNvSpPr txBox="1"/>
           <p:nvPr/>
         </p:nvSpPr>
         <p:spPr>
           <a:xfrm>
-            <a:off x="566928" y="4224528"/>
-            <a:ext cx="5394960" cy="320040"/>
+            <a:off x="7607808" y="5961888"/>
+            <a:ext cx="4023360" cy="274320"/>
           </a:xfrm>
           <a:prstGeom prst="rect">
             <a:avLst/>
@@ -7945,372 +7918,24 @@
           <a:p>
             <a:pPr algn="l">
               <a:spcAft>
-                <a:spcPts val="500"/>
+                <a:spcPts val="0"/>
               </a:spcAft>
             </a:pPr>
             <a:r>
-              <a:rPr sz="1500" b="1" i="0">
-                <a:solidFill>
-                  <a:srgbClr val="E8590C"/>
+              <a:rPr sz="1050" b="0" i="1">
+                <a:solidFill>
+                  <a:srgbClr val="717A85"/>
                 </a:solidFill>
                 <a:latin typeface="Helvetica Neue"/>
               </a:rPr>
-              <a:t>Scaling recommendation</a:t>
-            </a:r>
-          </a:p>
-        </p:txBody>
-      </p:sp>
-      <p:sp>
-        <p:nvSpPr>
-          <p:cNvPr id="19" name="TextBox 18"/>
-          <p:cNvSpPr txBox="1"/>
-          <p:nvPr/>
-        </p:nvSpPr>
-        <p:spPr>
-          <a:xfrm>
-            <a:off x="566928" y="4572000"/>
-            <a:ext cx="5394960" cy="1280160"/>
-          </a:xfrm>
-          <a:prstGeom prst="rect">
-            <a:avLst/>
-          </a:prstGeom>
-          <a:noFill/>
-        </p:spPr>
-        <p:txBody>
-          <a:bodyPr wrap="square" anchor="t">
-            <a:spAutoFit/>
-          </a:bodyPr>
-          <a:lstStyle/>
-          <a:p>
-            <a:pPr algn="l">
-              <a:spcAft>
-                <a:spcPts val="200"/>
-              </a:spcAft>
-            </a:pPr>
-            <a:r>
-              <a:rPr sz="1300" b="0" i="0">
-                <a:solidFill>
-                  <a:srgbClr val="15171A"/>
-                </a:solidFill>
-                <a:latin typeface="Helvetica Neue"/>
-              </a:rPr>
-              <a:t>Do not scale out. Amortise: raise batch only until</a:t>
-            </a:r>
-          </a:p>
-          <a:p>
-            <a:pPr algn="l">
-              <a:spcAft>
-                <a:spcPts val="200"/>
-              </a:spcAft>
-            </a:pPr>
-            <a:r>
-              <a:rPr sz="1300" b="0" i="0">
-                <a:solidFill>
-                  <a:srgbClr val="15171A"/>
-                </a:solidFill>
-                <a:latin typeface="Helvetica Neue"/>
-              </a:rPr>
-              <a:t>the chip is occupied, then attack fixed cost:</a:t>
-            </a:r>
-          </a:p>
-          <a:p>
-            <a:pPr algn="l">
-              <a:spcAft>
-                <a:spcPts val="200"/>
-              </a:spcAft>
-            </a:pPr>
-            <a:r>
-              <a:rPr sz="1300" b="0" i="0">
-                <a:solidFill>
-                  <a:srgbClr val="15171A"/>
-                </a:solidFill>
-                <a:latin typeface="Helvetica Neue"/>
-              </a:rPr>
-              <a:t>persistent compile caches, warm workers instead of</a:t>
-            </a:r>
-          </a:p>
-          <a:p>
-            <a:pPr algn="l">
-              <a:spcAft>
-                <a:spcPts val="200"/>
-              </a:spcAft>
-            </a:pPr>
-            <a:r>
-              <a:rPr sz="1300" b="0" i="0">
-                <a:solidFill>
-                  <a:srgbClr val="15171A"/>
-                </a:solidFill>
-                <a:latin typeface="Helvetica Neue"/>
-              </a:rPr>
-              <a:t>a pod per job, file cache on anything reading a</a:t>
-            </a:r>
-          </a:p>
-          <a:p>
-            <a:pPr algn="l">
-              <a:spcAft>
-                <a:spcPts val="200"/>
-              </a:spcAft>
-            </a:pPr>
-            <a:r>
-              <a:rPr sz="1300" b="0" i="0">
-                <a:solidFill>
-                  <a:srgbClr val="15171A"/>
-                </a:solidFill>
-                <a:latin typeface="Helvetica Neue"/>
-              </a:rPr>
-              <a:t>checkpoint.</a:t>
-            </a:r>
-          </a:p>
-        </p:txBody>
-      </p:sp>
-      <p:sp>
-        <p:nvSpPr>
-          <p:cNvPr id="20" name="Rounded Rectangle 19"/>
-          <p:cNvSpPr/>
-          <p:nvPr/>
-        </p:nvSpPr>
-        <p:spPr>
-          <a:xfrm>
-            <a:off x="6217920" y="4078224"/>
-            <a:ext cx="5394960" cy="2392659"/>
-          </a:xfrm>
-          <a:prstGeom prst="roundRect">
-            <a:avLst>
-              <a:gd name="adj" fmla="val 4000"/>
-            </a:avLst>
-          </a:prstGeom>
-          <a:solidFill>
-            <a:srgbClr val="FEF3EA"/>
-          </a:solidFill>
-          <a:ln w="9525">
-            <a:solidFill>
-              <a:srgbClr val="E6E9EC"/>
-            </a:solidFill>
-          </a:ln>
-          <a:effectLst/>
-        </p:spPr>
-        <p:style>
-          <a:lnRef idx="1">
-            <a:schemeClr val="accent1"/>
-          </a:lnRef>
-          <a:fillRef idx="3">
-            <a:schemeClr val="accent1"/>
-          </a:fillRef>
-          <a:effectRef idx="2">
-            <a:schemeClr val="accent1"/>
-          </a:effectRef>
-          <a:fontRef idx="minor">
-            <a:schemeClr val="lt1"/>
-          </a:fontRef>
-        </p:style>
-        <p:txBody>
-          <a:bodyPr rtlCol="0" anchor="ctr"/>
-          <a:lstStyle/>
-          <a:p>
-            <a:pPr algn="ctr"/>
+              <a:t>TPU rate billed; the GH200 rate is a market proxy</a:t>
+            </a:r>
           </a:p>
         </p:txBody>
       </p:sp>
       <p:sp>
         <p:nvSpPr>
           <p:cNvPr id="21" name="TextBox 20"/>
-          <p:cNvSpPr txBox="1"/>
-          <p:nvPr/>
-        </p:nvSpPr>
-        <p:spPr>
-          <a:xfrm>
-            <a:off x="6473952" y="4315968"/>
-            <a:ext cx="4919472" cy="251460"/>
-          </a:xfrm>
-          <a:prstGeom prst="rect">
-            <a:avLst/>
-          </a:prstGeom>
-          <a:noFill/>
-        </p:spPr>
-        <p:txBody>
-          <a:bodyPr wrap="square" anchor="t">
-            <a:spAutoFit/>
-          </a:bodyPr>
-          <a:lstStyle/>
-          <a:p>
-            <a:pPr algn="l">
-              <a:spcAft>
-                <a:spcPts val="500"/>
-              </a:spcAft>
-            </a:pPr>
-            <a:r>
-              <a:rPr sz="1500" b="1" i="0">
-                <a:solidFill>
-                  <a:srgbClr val="E8590C"/>
-                </a:solidFill>
-                <a:latin typeface="Helvetica Neue"/>
-              </a:rPr>
-              <a:t>What this means for Dr. Findus</a:t>
-            </a:r>
-          </a:p>
-        </p:txBody>
-      </p:sp>
-      <p:sp>
-        <p:nvSpPr>
-          <p:cNvPr id="22" name="TextBox 21"/>
-          <p:cNvSpPr txBox="1"/>
-          <p:nvPr/>
-        </p:nvSpPr>
-        <p:spPr>
-          <a:xfrm>
-            <a:off x="6473952" y="4658868"/>
-            <a:ext cx="4919472" cy="1371600"/>
-          </a:xfrm>
-          <a:prstGeom prst="rect">
-            <a:avLst/>
-          </a:prstGeom>
-          <a:noFill/>
-        </p:spPr>
-        <p:txBody>
-          <a:bodyPr wrap="square" anchor="t">
-            <a:spAutoFit/>
-          </a:bodyPr>
-          <a:lstStyle/>
-          <a:p>
-            <a:pPr algn="l">
-              <a:spcAft>
-                <a:spcPts val="200"/>
-              </a:spcAft>
-            </a:pPr>
-            <a:r>
-              <a:rPr sz="1250" b="0" i="0">
-                <a:solidFill>
-                  <a:srgbClr val="15171A"/>
-                </a:solidFill>
-                <a:latin typeface="Helvetica Neue"/>
-              </a:rPr>
-              <a:t>At batch 8, the slice's own best point: one GH200 runs</a:t>
-            </a:r>
-          </a:p>
-          <a:p>
-            <a:pPr algn="l">
-              <a:spcAft>
-                <a:spcPts val="200"/>
-              </a:spcAft>
-            </a:pPr>
-            <a:r>
-              <a:rPr sz="1250" b="0" i="0">
-                <a:solidFill>
-                  <a:srgbClr val="15171A"/>
-                </a:solidFill>
-                <a:latin typeface="Helvetica Neue"/>
-              </a:rPr>
-              <a:t>2.5× faster than eight TPU chips and costs 10× less,</a:t>
-            </a:r>
-          </a:p>
-          <a:p>
-            <a:pPr algn="l">
-              <a:spcAft>
-                <a:spcPts val="200"/>
-              </a:spcAft>
-            </a:pPr>
-            <a:r>
-              <a:rPr sz="1250" b="0" i="0">
-                <a:solidFill>
-                  <a:srgbClr val="15171A"/>
-                </a:solidFill>
-                <a:latin typeface="Helvetica Neue"/>
-              </a:rPr>
-              <a:t>$0.56 against $5.72 per 1,000 steps.</a:t>
-            </a:r>
-          </a:p>
-          <a:p>
-            <a:pPr algn="l">
-              <a:spcAft>
-                <a:spcPts val="200"/>
-              </a:spcAft>
-            </a:pPr>
-            <a:r>
-              <a:rPr sz="1250" b="0" i="0">
-                <a:solidFill>
-                  <a:srgbClr val="15171A"/>
-                </a:solidFill>
-                <a:latin typeface="Helvetica Neue"/>
-              </a:rPr>
-              <a:t/>
-            </a:r>
-          </a:p>
-          <a:p>
-            <a:pPr algn="l">
-              <a:spcAft>
-                <a:spcPts val="200"/>
-              </a:spcAft>
-            </a:pPr>
-            <a:r>
-              <a:rPr sz="1250" b="0" i="0">
-                <a:solidFill>
-                  <a:srgbClr val="15171A"/>
-                </a:solidFill>
-                <a:latin typeface="Helvetica Neue"/>
-              </a:rPr>
-              <a:t>Self-hosting is not the cost problem we assumed.</a:t>
-            </a:r>
-          </a:p>
-          <a:p>
-            <a:pPr algn="l">
-              <a:spcAft>
-                <a:spcPts val="200"/>
-              </a:spcAft>
-            </a:pPr>
-            <a:r>
-              <a:rPr sz="1250" b="0" i="0">
-                <a:solidFill>
-                  <a:srgbClr val="15171A"/>
-                </a:solidFill>
-                <a:latin typeface="Helvetica Neue"/>
-              </a:rPr>
-              <a:t>The real cost is fixed overhead per job.</a:t>
-            </a:r>
-          </a:p>
-        </p:txBody>
-      </p:sp>
-      <p:sp>
-        <p:nvSpPr>
-          <p:cNvPr id="23" name="TextBox 22"/>
-          <p:cNvSpPr txBox="1"/>
-          <p:nvPr/>
-        </p:nvSpPr>
-        <p:spPr>
-          <a:xfrm>
-            <a:off x="6473952" y="6103620"/>
-            <a:ext cx="4919472" cy="269240"/>
-          </a:xfrm>
-          <a:prstGeom prst="rect">
-            <a:avLst/>
-          </a:prstGeom>
-          <a:noFill/>
-        </p:spPr>
-        <p:txBody>
-          <a:bodyPr wrap="square" anchor="t">
-            <a:spAutoFit/>
-          </a:bodyPr>
-          <a:lstStyle/>
-          <a:p>
-            <a:pPr algn="l">
-              <a:spcAft>
-                <a:spcPts val="200"/>
-              </a:spcAft>
-            </a:pPr>
-            <a:r>
-              <a:rPr sz="1050" b="0" i="0">
-                <a:solidFill>
-                  <a:srgbClr val="717A85"/>
-                </a:solidFill>
-                <a:latin typeface="Helvetica Neue"/>
-              </a:rPr>
-              <a:t>TPU rate billed; the GH200 rate is a market proxy.</a:t>
-            </a:r>
-          </a:p>
-        </p:txBody>
-      </p:sp>
-      <p:sp>
-        <p:nvSpPr>
-          <p:cNvPr id="24" name="TextBox 23"/>
           <p:cNvSpPr txBox="1"/>
           <p:nvPr/>
         </p:nvSpPr>

--- a/slides/ME344_Final_Arnold_Hambuch.pptx
+++ b/slides/ME344_Final_Arnold_Hambuch.pptx
@@ -7770,7 +7770,7 @@
         <p:spPr>
           <a:xfrm>
             <a:off x="7589520" y="4663440"/>
-            <a:ext cx="1371600" cy="548640"/>
+            <a:ext cx="1828800" cy="548640"/>
           </a:xfrm>
           <a:prstGeom prst="rect">
             <a:avLst/>
@@ -7808,8 +7808,8 @@
         </p:nvSpPr>
         <p:spPr>
           <a:xfrm>
-            <a:off x="8915400" y="4809744"/>
-            <a:ext cx="2743200" cy="365760"/>
+            <a:off x="9281160" y="4828032"/>
+            <a:ext cx="2377440" cy="365760"/>
           </a:xfrm>
           <a:prstGeom prst="rect">
             <a:avLst/>

--- a/slides/ME344_Final_Arnold_Hambuch.pptx
+++ b/slides/ME344_Final_Arnold_Hambuch.pptx
@@ -3283,7 +3283,7 @@
                 </a:solidFill>
                 <a:latin typeface="Helvetica Neue"/>
               </a:rPr>
-              <a:t>Dr. Findus, our startup in Berlin</a:t>
+              <a:t>DrFindus, our startup in Berlin</a:t>
             </a:r>
           </a:p>
         </p:txBody>
